--- a/Raccolta esercizi - Docker Atomo.pptx
+++ b/Raccolta esercizi - Docker Atomo.pptx
@@ -5,10 +5,10 @@
     <p:sldMasterId id="2147483672" r:id="rId4"/>
   </p:sldMasterIdLst>
   <p:notesMasterIdLst>
-    <p:notesMasterId r:id="rId17"/>
+    <p:notesMasterId r:id="rId30"/>
   </p:notesMasterIdLst>
   <p:handoutMasterIdLst>
-    <p:handoutMasterId r:id="rId18"/>
+    <p:handoutMasterId r:id="rId31"/>
   </p:handoutMasterIdLst>
   <p:sldIdLst>
     <p:sldId id="262" r:id="rId5"/>
@@ -22,7 +22,20 @@
     <p:sldId id="268" r:id="rId13"/>
     <p:sldId id="269" r:id="rId14"/>
     <p:sldId id="270" r:id="rId15"/>
-    <p:sldId id="261" r:id="rId16"/>
+    <p:sldId id="271" r:id="rId16"/>
+    <p:sldId id="272" r:id="rId17"/>
+    <p:sldId id="273" r:id="rId18"/>
+    <p:sldId id="274" r:id="rId19"/>
+    <p:sldId id="275" r:id="rId20"/>
+    <p:sldId id="276" r:id="rId21"/>
+    <p:sldId id="277" r:id="rId22"/>
+    <p:sldId id="278" r:id="rId23"/>
+    <p:sldId id="279" r:id="rId24"/>
+    <p:sldId id="280" r:id="rId25"/>
+    <p:sldId id="281" r:id="rId26"/>
+    <p:sldId id="282" r:id="rId27"/>
+    <p:sldId id="283" r:id="rId28"/>
+    <p:sldId id="261" r:id="rId29"/>
   </p:sldIdLst>
   <p:sldSz cx="12192000" cy="6858000"/>
   <p:notesSz cx="6858000" cy="9144000"/>
@@ -237,7 +250,7 @@
           <a:p>
             <a:fld id="{AB567D21-D55F-4A7B-94FF-7608FD989819}" type="datetimeFigureOut">
               <a:rPr lang="it-IT" smtClean="0"/>
-              <a:t>13/06/2026</a:t>
+              <a:t>14/06/2026</a:t>
             </a:fld>
             <a:endParaRPr lang="it-IT"/>
           </a:p>
@@ -430,7 +443,7 @@
           <a:p>
             <a:fld id="{CE0B2B73-14A8-482F-9803-A95CC73B5B34}" type="datetimeFigureOut">
               <a:rPr lang="it-IT" smtClean="0"/>
-              <a:t>13/06/2026</a:t>
+              <a:t>14/06/2026</a:t>
             </a:fld>
             <a:endParaRPr lang="it-IT"/>
           </a:p>
@@ -4142,7 +4155,13 @@
   <p:cSld>
     <p:spTree>
       <p:nvGrpSpPr>
-        <p:cNvPr id="1" name=""/>
+        <p:cNvPr id="1" name="">
+          <a:extLst>
+            <a:ext uri="{FF2B5EF4-FFF2-40B4-BE49-F238E27FC236}">
+              <a16:creationId xmlns:a16="http://schemas.microsoft.com/office/drawing/2014/main" id="{1F4EA5A4-947E-6404-343F-20945335EAFF}"/>
+            </a:ext>
+          </a:extLst>
+        </p:cNvPr>
         <p:cNvGrpSpPr/>
         <p:nvPr/>
       </p:nvGrpSpPr>
@@ -4156,10 +4175,10 @@
       </p:grpSpPr>
       <p:sp>
         <p:nvSpPr>
-          <p:cNvPr id="2" name="Titolo 1">
+          <p:cNvPr id="2" name="Titolo della lezione">
             <a:extLst>
               <a:ext uri="{FF2B5EF4-FFF2-40B4-BE49-F238E27FC236}">
-                <a16:creationId xmlns:a16="http://schemas.microsoft.com/office/drawing/2014/main" id="{B5E02355-4941-9C10-CA1D-649F04DB5143}"/>
+                <a16:creationId xmlns:a16="http://schemas.microsoft.com/office/drawing/2014/main" id="{B74FDC5A-3F0C-B48A-90DA-848591074180}"/>
               </a:ext>
             </a:extLst>
           </p:cNvPr>
@@ -4170,16 +4189,82 @@
             <p:ph type="title"/>
           </p:nvPr>
         </p:nvSpPr>
-        <p:spPr/>
+        <p:spPr>
+          <a:xfrm>
+            <a:off x="838200" y="831206"/>
+            <a:ext cx="10515600" cy="314198"/>
+          </a:xfrm>
+        </p:spPr>
         <p:txBody>
           <a:bodyPr/>
           <a:lstStyle/>
           <a:p>
             <a:r>
-              <a:rPr lang="it-IT" spc="0" dirty="0">
-                <a:latin typeface="Neue Haas Grotesk Text Pro" panose="020B0504020202020204" pitchFamily="34" charset="0"/>
-              </a:rPr>
-              <a:t>GRAZIE PER L’ATTENZIONE</a:t>
+              <a:rPr lang="it-IT" dirty="0"/>
+              <a:t>LAB 3: Il Networking Isolato – Comunicazione via DNS interno</a:t>
+            </a:r>
+          </a:p>
+        </p:txBody>
+      </p:sp>
+      <p:sp>
+        <p:nvSpPr>
+          <p:cNvPr id="3" name="Contenuto della lezione">
+            <a:extLst>
+              <a:ext uri="{FF2B5EF4-FFF2-40B4-BE49-F238E27FC236}">
+                <a16:creationId xmlns:a16="http://schemas.microsoft.com/office/drawing/2014/main" id="{3F6A557C-BD93-430C-0B5E-025CE75DB19E}"/>
+              </a:ext>
+            </a:extLst>
+          </p:cNvPr>
+          <p:cNvSpPr>
+            <a:spLocks noGrp="1"/>
+          </p:cNvSpPr>
+          <p:nvPr>
+            <p:ph idx="1"/>
+          </p:nvPr>
+        </p:nvSpPr>
+        <p:spPr>
+          <a:xfrm>
+            <a:off x="1415438" y="1349192"/>
+            <a:ext cx="9557362" cy="4803369"/>
+          </a:xfrm>
+        </p:spPr>
+        <p:txBody>
+          <a:bodyPr/>
+          <a:lstStyle/>
+          <a:p>
+            <a:r>
+              <a:rPr lang="it-IT" b="1" dirty="0"/>
+              <a:t>Obiettivo</a:t>
+            </a:r>
+            <a:r>
+              <a:rPr lang="it-IT" dirty="0"/>
+              <a:t>: Capire perché la rete di default (bridge) non permette la comunicazione tramite nome del container e come le reti personalizzate attivino un server DNS interno automatico.</a:t>
+            </a:r>
+          </a:p>
+          <a:p>
+            <a:r>
+              <a:rPr lang="it-IT" b="1" dirty="0"/>
+              <a:t>Traccia:</a:t>
+            </a:r>
+            <a:r>
+              <a:rPr lang="it-IT" dirty="0"/>
+              <a:t> Avete un </a:t>
+            </a:r>
+            <a:r>
+              <a:rPr lang="it-IT" dirty="0" err="1"/>
+              <a:t>backend</a:t>
+            </a:r>
+            <a:r>
+              <a:rPr lang="it-IT" dirty="0"/>
+              <a:t> Python che deve inviare dati a un database </a:t>
+            </a:r>
+            <a:r>
+              <a:rPr lang="it-IT" dirty="0" err="1"/>
+              <a:t>MariaDB</a:t>
+            </a:r>
+            <a:r>
+              <a:rPr lang="it-IT" dirty="0"/>
+              <a:t>. Di default i container sono isolati. Dovete creare un'autostrada virtuale dedicata, connettere i due container usando i loro nomi logici.</a:t>
             </a:r>
           </a:p>
         </p:txBody>
@@ -4187,7 +4272,1662 @@
     </p:spTree>
     <p:extLst>
       <p:ext uri="{BB962C8B-B14F-4D97-AF65-F5344CB8AC3E}">
-        <p14:creationId xmlns:p14="http://schemas.microsoft.com/office/powerpoint/2010/main" val="3003246572"/>
+        <p14:creationId xmlns:p14="http://schemas.microsoft.com/office/powerpoint/2010/main" val="2309863802"/>
+      </p:ext>
+    </p:extLst>
+  </p:cSld>
+  <p:clrMapOvr>
+    <a:masterClrMapping/>
+  </p:clrMapOvr>
+</p:sld>
+</file>
+
+<file path=ppt/slides/slide13.xml><?xml version="1.0" encoding="utf-8"?>
+<p:sld xmlns:a="http://schemas.openxmlformats.org/drawingml/2006/main" xmlns:r="http://schemas.openxmlformats.org/officeDocument/2006/relationships" xmlns:p="http://schemas.openxmlformats.org/presentationml/2006/main">
+  <p:cSld>
+    <p:spTree>
+      <p:nvGrpSpPr>
+        <p:cNvPr id="1" name="">
+          <a:extLst>
+            <a:ext uri="{FF2B5EF4-FFF2-40B4-BE49-F238E27FC236}">
+              <a16:creationId xmlns:a16="http://schemas.microsoft.com/office/drawing/2014/main" id="{498E4D6B-7EC5-6D90-2102-8F7963F34C0F}"/>
+            </a:ext>
+          </a:extLst>
+        </p:cNvPr>
+        <p:cNvGrpSpPr/>
+        <p:nvPr/>
+      </p:nvGrpSpPr>
+      <p:grpSpPr>
+        <a:xfrm>
+          <a:off x="0" y="0"/>
+          <a:ext cx="0" cy="0"/>
+          <a:chOff x="0" y="0"/>
+          <a:chExt cx="0" cy="0"/>
+        </a:xfrm>
+      </p:grpSpPr>
+      <p:sp>
+        <p:nvSpPr>
+          <p:cNvPr id="3" name="Contenuto della lezione">
+            <a:extLst>
+              <a:ext uri="{FF2B5EF4-FFF2-40B4-BE49-F238E27FC236}">
+                <a16:creationId xmlns:a16="http://schemas.microsoft.com/office/drawing/2014/main" id="{3CBD09AF-0D8A-DC74-8EDE-8E80F2A90FDB}"/>
+              </a:ext>
+            </a:extLst>
+          </p:cNvPr>
+          <p:cNvSpPr>
+            <a:spLocks noGrp="1"/>
+          </p:cNvSpPr>
+          <p:nvPr>
+            <p:ph idx="1"/>
+          </p:nvPr>
+        </p:nvSpPr>
+        <p:spPr>
+          <a:xfrm>
+            <a:off x="1415438" y="1349192"/>
+            <a:ext cx="9557362" cy="4803369"/>
+          </a:xfrm>
+        </p:spPr>
+        <p:txBody>
+          <a:bodyPr/>
+          <a:lstStyle/>
+          <a:p>
+            <a:r>
+              <a:rPr lang="it-IT" b="1" dirty="0"/>
+              <a:t>1. Il problema della comunicazione dei container su bridge</a:t>
+            </a:r>
+          </a:p>
+          <a:p>
+            <a:r>
+              <a:rPr lang="it-IT" dirty="0"/>
+              <a:t>Avviamo un database:</a:t>
+            </a:r>
+          </a:p>
+          <a:p>
+            <a:r>
+              <a:rPr lang="it-IT" dirty="0" err="1">
+                <a:solidFill>
+                  <a:srgbClr val="171FE2"/>
+                </a:solidFill>
+                <a:latin typeface="Consolas" panose="020B0609020204030204" pitchFamily="49" charset="0"/>
+              </a:rPr>
+              <a:t>docker</a:t>
+            </a:r>
+            <a:r>
+              <a:rPr lang="it-IT" dirty="0">
+                <a:solidFill>
+                  <a:srgbClr val="171FE2"/>
+                </a:solidFill>
+                <a:latin typeface="Consolas" panose="020B0609020204030204" pitchFamily="49" charset="0"/>
+              </a:rPr>
+              <a:t> </a:t>
+            </a:r>
+            <a:r>
+              <a:rPr lang="it-IT" dirty="0" err="1">
+                <a:solidFill>
+                  <a:srgbClr val="171FE2"/>
+                </a:solidFill>
+                <a:latin typeface="Consolas" panose="020B0609020204030204" pitchFamily="49" charset="0"/>
+              </a:rPr>
+              <a:t>run</a:t>
+            </a:r>
+            <a:r>
+              <a:rPr lang="it-IT" dirty="0">
+                <a:solidFill>
+                  <a:srgbClr val="171FE2"/>
+                </a:solidFill>
+                <a:latin typeface="Consolas" panose="020B0609020204030204" pitchFamily="49" charset="0"/>
+              </a:rPr>
+              <a:t> -d --name </a:t>
+            </a:r>
+            <a:r>
+              <a:rPr lang="it-IT" dirty="0" err="1">
+                <a:solidFill>
+                  <a:srgbClr val="171FE2"/>
+                </a:solidFill>
+                <a:latin typeface="Consolas" panose="020B0609020204030204" pitchFamily="49" charset="0"/>
+              </a:rPr>
+              <a:t>db</a:t>
+            </a:r>
+            <a:r>
+              <a:rPr lang="it-IT" dirty="0">
+                <a:solidFill>
+                  <a:srgbClr val="171FE2"/>
+                </a:solidFill>
+                <a:latin typeface="Consolas" panose="020B0609020204030204" pitchFamily="49" charset="0"/>
+              </a:rPr>
+              <a:t>-standard -e MARIADB_ROOT_PASSWORD=pass </a:t>
+            </a:r>
+            <a:r>
+              <a:rPr lang="it-IT" dirty="0" err="1">
+                <a:solidFill>
+                  <a:srgbClr val="171FE2"/>
+                </a:solidFill>
+                <a:latin typeface="Consolas" panose="020B0609020204030204" pitchFamily="49" charset="0"/>
+              </a:rPr>
+              <a:t>mariadb:latest</a:t>
+            </a:r>
+            <a:endParaRPr lang="it-IT" dirty="0">
+              <a:solidFill>
+                <a:srgbClr val="171FE2"/>
+              </a:solidFill>
+              <a:latin typeface="Consolas" panose="020B0609020204030204" pitchFamily="49" charset="0"/>
+            </a:endParaRPr>
+          </a:p>
+          <a:p>
+            <a:r>
+              <a:rPr lang="it-IT" dirty="0"/>
+              <a:t>Ora chiediamo a Docker di mostrarci la mappa della rete standard (</a:t>
+            </a:r>
+            <a:r>
+              <a:rPr lang="it-IT" b="1" dirty="0"/>
+              <a:t>bridge</a:t>
+            </a:r>
+            <a:r>
+              <a:rPr lang="it-IT" dirty="0"/>
+              <a:t>):</a:t>
+            </a:r>
+          </a:p>
+          <a:p>
+            <a:r>
+              <a:rPr lang="it-IT" dirty="0" err="1">
+                <a:solidFill>
+                  <a:srgbClr val="171FE2"/>
+                </a:solidFill>
+                <a:latin typeface="Consolas" panose="020B0609020204030204" pitchFamily="49" charset="0"/>
+              </a:rPr>
+              <a:t>docker</a:t>
+            </a:r>
+            <a:r>
+              <a:rPr lang="it-IT" dirty="0">
+                <a:solidFill>
+                  <a:srgbClr val="171FE2"/>
+                </a:solidFill>
+                <a:latin typeface="Consolas" panose="020B0609020204030204" pitchFamily="49" charset="0"/>
+              </a:rPr>
+              <a:t> network </a:t>
+            </a:r>
+            <a:r>
+              <a:rPr lang="it-IT" dirty="0" err="1">
+                <a:solidFill>
+                  <a:srgbClr val="171FE2"/>
+                </a:solidFill>
+                <a:latin typeface="Consolas" panose="020B0609020204030204" pitchFamily="49" charset="0"/>
+              </a:rPr>
+              <a:t>inspect</a:t>
+            </a:r>
+            <a:r>
+              <a:rPr lang="it-IT" dirty="0">
+                <a:solidFill>
+                  <a:srgbClr val="171FE2"/>
+                </a:solidFill>
+                <a:latin typeface="Consolas" panose="020B0609020204030204" pitchFamily="49" charset="0"/>
+              </a:rPr>
+              <a:t> bridge</a:t>
+            </a:r>
+          </a:p>
+          <a:p>
+            <a:r>
+              <a:rPr lang="it-IT" dirty="0"/>
+              <a:t>Scorrendo l'output fino alla sezione "Containers" vedremo </a:t>
+            </a:r>
+            <a:r>
+              <a:rPr lang="it-IT" dirty="0" err="1"/>
+              <a:t>db</a:t>
+            </a:r>
+            <a:r>
+              <a:rPr lang="it-IT" dirty="0"/>
+              <a:t>-standard con un IP numerico (es. 172.17.0.2):</a:t>
+            </a:r>
+          </a:p>
+          <a:p>
+            <a:r>
+              <a:rPr lang="en-US" dirty="0"/>
+              <a:t>"Containers": {</a:t>
+            </a:r>
+          </a:p>
+          <a:p>
+            <a:r>
+              <a:rPr lang="en-US" dirty="0"/>
+              <a:t>            "70ac4f93cd1427e40f4e83387557d48a509cd22ea95a00ed3a3884496ff70ba9": {</a:t>
+            </a:r>
+          </a:p>
+          <a:p>
+            <a:r>
+              <a:rPr lang="en-US" dirty="0"/>
+              <a:t>                "Name": "</a:t>
+            </a:r>
+            <a:r>
+              <a:rPr lang="en-US" dirty="0" err="1"/>
+              <a:t>db</a:t>
+            </a:r>
+            <a:r>
+              <a:rPr lang="en-US" dirty="0"/>
+              <a:t>-standard",</a:t>
+            </a:r>
+          </a:p>
+          <a:p>
+            <a:r>
+              <a:rPr lang="en-US" dirty="0"/>
+              <a:t>                "IPv4Address": "172.17.0.2/16",</a:t>
+            </a:r>
+          </a:p>
+          <a:p>
+            <a:r>
+              <a:rPr lang="en-US" dirty="0"/>
+              <a:t>	…</a:t>
+            </a:r>
+            <a:endParaRPr lang="it-IT" dirty="0"/>
+          </a:p>
+        </p:txBody>
+      </p:sp>
+    </p:spTree>
+    <p:extLst>
+      <p:ext uri="{BB962C8B-B14F-4D97-AF65-F5344CB8AC3E}">
+        <p14:creationId xmlns:p14="http://schemas.microsoft.com/office/powerpoint/2010/main" val="1238146070"/>
+      </p:ext>
+    </p:extLst>
+  </p:cSld>
+  <p:clrMapOvr>
+    <a:masterClrMapping/>
+  </p:clrMapOvr>
+</p:sld>
+</file>
+
+<file path=ppt/slides/slide14.xml><?xml version="1.0" encoding="utf-8"?>
+<p:sld xmlns:a="http://schemas.openxmlformats.org/drawingml/2006/main" xmlns:r="http://schemas.openxmlformats.org/officeDocument/2006/relationships" xmlns:p="http://schemas.openxmlformats.org/presentationml/2006/main">
+  <p:cSld>
+    <p:spTree>
+      <p:nvGrpSpPr>
+        <p:cNvPr id="1" name="">
+          <a:extLst>
+            <a:ext uri="{FF2B5EF4-FFF2-40B4-BE49-F238E27FC236}">
+              <a16:creationId xmlns:a16="http://schemas.microsoft.com/office/drawing/2014/main" id="{527B8674-7A27-2887-FBAD-9F7C2DF6FE08}"/>
+            </a:ext>
+          </a:extLst>
+        </p:cNvPr>
+        <p:cNvGrpSpPr/>
+        <p:nvPr/>
+      </p:nvGrpSpPr>
+      <p:grpSpPr>
+        <a:xfrm>
+          <a:off x="0" y="0"/>
+          <a:ext cx="0" cy="0"/>
+          <a:chOff x="0" y="0"/>
+          <a:chExt cx="0" cy="0"/>
+        </a:xfrm>
+      </p:grpSpPr>
+      <p:sp>
+        <p:nvSpPr>
+          <p:cNvPr id="3" name="Contenuto della lezione">
+            <a:extLst>
+              <a:ext uri="{FF2B5EF4-FFF2-40B4-BE49-F238E27FC236}">
+                <a16:creationId xmlns:a16="http://schemas.microsoft.com/office/drawing/2014/main" id="{A3B745B4-371B-A815-6A5B-F4BBCC7C3FA7}"/>
+              </a:ext>
+            </a:extLst>
+          </p:cNvPr>
+          <p:cNvSpPr>
+            <a:spLocks noGrp="1"/>
+          </p:cNvSpPr>
+          <p:nvPr>
+            <p:ph idx="1"/>
+          </p:nvPr>
+        </p:nvSpPr>
+        <p:spPr>
+          <a:xfrm>
+            <a:off x="1415438" y="1349192"/>
+            <a:ext cx="9557362" cy="4803369"/>
+          </a:xfrm>
+        </p:spPr>
+        <p:txBody>
+          <a:bodyPr/>
+          <a:lstStyle/>
+          <a:p>
+            <a:r>
+              <a:rPr lang="it-IT" dirty="0"/>
+              <a:t>Nell'ispezione della rete il nome '</a:t>
+            </a:r>
+            <a:r>
+              <a:rPr lang="it-IT" dirty="0" err="1"/>
+              <a:t>db</a:t>
+            </a:r>
+            <a:r>
+              <a:rPr lang="it-IT" dirty="0"/>
+              <a:t>-standard' compare chiaramente. Quindi Docker sa benissimo come si chiama questo container.</a:t>
+            </a:r>
+          </a:p>
+          <a:p>
+            <a:r>
+              <a:rPr lang="it-IT" dirty="0"/>
+              <a:t>Tuttavia, nella rete di default, Docker tiene questo registro sotto chiave. Un container </a:t>
+            </a:r>
+            <a:r>
+              <a:rPr lang="it-IT" dirty="0" err="1"/>
+              <a:t>backend</a:t>
+            </a:r>
+            <a:r>
+              <a:rPr lang="it-IT" dirty="0"/>
+              <a:t> che lo vuole raggiungere non ha il permesso di consultare questo elenco. Di conseguenza, anche se il nome esiste nel sistema, il </a:t>
+            </a:r>
+            <a:r>
+              <a:rPr lang="it-IT" dirty="0" err="1"/>
+              <a:t>backend</a:t>
+            </a:r>
+            <a:r>
+              <a:rPr lang="it-IT" dirty="0"/>
+              <a:t> è costretto a usare il numero IP 172.17.0.2 per connettersi.</a:t>
+            </a:r>
+          </a:p>
+          <a:p>
+            <a:r>
+              <a:rPr lang="it-IT" dirty="0">
+                <a:solidFill>
+                  <a:srgbClr val="171FE2"/>
+                </a:solidFill>
+              </a:rPr>
+              <a:t>Se il database si riavvia e il numero cambia, il </a:t>
+            </a:r>
+            <a:r>
+              <a:rPr lang="it-IT" dirty="0" err="1">
+                <a:solidFill>
+                  <a:srgbClr val="171FE2"/>
+                </a:solidFill>
+              </a:rPr>
+              <a:t>backend</a:t>
+            </a:r>
+            <a:r>
+              <a:rPr lang="it-IT" dirty="0">
+                <a:solidFill>
+                  <a:srgbClr val="171FE2"/>
+                </a:solidFill>
+              </a:rPr>
+              <a:t> non lo può più raggiungere.</a:t>
+            </a:r>
+          </a:p>
+          <a:p>
+            <a:r>
+              <a:rPr lang="it-IT" b="1" dirty="0"/>
+              <a:t>2. La Soluzione: Creazione di una Bridge Network Personalizzata</a:t>
+            </a:r>
+          </a:p>
+          <a:p>
+            <a:r>
+              <a:rPr lang="it-IT" dirty="0"/>
+              <a:t>Creiamo la nostra rete privata in cui i container coinvolti possono riconoscersi per nome e non più per </a:t>
+            </a:r>
+            <a:r>
+              <a:rPr lang="it-IT" dirty="0" err="1"/>
+              <a:t>ip</a:t>
+            </a:r>
+            <a:r>
+              <a:rPr lang="it-IT" dirty="0"/>
+              <a:t>:</a:t>
+            </a:r>
+          </a:p>
+          <a:p>
+            <a:r>
+              <a:rPr lang="it-IT" dirty="0" err="1">
+                <a:solidFill>
+                  <a:srgbClr val="171FE2"/>
+                </a:solidFill>
+                <a:latin typeface="Consolas" panose="020B0609020204030204" pitchFamily="49" charset="0"/>
+              </a:rPr>
+              <a:t>docker</a:t>
+            </a:r>
+            <a:r>
+              <a:rPr lang="it-IT" dirty="0">
+                <a:solidFill>
+                  <a:srgbClr val="171FE2"/>
+                </a:solidFill>
+                <a:latin typeface="Consolas" panose="020B0609020204030204" pitchFamily="49" charset="0"/>
+              </a:rPr>
+              <a:t> network create rete-aziendale</a:t>
+            </a:r>
+          </a:p>
+          <a:p>
+            <a:r>
+              <a:rPr lang="it-IT" dirty="0"/>
+              <a:t>Verifichiamo la lista delle reti per vedere il driver:</a:t>
+            </a:r>
+          </a:p>
+          <a:p>
+            <a:r>
+              <a:rPr lang="it-IT" dirty="0" err="1">
+                <a:solidFill>
+                  <a:srgbClr val="171FE2"/>
+                </a:solidFill>
+                <a:latin typeface="Consolas" panose="020B0609020204030204" pitchFamily="49" charset="0"/>
+              </a:rPr>
+              <a:t>docker</a:t>
+            </a:r>
+            <a:r>
+              <a:rPr lang="it-IT" dirty="0">
+                <a:solidFill>
+                  <a:srgbClr val="171FE2"/>
+                </a:solidFill>
+                <a:latin typeface="Consolas" panose="020B0609020204030204" pitchFamily="49" charset="0"/>
+              </a:rPr>
+              <a:t> network </a:t>
+            </a:r>
+            <a:r>
+              <a:rPr lang="it-IT" dirty="0" err="1">
+                <a:solidFill>
+                  <a:srgbClr val="171FE2"/>
+                </a:solidFill>
+                <a:latin typeface="Consolas" panose="020B0609020204030204" pitchFamily="49" charset="0"/>
+              </a:rPr>
+              <a:t>ls</a:t>
+            </a:r>
+            <a:endParaRPr lang="it-IT" dirty="0">
+              <a:solidFill>
+                <a:srgbClr val="171FE2"/>
+              </a:solidFill>
+              <a:latin typeface="Consolas" panose="020B0609020204030204" pitchFamily="49" charset="0"/>
+            </a:endParaRPr>
+          </a:p>
+          <a:p>
+            <a:endParaRPr lang="it-IT" dirty="0">
+              <a:solidFill>
+                <a:srgbClr val="171FE2"/>
+              </a:solidFill>
+            </a:endParaRPr>
+          </a:p>
+        </p:txBody>
+      </p:sp>
+    </p:spTree>
+    <p:extLst>
+      <p:ext uri="{BB962C8B-B14F-4D97-AF65-F5344CB8AC3E}">
+        <p14:creationId xmlns:p14="http://schemas.microsoft.com/office/powerpoint/2010/main" val="1880644607"/>
+      </p:ext>
+    </p:extLst>
+  </p:cSld>
+  <p:clrMapOvr>
+    <a:masterClrMapping/>
+  </p:clrMapOvr>
+</p:sld>
+</file>
+
+<file path=ppt/slides/slide15.xml><?xml version="1.0" encoding="utf-8"?>
+<p:sld xmlns:a="http://schemas.openxmlformats.org/drawingml/2006/main" xmlns:r="http://schemas.openxmlformats.org/officeDocument/2006/relationships" xmlns:p="http://schemas.openxmlformats.org/presentationml/2006/main">
+  <p:cSld>
+    <p:spTree>
+      <p:nvGrpSpPr>
+        <p:cNvPr id="1" name="">
+          <a:extLst>
+            <a:ext uri="{FF2B5EF4-FFF2-40B4-BE49-F238E27FC236}">
+              <a16:creationId xmlns:a16="http://schemas.microsoft.com/office/drawing/2014/main" id="{D79C75A0-45BD-A429-CA67-64D735D0FAB1}"/>
+            </a:ext>
+          </a:extLst>
+        </p:cNvPr>
+        <p:cNvGrpSpPr/>
+        <p:nvPr/>
+      </p:nvGrpSpPr>
+      <p:grpSpPr>
+        <a:xfrm>
+          <a:off x="0" y="0"/>
+          <a:ext cx="0" cy="0"/>
+          <a:chOff x="0" y="0"/>
+          <a:chExt cx="0" cy="0"/>
+        </a:xfrm>
+      </p:grpSpPr>
+      <p:sp>
+        <p:nvSpPr>
+          <p:cNvPr id="3" name="Contenuto della lezione">
+            <a:extLst>
+              <a:ext uri="{FF2B5EF4-FFF2-40B4-BE49-F238E27FC236}">
+                <a16:creationId xmlns:a16="http://schemas.microsoft.com/office/drawing/2014/main" id="{2C200DBF-4A08-836C-39D8-B88A5FB545B1}"/>
+              </a:ext>
+            </a:extLst>
+          </p:cNvPr>
+          <p:cNvSpPr>
+            <a:spLocks noGrp="1"/>
+          </p:cNvSpPr>
+          <p:nvPr>
+            <p:ph idx="1"/>
+          </p:nvPr>
+        </p:nvSpPr>
+        <p:spPr>
+          <a:xfrm>
+            <a:off x="1415438" y="1349192"/>
+            <a:ext cx="9557362" cy="4803369"/>
+          </a:xfrm>
+        </p:spPr>
+        <p:txBody>
+          <a:bodyPr/>
+          <a:lstStyle/>
+          <a:p>
+            <a:r>
+              <a:rPr lang="it-IT" b="1" dirty="0"/>
+              <a:t>3. Agganciamo i container alla nuova rete</a:t>
+            </a:r>
+          </a:p>
+          <a:p>
+            <a:r>
+              <a:rPr lang="it-IT" dirty="0"/>
+              <a:t>Avviamo il database reale inserendolo nella rete aziendale:</a:t>
+            </a:r>
+          </a:p>
+          <a:p>
+            <a:r>
+              <a:rPr lang="it-IT" dirty="0" err="1">
+                <a:solidFill>
+                  <a:srgbClr val="171FE2"/>
+                </a:solidFill>
+                <a:latin typeface="Consolas" panose="020B0609020204030204" pitchFamily="49" charset="0"/>
+              </a:rPr>
+              <a:t>docker</a:t>
+            </a:r>
+            <a:r>
+              <a:rPr lang="it-IT" dirty="0">
+                <a:solidFill>
+                  <a:srgbClr val="171FE2"/>
+                </a:solidFill>
+                <a:latin typeface="Consolas" panose="020B0609020204030204" pitchFamily="49" charset="0"/>
+              </a:rPr>
+              <a:t> </a:t>
+            </a:r>
+            <a:r>
+              <a:rPr lang="it-IT" dirty="0" err="1">
+                <a:solidFill>
+                  <a:srgbClr val="171FE2"/>
+                </a:solidFill>
+                <a:latin typeface="Consolas" panose="020B0609020204030204" pitchFamily="49" charset="0"/>
+              </a:rPr>
+              <a:t>run</a:t>
+            </a:r>
+            <a:r>
+              <a:rPr lang="it-IT" dirty="0">
+                <a:solidFill>
+                  <a:srgbClr val="171FE2"/>
+                </a:solidFill>
+                <a:latin typeface="Consolas" panose="020B0609020204030204" pitchFamily="49" charset="0"/>
+              </a:rPr>
+              <a:t> -d --name </a:t>
+            </a:r>
+            <a:r>
+              <a:rPr lang="it-IT" dirty="0" err="1">
+                <a:solidFill>
+                  <a:srgbClr val="171FE2"/>
+                </a:solidFill>
+                <a:latin typeface="Consolas" panose="020B0609020204030204" pitchFamily="49" charset="0"/>
+              </a:rPr>
+              <a:t>db</a:t>
+            </a:r>
+            <a:r>
+              <a:rPr lang="it-IT" dirty="0">
+                <a:solidFill>
+                  <a:srgbClr val="171FE2"/>
+                </a:solidFill>
+                <a:latin typeface="Consolas" panose="020B0609020204030204" pitchFamily="49" charset="0"/>
+              </a:rPr>
+              <a:t>-aziendale --network rete-aziendale -e MARIADB_ROOT_PASSWORD=secret </a:t>
+            </a:r>
+            <a:r>
+              <a:rPr lang="it-IT" dirty="0" err="1">
+                <a:solidFill>
+                  <a:srgbClr val="171FE2"/>
+                </a:solidFill>
+                <a:latin typeface="Consolas" panose="020B0609020204030204" pitchFamily="49" charset="0"/>
+              </a:rPr>
+              <a:t>mariadb:latest</a:t>
+            </a:r>
+            <a:endParaRPr lang="it-IT" dirty="0">
+              <a:solidFill>
+                <a:srgbClr val="171FE2"/>
+              </a:solidFill>
+              <a:latin typeface="Consolas" panose="020B0609020204030204" pitchFamily="49" charset="0"/>
+            </a:endParaRPr>
+          </a:p>
+          <a:p>
+            <a:r>
+              <a:rPr lang="it-IT" dirty="0"/>
+              <a:t>Ora se agganciamo nella stessa rete un container </a:t>
+            </a:r>
+            <a:r>
+              <a:rPr lang="it-IT" dirty="0" err="1"/>
+              <a:t>backend</a:t>
+            </a:r>
+            <a:r>
+              <a:rPr lang="it-IT" dirty="0"/>
+              <a:t>, potrà comunicare col database usando direttamente il nome </a:t>
+            </a:r>
+            <a:r>
+              <a:rPr lang="it-IT" dirty="0" err="1"/>
+              <a:t>db</a:t>
+            </a:r>
+            <a:r>
+              <a:rPr lang="it-IT" dirty="0"/>
+              <a:t>-aziendale.</a:t>
+            </a:r>
+            <a:endParaRPr lang="it-IT" dirty="0">
+              <a:solidFill>
+                <a:srgbClr val="171FE2"/>
+              </a:solidFill>
+              <a:latin typeface="Consolas" panose="020B0609020204030204" pitchFamily="49" charset="0"/>
+            </a:endParaRPr>
+          </a:p>
+          <a:p>
+            <a:endParaRPr lang="it-IT" dirty="0">
+              <a:solidFill>
+                <a:srgbClr val="171FE2"/>
+              </a:solidFill>
+              <a:latin typeface="Consolas" panose="020B0609020204030204" pitchFamily="49" charset="0"/>
+            </a:endParaRPr>
+          </a:p>
+        </p:txBody>
+      </p:sp>
+    </p:spTree>
+    <p:extLst>
+      <p:ext uri="{BB962C8B-B14F-4D97-AF65-F5344CB8AC3E}">
+        <p14:creationId xmlns:p14="http://schemas.microsoft.com/office/powerpoint/2010/main" val="1534462775"/>
+      </p:ext>
+    </p:extLst>
+  </p:cSld>
+  <p:clrMapOvr>
+    <a:masterClrMapping/>
+  </p:clrMapOvr>
+</p:sld>
+</file>
+
+<file path=ppt/slides/slide16.xml><?xml version="1.0" encoding="utf-8"?>
+<p:sld xmlns:a="http://schemas.openxmlformats.org/drawingml/2006/main" xmlns:r="http://schemas.openxmlformats.org/officeDocument/2006/relationships" xmlns:p="http://schemas.openxmlformats.org/presentationml/2006/main">
+  <p:cSld>
+    <p:spTree>
+      <p:nvGrpSpPr>
+        <p:cNvPr id="1" name="">
+          <a:extLst>
+            <a:ext uri="{FF2B5EF4-FFF2-40B4-BE49-F238E27FC236}">
+              <a16:creationId xmlns:a16="http://schemas.microsoft.com/office/drawing/2014/main" id="{76BCCB24-18BE-77FC-63EB-9D4B5144C36B}"/>
+            </a:ext>
+          </a:extLst>
+        </p:cNvPr>
+        <p:cNvGrpSpPr/>
+        <p:nvPr/>
+      </p:nvGrpSpPr>
+      <p:grpSpPr>
+        <a:xfrm>
+          <a:off x="0" y="0"/>
+          <a:ext cx="0" cy="0"/>
+          <a:chOff x="0" y="0"/>
+          <a:chExt cx="0" cy="0"/>
+        </a:xfrm>
+      </p:grpSpPr>
+      <p:sp>
+        <p:nvSpPr>
+          <p:cNvPr id="2" name="Titolo della lezione">
+            <a:extLst>
+              <a:ext uri="{FF2B5EF4-FFF2-40B4-BE49-F238E27FC236}">
+                <a16:creationId xmlns:a16="http://schemas.microsoft.com/office/drawing/2014/main" id="{6CF975E0-E2AF-6A49-0EAA-4C1D829D3E06}"/>
+              </a:ext>
+            </a:extLst>
+          </p:cNvPr>
+          <p:cNvSpPr>
+            <a:spLocks noGrp="1"/>
+          </p:cNvSpPr>
+          <p:nvPr>
+            <p:ph type="title"/>
+          </p:nvPr>
+        </p:nvSpPr>
+        <p:spPr>
+          <a:xfrm>
+            <a:off x="838200" y="831206"/>
+            <a:ext cx="10515600" cy="314198"/>
+          </a:xfrm>
+        </p:spPr>
+        <p:txBody>
+          <a:bodyPr/>
+          <a:lstStyle/>
+          <a:p>
+            <a:r>
+              <a:rPr lang="it-IT" dirty="0"/>
+              <a:t>LAB 4: Scrittura di </a:t>
+            </a:r>
+            <a:r>
+              <a:rPr lang="it-IT" dirty="0" err="1"/>
+              <a:t>Dockerfile</a:t>
+            </a:r>
+            <a:r>
+              <a:rPr lang="it-IT" dirty="0"/>
+              <a:t> – Single Stage vs Multi-Stage Build (Java Enterprise)</a:t>
+            </a:r>
+          </a:p>
+        </p:txBody>
+      </p:sp>
+      <p:sp>
+        <p:nvSpPr>
+          <p:cNvPr id="3" name="Contenuto della lezione">
+            <a:extLst>
+              <a:ext uri="{FF2B5EF4-FFF2-40B4-BE49-F238E27FC236}">
+                <a16:creationId xmlns:a16="http://schemas.microsoft.com/office/drawing/2014/main" id="{44A52532-6530-08B6-7E03-86DD7982F1D5}"/>
+              </a:ext>
+            </a:extLst>
+          </p:cNvPr>
+          <p:cNvSpPr>
+            <a:spLocks noGrp="1"/>
+          </p:cNvSpPr>
+          <p:nvPr>
+            <p:ph idx="1"/>
+          </p:nvPr>
+        </p:nvSpPr>
+        <p:spPr>
+          <a:xfrm>
+            <a:off x="1317319" y="1558742"/>
+            <a:ext cx="9557362" cy="4803369"/>
+          </a:xfrm>
+        </p:spPr>
+        <p:txBody>
+          <a:bodyPr/>
+          <a:lstStyle/>
+          <a:p>
+            <a:r>
+              <a:rPr lang="it-IT" b="1" dirty="0"/>
+              <a:t>Obiettivo</a:t>
+            </a:r>
+            <a:r>
+              <a:rPr lang="it-IT" dirty="0"/>
+              <a:t>: Scrivere la "ricetta" di build di un'immagine personalizzata. Comprendere l'impatto dei </a:t>
+            </a:r>
+            <a:r>
+              <a:rPr lang="it-IT" dirty="0" err="1"/>
+              <a:t>layer</a:t>
+            </a:r>
+            <a:r>
+              <a:rPr lang="it-IT" dirty="0"/>
+              <a:t> sulla sicurezza e sulle dimensioni delle immagini aziendali passando da un build ingenuo a uno Multi-Stage professionale.</a:t>
+            </a:r>
+          </a:p>
+          <a:p>
+            <a:r>
+              <a:rPr lang="it-IT" b="1" dirty="0"/>
+              <a:t>Traccia:</a:t>
+            </a:r>
+            <a:r>
+              <a:rPr lang="it-IT" dirty="0"/>
+              <a:t> </a:t>
+            </a:r>
+            <a:r>
+              <a:rPr lang="it-IT" b="1" dirty="0"/>
+              <a:t>Scenario Aziendale:</a:t>
+            </a:r>
+            <a:r>
+              <a:rPr lang="it-IT" dirty="0"/>
+              <a:t> Il team di sviluppo vi ha fornito il codice sorgente di un'applicazione Java Spring Boot. Il manager Cloud vi impone un limite: l'immagine finale da caricare su AWS non deve superare i 250MB per motivi di costi di trasferimento e non deve contenere il codice sorgente in chiaro per motivi di sicurezza industriale. Dovete compilare l'app direttamente dentro Docker usando il Multi-Stage build.</a:t>
+            </a:r>
+          </a:p>
+        </p:txBody>
+      </p:sp>
+    </p:spTree>
+    <p:extLst>
+      <p:ext uri="{BB962C8B-B14F-4D97-AF65-F5344CB8AC3E}">
+        <p14:creationId xmlns:p14="http://schemas.microsoft.com/office/powerpoint/2010/main" val="127158571"/>
+      </p:ext>
+    </p:extLst>
+  </p:cSld>
+  <p:clrMapOvr>
+    <a:masterClrMapping/>
+  </p:clrMapOvr>
+</p:sld>
+</file>
+
+<file path=ppt/slides/slide17.xml><?xml version="1.0" encoding="utf-8"?>
+<p:sld xmlns:a="http://schemas.openxmlformats.org/drawingml/2006/main" xmlns:r="http://schemas.openxmlformats.org/officeDocument/2006/relationships" xmlns:p="http://schemas.openxmlformats.org/presentationml/2006/main">
+  <p:cSld>
+    <p:spTree>
+      <p:nvGrpSpPr>
+        <p:cNvPr id="1" name="">
+          <a:extLst>
+            <a:ext uri="{FF2B5EF4-FFF2-40B4-BE49-F238E27FC236}">
+              <a16:creationId xmlns:a16="http://schemas.microsoft.com/office/drawing/2014/main" id="{0E849E80-5FB2-2FB3-878E-37B6F38D3E01}"/>
+            </a:ext>
+          </a:extLst>
+        </p:cNvPr>
+        <p:cNvGrpSpPr/>
+        <p:nvPr/>
+      </p:nvGrpSpPr>
+      <p:grpSpPr>
+        <a:xfrm>
+          <a:off x="0" y="0"/>
+          <a:ext cx="0" cy="0"/>
+          <a:chOff x="0" y="0"/>
+          <a:chExt cx="0" cy="0"/>
+        </a:xfrm>
+      </p:grpSpPr>
+      <p:sp>
+        <p:nvSpPr>
+          <p:cNvPr id="3" name="Contenuto della lezione">
+            <a:extLst>
+              <a:ext uri="{FF2B5EF4-FFF2-40B4-BE49-F238E27FC236}">
+                <a16:creationId xmlns:a16="http://schemas.microsoft.com/office/drawing/2014/main" id="{A167E556-A370-DAF7-5DB9-BCA64CDE701B}"/>
+              </a:ext>
+            </a:extLst>
+          </p:cNvPr>
+          <p:cNvSpPr>
+            <a:spLocks noGrp="1"/>
+          </p:cNvSpPr>
+          <p:nvPr>
+            <p:ph idx="1"/>
+          </p:nvPr>
+        </p:nvSpPr>
+        <p:spPr>
+          <a:xfrm>
+            <a:off x="1415438" y="1349192"/>
+            <a:ext cx="9557362" cy="4803369"/>
+          </a:xfrm>
+        </p:spPr>
+        <p:txBody>
+          <a:bodyPr/>
+          <a:lstStyle/>
+          <a:p>
+            <a:r>
+              <a:rPr lang="it-IT" dirty="0"/>
+              <a:t>Creiamo una cartella chiamata progetto-java. All'interno creiamo una struttura di codice sorgente minima (per evitare di configurare un intero progetto Spring Boot reale).</a:t>
+            </a:r>
+          </a:p>
+          <a:p>
+            <a:r>
+              <a:rPr lang="it-IT" dirty="0"/>
+              <a:t>Dentro la cartella creiamo il file Avvio.java:</a:t>
+            </a:r>
+          </a:p>
+          <a:p>
+            <a:r>
+              <a:rPr lang="it-IT" dirty="0">
+                <a:solidFill>
+                  <a:srgbClr val="171FE2"/>
+                </a:solidFill>
+                <a:latin typeface="Consolas" panose="020B0609020204030204" pitchFamily="49" charset="0"/>
+              </a:rPr>
+              <a:t>public class Avvio {</a:t>
+            </a:r>
+          </a:p>
+          <a:p>
+            <a:r>
+              <a:rPr lang="it-IT" dirty="0">
+                <a:solidFill>
+                  <a:srgbClr val="171FE2"/>
+                </a:solidFill>
+                <a:latin typeface="Consolas" panose="020B0609020204030204" pitchFamily="49" charset="0"/>
+              </a:rPr>
+              <a:t>    public </a:t>
+            </a:r>
+            <a:r>
+              <a:rPr lang="it-IT" dirty="0" err="1">
+                <a:solidFill>
+                  <a:srgbClr val="171FE2"/>
+                </a:solidFill>
+                <a:latin typeface="Consolas" panose="020B0609020204030204" pitchFamily="49" charset="0"/>
+              </a:rPr>
+              <a:t>static</a:t>
+            </a:r>
+            <a:r>
+              <a:rPr lang="it-IT" dirty="0">
+                <a:solidFill>
+                  <a:srgbClr val="171FE2"/>
+                </a:solidFill>
+                <a:latin typeface="Consolas" panose="020B0609020204030204" pitchFamily="49" charset="0"/>
+              </a:rPr>
+              <a:t> </a:t>
+            </a:r>
+            <a:r>
+              <a:rPr lang="it-IT" dirty="0" err="1">
+                <a:solidFill>
+                  <a:srgbClr val="171FE2"/>
+                </a:solidFill>
+                <a:latin typeface="Consolas" panose="020B0609020204030204" pitchFamily="49" charset="0"/>
+              </a:rPr>
+              <a:t>void</a:t>
+            </a:r>
+            <a:r>
+              <a:rPr lang="it-IT" dirty="0">
+                <a:solidFill>
+                  <a:srgbClr val="171FE2"/>
+                </a:solidFill>
+                <a:latin typeface="Consolas" panose="020B0609020204030204" pitchFamily="49" charset="0"/>
+              </a:rPr>
+              <a:t> </a:t>
+            </a:r>
+            <a:r>
+              <a:rPr lang="it-IT" dirty="0" err="1">
+                <a:solidFill>
+                  <a:srgbClr val="171FE2"/>
+                </a:solidFill>
+                <a:latin typeface="Consolas" panose="020B0609020204030204" pitchFamily="49" charset="0"/>
+              </a:rPr>
+              <a:t>main</a:t>
+            </a:r>
+            <a:r>
+              <a:rPr lang="it-IT" dirty="0">
+                <a:solidFill>
+                  <a:srgbClr val="171FE2"/>
+                </a:solidFill>
+                <a:latin typeface="Consolas" panose="020B0609020204030204" pitchFamily="49" charset="0"/>
+              </a:rPr>
+              <a:t>(</a:t>
+            </a:r>
+            <a:r>
+              <a:rPr lang="it-IT" dirty="0" err="1">
+                <a:solidFill>
+                  <a:srgbClr val="171FE2"/>
+                </a:solidFill>
+                <a:latin typeface="Consolas" panose="020B0609020204030204" pitchFamily="49" charset="0"/>
+              </a:rPr>
+              <a:t>String</a:t>
+            </a:r>
+            <a:r>
+              <a:rPr lang="it-IT" dirty="0">
+                <a:solidFill>
+                  <a:srgbClr val="171FE2"/>
+                </a:solidFill>
+                <a:latin typeface="Consolas" panose="020B0609020204030204" pitchFamily="49" charset="0"/>
+              </a:rPr>
+              <a:t>[] </a:t>
+            </a:r>
+            <a:r>
+              <a:rPr lang="it-IT" dirty="0" err="1">
+                <a:solidFill>
+                  <a:srgbClr val="171FE2"/>
+                </a:solidFill>
+                <a:latin typeface="Consolas" panose="020B0609020204030204" pitchFamily="49" charset="0"/>
+              </a:rPr>
+              <a:t>args</a:t>
+            </a:r>
+            <a:r>
+              <a:rPr lang="it-IT" dirty="0">
+                <a:solidFill>
+                  <a:srgbClr val="171FE2"/>
+                </a:solidFill>
+                <a:latin typeface="Consolas" panose="020B0609020204030204" pitchFamily="49" charset="0"/>
+              </a:rPr>
+              <a:t>) {</a:t>
+            </a:r>
+          </a:p>
+          <a:p>
+            <a:r>
+              <a:rPr lang="it-IT" dirty="0">
+                <a:solidFill>
+                  <a:srgbClr val="171FE2"/>
+                </a:solidFill>
+                <a:latin typeface="Consolas" panose="020B0609020204030204" pitchFamily="49" charset="0"/>
+              </a:rPr>
+              <a:t>        </a:t>
+            </a:r>
+            <a:r>
+              <a:rPr lang="it-IT" dirty="0" err="1">
+                <a:solidFill>
+                  <a:srgbClr val="171FE2"/>
+                </a:solidFill>
+                <a:latin typeface="Consolas" panose="020B0609020204030204" pitchFamily="49" charset="0"/>
+              </a:rPr>
+              <a:t>System.out.println</a:t>
+            </a:r>
+            <a:r>
+              <a:rPr lang="it-IT" dirty="0">
+                <a:solidFill>
+                  <a:srgbClr val="171FE2"/>
+                </a:solidFill>
+                <a:latin typeface="Consolas" panose="020B0609020204030204" pitchFamily="49" charset="0"/>
+              </a:rPr>
+              <a:t>("Applicazione Enterprise Java avviata correttamente dentro Docker!");</a:t>
+            </a:r>
+          </a:p>
+          <a:p>
+            <a:r>
+              <a:rPr lang="it-IT" dirty="0">
+                <a:solidFill>
+                  <a:srgbClr val="171FE2"/>
+                </a:solidFill>
+                <a:latin typeface="Consolas" panose="020B0609020204030204" pitchFamily="49" charset="0"/>
+              </a:rPr>
+              <a:t>    }</a:t>
+            </a:r>
+          </a:p>
+          <a:p>
+            <a:r>
+              <a:rPr lang="it-IT" dirty="0">
+                <a:solidFill>
+                  <a:srgbClr val="171FE2"/>
+                </a:solidFill>
+                <a:latin typeface="Consolas" panose="020B0609020204030204" pitchFamily="49" charset="0"/>
+              </a:rPr>
+              <a:t>}</a:t>
+            </a:r>
+          </a:p>
+          <a:p>
+            <a:endParaRPr lang="it-IT" dirty="0"/>
+          </a:p>
+          <a:p>
+            <a:endParaRPr lang="it-IT" dirty="0">
+              <a:solidFill>
+                <a:srgbClr val="171FE2"/>
+              </a:solidFill>
+              <a:latin typeface="Consolas" panose="020B0609020204030204" pitchFamily="49" charset="0"/>
+            </a:endParaRPr>
+          </a:p>
+        </p:txBody>
+      </p:sp>
+    </p:spTree>
+    <p:extLst>
+      <p:ext uri="{BB962C8B-B14F-4D97-AF65-F5344CB8AC3E}">
+        <p14:creationId xmlns:p14="http://schemas.microsoft.com/office/powerpoint/2010/main" val="1462815745"/>
+      </p:ext>
+    </p:extLst>
+  </p:cSld>
+  <p:clrMapOvr>
+    <a:masterClrMapping/>
+  </p:clrMapOvr>
+</p:sld>
+</file>
+
+<file path=ppt/slides/slide18.xml><?xml version="1.0" encoding="utf-8"?>
+<p:sld xmlns:a="http://schemas.openxmlformats.org/drawingml/2006/main" xmlns:r="http://schemas.openxmlformats.org/officeDocument/2006/relationships" xmlns:p="http://schemas.openxmlformats.org/presentationml/2006/main">
+  <p:cSld>
+    <p:spTree>
+      <p:nvGrpSpPr>
+        <p:cNvPr id="1" name="">
+          <a:extLst>
+            <a:ext uri="{FF2B5EF4-FFF2-40B4-BE49-F238E27FC236}">
+              <a16:creationId xmlns:a16="http://schemas.microsoft.com/office/drawing/2014/main" id="{A8842933-7F60-0D47-CA9F-1E6376E7BC7D}"/>
+            </a:ext>
+          </a:extLst>
+        </p:cNvPr>
+        <p:cNvGrpSpPr/>
+        <p:nvPr/>
+      </p:nvGrpSpPr>
+      <p:grpSpPr>
+        <a:xfrm>
+          <a:off x="0" y="0"/>
+          <a:ext cx="0" cy="0"/>
+          <a:chOff x="0" y="0"/>
+          <a:chExt cx="0" cy="0"/>
+        </a:xfrm>
+      </p:grpSpPr>
+      <p:sp>
+        <p:nvSpPr>
+          <p:cNvPr id="3" name="Contenuto della lezione">
+            <a:extLst>
+              <a:ext uri="{FF2B5EF4-FFF2-40B4-BE49-F238E27FC236}">
+                <a16:creationId xmlns:a16="http://schemas.microsoft.com/office/drawing/2014/main" id="{26A7DC16-385D-497D-6F7C-49E00B3E61F7}"/>
+              </a:ext>
+            </a:extLst>
+          </p:cNvPr>
+          <p:cNvSpPr>
+            <a:spLocks noGrp="1"/>
+          </p:cNvSpPr>
+          <p:nvPr>
+            <p:ph idx="1"/>
+          </p:nvPr>
+        </p:nvSpPr>
+        <p:spPr>
+          <a:xfrm>
+            <a:off x="1415438" y="1349192"/>
+            <a:ext cx="9557362" cy="4803369"/>
+          </a:xfrm>
+        </p:spPr>
+        <p:txBody>
+          <a:bodyPr/>
+          <a:lstStyle/>
+          <a:p>
+            <a:r>
+              <a:rPr lang="it-IT" b="1" dirty="0"/>
+              <a:t>PARTE 1: Il Build Ingenuo (Single-Stage) – La versione pesante</a:t>
+            </a:r>
+          </a:p>
+          <a:p>
+            <a:r>
+              <a:rPr lang="it-IT" dirty="0"/>
+              <a:t>Creiamo un file chiamato </a:t>
+            </a:r>
+            <a:r>
+              <a:rPr lang="it-IT" b="1" dirty="0" err="1"/>
+              <a:t>Dockerfile.pesante</a:t>
+            </a:r>
+            <a:r>
+              <a:rPr lang="it-IT" b="1" dirty="0"/>
+              <a:t> </a:t>
+            </a:r>
+            <a:r>
+              <a:rPr lang="it-IT" dirty="0"/>
+              <a:t>nella stessa cartella:</a:t>
+            </a:r>
+          </a:p>
+          <a:p>
+            <a:r>
+              <a:rPr lang="it-IT" dirty="0">
+                <a:solidFill>
+                  <a:srgbClr val="171FE2"/>
+                </a:solidFill>
+                <a:latin typeface="Consolas" panose="020B0609020204030204" pitchFamily="49" charset="0"/>
+              </a:rPr>
+              <a:t>FROM maven:3.8.4-openjdk-17</a:t>
+            </a:r>
+          </a:p>
+          <a:p>
+            <a:endParaRPr lang="it-IT" dirty="0">
+              <a:solidFill>
+                <a:srgbClr val="171FE2"/>
+              </a:solidFill>
+              <a:latin typeface="Consolas" panose="020B0609020204030204" pitchFamily="49" charset="0"/>
+            </a:endParaRPr>
+          </a:p>
+          <a:p>
+            <a:r>
+              <a:rPr lang="it-IT" dirty="0">
+                <a:solidFill>
+                  <a:srgbClr val="171FE2"/>
+                </a:solidFill>
+                <a:latin typeface="Consolas" panose="020B0609020204030204" pitchFamily="49" charset="0"/>
+              </a:rPr>
+              <a:t>WORKDIR /app</a:t>
+            </a:r>
+          </a:p>
+          <a:p>
+            <a:r>
+              <a:rPr lang="it-IT" dirty="0">
+                <a:solidFill>
+                  <a:srgbClr val="171FE2"/>
+                </a:solidFill>
+                <a:latin typeface="Consolas" panose="020B0609020204030204" pitchFamily="49" charset="0"/>
+              </a:rPr>
+              <a:t>COPY Avvio.java /app/</a:t>
+            </a:r>
+          </a:p>
+          <a:p>
+            <a:endParaRPr lang="it-IT" dirty="0">
+              <a:solidFill>
+                <a:srgbClr val="171FE2"/>
+              </a:solidFill>
+              <a:latin typeface="Consolas" panose="020B0609020204030204" pitchFamily="49" charset="0"/>
+            </a:endParaRPr>
+          </a:p>
+          <a:p>
+            <a:r>
+              <a:rPr lang="it-IT" dirty="0">
+                <a:solidFill>
+                  <a:srgbClr val="00B050"/>
+                </a:solidFill>
+                <a:latin typeface="Consolas" panose="020B0609020204030204" pitchFamily="49" charset="0"/>
+              </a:rPr>
+              <a:t># Compiliamo il codice dentro l'immagine</a:t>
+            </a:r>
+          </a:p>
+          <a:p>
+            <a:r>
+              <a:rPr lang="it-IT" dirty="0">
+                <a:solidFill>
+                  <a:srgbClr val="171FE2"/>
+                </a:solidFill>
+                <a:latin typeface="Consolas" panose="020B0609020204030204" pitchFamily="49" charset="0"/>
+              </a:rPr>
+              <a:t>RUN </a:t>
+            </a:r>
+            <a:r>
+              <a:rPr lang="it-IT" dirty="0" err="1">
+                <a:solidFill>
+                  <a:srgbClr val="171FE2"/>
+                </a:solidFill>
+                <a:latin typeface="Consolas" panose="020B0609020204030204" pitchFamily="49" charset="0"/>
+              </a:rPr>
+              <a:t>javac</a:t>
+            </a:r>
+            <a:r>
+              <a:rPr lang="it-IT" dirty="0">
+                <a:solidFill>
+                  <a:srgbClr val="171FE2"/>
+                </a:solidFill>
+                <a:latin typeface="Consolas" panose="020B0609020204030204" pitchFamily="49" charset="0"/>
+              </a:rPr>
+              <a:t> Avvio.java </a:t>
+            </a:r>
+            <a:r>
+              <a:rPr lang="it-IT" dirty="0">
+                <a:solidFill>
+                  <a:srgbClr val="00B050"/>
+                </a:solidFill>
+                <a:latin typeface="Consolas" panose="020B0609020204030204" pitchFamily="49" charset="0"/>
+              </a:rPr>
+              <a:t># Crea un </a:t>
+            </a:r>
+            <a:r>
+              <a:rPr lang="it-IT" dirty="0" err="1">
+                <a:solidFill>
+                  <a:srgbClr val="00B050"/>
+                </a:solidFill>
+                <a:latin typeface="Consolas" panose="020B0609020204030204" pitchFamily="49" charset="0"/>
+              </a:rPr>
+              <a:t>layer</a:t>
+            </a:r>
+            <a:r>
+              <a:rPr lang="it-IT" dirty="0">
+                <a:solidFill>
+                  <a:srgbClr val="00B050"/>
+                </a:solidFill>
+                <a:latin typeface="Consolas" panose="020B0609020204030204" pitchFamily="49" charset="0"/>
+              </a:rPr>
+              <a:t> con il .class</a:t>
+            </a:r>
+          </a:p>
+          <a:p>
+            <a:endParaRPr lang="it-IT" dirty="0">
+              <a:solidFill>
+                <a:srgbClr val="00B050"/>
+              </a:solidFill>
+              <a:latin typeface="Consolas" panose="020B0609020204030204" pitchFamily="49" charset="0"/>
+            </a:endParaRPr>
+          </a:p>
+          <a:p>
+            <a:r>
+              <a:rPr lang="it-IT" dirty="0">
+                <a:solidFill>
+                  <a:srgbClr val="171FE2"/>
+                </a:solidFill>
+                <a:latin typeface="Consolas" panose="020B0609020204030204" pitchFamily="49" charset="0"/>
+              </a:rPr>
+              <a:t>CMD ["java", "Avvio"]</a:t>
+            </a:r>
+          </a:p>
+          <a:p>
+            <a:r>
+              <a:rPr lang="it-IT" dirty="0" err="1"/>
+              <a:t>NB:usando</a:t>
+            </a:r>
+            <a:r>
+              <a:rPr lang="it-IT" dirty="0"/>
+              <a:t> </a:t>
+            </a:r>
+            <a:r>
+              <a:rPr lang="it-IT" dirty="0" err="1"/>
+              <a:t>javac</a:t>
+            </a:r>
+            <a:r>
+              <a:rPr lang="it-IT" dirty="0"/>
+              <a:t> possiamo fare a meno di Maven, ma è per simulare il caso di un progetto Spring Boot.</a:t>
+            </a:r>
+          </a:p>
+          <a:p>
+            <a:endParaRPr lang="it-IT" dirty="0">
+              <a:solidFill>
+                <a:srgbClr val="171FE2"/>
+              </a:solidFill>
+              <a:latin typeface="Consolas" panose="020B0609020204030204" pitchFamily="49" charset="0"/>
+            </a:endParaRPr>
+          </a:p>
+        </p:txBody>
+      </p:sp>
+    </p:spTree>
+    <p:extLst>
+      <p:ext uri="{BB962C8B-B14F-4D97-AF65-F5344CB8AC3E}">
+        <p14:creationId xmlns:p14="http://schemas.microsoft.com/office/powerpoint/2010/main" val="2886579635"/>
+      </p:ext>
+    </p:extLst>
+  </p:cSld>
+  <p:clrMapOvr>
+    <a:masterClrMapping/>
+  </p:clrMapOvr>
+</p:sld>
+</file>
+
+<file path=ppt/slides/slide19.xml><?xml version="1.0" encoding="utf-8"?>
+<p:sld xmlns:a="http://schemas.openxmlformats.org/drawingml/2006/main" xmlns:r="http://schemas.openxmlformats.org/officeDocument/2006/relationships" xmlns:p="http://schemas.openxmlformats.org/presentationml/2006/main">
+  <p:cSld>
+    <p:spTree>
+      <p:nvGrpSpPr>
+        <p:cNvPr id="1" name="">
+          <a:extLst>
+            <a:ext uri="{FF2B5EF4-FFF2-40B4-BE49-F238E27FC236}">
+              <a16:creationId xmlns:a16="http://schemas.microsoft.com/office/drawing/2014/main" id="{A431995B-EB82-9ED3-182D-424CD7F0C72B}"/>
+            </a:ext>
+          </a:extLst>
+        </p:cNvPr>
+        <p:cNvGrpSpPr/>
+        <p:nvPr/>
+      </p:nvGrpSpPr>
+      <p:grpSpPr>
+        <a:xfrm>
+          <a:off x="0" y="0"/>
+          <a:ext cx="0" cy="0"/>
+          <a:chOff x="0" y="0"/>
+          <a:chExt cx="0" cy="0"/>
+        </a:xfrm>
+      </p:grpSpPr>
+      <p:sp>
+        <p:nvSpPr>
+          <p:cNvPr id="3" name="Contenuto della lezione">
+            <a:extLst>
+              <a:ext uri="{FF2B5EF4-FFF2-40B4-BE49-F238E27FC236}">
+                <a16:creationId xmlns:a16="http://schemas.microsoft.com/office/drawing/2014/main" id="{586D7931-1A37-E2B7-368C-7E8D2E05D8F7}"/>
+              </a:ext>
+            </a:extLst>
+          </p:cNvPr>
+          <p:cNvSpPr>
+            <a:spLocks noGrp="1"/>
+          </p:cNvSpPr>
+          <p:nvPr>
+            <p:ph idx="1"/>
+          </p:nvPr>
+        </p:nvSpPr>
+        <p:spPr>
+          <a:xfrm>
+            <a:off x="1415438" y="1349192"/>
+            <a:ext cx="9557362" cy="4803369"/>
+          </a:xfrm>
+        </p:spPr>
+        <p:txBody>
+          <a:bodyPr/>
+          <a:lstStyle/>
+          <a:p>
+            <a:r>
+              <a:rPr lang="it-IT" dirty="0"/>
+              <a:t>Lanciamo il build di questa prima versione:</a:t>
+            </a:r>
+          </a:p>
+          <a:p>
+            <a:r>
+              <a:rPr lang="it-IT" dirty="0" err="1">
+                <a:solidFill>
+                  <a:srgbClr val="171FE2"/>
+                </a:solidFill>
+                <a:latin typeface="Consolas" panose="020B0609020204030204" pitchFamily="49" charset="0"/>
+              </a:rPr>
+              <a:t>docker</a:t>
+            </a:r>
+            <a:r>
+              <a:rPr lang="it-IT" dirty="0">
+                <a:solidFill>
+                  <a:srgbClr val="171FE2"/>
+                </a:solidFill>
+                <a:latin typeface="Consolas" panose="020B0609020204030204" pitchFamily="49" charset="0"/>
+              </a:rPr>
+              <a:t> build -t </a:t>
+            </a:r>
+            <a:r>
+              <a:rPr lang="it-IT" dirty="0" err="1">
+                <a:solidFill>
+                  <a:srgbClr val="171FE2"/>
+                </a:solidFill>
+                <a:latin typeface="Consolas" panose="020B0609020204030204" pitchFamily="49" charset="0"/>
+              </a:rPr>
+              <a:t>app-java:pesante</a:t>
+            </a:r>
+            <a:r>
+              <a:rPr lang="it-IT" dirty="0">
+                <a:solidFill>
+                  <a:srgbClr val="171FE2"/>
+                </a:solidFill>
+                <a:latin typeface="Consolas" panose="020B0609020204030204" pitchFamily="49" charset="0"/>
+              </a:rPr>
+              <a:t> -f </a:t>
+            </a:r>
+            <a:r>
+              <a:rPr lang="it-IT" dirty="0" err="1">
+                <a:solidFill>
+                  <a:srgbClr val="171FE2"/>
+                </a:solidFill>
+                <a:latin typeface="Consolas" panose="020B0609020204030204" pitchFamily="49" charset="0"/>
+              </a:rPr>
+              <a:t>Dockerfile.pesante</a:t>
+            </a:r>
+            <a:r>
+              <a:rPr lang="it-IT" dirty="0">
+                <a:solidFill>
+                  <a:srgbClr val="171FE2"/>
+                </a:solidFill>
+                <a:latin typeface="Consolas" panose="020B0609020204030204" pitchFamily="49" charset="0"/>
+              </a:rPr>
+              <a:t> .</a:t>
+            </a:r>
+          </a:p>
+          <a:p>
+            <a:r>
+              <a:rPr lang="it-IT" dirty="0"/>
+              <a:t>Dettaglio delle opzioni:</a:t>
+            </a:r>
+          </a:p>
+          <a:p>
+            <a:r>
+              <a:rPr lang="it-IT" dirty="0" err="1">
+                <a:solidFill>
+                  <a:srgbClr val="171FE2"/>
+                </a:solidFill>
+                <a:latin typeface="Consolas" panose="020B0609020204030204" pitchFamily="49" charset="0"/>
+              </a:rPr>
+              <a:t>docker</a:t>
+            </a:r>
+            <a:r>
+              <a:rPr lang="it-IT" dirty="0">
+                <a:solidFill>
+                  <a:srgbClr val="171FE2"/>
+                </a:solidFill>
+                <a:latin typeface="Consolas" panose="020B0609020204030204" pitchFamily="49" charset="0"/>
+              </a:rPr>
+              <a:t> build </a:t>
+            </a:r>
+          </a:p>
+          <a:p>
+            <a:pPr lvl="1"/>
+            <a:r>
+              <a:rPr lang="it-IT" sz="1800" dirty="0">
+                <a:latin typeface="Neue Haas Grotesk Text Pro" panose="020B0504020202020204" pitchFamily="34" charset="0"/>
+              </a:rPr>
+              <a:t>avvia la costruzione di un'immagine Docker. </a:t>
+            </a:r>
+          </a:p>
+          <a:p>
+            <a:r>
+              <a:rPr lang="it-IT" dirty="0">
+                <a:solidFill>
+                  <a:srgbClr val="171FE2"/>
+                </a:solidFill>
+                <a:latin typeface="Consolas" panose="020B0609020204030204" pitchFamily="49" charset="0"/>
+              </a:rPr>
+              <a:t>-t </a:t>
+            </a:r>
+            <a:r>
+              <a:rPr lang="it-IT" dirty="0" err="1">
+                <a:solidFill>
+                  <a:srgbClr val="171FE2"/>
+                </a:solidFill>
+                <a:latin typeface="Consolas" panose="020B0609020204030204" pitchFamily="49" charset="0"/>
+              </a:rPr>
+              <a:t>app-java:pesante</a:t>
+            </a:r>
+            <a:r>
+              <a:rPr lang="it-IT" dirty="0">
+                <a:solidFill>
+                  <a:srgbClr val="171FE2"/>
+                </a:solidFill>
+                <a:latin typeface="Consolas" panose="020B0609020204030204" pitchFamily="49" charset="0"/>
+              </a:rPr>
+              <a:t> </a:t>
+            </a:r>
+            <a:r>
+              <a:rPr lang="it-IT" sz="2400" dirty="0">
+                <a:latin typeface="+mn-lt"/>
+              </a:rPr>
+              <a:t>(-t sta per tag)</a:t>
+            </a:r>
+          </a:p>
+          <a:p>
+            <a:pPr lvl="1"/>
+            <a:r>
+              <a:rPr lang="it-IT" sz="1800" dirty="0">
+                <a:latin typeface="Neue Haas Grotesk Text Pro" panose="020B0504020202020204" pitchFamily="34" charset="0"/>
+              </a:rPr>
+              <a:t>assegna un nome (repository) e un tag (versione) all'immagine. </a:t>
+            </a:r>
+          </a:p>
+          <a:p>
+            <a:pPr lvl="1"/>
+            <a:r>
+              <a:rPr lang="it-IT" sz="1800" dirty="0">
+                <a:latin typeface="Neue Haas Grotesk Text Pro" panose="020B0504020202020204" pitchFamily="34" charset="0"/>
+              </a:rPr>
+              <a:t>Nome: app-java </a:t>
+            </a:r>
+          </a:p>
+          <a:p>
+            <a:pPr lvl="1"/>
+            <a:r>
+              <a:rPr lang="it-IT" sz="1800" dirty="0">
+                <a:latin typeface="Neue Haas Grotesk Text Pro" panose="020B0504020202020204" pitchFamily="34" charset="0"/>
+              </a:rPr>
+              <a:t>Tag: pesante </a:t>
+            </a:r>
+          </a:p>
+          <a:p>
+            <a:pPr lvl="1"/>
+            <a:r>
+              <a:rPr lang="it-IT" sz="1800" dirty="0">
+                <a:latin typeface="Neue Haas Grotesk Text Pro" panose="020B0504020202020204" pitchFamily="34" charset="0"/>
+              </a:rPr>
+              <a:t>Equivale a: </a:t>
+            </a:r>
+            <a:r>
+              <a:rPr lang="it-IT" sz="1800" dirty="0" err="1">
+                <a:solidFill>
+                  <a:srgbClr val="171FE2"/>
+                </a:solidFill>
+                <a:latin typeface="Consolas" panose="020B0609020204030204" pitchFamily="49" charset="0"/>
+              </a:rPr>
+              <a:t>app-java:pesante</a:t>
+            </a:r>
+            <a:endParaRPr lang="it-IT" sz="1800" dirty="0">
+              <a:solidFill>
+                <a:srgbClr val="171FE2"/>
+              </a:solidFill>
+              <a:latin typeface="Consolas" panose="020B0609020204030204" pitchFamily="49" charset="0"/>
+            </a:endParaRPr>
+          </a:p>
+          <a:p>
+            <a:r>
+              <a:rPr lang="it-IT" dirty="0"/>
+              <a:t>-</a:t>
+            </a:r>
+            <a:r>
+              <a:rPr lang="it-IT" dirty="0">
+                <a:solidFill>
+                  <a:srgbClr val="171FE2"/>
+                </a:solidFill>
+                <a:latin typeface="Consolas" panose="020B0609020204030204" pitchFamily="49" charset="0"/>
+              </a:rPr>
+              <a:t>f </a:t>
+            </a:r>
+            <a:r>
+              <a:rPr lang="it-IT" dirty="0" err="1">
+                <a:solidFill>
+                  <a:srgbClr val="171FE2"/>
+                </a:solidFill>
+                <a:latin typeface="Consolas" panose="020B0609020204030204" pitchFamily="49" charset="0"/>
+              </a:rPr>
+              <a:t>Dockerfile.pesante</a:t>
+            </a:r>
+            <a:r>
+              <a:rPr lang="it-IT" dirty="0">
+                <a:solidFill>
+                  <a:srgbClr val="171FE2"/>
+                </a:solidFill>
+                <a:latin typeface="Consolas" panose="020B0609020204030204" pitchFamily="49" charset="0"/>
+              </a:rPr>
+              <a:t> </a:t>
+            </a:r>
+            <a:r>
+              <a:rPr lang="it-IT" dirty="0"/>
+              <a:t>(-f sta per file)</a:t>
+            </a:r>
+            <a:endParaRPr lang="it-IT" dirty="0">
+              <a:solidFill>
+                <a:srgbClr val="171FE2"/>
+              </a:solidFill>
+              <a:latin typeface="Consolas" panose="020B0609020204030204" pitchFamily="49" charset="0"/>
+            </a:endParaRPr>
+          </a:p>
+          <a:p>
+            <a:pPr lvl="1"/>
+            <a:r>
+              <a:rPr lang="it-IT" sz="1800" dirty="0">
+                <a:latin typeface="Neue Haas Grotesk Text Pro" panose="020B0504020202020204" pitchFamily="34" charset="0"/>
+              </a:rPr>
+              <a:t>dice a Docker di usare il file </a:t>
+            </a:r>
+            <a:r>
+              <a:rPr lang="it-IT" sz="1800" dirty="0" err="1">
+                <a:latin typeface="Neue Haas Grotesk Text Pro" panose="020B0504020202020204" pitchFamily="34" charset="0"/>
+              </a:rPr>
+              <a:t>Dockerfile.pesante</a:t>
+            </a:r>
+            <a:r>
+              <a:rPr lang="it-IT" sz="1800" dirty="0">
+                <a:latin typeface="Neue Haas Grotesk Text Pro" panose="020B0504020202020204" pitchFamily="34" charset="0"/>
+              </a:rPr>
+              <a:t> invece del file predefinito </a:t>
+            </a:r>
+            <a:r>
+              <a:rPr lang="it-IT" sz="1800" dirty="0" err="1">
+                <a:latin typeface="Neue Haas Grotesk Text Pro" panose="020B0504020202020204" pitchFamily="34" charset="0"/>
+              </a:rPr>
+              <a:t>Dockerfile</a:t>
+            </a:r>
+            <a:r>
+              <a:rPr lang="it-IT" sz="1800" dirty="0">
+                <a:latin typeface="Neue Haas Grotesk Text Pro" panose="020B0504020202020204" pitchFamily="34" charset="0"/>
+              </a:rPr>
+              <a:t>. </a:t>
+            </a:r>
+          </a:p>
+          <a:p>
+            <a:pPr lvl="1"/>
+            <a:r>
+              <a:rPr lang="it-IT" sz="1800" b="1" dirty="0">
+                <a:solidFill>
+                  <a:srgbClr val="171FE2"/>
+                </a:solidFill>
+                <a:latin typeface="Neue Haas Grotesk Text Pro" panose="020B0504020202020204" pitchFamily="34" charset="0"/>
+              </a:rPr>
+              <a:t>.</a:t>
+            </a:r>
+            <a:r>
+              <a:rPr lang="it-IT" sz="1800" dirty="0">
+                <a:latin typeface="Neue Haas Grotesk Text Pro" panose="020B0504020202020204" pitchFamily="34" charset="0"/>
+              </a:rPr>
+              <a:t>  indica il build </a:t>
+            </a:r>
+            <a:r>
+              <a:rPr lang="it-IT" sz="1800" dirty="0" err="1">
+                <a:latin typeface="Neue Haas Grotesk Text Pro" panose="020B0504020202020204" pitchFamily="34" charset="0"/>
+              </a:rPr>
+              <a:t>context</a:t>
+            </a:r>
+            <a:r>
+              <a:rPr lang="it-IT" sz="1800" dirty="0">
+                <a:latin typeface="Neue Haas Grotesk Text Pro" panose="020B0504020202020204" pitchFamily="34" charset="0"/>
+              </a:rPr>
+              <a:t>, cioè la cartella corrente. Tutti i file che il </a:t>
+            </a:r>
+            <a:r>
+              <a:rPr lang="it-IT" sz="1800" dirty="0" err="1">
+                <a:latin typeface="Neue Haas Grotesk Text Pro" panose="020B0504020202020204" pitchFamily="34" charset="0"/>
+              </a:rPr>
+              <a:t>Dockerfile</a:t>
+            </a:r>
+            <a:r>
+              <a:rPr lang="it-IT" sz="1800" dirty="0">
+                <a:latin typeface="Neue Haas Grotesk Text Pro" panose="020B0504020202020204" pitchFamily="34" charset="0"/>
+              </a:rPr>
+              <a:t> può copiare con COPY o ADD vengono presi da qui.</a:t>
+            </a:r>
+          </a:p>
+          <a:p>
+            <a:endParaRPr lang="it-IT" dirty="0">
+              <a:solidFill>
+                <a:srgbClr val="171FE2"/>
+              </a:solidFill>
+              <a:latin typeface="Consolas" panose="020B0609020204030204" pitchFamily="49" charset="0"/>
+            </a:endParaRPr>
+          </a:p>
+        </p:txBody>
+      </p:sp>
+    </p:spTree>
+    <p:extLst>
+      <p:ext uri="{BB962C8B-B14F-4D97-AF65-F5344CB8AC3E}">
+        <p14:creationId xmlns:p14="http://schemas.microsoft.com/office/powerpoint/2010/main" val="1621301815"/>
       </p:ext>
     </p:extLst>
   </p:cSld>
@@ -4292,6 +6032,1761 @@
     <p:extLst>
       <p:ext uri="{BB962C8B-B14F-4D97-AF65-F5344CB8AC3E}">
         <p14:creationId xmlns:p14="http://schemas.microsoft.com/office/powerpoint/2010/main" val="339079353"/>
+      </p:ext>
+    </p:extLst>
+  </p:cSld>
+  <p:clrMapOvr>
+    <a:masterClrMapping/>
+  </p:clrMapOvr>
+</p:sld>
+</file>
+
+<file path=ppt/slides/slide20.xml><?xml version="1.0" encoding="utf-8"?>
+<p:sld xmlns:a="http://schemas.openxmlformats.org/drawingml/2006/main" xmlns:r="http://schemas.openxmlformats.org/officeDocument/2006/relationships" xmlns:p="http://schemas.openxmlformats.org/presentationml/2006/main">
+  <p:cSld>
+    <p:spTree>
+      <p:nvGrpSpPr>
+        <p:cNvPr id="1" name="">
+          <a:extLst>
+            <a:ext uri="{FF2B5EF4-FFF2-40B4-BE49-F238E27FC236}">
+              <a16:creationId xmlns:a16="http://schemas.microsoft.com/office/drawing/2014/main" id="{C0B6D1AA-0C75-24BC-E6CC-73DDF2F190DF}"/>
+            </a:ext>
+          </a:extLst>
+        </p:cNvPr>
+        <p:cNvGrpSpPr/>
+        <p:nvPr/>
+      </p:nvGrpSpPr>
+      <p:grpSpPr>
+        <a:xfrm>
+          <a:off x="0" y="0"/>
+          <a:ext cx="0" cy="0"/>
+          <a:chOff x="0" y="0"/>
+          <a:chExt cx="0" cy="0"/>
+        </a:xfrm>
+      </p:grpSpPr>
+      <p:sp>
+        <p:nvSpPr>
+          <p:cNvPr id="3" name="Contenuto della lezione">
+            <a:extLst>
+              <a:ext uri="{FF2B5EF4-FFF2-40B4-BE49-F238E27FC236}">
+                <a16:creationId xmlns:a16="http://schemas.microsoft.com/office/drawing/2014/main" id="{52D998CD-095E-3B57-BD4C-A9FC9AB2F90B}"/>
+              </a:ext>
+            </a:extLst>
+          </p:cNvPr>
+          <p:cNvSpPr>
+            <a:spLocks noGrp="1"/>
+          </p:cNvSpPr>
+          <p:nvPr>
+            <p:ph idx="1"/>
+          </p:nvPr>
+        </p:nvSpPr>
+        <p:spPr>
+          <a:xfrm>
+            <a:off x="386738" y="1349192"/>
+            <a:ext cx="2940662" cy="4803369"/>
+          </a:xfrm>
+        </p:spPr>
+        <p:txBody>
+          <a:bodyPr/>
+          <a:lstStyle/>
+          <a:p>
+            <a:r>
+              <a:rPr lang="it-IT" b="1" dirty="0"/>
+              <a:t>PARTE 2: Il Build Professionale (Multi-Stage) – La versione piuma</a:t>
+            </a:r>
+          </a:p>
+          <a:p>
+            <a:r>
+              <a:rPr lang="it-IT" dirty="0"/>
+              <a:t>L'immagine appena creata contiene il compilatore </a:t>
+            </a:r>
+            <a:r>
+              <a:rPr lang="it-IT" dirty="0" err="1"/>
+              <a:t>javac</a:t>
+            </a:r>
+            <a:r>
+              <a:rPr lang="it-IT" dirty="0"/>
+              <a:t>, l'intera suite Maven e il codice .java sorgente. </a:t>
+            </a:r>
+            <a:r>
+              <a:rPr lang="it-IT" dirty="0">
+                <a:solidFill>
+                  <a:srgbClr val="171FE2"/>
+                </a:solidFill>
+              </a:rPr>
+              <a:t>Roba inutile in produzione che appesantisce il server.</a:t>
+            </a:r>
+          </a:p>
+          <a:p>
+            <a:r>
+              <a:rPr lang="it-IT" dirty="0"/>
+              <a:t>Riscriviamo l'architettura creando un nuovo file chiamato </a:t>
+            </a:r>
+            <a:r>
+              <a:rPr lang="it-IT" b="1" dirty="0" err="1"/>
+              <a:t>Dockerfile.leggero</a:t>
+            </a:r>
+            <a:r>
+              <a:rPr lang="it-IT" b="1" dirty="0"/>
+              <a:t>.</a:t>
+            </a:r>
+            <a:endParaRPr lang="it-IT" dirty="0"/>
+          </a:p>
+          <a:p>
+            <a:endParaRPr lang="it-IT" dirty="0">
+              <a:solidFill>
+                <a:srgbClr val="171FE2"/>
+              </a:solidFill>
+              <a:latin typeface="Consolas" panose="020B0609020204030204" pitchFamily="49" charset="0"/>
+            </a:endParaRPr>
+          </a:p>
+        </p:txBody>
+      </p:sp>
+      <p:sp>
+        <p:nvSpPr>
+          <p:cNvPr id="2" name="CasellaDiTesto 1">
+            <a:extLst>
+              <a:ext uri="{FF2B5EF4-FFF2-40B4-BE49-F238E27FC236}">
+                <a16:creationId xmlns:a16="http://schemas.microsoft.com/office/drawing/2014/main" id="{A4D2CC81-A0E0-F737-A9A9-AFD5222E71A7}"/>
+              </a:ext>
+            </a:extLst>
+          </p:cNvPr>
+          <p:cNvSpPr txBox="1"/>
+          <p:nvPr/>
+        </p:nvSpPr>
+        <p:spPr>
+          <a:xfrm>
+            <a:off x="3515813" y="1349192"/>
+            <a:ext cx="8289449" cy="3693319"/>
+          </a:xfrm>
+          <a:prstGeom prst="rect">
+            <a:avLst/>
+          </a:prstGeom>
+          <a:noFill/>
+        </p:spPr>
+        <p:txBody>
+          <a:bodyPr wrap="none" rtlCol="0">
+            <a:spAutoFit/>
+          </a:bodyPr>
+          <a:lstStyle/>
+          <a:p>
+            <a:r>
+              <a:rPr lang="it-IT" dirty="0">
+                <a:solidFill>
+                  <a:srgbClr val="00B050"/>
+                </a:solidFill>
+                <a:latin typeface="Consolas" panose="020B0609020204030204" pitchFamily="49" charset="0"/>
+              </a:rPr>
+              <a:t># STAGE 1: Compilazione (La fabbrica)</a:t>
+            </a:r>
+          </a:p>
+          <a:p>
+            <a:r>
+              <a:rPr lang="it-IT" dirty="0">
+                <a:solidFill>
+                  <a:srgbClr val="171FE2"/>
+                </a:solidFill>
+                <a:latin typeface="Consolas" panose="020B0609020204030204" pitchFamily="49" charset="0"/>
+              </a:rPr>
+              <a:t>FROM maven:3.8.4-openjdk-17 AS build</a:t>
+            </a:r>
+          </a:p>
+          <a:p>
+            <a:r>
+              <a:rPr lang="it-IT" dirty="0">
+                <a:solidFill>
+                  <a:srgbClr val="171FE2"/>
+                </a:solidFill>
+                <a:latin typeface="Consolas" panose="020B0609020204030204" pitchFamily="49" charset="0"/>
+              </a:rPr>
+              <a:t>WORKDIR /build</a:t>
+            </a:r>
+          </a:p>
+          <a:p>
+            <a:r>
+              <a:rPr lang="it-IT" dirty="0">
+                <a:solidFill>
+                  <a:srgbClr val="171FE2"/>
+                </a:solidFill>
+                <a:latin typeface="Consolas" panose="020B0609020204030204" pitchFamily="49" charset="0"/>
+              </a:rPr>
+              <a:t>COPY Avvio.java .</a:t>
+            </a:r>
+          </a:p>
+          <a:p>
+            <a:r>
+              <a:rPr lang="it-IT" dirty="0">
+                <a:solidFill>
+                  <a:srgbClr val="171FE2"/>
+                </a:solidFill>
+                <a:latin typeface="Consolas" panose="020B0609020204030204" pitchFamily="49" charset="0"/>
+              </a:rPr>
+              <a:t>RUN </a:t>
+            </a:r>
+            <a:r>
+              <a:rPr lang="it-IT" dirty="0" err="1">
+                <a:solidFill>
+                  <a:srgbClr val="171FE2"/>
+                </a:solidFill>
+                <a:latin typeface="Consolas" panose="020B0609020204030204" pitchFamily="49" charset="0"/>
+              </a:rPr>
+              <a:t>javac</a:t>
+            </a:r>
+            <a:r>
+              <a:rPr lang="it-IT" dirty="0">
+                <a:solidFill>
+                  <a:srgbClr val="171FE2"/>
+                </a:solidFill>
+                <a:latin typeface="Consolas" panose="020B0609020204030204" pitchFamily="49" charset="0"/>
+              </a:rPr>
+              <a:t> Avvio.java </a:t>
+            </a:r>
+            <a:r>
+              <a:rPr lang="it-IT" dirty="0">
+                <a:solidFill>
+                  <a:srgbClr val="00B050"/>
+                </a:solidFill>
+                <a:latin typeface="Consolas" panose="020B0609020204030204" pitchFamily="49" charset="0"/>
+              </a:rPr>
+              <a:t># ottengo il </a:t>
+            </a:r>
+            <a:r>
+              <a:rPr lang="it-IT" dirty="0" err="1">
+                <a:solidFill>
+                  <a:srgbClr val="00B050"/>
+                </a:solidFill>
+                <a:latin typeface="Consolas" panose="020B0609020204030204" pitchFamily="49" charset="0"/>
+              </a:rPr>
+              <a:t>layer</a:t>
+            </a:r>
+            <a:r>
+              <a:rPr lang="it-IT" dirty="0">
+                <a:solidFill>
+                  <a:srgbClr val="00B050"/>
+                </a:solidFill>
+                <a:latin typeface="Consolas" panose="020B0609020204030204" pitchFamily="49" charset="0"/>
+              </a:rPr>
+              <a:t> build/</a:t>
+            </a:r>
+            <a:r>
+              <a:rPr lang="it-IT" dirty="0" err="1">
+                <a:solidFill>
+                  <a:srgbClr val="00B050"/>
+                </a:solidFill>
+                <a:latin typeface="Consolas" panose="020B0609020204030204" pitchFamily="49" charset="0"/>
+              </a:rPr>
+              <a:t>Avvio.class</a:t>
+            </a:r>
+            <a:endParaRPr lang="it-IT" dirty="0">
+              <a:solidFill>
+                <a:srgbClr val="171FE2"/>
+              </a:solidFill>
+              <a:latin typeface="Consolas" panose="020B0609020204030204" pitchFamily="49" charset="0"/>
+            </a:endParaRPr>
+          </a:p>
+          <a:p>
+            <a:r>
+              <a:rPr lang="it-IT" dirty="0">
+                <a:solidFill>
+                  <a:srgbClr val="00B050"/>
+                </a:solidFill>
+                <a:latin typeface="Consolas" panose="020B0609020204030204" pitchFamily="49" charset="0"/>
+              </a:rPr>
+              <a:t># Nello stage 2, ci portiamo dietro solo il </a:t>
+            </a:r>
+            <a:r>
+              <a:rPr lang="it-IT" dirty="0" err="1">
+                <a:solidFill>
+                  <a:srgbClr val="00B050"/>
+                </a:solidFill>
+                <a:latin typeface="Consolas" panose="020B0609020204030204" pitchFamily="49" charset="0"/>
+              </a:rPr>
+              <a:t>layer</a:t>
+            </a:r>
+            <a:r>
+              <a:rPr lang="it-IT" dirty="0">
+                <a:solidFill>
+                  <a:srgbClr val="00B050"/>
+                </a:solidFill>
+                <a:latin typeface="Consolas" panose="020B0609020204030204" pitchFamily="49" charset="0"/>
+              </a:rPr>
+              <a:t> ottenuto</a:t>
+            </a:r>
+          </a:p>
+          <a:p>
+            <a:endParaRPr lang="it-IT" dirty="0">
+              <a:solidFill>
+                <a:srgbClr val="00B050"/>
+              </a:solidFill>
+              <a:latin typeface="Consolas" panose="020B0609020204030204" pitchFamily="49" charset="0"/>
+            </a:endParaRPr>
+          </a:p>
+          <a:p>
+            <a:r>
+              <a:rPr lang="it-IT" dirty="0">
+                <a:solidFill>
+                  <a:srgbClr val="00B050"/>
+                </a:solidFill>
+                <a:latin typeface="Consolas" panose="020B0609020204030204" pitchFamily="49" charset="0"/>
+              </a:rPr>
+              <a:t># STAGE 2: Esecuzione (Il negozio leggero)</a:t>
+            </a:r>
+          </a:p>
+          <a:p>
+            <a:r>
+              <a:rPr lang="it-IT" dirty="0">
+                <a:solidFill>
+                  <a:srgbClr val="171FE2"/>
+                </a:solidFill>
+                <a:latin typeface="Consolas" panose="020B0609020204030204" pitchFamily="49" charset="0"/>
+              </a:rPr>
+              <a:t>FROM </a:t>
+            </a:r>
+            <a:r>
+              <a:rPr lang="it-IT" dirty="0"/>
+              <a:t>eclipse-temurin:17-jre</a:t>
+            </a:r>
+          </a:p>
+          <a:p>
+            <a:r>
+              <a:rPr lang="it-IT" dirty="0">
+                <a:solidFill>
+                  <a:srgbClr val="171FE2"/>
+                </a:solidFill>
+                <a:latin typeface="Consolas" panose="020B0609020204030204" pitchFamily="49" charset="0"/>
+              </a:rPr>
+              <a:t>WORKDIR /app</a:t>
+            </a:r>
+          </a:p>
+          <a:p>
+            <a:r>
+              <a:rPr lang="it-IT" dirty="0">
+                <a:solidFill>
+                  <a:srgbClr val="00B050"/>
+                </a:solidFill>
+                <a:latin typeface="Consolas" panose="020B0609020204030204" pitchFamily="49" charset="0"/>
+              </a:rPr>
+              <a:t># Prendiamo SOLO il file compilato .class dallo stage precedente</a:t>
+            </a:r>
+          </a:p>
+          <a:p>
+            <a:r>
+              <a:rPr lang="it-IT" dirty="0">
+                <a:solidFill>
+                  <a:srgbClr val="171FE2"/>
+                </a:solidFill>
+                <a:latin typeface="Consolas" panose="020B0609020204030204" pitchFamily="49" charset="0"/>
+              </a:rPr>
+              <a:t>COPY --from=build /build/</a:t>
+            </a:r>
+            <a:r>
+              <a:rPr lang="it-IT" dirty="0" err="1">
+                <a:solidFill>
+                  <a:srgbClr val="171FE2"/>
+                </a:solidFill>
+                <a:latin typeface="Consolas" panose="020B0609020204030204" pitchFamily="49" charset="0"/>
+              </a:rPr>
+              <a:t>Avvio.class</a:t>
+            </a:r>
+            <a:r>
+              <a:rPr lang="it-IT" dirty="0">
+                <a:solidFill>
+                  <a:srgbClr val="171FE2"/>
+                </a:solidFill>
+                <a:latin typeface="Consolas" panose="020B0609020204030204" pitchFamily="49" charset="0"/>
+              </a:rPr>
+              <a:t> /app/</a:t>
+            </a:r>
+          </a:p>
+          <a:p>
+            <a:r>
+              <a:rPr lang="it-IT" dirty="0">
+                <a:solidFill>
+                  <a:srgbClr val="171FE2"/>
+                </a:solidFill>
+                <a:latin typeface="Consolas" panose="020B0609020204030204" pitchFamily="49" charset="0"/>
+              </a:rPr>
+              <a:t>CMD ["java", "Avvio"]</a:t>
+            </a:r>
+          </a:p>
+        </p:txBody>
+      </p:sp>
+    </p:spTree>
+    <p:extLst>
+      <p:ext uri="{BB962C8B-B14F-4D97-AF65-F5344CB8AC3E}">
+        <p14:creationId xmlns:p14="http://schemas.microsoft.com/office/powerpoint/2010/main" val="2330303796"/>
+      </p:ext>
+    </p:extLst>
+  </p:cSld>
+  <p:clrMapOvr>
+    <a:masterClrMapping/>
+  </p:clrMapOvr>
+</p:sld>
+</file>
+
+<file path=ppt/slides/slide21.xml><?xml version="1.0" encoding="utf-8"?>
+<p:sld xmlns:a="http://schemas.openxmlformats.org/drawingml/2006/main" xmlns:r="http://schemas.openxmlformats.org/officeDocument/2006/relationships" xmlns:p="http://schemas.openxmlformats.org/presentationml/2006/main">
+  <p:cSld>
+    <p:spTree>
+      <p:nvGrpSpPr>
+        <p:cNvPr id="1" name="">
+          <a:extLst>
+            <a:ext uri="{FF2B5EF4-FFF2-40B4-BE49-F238E27FC236}">
+              <a16:creationId xmlns:a16="http://schemas.microsoft.com/office/drawing/2014/main" id="{32113410-C636-131C-8B27-49E74CF77DAF}"/>
+            </a:ext>
+          </a:extLst>
+        </p:cNvPr>
+        <p:cNvGrpSpPr/>
+        <p:nvPr/>
+      </p:nvGrpSpPr>
+      <p:grpSpPr>
+        <a:xfrm>
+          <a:off x="0" y="0"/>
+          <a:ext cx="0" cy="0"/>
+          <a:chOff x="0" y="0"/>
+          <a:chExt cx="0" cy="0"/>
+        </a:xfrm>
+      </p:grpSpPr>
+      <p:sp>
+        <p:nvSpPr>
+          <p:cNvPr id="3" name="Contenuto della lezione">
+            <a:extLst>
+              <a:ext uri="{FF2B5EF4-FFF2-40B4-BE49-F238E27FC236}">
+                <a16:creationId xmlns:a16="http://schemas.microsoft.com/office/drawing/2014/main" id="{ED88E4CC-0A67-6092-721A-BE42313074C9}"/>
+              </a:ext>
+            </a:extLst>
+          </p:cNvPr>
+          <p:cNvSpPr>
+            <a:spLocks noGrp="1"/>
+          </p:cNvSpPr>
+          <p:nvPr>
+            <p:ph idx="1"/>
+          </p:nvPr>
+        </p:nvSpPr>
+        <p:spPr>
+          <a:xfrm>
+            <a:off x="1415438" y="1349192"/>
+            <a:ext cx="9557362" cy="4803369"/>
+          </a:xfrm>
+        </p:spPr>
+        <p:txBody>
+          <a:bodyPr/>
+          <a:lstStyle/>
+          <a:p>
+            <a:r>
+              <a:rPr lang="it-IT" b="1" dirty="0"/>
+              <a:t>PARTE 3: L'Ispezione dei pesi</a:t>
+            </a:r>
+          </a:p>
+          <a:p>
+            <a:r>
+              <a:rPr lang="it-IT" dirty="0"/>
+              <a:t>Eseguiamo il comando di controllo:</a:t>
+            </a:r>
+          </a:p>
+          <a:p>
+            <a:r>
+              <a:rPr lang="it-IT" dirty="0" err="1">
+                <a:solidFill>
+                  <a:srgbClr val="171FE2"/>
+                </a:solidFill>
+                <a:latin typeface="Consolas" panose="020B0609020204030204" pitchFamily="49" charset="0"/>
+              </a:rPr>
+              <a:t>docker</a:t>
+            </a:r>
+            <a:r>
+              <a:rPr lang="it-IT" dirty="0">
+                <a:solidFill>
+                  <a:srgbClr val="171FE2"/>
+                </a:solidFill>
+                <a:latin typeface="Consolas" panose="020B0609020204030204" pitchFamily="49" charset="0"/>
+              </a:rPr>
+              <a:t> images | </a:t>
+            </a:r>
+            <a:r>
+              <a:rPr lang="it-IT" dirty="0" err="1">
+                <a:solidFill>
+                  <a:srgbClr val="171FE2"/>
+                </a:solidFill>
+                <a:latin typeface="Consolas" panose="020B0609020204030204" pitchFamily="49" charset="0"/>
+              </a:rPr>
+              <a:t>select-string</a:t>
+            </a:r>
+            <a:r>
+              <a:rPr lang="it-IT" dirty="0">
+                <a:solidFill>
+                  <a:srgbClr val="171FE2"/>
+                </a:solidFill>
+                <a:latin typeface="Consolas" panose="020B0609020204030204" pitchFamily="49" charset="0"/>
+              </a:rPr>
+              <a:t> "app-java"</a:t>
+            </a:r>
+          </a:p>
+          <a:p>
+            <a:endParaRPr lang="it-IT" dirty="0">
+              <a:solidFill>
+                <a:srgbClr val="171FE2"/>
+              </a:solidFill>
+              <a:latin typeface="Consolas" panose="020B0609020204030204" pitchFamily="49" charset="0"/>
+            </a:endParaRPr>
+          </a:p>
+          <a:p>
+            <a:endParaRPr lang="it-IT" dirty="0">
+              <a:solidFill>
+                <a:srgbClr val="171FE2"/>
+              </a:solidFill>
+              <a:latin typeface="Consolas" panose="020B0609020204030204" pitchFamily="49" charset="0"/>
+            </a:endParaRPr>
+          </a:p>
+          <a:p>
+            <a:endParaRPr lang="it-IT" dirty="0">
+              <a:solidFill>
+                <a:srgbClr val="171FE2"/>
+              </a:solidFill>
+              <a:latin typeface="Consolas" panose="020B0609020204030204" pitchFamily="49" charset="0"/>
+            </a:endParaRPr>
+          </a:p>
+          <a:p>
+            <a:endParaRPr lang="it-IT" dirty="0">
+              <a:solidFill>
+                <a:srgbClr val="171FE2"/>
+              </a:solidFill>
+              <a:latin typeface="Consolas" panose="020B0609020204030204" pitchFamily="49" charset="0"/>
+            </a:endParaRPr>
+          </a:p>
+          <a:p>
+            <a:endParaRPr lang="it-IT" dirty="0">
+              <a:solidFill>
+                <a:srgbClr val="171FE2"/>
+              </a:solidFill>
+              <a:latin typeface="Consolas" panose="020B0609020204030204" pitchFamily="49" charset="0"/>
+            </a:endParaRPr>
+          </a:p>
+          <a:p>
+            <a:endParaRPr lang="it-IT" dirty="0">
+              <a:solidFill>
+                <a:srgbClr val="171FE2"/>
+              </a:solidFill>
+              <a:latin typeface="Consolas" panose="020B0609020204030204" pitchFamily="49" charset="0"/>
+            </a:endParaRPr>
+          </a:p>
+          <a:p>
+            <a:endParaRPr lang="it-IT" dirty="0"/>
+          </a:p>
+          <a:p>
+            <a:r>
+              <a:rPr lang="it-IT" dirty="0"/>
+              <a:t>Facciamo girare il container leggero per verificare che funzioni:</a:t>
+            </a:r>
+          </a:p>
+          <a:p>
+            <a:r>
+              <a:rPr lang="sv-SE" dirty="0">
+                <a:solidFill>
+                  <a:srgbClr val="171FE2"/>
+                </a:solidFill>
+                <a:latin typeface="Consolas" panose="020B0609020204030204" pitchFamily="49" charset="0"/>
+              </a:rPr>
+              <a:t>docker run --rm app-java:leggera</a:t>
+            </a:r>
+            <a:endParaRPr lang="it-IT" dirty="0">
+              <a:solidFill>
+                <a:srgbClr val="171FE2"/>
+              </a:solidFill>
+              <a:latin typeface="Consolas" panose="020B0609020204030204" pitchFamily="49" charset="0"/>
+            </a:endParaRPr>
+          </a:p>
+          <a:p>
+            <a:r>
+              <a:rPr lang="it-IT" dirty="0"/>
+              <a:t>A schermo apparirà la scritta: "Applicazione Enterprise Java avviata correttamente dentro Docker!" e il container si auto-eliminerà (--</a:t>
+            </a:r>
+            <a:r>
+              <a:rPr lang="it-IT" dirty="0" err="1"/>
+              <a:t>rm</a:t>
+            </a:r>
+            <a:r>
+              <a:rPr lang="it-IT" dirty="0"/>
+              <a:t>) subito dopo aver terminato il lavoro, lasciando il PC pulito.</a:t>
+            </a:r>
+          </a:p>
+          <a:p>
+            <a:endParaRPr lang="it-IT" dirty="0">
+              <a:solidFill>
+                <a:srgbClr val="171FE2"/>
+              </a:solidFill>
+              <a:latin typeface="Consolas" panose="020B0609020204030204" pitchFamily="49" charset="0"/>
+            </a:endParaRPr>
+          </a:p>
+          <a:p>
+            <a:endParaRPr lang="it-IT" dirty="0">
+              <a:solidFill>
+                <a:srgbClr val="171FE2"/>
+              </a:solidFill>
+              <a:latin typeface="Consolas" panose="020B0609020204030204" pitchFamily="49" charset="0"/>
+            </a:endParaRPr>
+          </a:p>
+        </p:txBody>
+      </p:sp>
+      <p:pic>
+        <p:nvPicPr>
+          <p:cNvPr id="4" name="Immagine 3">
+            <a:extLst>
+              <a:ext uri="{FF2B5EF4-FFF2-40B4-BE49-F238E27FC236}">
+                <a16:creationId xmlns:a16="http://schemas.microsoft.com/office/drawing/2014/main" id="{A4A58602-9362-EBF5-19B8-D9FB9B527CDA}"/>
+              </a:ext>
+            </a:extLst>
+          </p:cNvPr>
+          <p:cNvPicPr>
+            <a:picLocks noChangeAspect="1"/>
+          </p:cNvPicPr>
+          <p:nvPr/>
+        </p:nvPicPr>
+        <p:blipFill>
+          <a:blip r:embed="rId2"/>
+          <a:stretch>
+            <a:fillRect/>
+          </a:stretch>
+        </p:blipFill>
+        <p:spPr>
+          <a:xfrm>
+            <a:off x="1529919" y="2681076"/>
+            <a:ext cx="3544217" cy="1495848"/>
+          </a:xfrm>
+          <a:prstGeom prst="rect">
+            <a:avLst/>
+          </a:prstGeom>
+        </p:spPr>
+      </p:pic>
+      <p:sp>
+        <p:nvSpPr>
+          <p:cNvPr id="6" name="CasellaDiTesto 5">
+            <a:extLst>
+              <a:ext uri="{FF2B5EF4-FFF2-40B4-BE49-F238E27FC236}">
+                <a16:creationId xmlns:a16="http://schemas.microsoft.com/office/drawing/2014/main" id="{10424D3B-A3A6-C2AC-FC5F-CB3366CB62E5}"/>
+              </a:ext>
+            </a:extLst>
+          </p:cNvPr>
+          <p:cNvSpPr txBox="1"/>
+          <p:nvPr/>
+        </p:nvSpPr>
+        <p:spPr>
+          <a:xfrm>
+            <a:off x="5188616" y="2474235"/>
+            <a:ext cx="6848157" cy="2862322"/>
+          </a:xfrm>
+          <a:prstGeom prst="rect">
+            <a:avLst/>
+          </a:prstGeom>
+          <a:noFill/>
+        </p:spPr>
+        <p:txBody>
+          <a:bodyPr wrap="none" rtlCol="0">
+            <a:spAutoFit/>
+          </a:bodyPr>
+          <a:lstStyle/>
+          <a:p>
+            <a:r>
+              <a:rPr lang="it-IT" dirty="0"/>
+              <a:t>Docker non duplica i </a:t>
+            </a:r>
+            <a:r>
+              <a:rPr lang="it-IT" dirty="0" err="1"/>
+              <a:t>layer</a:t>
+            </a:r>
+            <a:r>
+              <a:rPr lang="it-IT" dirty="0"/>
+              <a:t> uguali.</a:t>
+            </a:r>
+          </a:p>
+          <a:p>
+            <a:r>
+              <a:rPr lang="it-IT" dirty="0"/>
+              <a:t>Quindi:</a:t>
+            </a:r>
+          </a:p>
+          <a:p>
+            <a:r>
+              <a:rPr lang="it-IT" b="1" dirty="0"/>
+              <a:t>425 MB</a:t>
+            </a:r>
+            <a:r>
+              <a:rPr lang="it-IT" dirty="0"/>
+              <a:t> = dimensione logica dell'immagine leggera. </a:t>
+            </a:r>
+          </a:p>
+          <a:p>
+            <a:r>
+              <a:rPr lang="it-IT" b="1" dirty="0"/>
+              <a:t>109 MB</a:t>
+            </a:r>
+            <a:r>
+              <a:rPr lang="it-IT" dirty="0"/>
+              <a:t> = spazio aggiuntivo occupato sul disco perché molti </a:t>
+            </a:r>
+          </a:p>
+          <a:p>
+            <a:r>
+              <a:rPr lang="it-IT" dirty="0" err="1"/>
+              <a:t>layer</a:t>
+            </a:r>
+            <a:r>
+              <a:rPr lang="it-IT" dirty="0"/>
+              <a:t> sono condivisi con altre immagini. </a:t>
+            </a:r>
+          </a:p>
+          <a:p>
+            <a:r>
+              <a:rPr lang="it-IT" dirty="0"/>
+              <a:t>Analogamente:</a:t>
+            </a:r>
+          </a:p>
+          <a:p>
+            <a:r>
+              <a:rPr lang="it-IT" b="1" dirty="0"/>
+              <a:t>1.25 GB</a:t>
+            </a:r>
+            <a:r>
+              <a:rPr lang="it-IT" dirty="0"/>
+              <a:t> = dimensione logica dell'immagine pesante. </a:t>
+            </a:r>
+          </a:p>
+          <a:p>
+            <a:r>
+              <a:rPr lang="it-IT" b="1" dirty="0"/>
+              <a:t>428 MB</a:t>
+            </a:r>
+            <a:r>
+              <a:rPr lang="it-IT" dirty="0"/>
+              <a:t> = spazio unico che quella immagine aggiunge rispetto ai </a:t>
+            </a:r>
+            <a:r>
+              <a:rPr lang="it-IT" dirty="0" err="1"/>
+              <a:t>layer</a:t>
+            </a:r>
+            <a:r>
+              <a:rPr lang="it-IT" dirty="0"/>
+              <a:t> </a:t>
+            </a:r>
+          </a:p>
+          <a:p>
+            <a:r>
+              <a:rPr lang="it-IT" dirty="0"/>
+              <a:t>già presenti.</a:t>
+            </a:r>
+          </a:p>
+          <a:p>
+            <a:endParaRPr lang="it-IT" dirty="0"/>
+          </a:p>
+        </p:txBody>
+      </p:sp>
+    </p:spTree>
+    <p:extLst>
+      <p:ext uri="{BB962C8B-B14F-4D97-AF65-F5344CB8AC3E}">
+        <p14:creationId xmlns:p14="http://schemas.microsoft.com/office/powerpoint/2010/main" val="1446357902"/>
+      </p:ext>
+    </p:extLst>
+  </p:cSld>
+  <p:clrMapOvr>
+    <a:masterClrMapping/>
+  </p:clrMapOvr>
+</p:sld>
+</file>
+
+<file path=ppt/slides/slide22.xml><?xml version="1.0" encoding="utf-8"?>
+<p:sld xmlns:a="http://schemas.openxmlformats.org/drawingml/2006/main" xmlns:r="http://schemas.openxmlformats.org/officeDocument/2006/relationships" xmlns:p="http://schemas.openxmlformats.org/presentationml/2006/main">
+  <p:cSld>
+    <p:spTree>
+      <p:nvGrpSpPr>
+        <p:cNvPr id="1" name="">
+          <a:extLst>
+            <a:ext uri="{FF2B5EF4-FFF2-40B4-BE49-F238E27FC236}">
+              <a16:creationId xmlns:a16="http://schemas.microsoft.com/office/drawing/2014/main" id="{4F01B70F-6646-69DD-B0EC-CF090F782B05}"/>
+            </a:ext>
+          </a:extLst>
+        </p:cNvPr>
+        <p:cNvGrpSpPr/>
+        <p:nvPr/>
+      </p:nvGrpSpPr>
+      <p:grpSpPr>
+        <a:xfrm>
+          <a:off x="0" y="0"/>
+          <a:ext cx="0" cy="0"/>
+          <a:chOff x="0" y="0"/>
+          <a:chExt cx="0" cy="0"/>
+        </a:xfrm>
+      </p:grpSpPr>
+      <p:sp>
+        <p:nvSpPr>
+          <p:cNvPr id="3" name="Contenuto della lezione">
+            <a:extLst>
+              <a:ext uri="{FF2B5EF4-FFF2-40B4-BE49-F238E27FC236}">
+                <a16:creationId xmlns:a16="http://schemas.microsoft.com/office/drawing/2014/main" id="{7EF51540-EAF1-1E74-5AA3-17F204C1C570}"/>
+              </a:ext>
+            </a:extLst>
+          </p:cNvPr>
+          <p:cNvSpPr>
+            <a:spLocks noGrp="1"/>
+          </p:cNvSpPr>
+          <p:nvPr>
+            <p:ph idx="1"/>
+          </p:nvPr>
+        </p:nvSpPr>
+        <p:spPr>
+          <a:xfrm>
+            <a:off x="1415438" y="1349192"/>
+            <a:ext cx="9557362" cy="4803369"/>
+          </a:xfrm>
+        </p:spPr>
+        <p:txBody>
+          <a:bodyPr/>
+          <a:lstStyle/>
+          <a:p>
+            <a:r>
+              <a:rPr lang="it-IT" dirty="0"/>
+              <a:t>Per vedere i dettagli dell’immagine leggera:</a:t>
+            </a:r>
+          </a:p>
+          <a:p>
+            <a:r>
+              <a:rPr lang="it-IT" dirty="0" err="1">
+                <a:solidFill>
+                  <a:srgbClr val="171FE2"/>
+                </a:solidFill>
+                <a:latin typeface="Consolas" panose="020B0609020204030204" pitchFamily="49" charset="0"/>
+              </a:rPr>
+              <a:t>docker</a:t>
+            </a:r>
+            <a:r>
+              <a:rPr lang="it-IT" dirty="0">
+                <a:solidFill>
+                  <a:srgbClr val="171FE2"/>
+                </a:solidFill>
+                <a:latin typeface="Consolas" panose="020B0609020204030204" pitchFamily="49" charset="0"/>
+              </a:rPr>
+              <a:t> image </a:t>
+            </a:r>
+            <a:r>
+              <a:rPr lang="it-IT" dirty="0" err="1">
+                <a:solidFill>
+                  <a:srgbClr val="171FE2"/>
+                </a:solidFill>
+                <a:latin typeface="Consolas" panose="020B0609020204030204" pitchFamily="49" charset="0"/>
+              </a:rPr>
+              <a:t>inspect</a:t>
+            </a:r>
+            <a:r>
+              <a:rPr lang="it-IT" dirty="0">
+                <a:solidFill>
+                  <a:srgbClr val="171FE2"/>
+                </a:solidFill>
+                <a:latin typeface="Consolas" panose="020B0609020204030204" pitchFamily="49" charset="0"/>
+              </a:rPr>
+              <a:t> </a:t>
+            </a:r>
+            <a:r>
+              <a:rPr lang="it-IT" dirty="0" err="1">
+                <a:solidFill>
+                  <a:srgbClr val="171FE2"/>
+                </a:solidFill>
+                <a:latin typeface="Consolas" panose="020B0609020204030204" pitchFamily="49" charset="0"/>
+              </a:rPr>
+              <a:t>app-java:leggera</a:t>
+            </a:r>
+            <a:endParaRPr lang="it-IT" dirty="0">
+              <a:solidFill>
+                <a:srgbClr val="171FE2"/>
+              </a:solidFill>
+              <a:latin typeface="Consolas" panose="020B0609020204030204" pitchFamily="49" charset="0"/>
+            </a:endParaRPr>
+          </a:p>
+          <a:p>
+            <a:r>
+              <a:rPr lang="it-IT" dirty="0"/>
+              <a:t>oppure:</a:t>
+            </a:r>
+          </a:p>
+          <a:p>
+            <a:r>
+              <a:rPr lang="it-IT" dirty="0" err="1">
+                <a:solidFill>
+                  <a:srgbClr val="171FE2"/>
+                </a:solidFill>
+                <a:latin typeface="Consolas" panose="020B0609020204030204" pitchFamily="49" charset="0"/>
+              </a:rPr>
+              <a:t>docker</a:t>
+            </a:r>
+            <a:r>
+              <a:rPr lang="it-IT" dirty="0">
+                <a:solidFill>
+                  <a:srgbClr val="171FE2"/>
+                </a:solidFill>
+                <a:latin typeface="Consolas" panose="020B0609020204030204" pitchFamily="49" charset="0"/>
+              </a:rPr>
+              <a:t> system </a:t>
+            </a:r>
+            <a:r>
+              <a:rPr lang="it-IT" dirty="0" err="1">
+                <a:solidFill>
+                  <a:srgbClr val="171FE2"/>
+                </a:solidFill>
+                <a:latin typeface="Consolas" panose="020B0609020204030204" pitchFamily="49" charset="0"/>
+              </a:rPr>
+              <a:t>df</a:t>
+            </a:r>
+            <a:r>
+              <a:rPr lang="it-IT" dirty="0">
+                <a:solidFill>
+                  <a:srgbClr val="171FE2"/>
+                </a:solidFill>
+                <a:latin typeface="Consolas" panose="020B0609020204030204" pitchFamily="49" charset="0"/>
+              </a:rPr>
+              <a:t> –v</a:t>
+            </a:r>
+          </a:p>
+          <a:p>
+            <a:r>
+              <a:rPr lang="it-IT" dirty="0"/>
+              <a:t>Quest'ultimo è molto interessante perché mostra:</a:t>
+            </a:r>
+          </a:p>
+          <a:p>
+            <a:pPr marL="285750" indent="-285750">
+              <a:buFont typeface="Arial" panose="020B0604020202020204" pitchFamily="34" charset="0"/>
+              <a:buChar char="•"/>
+            </a:pPr>
+            <a:r>
+              <a:rPr lang="it-IT" dirty="0"/>
+              <a:t>dimensione totale dell'immagine; </a:t>
+            </a:r>
+          </a:p>
+          <a:p>
+            <a:pPr marL="285750" indent="-285750">
+              <a:buFont typeface="Arial" panose="020B0604020202020204" pitchFamily="34" charset="0"/>
+              <a:buChar char="•"/>
+            </a:pPr>
+            <a:r>
+              <a:rPr lang="it-IT" dirty="0"/>
+              <a:t>spazio condiviso; </a:t>
+            </a:r>
+          </a:p>
+          <a:p>
+            <a:pPr marL="285750" indent="-285750">
+              <a:buFont typeface="Arial" panose="020B0604020202020204" pitchFamily="34" charset="0"/>
+              <a:buChar char="•"/>
+            </a:pPr>
+            <a:r>
+              <a:rPr lang="it-IT" dirty="0"/>
+              <a:t>spazio unico; </a:t>
+            </a:r>
+          </a:p>
+          <a:p>
+            <a:pPr marL="285750" indent="-285750">
+              <a:buFont typeface="Arial" panose="020B0604020202020204" pitchFamily="34" charset="0"/>
+              <a:buChar char="•"/>
+            </a:pPr>
+            <a:r>
+              <a:rPr lang="it-IT" dirty="0"/>
+              <a:t>cache di build. </a:t>
+            </a:r>
+          </a:p>
+          <a:p>
+            <a:r>
+              <a:rPr lang="it-IT" dirty="0"/>
+              <a:t>È il comando migliore per capire perché due immagini apparentemente enormi occupano molto meno spazio reale sul disco.</a:t>
+            </a:r>
+          </a:p>
+          <a:p>
+            <a:endParaRPr lang="it-IT" dirty="0">
+              <a:solidFill>
+                <a:srgbClr val="171FE2"/>
+              </a:solidFill>
+              <a:latin typeface="Consolas" panose="020B0609020204030204" pitchFamily="49" charset="0"/>
+            </a:endParaRPr>
+          </a:p>
+          <a:p>
+            <a:endParaRPr lang="it-IT" dirty="0">
+              <a:solidFill>
+                <a:srgbClr val="171FE2"/>
+              </a:solidFill>
+              <a:latin typeface="Consolas" panose="020B0609020204030204" pitchFamily="49" charset="0"/>
+            </a:endParaRPr>
+          </a:p>
+        </p:txBody>
+      </p:sp>
+    </p:spTree>
+    <p:extLst>
+      <p:ext uri="{BB962C8B-B14F-4D97-AF65-F5344CB8AC3E}">
+        <p14:creationId xmlns:p14="http://schemas.microsoft.com/office/powerpoint/2010/main" val="3768136940"/>
+      </p:ext>
+    </p:extLst>
+  </p:cSld>
+  <p:clrMapOvr>
+    <a:masterClrMapping/>
+  </p:clrMapOvr>
+</p:sld>
+</file>
+
+<file path=ppt/slides/slide23.xml><?xml version="1.0" encoding="utf-8"?>
+<p:sld xmlns:a="http://schemas.openxmlformats.org/drawingml/2006/main" xmlns:r="http://schemas.openxmlformats.org/officeDocument/2006/relationships" xmlns:p="http://schemas.openxmlformats.org/presentationml/2006/main">
+  <p:cSld>
+    <p:spTree>
+      <p:nvGrpSpPr>
+        <p:cNvPr id="1" name="">
+          <a:extLst>
+            <a:ext uri="{FF2B5EF4-FFF2-40B4-BE49-F238E27FC236}">
+              <a16:creationId xmlns:a16="http://schemas.microsoft.com/office/drawing/2014/main" id="{AF4D1C76-4DDD-4D60-9D6E-617894A69358}"/>
+            </a:ext>
+          </a:extLst>
+        </p:cNvPr>
+        <p:cNvGrpSpPr/>
+        <p:nvPr/>
+      </p:nvGrpSpPr>
+      <p:grpSpPr>
+        <a:xfrm>
+          <a:off x="0" y="0"/>
+          <a:ext cx="0" cy="0"/>
+          <a:chOff x="0" y="0"/>
+          <a:chExt cx="0" cy="0"/>
+        </a:xfrm>
+      </p:grpSpPr>
+      <p:sp>
+        <p:nvSpPr>
+          <p:cNvPr id="3" name="Contenuto della lezione">
+            <a:extLst>
+              <a:ext uri="{FF2B5EF4-FFF2-40B4-BE49-F238E27FC236}">
+                <a16:creationId xmlns:a16="http://schemas.microsoft.com/office/drawing/2014/main" id="{1A9A86DC-CDD5-7FC2-1886-1C571E57B415}"/>
+              </a:ext>
+            </a:extLst>
+          </p:cNvPr>
+          <p:cNvSpPr>
+            <a:spLocks noGrp="1"/>
+          </p:cNvSpPr>
+          <p:nvPr>
+            <p:ph idx="1"/>
+          </p:nvPr>
+        </p:nvSpPr>
+        <p:spPr>
+          <a:xfrm>
+            <a:off x="1415438" y="1349192"/>
+            <a:ext cx="9557362" cy="4803369"/>
+          </a:xfrm>
+        </p:spPr>
+        <p:txBody>
+          <a:bodyPr/>
+          <a:lstStyle/>
+          <a:p>
+            <a:r>
+              <a:rPr lang="it-IT" dirty="0"/>
+              <a:t>La </a:t>
+            </a:r>
+            <a:r>
+              <a:rPr lang="it-IT" b="1" dirty="0"/>
+              <a:t>build cache</a:t>
+            </a:r>
+            <a:r>
+              <a:rPr lang="it-IT" dirty="0"/>
+              <a:t> di Docker è un insieme di </a:t>
+            </a:r>
+            <a:r>
+              <a:rPr lang="it-IT" dirty="0" err="1"/>
+              <a:t>layer</a:t>
+            </a:r>
+            <a:r>
+              <a:rPr lang="it-IT" dirty="0"/>
+              <a:t> che Docker conserva per evitare di rifare lavoro già fatto durante le build successive.</a:t>
+            </a:r>
+          </a:p>
+          <a:p>
+            <a:r>
+              <a:rPr lang="it-IT" dirty="0"/>
+              <a:t>Prendiamo questo </a:t>
+            </a:r>
+            <a:r>
+              <a:rPr lang="it-IT" dirty="0" err="1"/>
+              <a:t>Dockerfile</a:t>
+            </a:r>
+            <a:r>
+              <a:rPr lang="it-IT" dirty="0"/>
+              <a:t>:</a:t>
+            </a:r>
+          </a:p>
+          <a:p>
+            <a:r>
+              <a:rPr lang="it-IT" sz="1400" dirty="0">
+                <a:solidFill>
+                  <a:srgbClr val="171FE2"/>
+                </a:solidFill>
+                <a:latin typeface="Consolas" panose="020B0609020204030204" pitchFamily="49" charset="0"/>
+              </a:rPr>
+              <a:t>FROM eclipse-temurin:17-jdk</a:t>
+            </a:r>
+          </a:p>
+          <a:p>
+            <a:r>
+              <a:rPr lang="it-IT" sz="1400" dirty="0">
+                <a:solidFill>
+                  <a:srgbClr val="171FE2"/>
+                </a:solidFill>
+                <a:latin typeface="Consolas" panose="020B0609020204030204" pitchFamily="49" charset="0"/>
+              </a:rPr>
+              <a:t>WORKDIR /app</a:t>
+            </a:r>
+          </a:p>
+          <a:p>
+            <a:r>
+              <a:rPr lang="it-IT" sz="1400" dirty="0">
+                <a:solidFill>
+                  <a:srgbClr val="171FE2"/>
+                </a:solidFill>
+                <a:latin typeface="Consolas" panose="020B0609020204030204" pitchFamily="49" charset="0"/>
+              </a:rPr>
+              <a:t>COPY Avvio.java .</a:t>
+            </a:r>
+          </a:p>
+          <a:p>
+            <a:r>
+              <a:rPr lang="it-IT" sz="1400" dirty="0">
+                <a:solidFill>
+                  <a:srgbClr val="171FE2"/>
+                </a:solidFill>
+                <a:latin typeface="Consolas" panose="020B0609020204030204" pitchFamily="49" charset="0"/>
+              </a:rPr>
+              <a:t>RUN </a:t>
+            </a:r>
+            <a:r>
+              <a:rPr lang="it-IT" sz="1400" dirty="0" err="1">
+                <a:solidFill>
+                  <a:srgbClr val="171FE2"/>
+                </a:solidFill>
+                <a:latin typeface="Consolas" panose="020B0609020204030204" pitchFamily="49" charset="0"/>
+              </a:rPr>
+              <a:t>javac</a:t>
+            </a:r>
+            <a:r>
+              <a:rPr lang="it-IT" sz="1400" dirty="0">
+                <a:solidFill>
+                  <a:srgbClr val="171FE2"/>
+                </a:solidFill>
+                <a:latin typeface="Consolas" panose="020B0609020204030204" pitchFamily="49" charset="0"/>
+              </a:rPr>
+              <a:t> Avvio.java</a:t>
+            </a:r>
+          </a:p>
+          <a:p>
+            <a:r>
+              <a:rPr lang="it-IT" sz="1400" dirty="0">
+                <a:solidFill>
+                  <a:srgbClr val="171FE2"/>
+                </a:solidFill>
+                <a:latin typeface="Consolas" panose="020B0609020204030204" pitchFamily="49" charset="0"/>
+              </a:rPr>
+              <a:t>CMD ["java", "Avvio"]</a:t>
+            </a:r>
+          </a:p>
+          <a:p>
+            <a:r>
+              <a:rPr lang="it-IT" dirty="0"/>
+              <a:t>Quando eseguiamo: </a:t>
+            </a:r>
+            <a:r>
+              <a:rPr lang="it-IT" dirty="0" err="1">
+                <a:solidFill>
+                  <a:srgbClr val="171FE2"/>
+                </a:solidFill>
+                <a:latin typeface="Consolas" panose="020B0609020204030204" pitchFamily="49" charset="0"/>
+              </a:rPr>
+              <a:t>docker</a:t>
+            </a:r>
+            <a:r>
+              <a:rPr lang="it-IT" dirty="0">
+                <a:solidFill>
+                  <a:srgbClr val="171FE2"/>
+                </a:solidFill>
+                <a:latin typeface="Consolas" panose="020B0609020204030204" pitchFamily="49" charset="0"/>
+              </a:rPr>
+              <a:t> build -t app-java .</a:t>
+            </a:r>
+          </a:p>
+          <a:p>
+            <a:r>
+              <a:rPr lang="it-IT" dirty="0"/>
+              <a:t>e li salva nella cache.</a:t>
+            </a:r>
+          </a:p>
+          <a:p>
+            <a:r>
+              <a:rPr lang="it-IT" dirty="0"/>
+              <a:t>Se eseguiamo una seconda build con lo stesso comando senza modificare nulla, Docker vede che: il </a:t>
+            </a:r>
+            <a:r>
+              <a:rPr lang="it-IT" dirty="0" err="1"/>
+              <a:t>Dockerfile</a:t>
+            </a:r>
+            <a:r>
+              <a:rPr lang="it-IT" dirty="0"/>
+              <a:t> è uguale; Avvio.java è uguale; e riutilizza i </a:t>
+            </a:r>
+            <a:r>
+              <a:rPr lang="it-IT" dirty="0" err="1"/>
+              <a:t>layer</a:t>
+            </a:r>
+            <a:r>
+              <a:rPr lang="it-IT" dirty="0"/>
+              <a:t> già costruiti.</a:t>
+            </a:r>
+          </a:p>
+          <a:p>
+            <a:r>
+              <a:rPr lang="it-IT" dirty="0"/>
+              <a:t>Vedremo messaggi tipo:</a:t>
+            </a:r>
+          </a:p>
+          <a:p>
+            <a:r>
+              <a:rPr lang="it-IT" sz="1200" dirty="0">
+                <a:solidFill>
+                  <a:srgbClr val="171FE2"/>
+                </a:solidFill>
+                <a:latin typeface="Consolas" panose="020B0609020204030204" pitchFamily="49" charset="0"/>
+              </a:rPr>
+              <a:t>CACHED [2/4] WORKDIR /app</a:t>
+            </a:r>
+          </a:p>
+          <a:p>
+            <a:r>
+              <a:rPr lang="it-IT" sz="1200" dirty="0">
+                <a:solidFill>
+                  <a:srgbClr val="171FE2"/>
+                </a:solidFill>
+                <a:latin typeface="Consolas" panose="020B0609020204030204" pitchFamily="49" charset="0"/>
+              </a:rPr>
+              <a:t>CACHED [3/4] COPY Avvio.java .</a:t>
+            </a:r>
+          </a:p>
+          <a:p>
+            <a:r>
+              <a:rPr lang="it-IT" sz="1200" dirty="0">
+                <a:solidFill>
+                  <a:srgbClr val="171FE2"/>
+                </a:solidFill>
+                <a:latin typeface="Consolas" panose="020B0609020204030204" pitchFamily="49" charset="0"/>
+              </a:rPr>
+              <a:t>CACHED [4/4] RUN </a:t>
+            </a:r>
+            <a:r>
+              <a:rPr lang="it-IT" sz="1200" dirty="0" err="1">
+                <a:solidFill>
+                  <a:srgbClr val="171FE2"/>
+                </a:solidFill>
+                <a:latin typeface="Consolas" panose="020B0609020204030204" pitchFamily="49" charset="0"/>
+              </a:rPr>
+              <a:t>javac</a:t>
+            </a:r>
+            <a:r>
+              <a:rPr lang="it-IT" sz="1200" dirty="0">
+                <a:solidFill>
+                  <a:srgbClr val="171FE2"/>
+                </a:solidFill>
+                <a:latin typeface="Consolas" panose="020B0609020204030204" pitchFamily="49" charset="0"/>
+              </a:rPr>
+              <a:t> Avvio.java</a:t>
+            </a:r>
+          </a:p>
+          <a:p>
+            <a:r>
+              <a:rPr lang="it-IT" sz="1200" dirty="0"/>
+              <a:t>La build durerà pochi istanti.</a:t>
+            </a:r>
+            <a:endParaRPr lang="it-IT" sz="1200" dirty="0">
+              <a:solidFill>
+                <a:srgbClr val="171FE2"/>
+              </a:solidFill>
+              <a:latin typeface="Consolas" panose="020B0609020204030204" pitchFamily="49" charset="0"/>
+            </a:endParaRPr>
+          </a:p>
+        </p:txBody>
+      </p:sp>
+    </p:spTree>
+    <p:extLst>
+      <p:ext uri="{BB962C8B-B14F-4D97-AF65-F5344CB8AC3E}">
+        <p14:creationId xmlns:p14="http://schemas.microsoft.com/office/powerpoint/2010/main" val="4261343024"/>
+      </p:ext>
+    </p:extLst>
+  </p:cSld>
+  <p:clrMapOvr>
+    <a:masterClrMapping/>
+  </p:clrMapOvr>
+</p:sld>
+</file>
+
+<file path=ppt/slides/slide24.xml><?xml version="1.0" encoding="utf-8"?>
+<p:sld xmlns:a="http://schemas.openxmlformats.org/drawingml/2006/main" xmlns:r="http://schemas.openxmlformats.org/officeDocument/2006/relationships" xmlns:p="http://schemas.openxmlformats.org/presentationml/2006/main">
+  <p:cSld>
+    <p:spTree>
+      <p:nvGrpSpPr>
+        <p:cNvPr id="1" name="">
+          <a:extLst>
+            <a:ext uri="{FF2B5EF4-FFF2-40B4-BE49-F238E27FC236}">
+              <a16:creationId xmlns:a16="http://schemas.microsoft.com/office/drawing/2014/main" id="{0F7A2975-E353-DD33-F4A3-86B0A7831F78}"/>
+            </a:ext>
+          </a:extLst>
+        </p:cNvPr>
+        <p:cNvGrpSpPr/>
+        <p:nvPr/>
+      </p:nvGrpSpPr>
+      <p:grpSpPr>
+        <a:xfrm>
+          <a:off x="0" y="0"/>
+          <a:ext cx="0" cy="0"/>
+          <a:chOff x="0" y="0"/>
+          <a:chExt cx="0" cy="0"/>
+        </a:xfrm>
+      </p:grpSpPr>
+      <p:sp>
+        <p:nvSpPr>
+          <p:cNvPr id="3" name="Contenuto della lezione">
+            <a:extLst>
+              <a:ext uri="{FF2B5EF4-FFF2-40B4-BE49-F238E27FC236}">
+                <a16:creationId xmlns:a16="http://schemas.microsoft.com/office/drawing/2014/main" id="{0BC3C842-22FC-2A4D-512E-9C9E2E083305}"/>
+              </a:ext>
+            </a:extLst>
+          </p:cNvPr>
+          <p:cNvSpPr>
+            <a:spLocks noGrp="1"/>
+          </p:cNvSpPr>
+          <p:nvPr>
+            <p:ph idx="1"/>
+          </p:nvPr>
+        </p:nvSpPr>
+        <p:spPr>
+          <a:xfrm>
+            <a:off x="116311" y="913015"/>
+            <a:ext cx="5347312" cy="4803369"/>
+          </a:xfrm>
+        </p:spPr>
+        <p:txBody>
+          <a:bodyPr/>
+          <a:lstStyle/>
+          <a:p>
+            <a:r>
+              <a:rPr lang="it-IT" sz="1600" dirty="0"/>
+              <a:t>Se modifichiamo il sorgente, Docker </a:t>
+            </a:r>
+          </a:p>
+          <a:p>
+            <a:pPr marL="285750" indent="-285750">
+              <a:buFont typeface="Arial" panose="020B0604020202020204" pitchFamily="34" charset="0"/>
+              <a:buChar char="•"/>
+            </a:pPr>
+            <a:r>
+              <a:rPr lang="it-IT" sz="1600" dirty="0"/>
+              <a:t>riutilizza i </a:t>
+            </a:r>
+            <a:r>
+              <a:rPr lang="it-IT" sz="1600" dirty="0" err="1"/>
+              <a:t>layer</a:t>
+            </a:r>
+            <a:r>
+              <a:rPr lang="it-IT" sz="1600" dirty="0"/>
+              <a:t> precedenti fino a WORKDIR; </a:t>
+            </a:r>
+          </a:p>
+          <a:p>
+            <a:pPr marL="285750" indent="-285750">
+              <a:buFont typeface="Arial" panose="020B0604020202020204" pitchFamily="34" charset="0"/>
+              <a:buChar char="•"/>
+            </a:pPr>
+            <a:r>
+              <a:rPr lang="it-IT" sz="1600" dirty="0"/>
+              <a:t>deve rifare COPY Avvio.java; </a:t>
+            </a:r>
+          </a:p>
+          <a:p>
+            <a:pPr marL="285750" indent="-285750">
+              <a:buFont typeface="Arial" panose="020B0604020202020204" pitchFamily="34" charset="0"/>
+              <a:buChar char="•"/>
+            </a:pPr>
+            <a:r>
+              <a:rPr lang="it-IT" sz="1600" dirty="0"/>
+              <a:t>deve rifare RUN </a:t>
+            </a:r>
+            <a:r>
+              <a:rPr lang="it-IT" sz="1600" dirty="0" err="1"/>
+              <a:t>javac</a:t>
+            </a:r>
+            <a:r>
+              <a:rPr lang="it-IT" sz="1600" dirty="0"/>
+              <a:t> Avvio.java. </a:t>
+            </a:r>
+          </a:p>
+          <a:p>
+            <a:r>
+              <a:rPr lang="it-IT" sz="1600" dirty="0"/>
+              <a:t>Questi nuovi </a:t>
+            </a:r>
+            <a:r>
+              <a:rPr lang="it-IT" sz="1600" dirty="0" err="1"/>
+              <a:t>layer</a:t>
+            </a:r>
+            <a:r>
+              <a:rPr lang="it-IT" sz="1600" dirty="0"/>
+              <a:t> vengono aggiunti alla cache.</a:t>
+            </a:r>
+          </a:p>
+          <a:p>
+            <a:endParaRPr lang="it-IT" sz="1600" dirty="0"/>
+          </a:p>
+          <a:p>
+            <a:r>
+              <a:rPr lang="it-IT" sz="1600" dirty="0"/>
+              <a:t>Ogni build lascia </a:t>
+            </a:r>
+            <a:r>
+              <a:rPr lang="it-IT" sz="1600" dirty="0" err="1"/>
+              <a:t>layer</a:t>
+            </a:r>
+            <a:r>
+              <a:rPr lang="it-IT" sz="1600" dirty="0"/>
+              <a:t> utilizzabili in futuro.</a:t>
+            </a:r>
+          </a:p>
+          <a:p>
+            <a:r>
+              <a:rPr lang="it-IT" sz="1600" dirty="0"/>
+              <a:t>Dopo molte build puoi avere:</a:t>
+            </a:r>
+          </a:p>
+          <a:p>
+            <a:r>
+              <a:rPr lang="it-IT" sz="1600" dirty="0"/>
+              <a:t>Cache di build: 2.3 GB</a:t>
+            </a:r>
+          </a:p>
+          <a:p>
+            <a:r>
+              <a:rPr lang="it-IT" sz="1600" dirty="0"/>
+              <a:t>Immagini:       1.1 GB</a:t>
+            </a:r>
+          </a:p>
+          <a:p>
+            <a:r>
+              <a:rPr lang="it-IT" sz="1600" dirty="0"/>
+              <a:t>Container:      0.0 GB</a:t>
+            </a:r>
+          </a:p>
+          <a:p>
+            <a:r>
+              <a:rPr lang="it-IT" sz="1600" dirty="0"/>
+              <a:t>anche se alcune immagini sono state cancellate.</a:t>
+            </a:r>
+          </a:p>
+        </p:txBody>
+      </p:sp>
+      <p:sp>
+        <p:nvSpPr>
+          <p:cNvPr id="2" name="CasellaDiTesto 1">
+            <a:extLst>
+              <a:ext uri="{FF2B5EF4-FFF2-40B4-BE49-F238E27FC236}">
+                <a16:creationId xmlns:a16="http://schemas.microsoft.com/office/drawing/2014/main" id="{A0580CDE-11AE-4FE6-D76E-E41343E88474}"/>
+              </a:ext>
+            </a:extLst>
+          </p:cNvPr>
+          <p:cNvSpPr txBox="1"/>
+          <p:nvPr/>
+        </p:nvSpPr>
+        <p:spPr>
+          <a:xfrm>
+            <a:off x="5057486" y="913015"/>
+            <a:ext cx="7018203" cy="5355312"/>
+          </a:xfrm>
+          <a:prstGeom prst="rect">
+            <a:avLst/>
+          </a:prstGeom>
+          <a:noFill/>
+        </p:spPr>
+        <p:txBody>
+          <a:bodyPr wrap="none" rtlCol="0">
+            <a:spAutoFit/>
+          </a:bodyPr>
+          <a:lstStyle/>
+          <a:p>
+            <a:r>
+              <a:rPr lang="it-IT" b="1" dirty="0"/>
+              <a:t>Come vedere la cache</a:t>
+            </a:r>
+          </a:p>
+          <a:p>
+            <a:r>
+              <a:rPr lang="it-IT" sz="1600" dirty="0" err="1">
+                <a:solidFill>
+                  <a:srgbClr val="171FE2"/>
+                </a:solidFill>
+                <a:latin typeface="Consolas" panose="020B0609020204030204" pitchFamily="49" charset="0"/>
+              </a:rPr>
+              <a:t>docker</a:t>
+            </a:r>
+            <a:r>
+              <a:rPr lang="it-IT" sz="1600" dirty="0">
+                <a:solidFill>
+                  <a:srgbClr val="171FE2"/>
+                </a:solidFill>
+                <a:latin typeface="Consolas" panose="020B0609020204030204" pitchFamily="49" charset="0"/>
+              </a:rPr>
+              <a:t> system </a:t>
+            </a:r>
+            <a:r>
+              <a:rPr lang="it-IT" sz="1600" dirty="0" err="1">
+                <a:solidFill>
+                  <a:srgbClr val="171FE2"/>
+                </a:solidFill>
+                <a:latin typeface="Consolas" panose="020B0609020204030204" pitchFamily="49" charset="0"/>
+              </a:rPr>
+              <a:t>df</a:t>
+            </a:r>
+            <a:endParaRPr lang="it-IT" sz="1600" dirty="0">
+              <a:solidFill>
+                <a:srgbClr val="171FE2"/>
+              </a:solidFill>
+              <a:latin typeface="Consolas" panose="020B0609020204030204" pitchFamily="49" charset="0"/>
+            </a:endParaRPr>
+          </a:p>
+          <a:p>
+            <a:r>
+              <a:rPr lang="it-IT" dirty="0"/>
+              <a:t>oppure più dettagliato:</a:t>
+            </a:r>
+          </a:p>
+          <a:p>
+            <a:r>
+              <a:rPr lang="it-IT" sz="1600" dirty="0" err="1">
+                <a:solidFill>
+                  <a:srgbClr val="171FE2"/>
+                </a:solidFill>
+                <a:latin typeface="Consolas" panose="020B0609020204030204" pitchFamily="49" charset="0"/>
+              </a:rPr>
+              <a:t>docker</a:t>
+            </a:r>
+            <a:r>
+              <a:rPr lang="it-IT" sz="1600" dirty="0">
+                <a:solidFill>
+                  <a:srgbClr val="171FE2"/>
+                </a:solidFill>
+                <a:latin typeface="Consolas" panose="020B0609020204030204" pitchFamily="49" charset="0"/>
+              </a:rPr>
+              <a:t> system </a:t>
+            </a:r>
+            <a:r>
+              <a:rPr lang="it-IT" sz="1600" dirty="0" err="1">
+                <a:solidFill>
+                  <a:srgbClr val="171FE2"/>
+                </a:solidFill>
+                <a:latin typeface="Consolas" panose="020B0609020204030204" pitchFamily="49" charset="0"/>
+              </a:rPr>
+              <a:t>df</a:t>
+            </a:r>
+            <a:r>
+              <a:rPr lang="it-IT" sz="1600" dirty="0">
+                <a:solidFill>
+                  <a:srgbClr val="171FE2"/>
+                </a:solidFill>
+                <a:latin typeface="Consolas" panose="020B0609020204030204" pitchFamily="49" charset="0"/>
+              </a:rPr>
+              <a:t> -v</a:t>
+            </a:r>
+          </a:p>
+          <a:p>
+            <a:r>
+              <a:rPr lang="it-IT" dirty="0"/>
+              <a:t>Output tipico:</a:t>
+            </a:r>
+          </a:p>
+          <a:p>
+            <a:r>
+              <a:rPr lang="it-IT" dirty="0"/>
+              <a:t>TYPE            TOTAL     ACTIVE    SIZE</a:t>
+            </a:r>
+            <a:br>
+              <a:rPr lang="it-IT" dirty="0"/>
+            </a:br>
+            <a:r>
+              <a:rPr lang="it-IT" dirty="0"/>
+              <a:t>Images          5         2         1.8GB</a:t>
+            </a:r>
+            <a:br>
+              <a:rPr lang="it-IT" dirty="0"/>
+            </a:br>
+            <a:r>
+              <a:rPr lang="it-IT" dirty="0"/>
+              <a:t>Containers      2         0         0B</a:t>
+            </a:r>
+            <a:br>
+              <a:rPr lang="it-IT" dirty="0"/>
+            </a:br>
+            <a:r>
+              <a:rPr lang="it-IT" dirty="0"/>
+              <a:t>Build Cache     24        0         950MB</a:t>
+            </a:r>
+          </a:p>
+          <a:p>
+            <a:br>
+              <a:rPr lang="it-IT" dirty="0"/>
+            </a:br>
+            <a:endParaRPr lang="it-IT" dirty="0"/>
+          </a:p>
+          <a:p>
+            <a:r>
+              <a:rPr lang="it-IT" b="1" dirty="0"/>
+              <a:t>Come svuotarla</a:t>
+            </a:r>
+          </a:p>
+          <a:p>
+            <a:r>
+              <a:rPr lang="it-IT" dirty="0"/>
+              <a:t>Solo la cache di build:</a:t>
+            </a:r>
+          </a:p>
+          <a:p>
+            <a:r>
+              <a:rPr lang="it-IT" sz="1600" dirty="0" err="1">
+                <a:solidFill>
+                  <a:srgbClr val="171FE2"/>
+                </a:solidFill>
+                <a:latin typeface="Consolas" panose="020B0609020204030204" pitchFamily="49" charset="0"/>
+              </a:rPr>
+              <a:t>docker</a:t>
+            </a:r>
+            <a:r>
+              <a:rPr lang="it-IT" sz="1600" dirty="0">
+                <a:solidFill>
+                  <a:srgbClr val="171FE2"/>
+                </a:solidFill>
+                <a:latin typeface="Consolas" panose="020B0609020204030204" pitchFamily="49" charset="0"/>
+              </a:rPr>
+              <a:t> builder prune</a:t>
+            </a:r>
+          </a:p>
+          <a:p>
+            <a:r>
+              <a:rPr lang="it-IT" dirty="0"/>
+              <a:t>Tutta la cache senza chiedere conferma:</a:t>
+            </a:r>
+          </a:p>
+          <a:p>
+            <a:r>
+              <a:rPr lang="it-IT" sz="1600" dirty="0" err="1">
+                <a:solidFill>
+                  <a:srgbClr val="171FE2"/>
+                </a:solidFill>
+                <a:latin typeface="Consolas" panose="020B0609020204030204" pitchFamily="49" charset="0"/>
+              </a:rPr>
+              <a:t>docker</a:t>
+            </a:r>
+            <a:r>
+              <a:rPr lang="it-IT" sz="1600" dirty="0">
+                <a:solidFill>
+                  <a:srgbClr val="171FE2"/>
+                </a:solidFill>
+                <a:latin typeface="Consolas" panose="020B0609020204030204" pitchFamily="49" charset="0"/>
+              </a:rPr>
+              <a:t> builder prune -f</a:t>
+            </a:r>
+          </a:p>
+          <a:p>
+            <a:r>
+              <a:rPr lang="it-IT" dirty="0"/>
+              <a:t>Tutte le cache inutilizzate (immagini, container fermati, reti, cache build):</a:t>
+            </a:r>
+          </a:p>
+          <a:p>
+            <a:r>
+              <a:rPr lang="it-IT" sz="1600" dirty="0" err="1">
+                <a:solidFill>
+                  <a:srgbClr val="171FE2"/>
+                </a:solidFill>
+                <a:latin typeface="Consolas" panose="020B0609020204030204" pitchFamily="49" charset="0"/>
+              </a:rPr>
+              <a:t>docker</a:t>
+            </a:r>
+            <a:r>
+              <a:rPr lang="it-IT" sz="1600" dirty="0">
+                <a:solidFill>
+                  <a:srgbClr val="171FE2"/>
+                </a:solidFill>
+                <a:latin typeface="Consolas" panose="020B0609020204030204" pitchFamily="49" charset="0"/>
+              </a:rPr>
+              <a:t> system prune</a:t>
+            </a:r>
+          </a:p>
+          <a:p>
+            <a:endParaRPr lang="it-IT" dirty="0"/>
+          </a:p>
+        </p:txBody>
+      </p:sp>
+    </p:spTree>
+    <p:extLst>
+      <p:ext uri="{BB962C8B-B14F-4D97-AF65-F5344CB8AC3E}">
+        <p14:creationId xmlns:p14="http://schemas.microsoft.com/office/powerpoint/2010/main" val="2348891293"/>
+      </p:ext>
+    </p:extLst>
+  </p:cSld>
+  <p:clrMapOvr>
+    <a:masterClrMapping/>
+  </p:clrMapOvr>
+</p:sld>
+</file>
+
+<file path=ppt/slides/slide25.xml><?xml version="1.0" encoding="utf-8"?>
+<p:sld xmlns:a="http://schemas.openxmlformats.org/drawingml/2006/main" xmlns:r="http://schemas.openxmlformats.org/officeDocument/2006/relationships" xmlns:p="http://schemas.openxmlformats.org/presentationml/2006/main">
+  <p:cSld>
+    <p:spTree>
+      <p:nvGrpSpPr>
+        <p:cNvPr id="1" name=""/>
+        <p:cNvGrpSpPr/>
+        <p:nvPr/>
+      </p:nvGrpSpPr>
+      <p:grpSpPr>
+        <a:xfrm>
+          <a:off x="0" y="0"/>
+          <a:ext cx="0" cy="0"/>
+          <a:chOff x="0" y="0"/>
+          <a:chExt cx="0" cy="0"/>
+        </a:xfrm>
+      </p:grpSpPr>
+      <p:sp>
+        <p:nvSpPr>
+          <p:cNvPr id="2" name="Titolo 1">
+            <a:extLst>
+              <a:ext uri="{FF2B5EF4-FFF2-40B4-BE49-F238E27FC236}">
+                <a16:creationId xmlns:a16="http://schemas.microsoft.com/office/drawing/2014/main" id="{B5E02355-4941-9C10-CA1D-649F04DB5143}"/>
+              </a:ext>
+            </a:extLst>
+          </p:cNvPr>
+          <p:cNvSpPr>
+            <a:spLocks noGrp="1"/>
+          </p:cNvSpPr>
+          <p:nvPr>
+            <p:ph type="title"/>
+          </p:nvPr>
+        </p:nvSpPr>
+        <p:spPr/>
+        <p:txBody>
+          <a:bodyPr/>
+          <a:lstStyle/>
+          <a:p>
+            <a:r>
+              <a:rPr lang="it-IT" spc="0" dirty="0">
+                <a:latin typeface="Neue Haas Grotesk Text Pro" panose="020B0504020202020204" pitchFamily="34" charset="0"/>
+              </a:rPr>
+              <a:t>GRAZIE PER L’ATTENZIONE</a:t>
+            </a:r>
+          </a:p>
+        </p:txBody>
+      </p:sp>
+    </p:spTree>
+    <p:extLst>
+      <p:ext uri="{BB962C8B-B14F-4D97-AF65-F5344CB8AC3E}">
+        <p14:creationId xmlns:p14="http://schemas.microsoft.com/office/powerpoint/2010/main" val="3003246572"/>
       </p:ext>
     </p:extLst>
   </p:cSld>
@@ -4896,6 +8391,62 @@
               </a:rPr>
               <a:t>sh</a:t>
             </a:r>
+            <a:endParaRPr lang="en-US" dirty="0">
+              <a:solidFill>
+                <a:srgbClr val="171FE2"/>
+              </a:solidFill>
+              <a:latin typeface="Consolas" panose="020B0609020204030204" pitchFamily="49" charset="0"/>
+            </a:endParaRPr>
+          </a:p>
+          <a:p>
+            <a:r>
+              <a:rPr lang="it-IT" dirty="0"/>
+              <a:t>l'opzione -</a:t>
+            </a:r>
+            <a:r>
+              <a:rPr lang="it-IT" dirty="0" err="1"/>
+              <a:t>it</a:t>
+            </a:r>
+            <a:r>
+              <a:rPr lang="it-IT" dirty="0"/>
+              <a:t> è in realtà la combinazione di due flag:</a:t>
+            </a:r>
+          </a:p>
+          <a:p>
+            <a:r>
+              <a:rPr lang="it-IT" dirty="0"/>
+              <a:t>-i (--interactive): mantiene aperto lo </a:t>
+            </a:r>
+            <a:r>
+              <a:rPr lang="it-IT" b="1" dirty="0" err="1"/>
+              <a:t>stdin</a:t>
+            </a:r>
+            <a:r>
+              <a:rPr lang="it-IT" dirty="0"/>
+              <a:t> del container, permettendoti di inserire comandi. </a:t>
+            </a:r>
+          </a:p>
+          <a:p>
+            <a:r>
+              <a:rPr lang="it-IT" dirty="0"/>
+              <a:t>-t (--</a:t>
+            </a:r>
+            <a:r>
+              <a:rPr lang="it-IT" dirty="0" err="1"/>
+              <a:t>tty</a:t>
+            </a:r>
+            <a:r>
+              <a:rPr lang="it-IT" dirty="0"/>
+              <a:t>): alloca un </a:t>
+            </a:r>
+            <a:r>
+              <a:rPr lang="it-IT" b="1" dirty="0"/>
+              <a:t>terminale virtuale (TTY)</a:t>
+            </a:r>
+            <a:r>
+              <a:rPr lang="it-IT" dirty="0"/>
+              <a:t>, così hai una shell interattiva con prompt, colori, gestione dei caratteri, ecc.</a:t>
+            </a:r>
             <a:endParaRPr lang="it-IT" dirty="0">
               <a:solidFill>
                 <a:srgbClr val="171FE2"/>
@@ -5361,66 +8912,66 @@
           </a:p>
           <a:p>
             <a:r>
-              <a:rPr lang="en-US" dirty="0"/>
+              <a:rPr lang="en-US" sz="1400" dirty="0"/>
               <a:t>Container</a:t>
             </a:r>
           </a:p>
           <a:p>
             <a:r>
-              <a:rPr lang="en-US" dirty="0"/>
+              <a:rPr lang="en-US" sz="1400" dirty="0"/>
               <a:t>└── Writable Layer (</a:t>
             </a:r>
             <a:r>
-              <a:rPr lang="en-US" dirty="0" err="1"/>
+              <a:rPr lang="en-US" sz="1400" dirty="0" err="1"/>
               <a:t>scrivibile</a:t>
             </a:r>
             <a:r>
-              <a:rPr lang="en-US" dirty="0"/>
+              <a:rPr lang="en-US" sz="1400" dirty="0"/>
               <a:t>)</a:t>
             </a:r>
           </a:p>
           <a:p>
             <a:r>
-              <a:rPr lang="en-US" dirty="0"/>
+              <a:rPr lang="en-US" sz="1400" dirty="0"/>
               <a:t>    ├── Layer </a:t>
             </a:r>
             <a:r>
-              <a:rPr lang="en-US" dirty="0" err="1"/>
+              <a:rPr lang="en-US" sz="1400" dirty="0" err="1"/>
               <a:t>immagine</a:t>
             </a:r>
             <a:r>
-              <a:rPr lang="en-US" dirty="0"/>
+              <a:rPr lang="en-US" sz="1400" dirty="0"/>
               <a:t> 3 (read-only)</a:t>
             </a:r>
           </a:p>
           <a:p>
             <a:r>
-              <a:rPr lang="en-US" dirty="0"/>
+              <a:rPr lang="en-US" sz="1400" dirty="0"/>
               <a:t>    ├── Layer </a:t>
             </a:r>
             <a:r>
-              <a:rPr lang="en-US" dirty="0" err="1"/>
+              <a:rPr lang="en-US" sz="1400" dirty="0" err="1"/>
               <a:t>immagine</a:t>
             </a:r>
             <a:r>
-              <a:rPr lang="en-US" dirty="0"/>
+              <a:rPr lang="en-US" sz="1400" dirty="0"/>
               <a:t> 2 (read-only)</a:t>
             </a:r>
           </a:p>
           <a:p>
             <a:r>
-              <a:rPr lang="en-US" dirty="0"/>
+              <a:rPr lang="en-US" sz="1400" dirty="0"/>
               <a:t>    └── Layer </a:t>
             </a:r>
             <a:r>
-              <a:rPr lang="en-US" dirty="0" err="1"/>
+              <a:rPr lang="en-US" sz="1400" dirty="0" err="1"/>
               <a:t>immagine</a:t>
             </a:r>
             <a:r>
-              <a:rPr lang="en-US" dirty="0"/>
+              <a:rPr lang="en-US" sz="1400" dirty="0"/>
               <a:t> 1 (read-only)</a:t>
             </a:r>
-            <a:endParaRPr lang="it-IT" dirty="0"/>
+            <a:endParaRPr lang="it-IT" sz="1400" dirty="0"/>
           </a:p>
           <a:p>
             <a:r>
@@ -7050,6 +10601,27 @@
 </file>
 
 <file path=customXml/item1.xml><?xml version="1.0" encoding="utf-8"?>
+<p:properties xmlns:p="http://schemas.microsoft.com/office/2006/metadata/properties" xmlns:xsi="http://www.w3.org/2001/XMLSchema-instance" xmlns:pc="http://schemas.microsoft.com/office/infopath/2007/PartnerControls">
+  <documentManagement>
+    <TaxCatchAll xmlns="21b72fd8-e7d0-49ac-9795-d1b0bc6b7e1c" xsi:nil="true"/>
+    <lcf76f155ced4ddcb4097134ff3c332f xmlns="8b3acf13-3a58-43b2-a29e-f23503de136d">
+      <Terms xmlns="http://schemas.microsoft.com/office/infopath/2007/PartnerControls"/>
+    </lcf76f155ced4ddcb4097134ff3c332f>
+    <Argomento xmlns="8b3acf13-3a58-43b2-a29e-f23503de136d" xsi:nil="true"/>
+  </documentManagement>
+</p:properties>
+</file>
+
+<file path=customXml/item2.xml><?xml version="1.0" encoding="utf-8"?>
+<?mso-contentType ?>
+<FormTemplates xmlns="http://schemas.microsoft.com/sharepoint/v3/contenttype/forms">
+  <Display>DocumentLibraryForm</Display>
+  <Edit>DocumentLibraryForm</Edit>
+  <New>DocumentLibraryForm</New>
+</FormTemplates>
+</file>
+
+<file path=customXml/item3.xml><?xml version="1.0" encoding="utf-8"?>
 <ct:contentTypeSchema xmlns:ct="http://schemas.microsoft.com/office/2006/metadata/contentType" xmlns:ma="http://schemas.microsoft.com/office/2006/metadata/properties/metaAttributes" ct:_="" ma:_="" ma:contentTypeName="Document" ma:contentTypeID="0x010100D3455C6CD0B9BF4DB2CA3009677D9668" ma:contentTypeVersion="17" ma:contentTypeDescription="Create a new document." ma:contentTypeScope="" ma:versionID="6361f2605a906a42d9630ca59d277a8b">
   <xsd:schema xmlns:xsd="http://www.w3.org/2001/XMLSchema" xmlns:xs="http://www.w3.org/2001/XMLSchema" xmlns:p="http://schemas.microsoft.com/office/2006/metadata/properties" xmlns:ns2="8b3acf13-3a58-43b2-a29e-f23503de136d" xmlns:ns3="21b72fd8-e7d0-49ac-9795-d1b0bc6b7e1c" targetNamespace="http://schemas.microsoft.com/office/2006/metadata/properties" ma:root="true" ma:fieldsID="ae4eb9e2c998b5efed80ec6126f835fa" ns2:_="" ns3:_="">
     <xsd:import namespace="8b3acf13-3a58-43b2-a29e-f23503de136d"/>
@@ -7300,28 +10872,26 @@
 </ct:contentTypeSchema>
 </file>
 
-<file path=customXml/item2.xml><?xml version="1.0" encoding="utf-8"?>
-<?mso-contentType ?>
-<FormTemplates xmlns="http://schemas.microsoft.com/sharepoint/v3/contenttype/forms">
-  <Display>DocumentLibraryForm</Display>
-  <Edit>DocumentLibraryForm</Edit>
-  <New>DocumentLibraryForm</New>
-</FormTemplates>
+<file path=customXml/itemProps1.xml><?xml version="1.0" encoding="utf-8"?>
+<ds:datastoreItem xmlns:ds="http://schemas.openxmlformats.org/officeDocument/2006/customXml" ds:itemID="{6766878A-54ED-4867-B478-72A29DC19B89}">
+  <ds:schemaRefs>
+    <ds:schemaRef ds:uri="http://schemas.microsoft.com/office/2006/metadata/properties"/>
+    <ds:schemaRef ds:uri="http://schemas.microsoft.com/office/infopath/2007/PartnerControls"/>
+    <ds:schemaRef ds:uri="21b72fd8-e7d0-49ac-9795-d1b0bc6b7e1c"/>
+    <ds:schemaRef ds:uri="8b3acf13-3a58-43b2-a29e-f23503de136d"/>
+  </ds:schemaRefs>
+</ds:datastoreItem>
 </file>
 
-<file path=customXml/item3.xml><?xml version="1.0" encoding="utf-8"?>
-<p:properties xmlns:p="http://schemas.microsoft.com/office/2006/metadata/properties" xmlns:xsi="http://www.w3.org/2001/XMLSchema-instance" xmlns:pc="http://schemas.microsoft.com/office/infopath/2007/PartnerControls">
-  <documentManagement>
-    <TaxCatchAll xmlns="21b72fd8-e7d0-49ac-9795-d1b0bc6b7e1c" xsi:nil="true"/>
-    <lcf76f155ced4ddcb4097134ff3c332f xmlns="8b3acf13-3a58-43b2-a29e-f23503de136d">
-      <Terms xmlns="http://schemas.microsoft.com/office/infopath/2007/PartnerControls"/>
-    </lcf76f155ced4ddcb4097134ff3c332f>
-    <Argomento xmlns="8b3acf13-3a58-43b2-a29e-f23503de136d" xsi:nil="true"/>
-  </documentManagement>
-</p:properties>
+<file path=customXml/itemProps2.xml><?xml version="1.0" encoding="utf-8"?>
+<ds:datastoreItem xmlns:ds="http://schemas.openxmlformats.org/officeDocument/2006/customXml" ds:itemID="{67C65656-B2D8-4C19-A873-091B25A5212E}">
+  <ds:schemaRefs>
+    <ds:schemaRef ds:uri="http://schemas.microsoft.com/sharepoint/v3/contenttype/forms"/>
+  </ds:schemaRefs>
+</ds:datastoreItem>
 </file>
 
-<file path=customXml/itemProps1.xml><?xml version="1.0" encoding="utf-8"?>
+<file path=customXml/itemProps3.xml><?xml version="1.0" encoding="utf-8"?>
 <ds:datastoreItem xmlns:ds="http://schemas.openxmlformats.org/officeDocument/2006/customXml" ds:itemID="{70468F63-B318-4D5F-A1DF-86BE98AC2293}">
   <ds:schemaRefs>
     <ds:schemaRef ds:uri="http://schemas.microsoft.com/office/2006/metadata/contentType"/>
@@ -7338,23 +10908,4 @@
     <ds:schemaRef ds:uri="http://schemas.microsoft.com/internal/obd"/>
   </ds:schemaRefs>
 </ds:datastoreItem>
-</file>
-
-<file path=customXml/itemProps2.xml><?xml version="1.0" encoding="utf-8"?>
-<ds:datastoreItem xmlns:ds="http://schemas.openxmlformats.org/officeDocument/2006/customXml" ds:itemID="{67C65656-B2D8-4C19-A873-091B25A5212E}">
-  <ds:schemaRefs>
-    <ds:schemaRef ds:uri="http://schemas.microsoft.com/sharepoint/v3/contenttype/forms"/>
-  </ds:schemaRefs>
-</ds:datastoreItem>
-</file>
-
-<file path=customXml/itemProps3.xml><?xml version="1.0" encoding="utf-8"?>
-<ds:datastoreItem xmlns:ds="http://schemas.openxmlformats.org/officeDocument/2006/customXml" ds:itemID="{6766878A-54ED-4867-B478-72A29DC19B89}">
-  <ds:schemaRefs>
-    <ds:schemaRef ds:uri="http://schemas.microsoft.com/office/2006/metadata/properties"/>
-    <ds:schemaRef ds:uri="http://schemas.microsoft.com/office/infopath/2007/PartnerControls"/>
-    <ds:schemaRef ds:uri="21b72fd8-e7d0-49ac-9795-d1b0bc6b7e1c"/>
-    <ds:schemaRef ds:uri="8b3acf13-3a58-43b2-a29e-f23503de136d"/>
-  </ds:schemaRefs>
-</ds:datastoreItem>
 </file>
--- a/Raccolta esercizi - Docker Atomo.pptx
+++ b/Raccolta esercizi - Docker Atomo.pptx
@@ -5,10 +5,10 @@
     <p:sldMasterId id="2147483672" r:id="rId4"/>
   </p:sldMasterIdLst>
   <p:notesMasterIdLst>
-    <p:notesMasterId r:id="rId30"/>
+    <p:notesMasterId r:id="rId43"/>
   </p:notesMasterIdLst>
   <p:handoutMasterIdLst>
-    <p:handoutMasterId r:id="rId31"/>
+    <p:handoutMasterId r:id="rId44"/>
   </p:handoutMasterIdLst>
   <p:sldIdLst>
     <p:sldId id="262" r:id="rId5"/>
@@ -35,7 +35,20 @@
     <p:sldId id="281" r:id="rId26"/>
     <p:sldId id="282" r:id="rId27"/>
     <p:sldId id="283" r:id="rId28"/>
-    <p:sldId id="261" r:id="rId29"/>
+    <p:sldId id="284" r:id="rId29"/>
+    <p:sldId id="285" r:id="rId30"/>
+    <p:sldId id="286" r:id="rId31"/>
+    <p:sldId id="287" r:id="rId32"/>
+    <p:sldId id="288" r:id="rId33"/>
+    <p:sldId id="289" r:id="rId34"/>
+    <p:sldId id="290" r:id="rId35"/>
+    <p:sldId id="291" r:id="rId36"/>
+    <p:sldId id="292" r:id="rId37"/>
+    <p:sldId id="293" r:id="rId38"/>
+    <p:sldId id="294" r:id="rId39"/>
+    <p:sldId id="295" r:id="rId40"/>
+    <p:sldId id="296" r:id="rId41"/>
+    <p:sldId id="261" r:id="rId42"/>
   </p:sldIdLst>
   <p:sldSz cx="12192000" cy="6858000"/>
   <p:notesSz cx="6858000" cy="9144000"/>
@@ -3498,7 +3511,7 @@
         </p:nvSpPr>
         <p:spPr>
           <a:xfrm>
-            <a:off x="1415438" y="1349192"/>
+            <a:off x="1317319" y="1027315"/>
             <a:ext cx="9557362" cy="4803369"/>
           </a:xfrm>
         </p:spPr>
@@ -3830,6 +3843,39 @@
               </a:solidFill>
               <a:latin typeface="Consolas" panose="020B0609020204030204" pitchFamily="49" charset="0"/>
             </a:endParaRPr>
+          </a:p>
+        </p:txBody>
+      </p:sp>
+      <p:sp>
+        <p:nvSpPr>
+          <p:cNvPr id="2" name="Segnaposto numero diapositiva 11">
+            <a:extLst>
+              <a:ext uri="{FF2B5EF4-FFF2-40B4-BE49-F238E27FC236}">
+                <a16:creationId xmlns:a16="http://schemas.microsoft.com/office/drawing/2014/main" id="{DF558CC5-3F08-8791-01FE-EEFA03BADEFE}"/>
+              </a:ext>
+            </a:extLst>
+          </p:cNvPr>
+          <p:cNvSpPr>
+            <a:spLocks noGrp="1"/>
+          </p:cNvSpPr>
+          <p:nvPr>
+            <p:ph type="sldNum" sz="quarter" idx="12"/>
+          </p:nvPr>
+        </p:nvSpPr>
+        <p:spPr>
+          <a:xfrm>
+            <a:off x="8610600" y="6356350"/>
+            <a:ext cx="2743200" cy="365125"/>
+          </a:xfrm>
+        </p:spPr>
+        <p:txBody>
+          <a:bodyPr/>
+          <a:lstStyle/>
+          <a:p>
+            <a:r>
+              <a:rPr lang="it-IT" dirty="0"/>
+              <a:t>8</a:t>
+            </a:r>
           </a:p>
         </p:txBody>
       </p:sp>
@@ -3887,7 +3933,7 @@
         </p:nvSpPr>
         <p:spPr>
           <a:xfrm>
-            <a:off x="1415438" y="1349192"/>
+            <a:off x="1317319" y="1138880"/>
             <a:ext cx="9557362" cy="4803369"/>
           </a:xfrm>
         </p:spPr>
@@ -4134,6 +4180,39 @@
               </a:solidFill>
               <a:latin typeface="Consolas" panose="020B0609020204030204" pitchFamily="49" charset="0"/>
             </a:endParaRPr>
+          </a:p>
+        </p:txBody>
+      </p:sp>
+      <p:sp>
+        <p:nvSpPr>
+          <p:cNvPr id="2" name="Segnaposto numero diapositiva 11">
+            <a:extLst>
+              <a:ext uri="{FF2B5EF4-FFF2-40B4-BE49-F238E27FC236}">
+                <a16:creationId xmlns:a16="http://schemas.microsoft.com/office/drawing/2014/main" id="{B1AE1639-5938-338A-8C7F-A2F2BF2BF351}"/>
+              </a:ext>
+            </a:extLst>
+          </p:cNvPr>
+          <p:cNvSpPr>
+            <a:spLocks noGrp="1"/>
+          </p:cNvSpPr>
+          <p:nvPr>
+            <p:ph type="sldNum" sz="quarter" idx="12"/>
+          </p:nvPr>
+        </p:nvSpPr>
+        <p:spPr>
+          <a:xfrm>
+            <a:off x="8610600" y="6356350"/>
+            <a:ext cx="2743200" cy="365125"/>
+          </a:xfrm>
+        </p:spPr>
+        <p:txBody>
+          <a:bodyPr/>
+          <a:lstStyle/>
+          <a:p>
+            <a:r>
+              <a:rPr lang="it-IT" dirty="0"/>
+              <a:t>9</a:t>
+            </a:r>
           </a:p>
         </p:txBody>
       </p:sp>
@@ -4269,6 +4348,39 @@
           </a:p>
         </p:txBody>
       </p:sp>
+      <p:sp>
+        <p:nvSpPr>
+          <p:cNvPr id="4" name="Segnaposto numero diapositiva 11">
+            <a:extLst>
+              <a:ext uri="{FF2B5EF4-FFF2-40B4-BE49-F238E27FC236}">
+                <a16:creationId xmlns:a16="http://schemas.microsoft.com/office/drawing/2014/main" id="{A4DAD9FE-977B-BBCD-4DD6-B66559E8AF59}"/>
+              </a:ext>
+            </a:extLst>
+          </p:cNvPr>
+          <p:cNvSpPr>
+            <a:spLocks noGrp="1"/>
+          </p:cNvSpPr>
+          <p:nvPr>
+            <p:ph type="sldNum" sz="quarter" idx="12"/>
+          </p:nvPr>
+        </p:nvSpPr>
+        <p:spPr>
+          <a:xfrm>
+            <a:off x="8610600" y="6356350"/>
+            <a:ext cx="2743200" cy="365125"/>
+          </a:xfrm>
+        </p:spPr>
+        <p:txBody>
+          <a:bodyPr/>
+          <a:lstStyle/>
+          <a:p>
+            <a:r>
+              <a:rPr lang="it-IT" dirty="0"/>
+              <a:t>10</a:t>
+            </a:r>
+          </a:p>
+        </p:txBody>
+      </p:sp>
     </p:spTree>
     <p:extLst>
       <p:ext uri="{BB962C8B-B14F-4D97-AF65-F5344CB8AC3E}">
@@ -4517,6 +4629,39 @@
               <a:t>	…</a:t>
             </a:r>
             <a:endParaRPr lang="it-IT" dirty="0"/>
+          </a:p>
+        </p:txBody>
+      </p:sp>
+      <p:sp>
+        <p:nvSpPr>
+          <p:cNvPr id="2" name="Segnaposto numero diapositiva 11">
+            <a:extLst>
+              <a:ext uri="{FF2B5EF4-FFF2-40B4-BE49-F238E27FC236}">
+                <a16:creationId xmlns:a16="http://schemas.microsoft.com/office/drawing/2014/main" id="{A1FEE157-4435-DD61-A5DA-68DAC351D793}"/>
+              </a:ext>
+            </a:extLst>
+          </p:cNvPr>
+          <p:cNvSpPr>
+            <a:spLocks noGrp="1"/>
+          </p:cNvSpPr>
+          <p:nvPr>
+            <p:ph type="sldNum" sz="quarter" idx="12"/>
+          </p:nvPr>
+        </p:nvSpPr>
+        <p:spPr>
+          <a:xfrm>
+            <a:off x="8610600" y="6356350"/>
+            <a:ext cx="2743200" cy="365125"/>
+          </a:xfrm>
+        </p:spPr>
+        <p:txBody>
+          <a:bodyPr/>
+          <a:lstStyle/>
+          <a:p>
+            <a:r>
+              <a:rPr lang="it-IT" dirty="0"/>
+              <a:t>11</a:t>
+            </a:r>
           </a:p>
         </p:txBody>
       </p:sp>
@@ -4733,6 +4878,39 @@
           </a:p>
         </p:txBody>
       </p:sp>
+      <p:sp>
+        <p:nvSpPr>
+          <p:cNvPr id="2" name="Segnaposto numero diapositiva 11">
+            <a:extLst>
+              <a:ext uri="{FF2B5EF4-FFF2-40B4-BE49-F238E27FC236}">
+                <a16:creationId xmlns:a16="http://schemas.microsoft.com/office/drawing/2014/main" id="{8A46FBC0-79C0-DF40-0DA6-F9C8E5C07388}"/>
+              </a:ext>
+            </a:extLst>
+          </p:cNvPr>
+          <p:cNvSpPr>
+            <a:spLocks noGrp="1"/>
+          </p:cNvSpPr>
+          <p:nvPr>
+            <p:ph type="sldNum" sz="quarter" idx="12"/>
+          </p:nvPr>
+        </p:nvSpPr>
+        <p:spPr>
+          <a:xfrm>
+            <a:off x="8610600" y="6356350"/>
+            <a:ext cx="2743200" cy="365125"/>
+          </a:xfrm>
+        </p:spPr>
+        <p:txBody>
+          <a:bodyPr/>
+          <a:lstStyle/>
+          <a:p>
+            <a:r>
+              <a:rPr lang="it-IT" dirty="0"/>
+              <a:t>12</a:t>
+            </a:r>
+          </a:p>
+        </p:txBody>
+      </p:sp>
     </p:spTree>
     <p:extLst>
       <p:ext uri="{BB962C8B-B14F-4D97-AF65-F5344CB8AC3E}">
@@ -4912,6 +5090,39 @@
               </a:solidFill>
               <a:latin typeface="Consolas" panose="020B0609020204030204" pitchFamily="49" charset="0"/>
             </a:endParaRPr>
+          </a:p>
+        </p:txBody>
+      </p:sp>
+      <p:sp>
+        <p:nvSpPr>
+          <p:cNvPr id="2" name="Segnaposto numero diapositiva 11">
+            <a:extLst>
+              <a:ext uri="{FF2B5EF4-FFF2-40B4-BE49-F238E27FC236}">
+                <a16:creationId xmlns:a16="http://schemas.microsoft.com/office/drawing/2014/main" id="{9678B618-0AF3-A077-7309-F653C7BCFA3B}"/>
+              </a:ext>
+            </a:extLst>
+          </p:cNvPr>
+          <p:cNvSpPr>
+            <a:spLocks noGrp="1"/>
+          </p:cNvSpPr>
+          <p:nvPr>
+            <p:ph type="sldNum" sz="quarter" idx="12"/>
+          </p:nvPr>
+        </p:nvSpPr>
+        <p:spPr>
+          <a:xfrm>
+            <a:off x="8610600" y="6356350"/>
+            <a:ext cx="2743200" cy="365125"/>
+          </a:xfrm>
+        </p:spPr>
+        <p:txBody>
+          <a:bodyPr/>
+          <a:lstStyle/>
+          <a:p>
+            <a:r>
+              <a:rPr lang="it-IT" dirty="0"/>
+              <a:t>13</a:t>
+            </a:r>
           </a:p>
         </p:txBody>
       </p:sp>
@@ -5042,15 +5253,40 @@
             </a:r>
             <a:r>
               <a:rPr lang="it-IT" dirty="0"/>
-              <a:t> </a:t>
-            </a:r>
-            <a:r>
-              <a:rPr lang="it-IT" b="1" dirty="0"/>
-              <a:t>Scenario Aziendale:</a:t>
-            </a:r>
-            <a:r>
-              <a:rPr lang="it-IT" dirty="0"/>
               <a:t> Il team di sviluppo vi ha fornito il codice sorgente di un'applicazione Java Spring Boot. Il manager Cloud vi impone un limite: l'immagine finale da caricare su AWS non deve superare i 250MB per motivi di costi di trasferimento e non deve contenere il codice sorgente in chiaro per motivi di sicurezza industriale. Dovete compilare l'app direttamente dentro Docker usando il Multi-Stage build.</a:t>
+            </a:r>
+          </a:p>
+        </p:txBody>
+      </p:sp>
+      <p:sp>
+        <p:nvSpPr>
+          <p:cNvPr id="4" name="Segnaposto numero diapositiva 11">
+            <a:extLst>
+              <a:ext uri="{FF2B5EF4-FFF2-40B4-BE49-F238E27FC236}">
+                <a16:creationId xmlns:a16="http://schemas.microsoft.com/office/drawing/2014/main" id="{2DAC835F-B2E1-BE3E-D40F-D379A50BE375}"/>
+              </a:ext>
+            </a:extLst>
+          </p:cNvPr>
+          <p:cNvSpPr>
+            <a:spLocks noGrp="1"/>
+          </p:cNvSpPr>
+          <p:nvPr>
+            <p:ph type="sldNum" sz="quarter" idx="12"/>
+          </p:nvPr>
+        </p:nvSpPr>
+        <p:spPr>
+          <a:xfrm>
+            <a:off x="8610600" y="6356350"/>
+            <a:ext cx="2743200" cy="365125"/>
+          </a:xfrm>
+        </p:spPr>
+        <p:txBody>
+          <a:bodyPr/>
+          <a:lstStyle/>
+          <a:p>
+            <a:r>
+              <a:rPr lang="it-IT" dirty="0"/>
+              <a:t>14</a:t>
             </a:r>
           </a:p>
         </p:txBody>
@@ -5304,6 +5540,39 @@
           </a:p>
         </p:txBody>
       </p:sp>
+      <p:sp>
+        <p:nvSpPr>
+          <p:cNvPr id="2" name="Segnaposto numero diapositiva 11">
+            <a:extLst>
+              <a:ext uri="{FF2B5EF4-FFF2-40B4-BE49-F238E27FC236}">
+                <a16:creationId xmlns:a16="http://schemas.microsoft.com/office/drawing/2014/main" id="{E51C3BA9-E14C-862D-0CE2-CF09E8E6DE46}"/>
+              </a:ext>
+            </a:extLst>
+          </p:cNvPr>
+          <p:cNvSpPr>
+            <a:spLocks noGrp="1"/>
+          </p:cNvSpPr>
+          <p:nvPr>
+            <p:ph type="sldNum" sz="quarter" idx="12"/>
+          </p:nvPr>
+        </p:nvSpPr>
+        <p:spPr>
+          <a:xfrm>
+            <a:off x="8610600" y="6356350"/>
+            <a:ext cx="2743200" cy="365125"/>
+          </a:xfrm>
+        </p:spPr>
+        <p:txBody>
+          <a:bodyPr/>
+          <a:lstStyle/>
+          <a:p>
+            <a:r>
+              <a:rPr lang="it-IT" dirty="0"/>
+              <a:t>15</a:t>
+            </a:r>
+          </a:p>
+        </p:txBody>
+      </p:sp>
     </p:spTree>
     <p:extLst>
       <p:ext uri="{BB962C8B-B14F-4D97-AF65-F5344CB8AC3E}">
@@ -5358,7 +5627,7 @@
         </p:nvSpPr>
         <p:spPr>
           <a:xfrm>
-            <a:off x="1415438" y="1349192"/>
+            <a:off x="1452014" y="1027315"/>
             <a:ext cx="9557362" cy="4803369"/>
           </a:xfrm>
         </p:spPr>
@@ -5549,6 +5818,39 @@
               </a:solidFill>
               <a:latin typeface="Consolas" panose="020B0609020204030204" pitchFamily="49" charset="0"/>
             </a:endParaRPr>
+          </a:p>
+        </p:txBody>
+      </p:sp>
+      <p:sp>
+        <p:nvSpPr>
+          <p:cNvPr id="2" name="Segnaposto numero diapositiva 11">
+            <a:extLst>
+              <a:ext uri="{FF2B5EF4-FFF2-40B4-BE49-F238E27FC236}">
+                <a16:creationId xmlns:a16="http://schemas.microsoft.com/office/drawing/2014/main" id="{500CA36A-116D-9B8F-1629-C34F86DBEEE6}"/>
+              </a:ext>
+            </a:extLst>
+          </p:cNvPr>
+          <p:cNvSpPr>
+            <a:spLocks noGrp="1"/>
+          </p:cNvSpPr>
+          <p:nvPr>
+            <p:ph type="sldNum" sz="quarter" idx="12"/>
+          </p:nvPr>
+        </p:nvSpPr>
+        <p:spPr>
+          <a:xfrm>
+            <a:off x="8610600" y="6356350"/>
+            <a:ext cx="2743200" cy="365125"/>
+          </a:xfrm>
+        </p:spPr>
+        <p:txBody>
+          <a:bodyPr/>
+          <a:lstStyle/>
+          <a:p>
+            <a:r>
+              <a:rPr lang="it-IT" dirty="0"/>
+              <a:t>16</a:t>
+            </a:r>
           </a:p>
         </p:txBody>
       </p:sp>
@@ -5606,7 +5908,7 @@
         </p:nvSpPr>
         <p:spPr>
           <a:xfrm>
-            <a:off x="1415438" y="1349192"/>
+            <a:off x="1415438" y="1120592"/>
             <a:ext cx="9557362" cy="4803369"/>
           </a:xfrm>
         </p:spPr>
@@ -5921,6 +6223,39 @@
               </a:solidFill>
               <a:latin typeface="Consolas" panose="020B0609020204030204" pitchFamily="49" charset="0"/>
             </a:endParaRPr>
+          </a:p>
+        </p:txBody>
+      </p:sp>
+      <p:sp>
+        <p:nvSpPr>
+          <p:cNvPr id="2" name="Segnaposto numero diapositiva 11">
+            <a:extLst>
+              <a:ext uri="{FF2B5EF4-FFF2-40B4-BE49-F238E27FC236}">
+                <a16:creationId xmlns:a16="http://schemas.microsoft.com/office/drawing/2014/main" id="{A2BD07A0-82B0-B916-903A-98CFF645A3E5}"/>
+              </a:ext>
+            </a:extLst>
+          </p:cNvPr>
+          <p:cNvSpPr>
+            <a:spLocks noGrp="1"/>
+          </p:cNvSpPr>
+          <p:nvPr>
+            <p:ph type="sldNum" sz="quarter" idx="12"/>
+          </p:nvPr>
+        </p:nvSpPr>
+        <p:spPr>
+          <a:xfrm>
+            <a:off x="8610600" y="6356350"/>
+            <a:ext cx="2743200" cy="365125"/>
+          </a:xfrm>
+        </p:spPr>
+        <p:txBody>
+          <a:bodyPr/>
+          <a:lstStyle/>
+          <a:p>
+            <a:r>
+              <a:rPr lang="it-IT" dirty="0"/>
+              <a:t>17</a:t>
+            </a:r>
           </a:p>
         </p:txBody>
       </p:sp>
@@ -6411,6 +6746,39 @@
           </a:p>
         </p:txBody>
       </p:sp>
+      <p:sp>
+        <p:nvSpPr>
+          <p:cNvPr id="4" name="Segnaposto numero diapositiva 11">
+            <a:extLst>
+              <a:ext uri="{FF2B5EF4-FFF2-40B4-BE49-F238E27FC236}">
+                <a16:creationId xmlns:a16="http://schemas.microsoft.com/office/drawing/2014/main" id="{36428EAD-B6DE-FABE-7407-26619CFBC3B5}"/>
+              </a:ext>
+            </a:extLst>
+          </p:cNvPr>
+          <p:cNvSpPr>
+            <a:spLocks noGrp="1"/>
+          </p:cNvSpPr>
+          <p:nvPr>
+            <p:ph type="sldNum" sz="quarter" idx="12"/>
+          </p:nvPr>
+        </p:nvSpPr>
+        <p:spPr>
+          <a:xfrm>
+            <a:off x="8610600" y="6356350"/>
+            <a:ext cx="2743200" cy="365125"/>
+          </a:xfrm>
+        </p:spPr>
+        <p:txBody>
+          <a:bodyPr/>
+          <a:lstStyle/>
+          <a:p>
+            <a:r>
+              <a:rPr lang="it-IT" dirty="0"/>
+              <a:t>18</a:t>
+            </a:r>
+          </a:p>
+        </p:txBody>
+      </p:sp>
     </p:spTree>
     <p:extLst>
       <p:ext uri="{BB962C8B-B14F-4D97-AF65-F5344CB8AC3E}">
@@ -6465,7 +6833,7 @@
         </p:nvSpPr>
         <p:spPr>
           <a:xfrm>
-            <a:off x="1415438" y="1349192"/>
+            <a:off x="1415438" y="1043084"/>
             <a:ext cx="9557362" cy="4803369"/>
           </a:xfrm>
         </p:spPr>
@@ -6672,7 +7040,7 @@
         </p:nvSpPr>
         <p:spPr>
           <a:xfrm>
-            <a:off x="5188616" y="2474235"/>
+            <a:off x="5186521" y="2163339"/>
             <a:ext cx="6848157" cy="2862322"/>
           </a:xfrm>
           <a:prstGeom prst="rect">
@@ -6777,6 +7145,39 @@
           </a:p>
           <a:p>
             <a:endParaRPr lang="it-IT" dirty="0"/>
+          </a:p>
+        </p:txBody>
+      </p:sp>
+      <p:sp>
+        <p:nvSpPr>
+          <p:cNvPr id="2" name="Segnaposto numero diapositiva 11">
+            <a:extLst>
+              <a:ext uri="{FF2B5EF4-FFF2-40B4-BE49-F238E27FC236}">
+                <a16:creationId xmlns:a16="http://schemas.microsoft.com/office/drawing/2014/main" id="{EDFBFD33-E841-948F-1D48-4928839ACC1C}"/>
+              </a:ext>
+            </a:extLst>
+          </p:cNvPr>
+          <p:cNvSpPr>
+            <a:spLocks noGrp="1"/>
+          </p:cNvSpPr>
+          <p:nvPr>
+            <p:ph type="sldNum" sz="quarter" idx="12"/>
+          </p:nvPr>
+        </p:nvSpPr>
+        <p:spPr>
+          <a:xfrm>
+            <a:off x="8610600" y="6356350"/>
+            <a:ext cx="2743200" cy="365125"/>
+          </a:xfrm>
+        </p:spPr>
+        <p:txBody>
+          <a:bodyPr/>
+          <a:lstStyle/>
+          <a:p>
+            <a:r>
+              <a:rPr lang="it-IT" dirty="0"/>
+              <a:t>19</a:t>
+            </a:r>
           </a:p>
         </p:txBody>
       </p:sp>
@@ -7014,6 +7415,39 @@
           </a:p>
         </p:txBody>
       </p:sp>
+      <p:sp>
+        <p:nvSpPr>
+          <p:cNvPr id="2" name="Segnaposto numero diapositiva 11">
+            <a:extLst>
+              <a:ext uri="{FF2B5EF4-FFF2-40B4-BE49-F238E27FC236}">
+                <a16:creationId xmlns:a16="http://schemas.microsoft.com/office/drawing/2014/main" id="{184B62D7-6E8C-D3BC-BF45-DAD1EA5D98E6}"/>
+              </a:ext>
+            </a:extLst>
+          </p:cNvPr>
+          <p:cNvSpPr>
+            <a:spLocks noGrp="1"/>
+          </p:cNvSpPr>
+          <p:nvPr>
+            <p:ph type="sldNum" sz="quarter" idx="12"/>
+          </p:nvPr>
+        </p:nvSpPr>
+        <p:spPr>
+          <a:xfrm>
+            <a:off x="8610600" y="6356350"/>
+            <a:ext cx="2743200" cy="365125"/>
+          </a:xfrm>
+        </p:spPr>
+        <p:txBody>
+          <a:bodyPr/>
+          <a:lstStyle/>
+          <a:p>
+            <a:r>
+              <a:rPr lang="it-IT" dirty="0"/>
+              <a:t>20</a:t>
+            </a:r>
+          </a:p>
+        </p:txBody>
+      </p:sp>
     </p:spTree>
     <p:extLst>
       <p:ext uri="{BB962C8B-B14F-4D97-AF65-F5344CB8AC3E}">
@@ -7068,7 +7502,7 @@
         </p:nvSpPr>
         <p:spPr>
           <a:xfrm>
-            <a:off x="1415438" y="1349192"/>
+            <a:off x="1317319" y="1027315"/>
             <a:ext cx="9557362" cy="4803369"/>
           </a:xfrm>
         </p:spPr>
@@ -7077,23 +7511,43 @@
           <a:lstStyle/>
           <a:p>
             <a:r>
-              <a:rPr lang="it-IT" dirty="0"/>
+              <a:rPr lang="it-IT" dirty="0">
+                <a:solidFill>
+                  <a:srgbClr val="171FE2"/>
+                </a:solidFill>
+              </a:rPr>
               <a:t>La </a:t>
             </a:r>
             <a:r>
-              <a:rPr lang="it-IT" b="1" dirty="0"/>
+              <a:rPr lang="it-IT" b="1" dirty="0">
+                <a:solidFill>
+                  <a:srgbClr val="171FE2"/>
+                </a:solidFill>
+              </a:rPr>
               <a:t>build cache</a:t>
             </a:r>
             <a:r>
-              <a:rPr lang="it-IT" dirty="0"/>
+              <a:rPr lang="it-IT" dirty="0">
+                <a:solidFill>
+                  <a:srgbClr val="171FE2"/>
+                </a:solidFill>
+              </a:rPr>
               <a:t> di Docker è un insieme di </a:t>
             </a:r>
             <a:r>
-              <a:rPr lang="it-IT" dirty="0" err="1"/>
+              <a:rPr lang="it-IT" dirty="0" err="1">
+                <a:solidFill>
+                  <a:srgbClr val="171FE2"/>
+                </a:solidFill>
+              </a:rPr>
               <a:t>layer</a:t>
             </a:r>
             <a:r>
-              <a:rPr lang="it-IT" dirty="0"/>
+              <a:rPr lang="it-IT" dirty="0">
+                <a:solidFill>
+                  <a:srgbClr val="171FE2"/>
+                </a:solidFill>
+              </a:rPr>
               <a:t> che Docker conserva per evitare di rifare lavoro già fatto durante le build successive.</a:t>
             </a:r>
           </a:p>
@@ -7304,6 +7758,39 @@
               </a:solidFill>
               <a:latin typeface="Consolas" panose="020B0609020204030204" pitchFamily="49" charset="0"/>
             </a:endParaRPr>
+          </a:p>
+        </p:txBody>
+      </p:sp>
+      <p:sp>
+        <p:nvSpPr>
+          <p:cNvPr id="2" name="Segnaposto numero diapositiva 11">
+            <a:extLst>
+              <a:ext uri="{FF2B5EF4-FFF2-40B4-BE49-F238E27FC236}">
+                <a16:creationId xmlns:a16="http://schemas.microsoft.com/office/drawing/2014/main" id="{C549C590-7859-EA09-0A83-911E05CE9680}"/>
+              </a:ext>
+            </a:extLst>
+          </p:cNvPr>
+          <p:cNvSpPr>
+            <a:spLocks noGrp="1"/>
+          </p:cNvSpPr>
+          <p:nvPr>
+            <p:ph type="sldNum" sz="quarter" idx="12"/>
+          </p:nvPr>
+        </p:nvSpPr>
+        <p:spPr>
+          <a:xfrm>
+            <a:off x="8610600" y="6356350"/>
+            <a:ext cx="2743200" cy="365125"/>
+          </a:xfrm>
+        </p:spPr>
+        <p:txBody>
+          <a:bodyPr/>
+          <a:lstStyle/>
+          <a:p>
+            <a:r>
+              <a:rPr lang="it-IT" dirty="0"/>
+              <a:t>21</a:t>
+            </a:r>
           </a:p>
         </p:txBody>
       </p:sp>
@@ -7497,8 +7984,8 @@
         </p:nvSpPr>
         <p:spPr>
           <a:xfrm>
-            <a:off x="5057486" y="913015"/>
-            <a:ext cx="7018203" cy="5355312"/>
+            <a:off x="5057486" y="754394"/>
+            <a:ext cx="6642844" cy="6278642"/>
           </a:xfrm>
           <a:prstGeom prst="rect">
             <a:avLst/>
@@ -7554,87 +8041,76 @@
           <a:p>
             <a:r>
               <a:rPr lang="it-IT" dirty="0"/>
-              <a:t>oppure più dettagliato:</a:t>
-            </a:r>
-          </a:p>
-          <a:p>
-            <a:r>
-              <a:rPr lang="it-IT" sz="1600" dirty="0" err="1">
-                <a:solidFill>
-                  <a:srgbClr val="171FE2"/>
-                </a:solidFill>
-                <a:latin typeface="Consolas" panose="020B0609020204030204" pitchFamily="49" charset="0"/>
-              </a:rPr>
-              <a:t>docker</a:t>
-            </a:r>
-            <a:r>
-              <a:rPr lang="it-IT" sz="1600" dirty="0">
-                <a:solidFill>
-                  <a:srgbClr val="171FE2"/>
-                </a:solidFill>
-                <a:latin typeface="Consolas" panose="020B0609020204030204" pitchFamily="49" charset="0"/>
-              </a:rPr>
-              <a:t> system </a:t>
-            </a:r>
-            <a:r>
-              <a:rPr lang="it-IT" sz="1600" dirty="0" err="1">
-                <a:solidFill>
-                  <a:srgbClr val="171FE2"/>
-                </a:solidFill>
-                <a:latin typeface="Consolas" panose="020B0609020204030204" pitchFamily="49" charset="0"/>
-              </a:rPr>
-              <a:t>df</a:t>
-            </a:r>
-            <a:r>
-              <a:rPr lang="it-IT" sz="1600" dirty="0">
-                <a:solidFill>
-                  <a:srgbClr val="171FE2"/>
-                </a:solidFill>
-                <a:latin typeface="Consolas" panose="020B0609020204030204" pitchFamily="49" charset="0"/>
-              </a:rPr>
-              <a:t> -v</a:t>
-            </a:r>
-          </a:p>
-          <a:p>
-            <a:r>
-              <a:rPr lang="it-IT" dirty="0"/>
               <a:t>Output tipico:</a:t>
             </a:r>
           </a:p>
           <a:p>
-            <a:r>
-              <a:rPr lang="it-IT" dirty="0"/>
-              <a:t>TYPE            TOTAL     ACTIVE    SIZE</a:t>
-            </a:r>
             <a:br>
               <a:rPr lang="it-IT" dirty="0"/>
             </a:br>
-            <a:r>
-              <a:rPr lang="it-IT" dirty="0"/>
-              <a:t>Images          5         2         1.8GB</a:t>
-            </a:r>
             <a:br>
               <a:rPr lang="it-IT" dirty="0"/>
             </a:br>
-            <a:r>
-              <a:rPr lang="it-IT" dirty="0"/>
-              <a:t>Containers      2         0         0B</a:t>
-            </a:r>
-            <a:br>
-              <a:rPr lang="it-IT" dirty="0"/>
-            </a:br>
-            <a:r>
-              <a:rPr lang="it-IT" dirty="0"/>
-              <a:t>Build Cache     24        0         950MB</a:t>
-            </a:r>
-          </a:p>
-          <a:p>
             <a:br>
               <a:rPr lang="it-IT" dirty="0"/>
             </a:br>
             <a:endParaRPr lang="it-IT" dirty="0"/>
           </a:p>
           <a:p>
+            <a:endParaRPr lang="it-IT" dirty="0"/>
+          </a:p>
+          <a:p>
+            <a:endParaRPr lang="it-IT" dirty="0"/>
+          </a:p>
+          <a:p>
+            <a:r>
+              <a:rPr lang="it-IT" dirty="0"/>
+              <a:t>oppure più dettagliato:</a:t>
+            </a:r>
+          </a:p>
+          <a:p>
+            <a:r>
+              <a:rPr lang="it-IT" sz="1600" dirty="0" err="1">
+                <a:solidFill>
+                  <a:srgbClr val="171FE2"/>
+                </a:solidFill>
+                <a:latin typeface="Consolas" panose="020B0609020204030204" pitchFamily="49" charset="0"/>
+              </a:rPr>
+              <a:t>docker</a:t>
+            </a:r>
+            <a:r>
+              <a:rPr lang="it-IT" sz="1600" dirty="0">
+                <a:solidFill>
+                  <a:srgbClr val="171FE2"/>
+                </a:solidFill>
+                <a:latin typeface="Consolas" panose="020B0609020204030204" pitchFamily="49" charset="0"/>
+              </a:rPr>
+              <a:t> system </a:t>
+            </a:r>
+            <a:r>
+              <a:rPr lang="it-IT" sz="1600" dirty="0" err="1">
+                <a:solidFill>
+                  <a:srgbClr val="171FE2"/>
+                </a:solidFill>
+                <a:latin typeface="Consolas" panose="020B0609020204030204" pitchFamily="49" charset="0"/>
+              </a:rPr>
+              <a:t>df</a:t>
+            </a:r>
+            <a:r>
+              <a:rPr lang="it-IT" sz="1600" dirty="0">
+                <a:solidFill>
+                  <a:srgbClr val="171FE2"/>
+                </a:solidFill>
+                <a:latin typeface="Consolas" panose="020B0609020204030204" pitchFamily="49" charset="0"/>
+              </a:rPr>
+              <a:t> -v</a:t>
+            </a:r>
+            <a:endParaRPr lang="it-IT" dirty="0"/>
+          </a:p>
+          <a:p>
+            <a:endParaRPr lang="it-IT" dirty="0"/>
+          </a:p>
+          <a:p>
             <a:r>
               <a:rPr lang="it-IT" b="1" dirty="0"/>
               <a:t>Come svuotarla</a:t>
@@ -7695,7 +8171,13 @@
           <a:p>
             <a:r>
               <a:rPr lang="it-IT" dirty="0"/>
-              <a:t>Tutte le cache inutilizzate (immagini, container fermati, reti, cache build):</a:t>
+              <a:t>Tutte le cache inutilizzate (immagini NON taggate, container fermati, </a:t>
+            </a:r>
+          </a:p>
+          <a:p>
+            <a:r>
+              <a:rPr lang="it-IT" dirty="0"/>
+              <a:t>reti, cache build):</a:t>
             </a:r>
           </a:p>
           <a:p>
@@ -7719,7 +8201,381 @@
             </a:r>
           </a:p>
           <a:p>
+            <a:r>
+              <a:rPr lang="it-IT" dirty="0"/>
+              <a:t>Tutte le cache inutilizzate compresi i volumi e le immagini taggate:</a:t>
+            </a:r>
+          </a:p>
+          <a:p>
+            <a:r>
+              <a:rPr lang="it-IT" sz="1600" dirty="0" err="1">
+                <a:solidFill>
+                  <a:srgbClr val="171FE2"/>
+                </a:solidFill>
+                <a:latin typeface="Consolas" panose="020B0609020204030204" pitchFamily="49" charset="0"/>
+              </a:rPr>
+              <a:t>docker</a:t>
+            </a:r>
+            <a:r>
+              <a:rPr lang="it-IT" sz="1600" dirty="0">
+                <a:solidFill>
+                  <a:srgbClr val="171FE2"/>
+                </a:solidFill>
+                <a:latin typeface="Consolas" panose="020B0609020204030204" pitchFamily="49" charset="0"/>
+              </a:rPr>
+              <a:t> system prune –a --</a:t>
+            </a:r>
+            <a:r>
+              <a:rPr lang="it-IT" sz="1600" dirty="0" err="1">
+                <a:solidFill>
+                  <a:srgbClr val="171FE2"/>
+                </a:solidFill>
+                <a:latin typeface="Consolas" panose="020B0609020204030204" pitchFamily="49" charset="0"/>
+              </a:rPr>
+              <a:t>volumes</a:t>
+            </a:r>
+            <a:endParaRPr lang="it-IT" sz="1600" dirty="0">
+              <a:solidFill>
+                <a:srgbClr val="171FE2"/>
+              </a:solidFill>
+              <a:latin typeface="Consolas" panose="020B0609020204030204" pitchFamily="49" charset="0"/>
+            </a:endParaRPr>
+          </a:p>
+          <a:p>
             <a:endParaRPr lang="it-IT" dirty="0"/>
+          </a:p>
+        </p:txBody>
+      </p:sp>
+      <p:graphicFrame>
+        <p:nvGraphicFramePr>
+          <p:cNvPr id="4" name="Tabella 3">
+            <a:extLst>
+              <a:ext uri="{FF2B5EF4-FFF2-40B4-BE49-F238E27FC236}">
+                <a16:creationId xmlns:a16="http://schemas.microsoft.com/office/drawing/2014/main" id="{3BDE9489-C0C8-069B-03A3-BB8C3F895CF4}"/>
+              </a:ext>
+            </a:extLst>
+          </p:cNvPr>
+          <p:cNvGraphicFramePr>
+            <a:graphicFrameLocks noGrp="1"/>
+          </p:cNvGraphicFramePr>
+          <p:nvPr>
+            <p:extLst>
+              <p:ext uri="{D42A27DB-BD31-4B8C-83A1-F6EECF244321}">
+                <p14:modId xmlns:p14="http://schemas.microsoft.com/office/powerpoint/2010/main" val="709819154"/>
+              </p:ext>
+            </p:extLst>
+          </p:nvPr>
+        </p:nvGraphicFramePr>
+        <p:xfrm>
+          <a:off x="5057486" y="1610929"/>
+          <a:ext cx="5220372" cy="1463040"/>
+        </p:xfrm>
+        <a:graphic>
+          <a:graphicData uri="http://schemas.openxmlformats.org/drawingml/2006/table">
+            <a:tbl>
+              <a:tblPr firstRow="1" bandRow="1">
+                <a:tableStyleId>{5C22544A-7EE6-4342-B048-85BDC9FD1C3A}</a:tableStyleId>
+              </a:tblPr>
+              <a:tblGrid>
+                <a:gridCol w="1305093">
+                  <a:extLst>
+                    <a:ext uri="{9D8B030D-6E8A-4147-A177-3AD203B41FA5}">
+                      <a16:colId xmlns:a16="http://schemas.microsoft.com/office/drawing/2014/main" val="1893753600"/>
+                    </a:ext>
+                  </a:extLst>
+                </a:gridCol>
+                <a:gridCol w="1305093">
+                  <a:extLst>
+                    <a:ext uri="{9D8B030D-6E8A-4147-A177-3AD203B41FA5}">
+                      <a16:colId xmlns:a16="http://schemas.microsoft.com/office/drawing/2014/main" val="404553342"/>
+                    </a:ext>
+                  </a:extLst>
+                </a:gridCol>
+                <a:gridCol w="1305093">
+                  <a:extLst>
+                    <a:ext uri="{9D8B030D-6E8A-4147-A177-3AD203B41FA5}">
+                      <a16:colId xmlns:a16="http://schemas.microsoft.com/office/drawing/2014/main" val="99885200"/>
+                    </a:ext>
+                  </a:extLst>
+                </a:gridCol>
+                <a:gridCol w="1305093">
+                  <a:extLst>
+                    <a:ext uri="{9D8B030D-6E8A-4147-A177-3AD203B41FA5}">
+                      <a16:colId xmlns:a16="http://schemas.microsoft.com/office/drawing/2014/main" val="3955230152"/>
+                    </a:ext>
+                  </a:extLst>
+                </a:gridCol>
+              </a:tblGrid>
+              <a:tr h="322503">
+                <a:tc>
+                  <a:txBody>
+                    <a:bodyPr/>
+                    <a:lstStyle/>
+                    <a:p>
+                      <a:r>
+                        <a:rPr lang="it-IT" dirty="0"/>
+                        <a:t>TYPE</a:t>
+                      </a:r>
+                    </a:p>
+                  </a:txBody>
+                  <a:tcPr/>
+                </a:tc>
+                <a:tc>
+                  <a:txBody>
+                    <a:bodyPr/>
+                    <a:lstStyle/>
+                    <a:p>
+                      <a:r>
+                        <a:rPr lang="it-IT" dirty="0"/>
+                        <a:t>TOTAL</a:t>
+                      </a:r>
+                    </a:p>
+                  </a:txBody>
+                  <a:tcPr/>
+                </a:tc>
+                <a:tc>
+                  <a:txBody>
+                    <a:bodyPr/>
+                    <a:lstStyle/>
+                    <a:p>
+                      <a:r>
+                        <a:rPr lang="it-IT" dirty="0"/>
+                        <a:t>ACTIVE</a:t>
+                      </a:r>
+                    </a:p>
+                  </a:txBody>
+                  <a:tcPr/>
+                </a:tc>
+                <a:tc>
+                  <a:txBody>
+                    <a:bodyPr/>
+                    <a:lstStyle/>
+                    <a:p>
+                      <a:r>
+                        <a:rPr lang="it-IT" dirty="0"/>
+                        <a:t>SIZE</a:t>
+                      </a:r>
+                    </a:p>
+                  </a:txBody>
+                  <a:tcPr/>
+                </a:tc>
+                <a:extLst>
+                  <a:ext uri="{0D108BD9-81ED-4DB2-BD59-A6C34878D82A}">
+                    <a16:rowId xmlns:a16="http://schemas.microsoft.com/office/drawing/2014/main" val="291661921"/>
+                  </a:ext>
+                </a:extLst>
+              </a:tr>
+              <a:tr h="322503">
+                <a:tc>
+                  <a:txBody>
+                    <a:bodyPr/>
+                    <a:lstStyle/>
+                    <a:p>
+                      <a:r>
+                        <a:rPr lang="it-IT" dirty="0"/>
+                        <a:t>Images</a:t>
+                      </a:r>
+                    </a:p>
+                  </a:txBody>
+                  <a:tcPr/>
+                </a:tc>
+                <a:tc>
+                  <a:txBody>
+                    <a:bodyPr/>
+                    <a:lstStyle/>
+                    <a:p>
+                      <a:r>
+                        <a:rPr lang="it-IT" dirty="0"/>
+                        <a:t>5 </a:t>
+                      </a:r>
+                    </a:p>
+                  </a:txBody>
+                  <a:tcPr/>
+                </a:tc>
+                <a:tc>
+                  <a:txBody>
+                    <a:bodyPr/>
+                    <a:lstStyle/>
+                    <a:p>
+                      <a:r>
+                        <a:rPr lang="it-IT" dirty="0"/>
+                        <a:t>2</a:t>
+                      </a:r>
+                    </a:p>
+                  </a:txBody>
+                  <a:tcPr/>
+                </a:tc>
+                <a:tc>
+                  <a:txBody>
+                    <a:bodyPr/>
+                    <a:lstStyle/>
+                    <a:p>
+                      <a:r>
+                        <a:rPr lang="it-IT" dirty="0"/>
+                        <a:t>1.8GB</a:t>
+                      </a:r>
+                    </a:p>
+                  </a:txBody>
+                  <a:tcPr/>
+                </a:tc>
+                <a:extLst>
+                  <a:ext uri="{0D108BD9-81ED-4DB2-BD59-A6C34878D82A}">
+                    <a16:rowId xmlns:a16="http://schemas.microsoft.com/office/drawing/2014/main" val="4219149830"/>
+                  </a:ext>
+                </a:extLst>
+              </a:tr>
+              <a:tr h="322503">
+                <a:tc>
+                  <a:txBody>
+                    <a:bodyPr/>
+                    <a:lstStyle/>
+                    <a:p>
+                      <a:r>
+                        <a:rPr lang="it-IT" dirty="0"/>
+                        <a:t>Containers</a:t>
+                      </a:r>
+                    </a:p>
+                  </a:txBody>
+                  <a:tcPr/>
+                </a:tc>
+                <a:tc>
+                  <a:txBody>
+                    <a:bodyPr/>
+                    <a:lstStyle/>
+                    <a:p>
+                      <a:r>
+                        <a:rPr lang="it-IT" dirty="0"/>
+                        <a:t>2</a:t>
+                      </a:r>
+                    </a:p>
+                  </a:txBody>
+                  <a:tcPr/>
+                </a:tc>
+                <a:tc>
+                  <a:txBody>
+                    <a:bodyPr/>
+                    <a:lstStyle/>
+                    <a:p>
+                      <a:r>
+                        <a:rPr lang="it-IT" dirty="0"/>
+                        <a:t>0</a:t>
+                      </a:r>
+                    </a:p>
+                  </a:txBody>
+                  <a:tcPr/>
+                </a:tc>
+                <a:tc>
+                  <a:txBody>
+                    <a:bodyPr/>
+                    <a:lstStyle/>
+                    <a:p>
+                      <a:r>
+                        <a:rPr lang="it-IT" dirty="0"/>
+                        <a:t>0B</a:t>
+                      </a:r>
+                    </a:p>
+                  </a:txBody>
+                  <a:tcPr/>
+                </a:tc>
+                <a:extLst>
+                  <a:ext uri="{0D108BD9-81ED-4DB2-BD59-A6C34878D82A}">
+                    <a16:rowId xmlns:a16="http://schemas.microsoft.com/office/drawing/2014/main" val="275753317"/>
+                  </a:ext>
+                </a:extLst>
+              </a:tr>
+              <a:tr h="322503">
+                <a:tc>
+                  <a:txBody>
+                    <a:bodyPr/>
+                    <a:lstStyle/>
+                    <a:p>
+                      <a:r>
+                        <a:rPr lang="it-IT" dirty="0"/>
+                        <a:t>Build Cache </a:t>
+                      </a:r>
+                    </a:p>
+                  </a:txBody>
+                  <a:tcPr/>
+                </a:tc>
+                <a:tc>
+                  <a:txBody>
+                    <a:bodyPr/>
+                    <a:lstStyle/>
+                    <a:p>
+                      <a:r>
+                        <a:rPr lang="it-IT" dirty="0"/>
+                        <a:t>24</a:t>
+                      </a:r>
+                    </a:p>
+                  </a:txBody>
+                  <a:tcPr/>
+                </a:tc>
+                <a:tc>
+                  <a:txBody>
+                    <a:bodyPr/>
+                    <a:lstStyle/>
+                    <a:p>
+                      <a:r>
+                        <a:rPr lang="it-IT" dirty="0"/>
+                        <a:t>0</a:t>
+                      </a:r>
+                    </a:p>
+                  </a:txBody>
+                  <a:tcPr/>
+                </a:tc>
+                <a:tc>
+                  <a:txBody>
+                    <a:bodyPr/>
+                    <a:lstStyle/>
+                    <a:p>
+                      <a:r>
+                        <a:rPr lang="it-IT" dirty="0"/>
+                        <a:t>950MB</a:t>
+                      </a:r>
+                    </a:p>
+                  </a:txBody>
+                  <a:tcPr/>
+                </a:tc>
+                <a:extLst>
+                  <a:ext uri="{0D108BD9-81ED-4DB2-BD59-A6C34878D82A}">
+                    <a16:rowId xmlns:a16="http://schemas.microsoft.com/office/drawing/2014/main" val="2474470412"/>
+                  </a:ext>
+                </a:extLst>
+              </a:tr>
+            </a:tbl>
+          </a:graphicData>
+        </a:graphic>
+      </p:graphicFrame>
+      <p:sp>
+        <p:nvSpPr>
+          <p:cNvPr id="5" name="Segnaposto numero diapositiva 11">
+            <a:extLst>
+              <a:ext uri="{FF2B5EF4-FFF2-40B4-BE49-F238E27FC236}">
+                <a16:creationId xmlns:a16="http://schemas.microsoft.com/office/drawing/2014/main" id="{C51124D5-C2B3-3973-EABC-7F07A263EF30}"/>
+              </a:ext>
+            </a:extLst>
+          </p:cNvPr>
+          <p:cNvSpPr>
+            <a:spLocks noGrp="1"/>
+          </p:cNvSpPr>
+          <p:nvPr>
+            <p:ph type="sldNum" sz="quarter" idx="12"/>
+          </p:nvPr>
+        </p:nvSpPr>
+        <p:spPr>
+          <a:xfrm>
+            <a:off x="8610600" y="6356350"/>
+            <a:ext cx="2743200" cy="365125"/>
+          </a:xfrm>
+        </p:spPr>
+        <p:txBody>
+          <a:bodyPr/>
+          <a:lstStyle/>
+          <a:p>
+            <a:r>
+              <a:rPr lang="it-IT" dirty="0"/>
+              <a:t>22</a:t>
+            </a:r>
           </a:p>
         </p:txBody>
       </p:sp>
@@ -7741,7 +8597,13 @@
   <p:cSld>
     <p:spTree>
       <p:nvGrpSpPr>
-        <p:cNvPr id="1" name=""/>
+        <p:cNvPr id="1" name="">
+          <a:extLst>
+            <a:ext uri="{FF2B5EF4-FFF2-40B4-BE49-F238E27FC236}">
+              <a16:creationId xmlns:a16="http://schemas.microsoft.com/office/drawing/2014/main" id="{CA89B584-8B4F-5FCB-668E-9915CF150E34}"/>
+            </a:ext>
+          </a:extLst>
+        </p:cNvPr>
         <p:cNvGrpSpPr/>
         <p:nvPr/>
       </p:nvGrpSpPr>
@@ -7755,10 +8617,388 @@
       </p:grpSpPr>
       <p:sp>
         <p:nvSpPr>
-          <p:cNvPr id="2" name="Titolo 1">
+          <p:cNvPr id="3" name="Contenuto della lezione">
             <a:extLst>
               <a:ext uri="{FF2B5EF4-FFF2-40B4-BE49-F238E27FC236}">
-                <a16:creationId xmlns:a16="http://schemas.microsoft.com/office/drawing/2014/main" id="{B5E02355-4941-9C10-CA1D-649F04DB5143}"/>
+                <a16:creationId xmlns:a16="http://schemas.microsoft.com/office/drawing/2014/main" id="{76265E5D-82A3-8C3C-113B-DA288ABB994A}"/>
+              </a:ext>
+            </a:extLst>
+          </p:cNvPr>
+          <p:cNvSpPr>
+            <a:spLocks noGrp="1"/>
+          </p:cNvSpPr>
+          <p:nvPr>
+            <p:ph idx="1"/>
+          </p:nvPr>
+        </p:nvSpPr>
+        <p:spPr>
+          <a:xfrm>
+            <a:off x="1317319" y="1027315"/>
+            <a:ext cx="9557362" cy="4803369"/>
+          </a:xfrm>
+        </p:spPr>
+        <p:txBody>
+          <a:bodyPr/>
+          <a:lstStyle/>
+          <a:p>
+            <a:r>
+              <a:rPr lang="it-IT" b="1" dirty="0"/>
+              <a:t>Docker non permette di eliminare risorse attualmente in uso</a:t>
+            </a:r>
+            <a:r>
+              <a:rPr lang="it-IT" dirty="0"/>
+              <a:t> (container in esecuzione, immagini usate da container attivi, volumi montati, ecc.) senza prima fermarle/rimuoverle.</a:t>
+            </a:r>
+          </a:p>
+          <a:p>
+            <a:r>
+              <a:rPr lang="it-IT" dirty="0"/>
+              <a:t>Per eliminare anche i container attivi bisogna prima fermarli:</a:t>
+            </a:r>
+          </a:p>
+          <a:p>
+            <a:r>
+              <a:rPr lang="sv-SE" dirty="0">
+                <a:solidFill>
+                  <a:srgbClr val="171FE2"/>
+                </a:solidFill>
+                <a:latin typeface="Consolas" panose="020B0609020204030204" pitchFamily="49" charset="0"/>
+              </a:rPr>
+              <a:t>docker ps -aq | ForEach-Object { docker stop $_ }</a:t>
+            </a:r>
+          </a:p>
+          <a:p>
+            <a:r>
+              <a:rPr lang="sv-SE" dirty="0"/>
+              <a:t>e poi rimuoverli:</a:t>
+            </a:r>
+          </a:p>
+          <a:p>
+            <a:r>
+              <a:rPr lang="en-US" dirty="0">
+                <a:solidFill>
+                  <a:srgbClr val="171FE2"/>
+                </a:solidFill>
+                <a:latin typeface="Consolas" panose="020B0609020204030204" pitchFamily="49" charset="0"/>
+              </a:rPr>
+              <a:t>docker </a:t>
+            </a:r>
+            <a:r>
+              <a:rPr lang="en-US" dirty="0" err="1">
+                <a:solidFill>
+                  <a:srgbClr val="171FE2"/>
+                </a:solidFill>
+                <a:latin typeface="Consolas" panose="020B0609020204030204" pitchFamily="49" charset="0"/>
+              </a:rPr>
+              <a:t>ps</a:t>
+            </a:r>
+            <a:r>
+              <a:rPr lang="en-US" dirty="0">
+                <a:solidFill>
+                  <a:srgbClr val="171FE2"/>
+                </a:solidFill>
+                <a:latin typeface="Consolas" panose="020B0609020204030204" pitchFamily="49" charset="0"/>
+              </a:rPr>
+              <a:t> -</a:t>
+            </a:r>
+            <a:r>
+              <a:rPr lang="en-US" dirty="0" err="1">
+                <a:solidFill>
+                  <a:srgbClr val="171FE2"/>
+                </a:solidFill>
+                <a:latin typeface="Consolas" panose="020B0609020204030204" pitchFamily="49" charset="0"/>
+              </a:rPr>
+              <a:t>aq</a:t>
+            </a:r>
+            <a:r>
+              <a:rPr lang="en-US" dirty="0">
+                <a:solidFill>
+                  <a:srgbClr val="171FE2"/>
+                </a:solidFill>
+                <a:latin typeface="Consolas" panose="020B0609020204030204" pitchFamily="49" charset="0"/>
+              </a:rPr>
+              <a:t> | </a:t>
+            </a:r>
+            <a:r>
+              <a:rPr lang="en-US" dirty="0" err="1">
+                <a:solidFill>
+                  <a:srgbClr val="171FE2"/>
+                </a:solidFill>
+                <a:latin typeface="Consolas" panose="020B0609020204030204" pitchFamily="49" charset="0"/>
+              </a:rPr>
+              <a:t>ForEach</a:t>
+            </a:r>
+            <a:r>
+              <a:rPr lang="en-US" dirty="0">
+                <a:solidFill>
+                  <a:srgbClr val="171FE2"/>
+                </a:solidFill>
+                <a:latin typeface="Consolas" panose="020B0609020204030204" pitchFamily="49" charset="0"/>
+              </a:rPr>
+              <a:t>-Object { docker rm $_ }</a:t>
+            </a:r>
+          </a:p>
+          <a:p>
+            <a:r>
+              <a:rPr lang="it-IT" dirty="0"/>
+              <a:t>Dopodiché puoi pulire tutto (senza chiedere conferma: flag f):</a:t>
+            </a:r>
+          </a:p>
+          <a:p>
+            <a:r>
+              <a:rPr lang="it-IT" dirty="0" err="1">
+                <a:solidFill>
+                  <a:srgbClr val="171FE2"/>
+                </a:solidFill>
+                <a:latin typeface="Consolas" panose="020B0609020204030204" pitchFamily="49" charset="0"/>
+              </a:rPr>
+              <a:t>docker</a:t>
+            </a:r>
+            <a:r>
+              <a:rPr lang="it-IT" dirty="0">
+                <a:solidFill>
+                  <a:srgbClr val="171FE2"/>
+                </a:solidFill>
+                <a:latin typeface="Consolas" panose="020B0609020204030204" pitchFamily="49" charset="0"/>
+              </a:rPr>
+              <a:t> system prune -a --</a:t>
+            </a:r>
+            <a:r>
+              <a:rPr lang="it-IT" dirty="0" err="1">
+                <a:solidFill>
+                  <a:srgbClr val="171FE2"/>
+                </a:solidFill>
+                <a:latin typeface="Consolas" panose="020B0609020204030204" pitchFamily="49" charset="0"/>
+              </a:rPr>
+              <a:t>volumes</a:t>
+            </a:r>
+            <a:r>
+              <a:rPr lang="it-IT" dirty="0">
+                <a:solidFill>
+                  <a:srgbClr val="171FE2"/>
+                </a:solidFill>
+                <a:latin typeface="Consolas" panose="020B0609020204030204" pitchFamily="49" charset="0"/>
+              </a:rPr>
+              <a:t> –f</a:t>
+            </a:r>
+          </a:p>
+          <a:p>
+            <a:r>
+              <a:rPr lang="it-IT" dirty="0"/>
+              <a:t>Per capire cosa è rimasto adesso esegui:</a:t>
+            </a:r>
+          </a:p>
+          <a:p>
+            <a:r>
+              <a:rPr lang="it-IT" dirty="0" err="1">
+                <a:solidFill>
+                  <a:srgbClr val="171FE2"/>
+                </a:solidFill>
+                <a:latin typeface="Consolas" panose="020B0609020204030204" pitchFamily="49" charset="0"/>
+              </a:rPr>
+              <a:t>docker</a:t>
+            </a:r>
+            <a:r>
+              <a:rPr lang="it-IT" dirty="0">
+                <a:solidFill>
+                  <a:srgbClr val="171FE2"/>
+                </a:solidFill>
+                <a:latin typeface="Consolas" panose="020B0609020204030204" pitchFamily="49" charset="0"/>
+              </a:rPr>
+              <a:t> </a:t>
+            </a:r>
+            <a:r>
+              <a:rPr lang="it-IT" dirty="0" err="1">
+                <a:solidFill>
+                  <a:srgbClr val="171FE2"/>
+                </a:solidFill>
+                <a:latin typeface="Consolas" panose="020B0609020204030204" pitchFamily="49" charset="0"/>
+              </a:rPr>
+              <a:t>ps</a:t>
+            </a:r>
+            <a:r>
+              <a:rPr lang="it-IT" dirty="0">
+                <a:solidFill>
+                  <a:srgbClr val="171FE2"/>
+                </a:solidFill>
+                <a:latin typeface="Consolas" panose="020B0609020204030204" pitchFamily="49" charset="0"/>
+              </a:rPr>
+              <a:t> –a </a:t>
+            </a:r>
+          </a:p>
+          <a:p>
+            <a:r>
+              <a:rPr lang="it-IT" dirty="0" err="1">
+                <a:solidFill>
+                  <a:srgbClr val="171FE2"/>
+                </a:solidFill>
+                <a:latin typeface="Consolas" panose="020B0609020204030204" pitchFamily="49" charset="0"/>
+              </a:rPr>
+              <a:t>docker</a:t>
+            </a:r>
+            <a:r>
+              <a:rPr lang="it-IT" dirty="0">
+                <a:solidFill>
+                  <a:srgbClr val="171FE2"/>
+                </a:solidFill>
+                <a:latin typeface="Consolas" panose="020B0609020204030204" pitchFamily="49" charset="0"/>
+              </a:rPr>
+              <a:t> images</a:t>
+            </a:r>
+          </a:p>
+          <a:p>
+            <a:r>
+              <a:rPr lang="it-IT" dirty="0" err="1">
+                <a:solidFill>
+                  <a:srgbClr val="171FE2"/>
+                </a:solidFill>
+                <a:latin typeface="Consolas" panose="020B0609020204030204" pitchFamily="49" charset="0"/>
+              </a:rPr>
+              <a:t>docker</a:t>
+            </a:r>
+            <a:r>
+              <a:rPr lang="it-IT" dirty="0">
+                <a:solidFill>
+                  <a:srgbClr val="171FE2"/>
+                </a:solidFill>
+                <a:latin typeface="Consolas" panose="020B0609020204030204" pitchFamily="49" charset="0"/>
+              </a:rPr>
+              <a:t> volume </a:t>
+            </a:r>
+            <a:r>
+              <a:rPr lang="it-IT" dirty="0" err="1">
+                <a:solidFill>
+                  <a:srgbClr val="171FE2"/>
+                </a:solidFill>
+                <a:latin typeface="Consolas" panose="020B0609020204030204" pitchFamily="49" charset="0"/>
+              </a:rPr>
+              <a:t>ls</a:t>
+            </a:r>
+            <a:endParaRPr lang="it-IT" dirty="0">
+              <a:solidFill>
+                <a:srgbClr val="171FE2"/>
+              </a:solidFill>
+              <a:latin typeface="Consolas" panose="020B0609020204030204" pitchFamily="49" charset="0"/>
+            </a:endParaRPr>
+          </a:p>
+          <a:p>
+            <a:r>
+              <a:rPr lang="it-IT" dirty="0" err="1">
+                <a:solidFill>
+                  <a:srgbClr val="171FE2"/>
+                </a:solidFill>
+                <a:latin typeface="Consolas" panose="020B0609020204030204" pitchFamily="49" charset="0"/>
+              </a:rPr>
+              <a:t>docker</a:t>
+            </a:r>
+            <a:r>
+              <a:rPr lang="it-IT" dirty="0">
+                <a:solidFill>
+                  <a:srgbClr val="171FE2"/>
+                </a:solidFill>
+                <a:latin typeface="Consolas" panose="020B0609020204030204" pitchFamily="49" charset="0"/>
+              </a:rPr>
+              <a:t> network </a:t>
+            </a:r>
+            <a:r>
+              <a:rPr lang="it-IT" dirty="0" err="1">
+                <a:solidFill>
+                  <a:srgbClr val="171FE2"/>
+                </a:solidFill>
+                <a:latin typeface="Consolas" panose="020B0609020204030204" pitchFamily="49" charset="0"/>
+              </a:rPr>
+              <a:t>ls</a:t>
+            </a:r>
+            <a:endParaRPr lang="it-IT" dirty="0">
+              <a:solidFill>
+                <a:srgbClr val="171FE2"/>
+              </a:solidFill>
+              <a:latin typeface="Consolas" panose="020B0609020204030204" pitchFamily="49" charset="0"/>
+            </a:endParaRPr>
+          </a:p>
+          <a:p>
+            <a:r>
+              <a:rPr lang="it-IT" dirty="0"/>
+              <a:t>Ci accorgeremo che ciò che è sopravvissuto sono immagini, volumi e network di sistema.</a:t>
+            </a:r>
+          </a:p>
+        </p:txBody>
+      </p:sp>
+      <p:sp>
+        <p:nvSpPr>
+          <p:cNvPr id="2" name="Segnaposto numero diapositiva 11">
+            <a:extLst>
+              <a:ext uri="{FF2B5EF4-FFF2-40B4-BE49-F238E27FC236}">
+                <a16:creationId xmlns:a16="http://schemas.microsoft.com/office/drawing/2014/main" id="{2369414B-3D89-5DAA-890E-0B668DFA41CF}"/>
+              </a:ext>
+            </a:extLst>
+          </p:cNvPr>
+          <p:cNvSpPr>
+            <a:spLocks noGrp="1"/>
+          </p:cNvSpPr>
+          <p:nvPr>
+            <p:ph type="sldNum" sz="quarter" idx="12"/>
+          </p:nvPr>
+        </p:nvSpPr>
+        <p:spPr>
+          <a:xfrm>
+            <a:off x="8610600" y="6356350"/>
+            <a:ext cx="2743200" cy="365125"/>
+          </a:xfrm>
+        </p:spPr>
+        <p:txBody>
+          <a:bodyPr/>
+          <a:lstStyle/>
+          <a:p>
+            <a:r>
+              <a:rPr lang="it-IT" dirty="0"/>
+              <a:t>23</a:t>
+            </a:r>
+          </a:p>
+        </p:txBody>
+      </p:sp>
+    </p:spTree>
+    <p:extLst>
+      <p:ext uri="{BB962C8B-B14F-4D97-AF65-F5344CB8AC3E}">
+        <p14:creationId xmlns:p14="http://schemas.microsoft.com/office/powerpoint/2010/main" val="3776039681"/>
+      </p:ext>
+    </p:extLst>
+  </p:cSld>
+  <p:clrMapOvr>
+    <a:masterClrMapping/>
+  </p:clrMapOvr>
+</p:sld>
+</file>
+
+<file path=ppt/slides/slide26.xml><?xml version="1.0" encoding="utf-8"?>
+<p:sld xmlns:a="http://schemas.openxmlformats.org/drawingml/2006/main" xmlns:r="http://schemas.openxmlformats.org/officeDocument/2006/relationships" xmlns:p="http://schemas.openxmlformats.org/presentationml/2006/main">
+  <p:cSld>
+    <p:spTree>
+      <p:nvGrpSpPr>
+        <p:cNvPr id="1" name="">
+          <a:extLst>
+            <a:ext uri="{FF2B5EF4-FFF2-40B4-BE49-F238E27FC236}">
+              <a16:creationId xmlns:a16="http://schemas.microsoft.com/office/drawing/2014/main" id="{198DB40A-5A56-9833-49AE-78C6297FEB07}"/>
+            </a:ext>
+          </a:extLst>
+        </p:cNvPr>
+        <p:cNvGrpSpPr/>
+        <p:nvPr/>
+      </p:nvGrpSpPr>
+      <p:grpSpPr>
+        <a:xfrm>
+          <a:off x="0" y="0"/>
+          <a:ext cx="0" cy="0"/>
+          <a:chOff x="0" y="0"/>
+          <a:chExt cx="0" cy="0"/>
+        </a:xfrm>
+      </p:grpSpPr>
+      <p:sp>
+        <p:nvSpPr>
+          <p:cNvPr id="2" name="Titolo della lezione">
+            <a:extLst>
+              <a:ext uri="{FF2B5EF4-FFF2-40B4-BE49-F238E27FC236}">
+                <a16:creationId xmlns:a16="http://schemas.microsoft.com/office/drawing/2014/main" id="{E9B034FF-C57E-ACD8-A663-D791CA4A73E0}"/>
               </a:ext>
             </a:extLst>
           </p:cNvPr>
@@ -7769,16 +9009,107 @@
             <p:ph type="title"/>
           </p:nvPr>
         </p:nvSpPr>
-        <p:spPr/>
+        <p:spPr>
+          <a:xfrm>
+            <a:off x="838200" y="831206"/>
+            <a:ext cx="10515600" cy="314198"/>
+          </a:xfrm>
+        </p:spPr>
         <p:txBody>
           <a:bodyPr/>
           <a:lstStyle/>
           <a:p>
             <a:r>
-              <a:rPr lang="it-IT" spc="0" dirty="0">
-                <a:latin typeface="Neue Haas Grotesk Text Pro" panose="020B0504020202020204" pitchFamily="34" charset="0"/>
-              </a:rPr>
-              <a:t>GRAZIE PER L’ATTENZIONE</a:t>
+              <a:rPr lang="it-IT" dirty="0"/>
+              <a:t>LAB 5: Lo Stop "Gentile" vs "Brutale" e il comando Prune</a:t>
+            </a:r>
+          </a:p>
+        </p:txBody>
+      </p:sp>
+      <p:sp>
+        <p:nvSpPr>
+          <p:cNvPr id="3" name="Contenuto della lezione">
+            <a:extLst>
+              <a:ext uri="{FF2B5EF4-FFF2-40B4-BE49-F238E27FC236}">
+                <a16:creationId xmlns:a16="http://schemas.microsoft.com/office/drawing/2014/main" id="{D87A6DB2-4FC3-C80E-D9DA-3F51985ADB86}"/>
+              </a:ext>
+            </a:extLst>
+          </p:cNvPr>
+          <p:cNvSpPr>
+            <a:spLocks noGrp="1"/>
+          </p:cNvSpPr>
+          <p:nvPr>
+            <p:ph idx="1"/>
+          </p:nvPr>
+        </p:nvSpPr>
+        <p:spPr>
+          <a:xfrm>
+            <a:off x="1317319" y="1558742"/>
+            <a:ext cx="9557362" cy="4803369"/>
+          </a:xfrm>
+        </p:spPr>
+        <p:txBody>
+          <a:bodyPr/>
+          <a:lstStyle/>
+          <a:p>
+            <a:r>
+              <a:rPr lang="it-IT" b="1" dirty="0"/>
+              <a:t>Obiettivo</a:t>
+            </a:r>
+            <a:r>
+              <a:rPr lang="it-IT" dirty="0"/>
+              <a:t>: Capire la differenza tra SIGTERM e SIGKILL e ripulire il sistema senza lasciare container orfani sul PC.</a:t>
+            </a:r>
+          </a:p>
+          <a:p>
+            <a:r>
+              <a:rPr lang="it-IT" b="1" dirty="0"/>
+              <a:t>Traccia:</a:t>
+            </a:r>
+            <a:r>
+              <a:rPr lang="it-IT" dirty="0"/>
+              <a:t> Un server </a:t>
+            </a:r>
+            <a:r>
+              <a:rPr lang="it-IT" dirty="0" err="1"/>
+              <a:t>enterprise</a:t>
+            </a:r>
+            <a:r>
+              <a:rPr lang="it-IT" dirty="0"/>
+              <a:t> non può essere spento staccando la spina, altrimenti i database si corrompono. Dovete testare la differenza tra uno spegnimento controllato (che lascia al software il tempo di salvare i dati) e uno spegnimento immediato di emergenza. Infine, dovrete ripulire il PC da tutti i container nascosti e addormentati.</a:t>
+            </a:r>
+          </a:p>
+        </p:txBody>
+      </p:sp>
+      <p:sp>
+        <p:nvSpPr>
+          <p:cNvPr id="4" name="Segnaposto numero diapositiva 11">
+            <a:extLst>
+              <a:ext uri="{FF2B5EF4-FFF2-40B4-BE49-F238E27FC236}">
+                <a16:creationId xmlns:a16="http://schemas.microsoft.com/office/drawing/2014/main" id="{1BFAE118-85B6-5CBA-4F20-072A80BB294A}"/>
+              </a:ext>
+            </a:extLst>
+          </p:cNvPr>
+          <p:cNvSpPr>
+            <a:spLocks noGrp="1"/>
+          </p:cNvSpPr>
+          <p:nvPr>
+            <p:ph type="sldNum" sz="quarter" idx="12"/>
+          </p:nvPr>
+        </p:nvSpPr>
+        <p:spPr>
+          <a:xfrm>
+            <a:off x="8610600" y="6356350"/>
+            <a:ext cx="2743200" cy="365125"/>
+          </a:xfrm>
+        </p:spPr>
+        <p:txBody>
+          <a:bodyPr/>
+          <a:lstStyle/>
+          <a:p>
+            <a:r>
+              <a:rPr lang="it-IT" dirty="0"/>
+              <a:t>24</a:t>
             </a:r>
           </a:p>
         </p:txBody>
@@ -7786,7 +9117,1133 @@
     </p:spTree>
     <p:extLst>
       <p:ext uri="{BB962C8B-B14F-4D97-AF65-F5344CB8AC3E}">
-        <p14:creationId xmlns:p14="http://schemas.microsoft.com/office/powerpoint/2010/main" val="3003246572"/>
+        <p14:creationId xmlns:p14="http://schemas.microsoft.com/office/powerpoint/2010/main" val="1491290242"/>
+      </p:ext>
+    </p:extLst>
+  </p:cSld>
+  <p:clrMapOvr>
+    <a:masterClrMapping/>
+  </p:clrMapOvr>
+</p:sld>
+</file>
+
+<file path=ppt/slides/slide27.xml><?xml version="1.0" encoding="utf-8"?>
+<p:sld xmlns:a="http://schemas.openxmlformats.org/drawingml/2006/main" xmlns:r="http://schemas.openxmlformats.org/officeDocument/2006/relationships" xmlns:p="http://schemas.openxmlformats.org/presentationml/2006/main">
+  <p:cSld>
+    <p:spTree>
+      <p:nvGrpSpPr>
+        <p:cNvPr id="1" name="">
+          <a:extLst>
+            <a:ext uri="{FF2B5EF4-FFF2-40B4-BE49-F238E27FC236}">
+              <a16:creationId xmlns:a16="http://schemas.microsoft.com/office/drawing/2014/main" id="{FBFBD319-4D3D-D5CD-097D-519151B5A165}"/>
+            </a:ext>
+          </a:extLst>
+        </p:cNvPr>
+        <p:cNvGrpSpPr/>
+        <p:nvPr/>
+      </p:nvGrpSpPr>
+      <p:grpSpPr>
+        <a:xfrm>
+          <a:off x="0" y="0"/>
+          <a:ext cx="0" cy="0"/>
+          <a:chOff x="0" y="0"/>
+          <a:chExt cx="0" cy="0"/>
+        </a:xfrm>
+      </p:grpSpPr>
+      <p:sp>
+        <p:nvSpPr>
+          <p:cNvPr id="3" name="Contenuto della lezione">
+            <a:extLst>
+              <a:ext uri="{FF2B5EF4-FFF2-40B4-BE49-F238E27FC236}">
+                <a16:creationId xmlns:a16="http://schemas.microsoft.com/office/drawing/2014/main" id="{E99828EB-4876-4906-76FC-F7F8FC1D8FD3}"/>
+              </a:ext>
+            </a:extLst>
+          </p:cNvPr>
+          <p:cNvSpPr>
+            <a:spLocks noGrp="1"/>
+          </p:cNvSpPr>
+          <p:nvPr>
+            <p:ph idx="1"/>
+          </p:nvPr>
+        </p:nvSpPr>
+        <p:spPr>
+          <a:xfrm>
+            <a:off x="1317319" y="1027315"/>
+            <a:ext cx="9557362" cy="4803369"/>
+          </a:xfrm>
+        </p:spPr>
+        <p:txBody>
+          <a:bodyPr/>
+          <a:lstStyle/>
+          <a:p>
+            <a:r>
+              <a:rPr lang="it-IT" b="1" dirty="0"/>
+              <a:t>1. Il concetto di </a:t>
+            </a:r>
+            <a:r>
+              <a:rPr lang="it-IT" b="1" dirty="0" err="1"/>
+              <a:t>Graceful</a:t>
+            </a:r>
+            <a:r>
+              <a:rPr lang="it-IT" b="1" dirty="0"/>
+              <a:t> Shutdown (Stop vs </a:t>
+            </a:r>
+            <a:r>
+              <a:rPr lang="it-IT" b="1" dirty="0" err="1"/>
+              <a:t>Kill</a:t>
+            </a:r>
+            <a:r>
+              <a:rPr lang="it-IT" b="1" dirty="0"/>
+              <a:t>)</a:t>
+            </a:r>
+          </a:p>
+          <a:p>
+            <a:r>
+              <a:rPr lang="it-IT" dirty="0"/>
+              <a:t>Avviamo un container e monitoriamo i secondi che impiega a morire:</a:t>
+            </a:r>
+          </a:p>
+          <a:p>
+            <a:r>
+              <a:rPr lang="it-IT" dirty="0" err="1">
+                <a:solidFill>
+                  <a:srgbClr val="171FE2"/>
+                </a:solidFill>
+                <a:latin typeface="Consolas" panose="020B0609020204030204" pitchFamily="49" charset="0"/>
+              </a:rPr>
+              <a:t>docker</a:t>
+            </a:r>
+            <a:r>
+              <a:rPr lang="it-IT" dirty="0">
+                <a:solidFill>
+                  <a:srgbClr val="171FE2"/>
+                </a:solidFill>
+                <a:latin typeface="Consolas" panose="020B0609020204030204" pitchFamily="49" charset="0"/>
+              </a:rPr>
+              <a:t> </a:t>
+            </a:r>
+            <a:r>
+              <a:rPr lang="it-IT" dirty="0" err="1">
+                <a:solidFill>
+                  <a:srgbClr val="171FE2"/>
+                </a:solidFill>
+                <a:latin typeface="Consolas" panose="020B0609020204030204" pitchFamily="49" charset="0"/>
+              </a:rPr>
+              <a:t>run</a:t>
+            </a:r>
+            <a:r>
+              <a:rPr lang="it-IT" dirty="0">
+                <a:solidFill>
+                  <a:srgbClr val="171FE2"/>
+                </a:solidFill>
+                <a:latin typeface="Consolas" panose="020B0609020204030204" pitchFamily="49" charset="0"/>
+              </a:rPr>
+              <a:t> -d --name server-paziente </a:t>
+            </a:r>
+            <a:r>
+              <a:rPr lang="it-IT" dirty="0" err="1">
+                <a:solidFill>
+                  <a:srgbClr val="171FE2"/>
+                </a:solidFill>
+                <a:latin typeface="Consolas" panose="020B0609020204030204" pitchFamily="49" charset="0"/>
+              </a:rPr>
+              <a:t>nginx:latest</a:t>
+            </a:r>
+            <a:endParaRPr lang="it-IT" dirty="0">
+              <a:solidFill>
+                <a:srgbClr val="171FE2"/>
+              </a:solidFill>
+              <a:latin typeface="Consolas" panose="020B0609020204030204" pitchFamily="49" charset="0"/>
+            </a:endParaRPr>
+          </a:p>
+          <a:p>
+            <a:r>
+              <a:rPr lang="it-IT" dirty="0"/>
+              <a:t>Ora lanciamo il comando di stop standard e cronometriamo visivamente il tempo:</a:t>
+            </a:r>
+          </a:p>
+          <a:p>
+            <a:r>
+              <a:rPr lang="it-IT" dirty="0" err="1">
+                <a:solidFill>
+                  <a:srgbClr val="171FE2"/>
+                </a:solidFill>
+                <a:latin typeface="Consolas" panose="020B0609020204030204" pitchFamily="49" charset="0"/>
+              </a:rPr>
+              <a:t>docker</a:t>
+            </a:r>
+            <a:r>
+              <a:rPr lang="it-IT" dirty="0">
+                <a:solidFill>
+                  <a:srgbClr val="171FE2"/>
+                </a:solidFill>
+                <a:latin typeface="Consolas" panose="020B0609020204030204" pitchFamily="49" charset="0"/>
+              </a:rPr>
+              <a:t> stop server-paziente</a:t>
+            </a:r>
+          </a:p>
+          <a:p>
+            <a:r>
+              <a:rPr lang="it-IT" b="1" dirty="0" err="1"/>
+              <a:t>docker</a:t>
+            </a:r>
+            <a:r>
+              <a:rPr lang="it-IT" b="1" dirty="0"/>
+              <a:t> stop </a:t>
+            </a:r>
+            <a:r>
+              <a:rPr lang="it-IT" dirty="0"/>
+              <a:t>invia un segnale Linux chiamato </a:t>
+            </a:r>
+            <a:r>
+              <a:rPr lang="it-IT" b="1" dirty="0"/>
+              <a:t>SIGTERM</a:t>
+            </a:r>
+            <a:r>
+              <a:rPr lang="it-IT" dirty="0"/>
+              <a:t>. </a:t>
+            </a:r>
+          </a:p>
+          <a:p>
+            <a:r>
+              <a:rPr lang="it-IT" dirty="0"/>
+              <a:t>Comunica al container: </a:t>
+            </a:r>
+            <a:r>
+              <a:rPr lang="it-IT" i="1" dirty="0"/>
+              <a:t>"Guarda che sto per chiudere, salva i file aperti"</a:t>
+            </a:r>
+            <a:r>
+              <a:rPr lang="it-IT" dirty="0"/>
+              <a:t>. </a:t>
+            </a:r>
+          </a:p>
+          <a:p>
+            <a:r>
+              <a:rPr lang="it-IT" dirty="0">
+                <a:solidFill>
+                  <a:srgbClr val="171FE2"/>
+                </a:solidFill>
+              </a:rPr>
+              <a:t>Docker aspetta di default fino a 10 secondi. Se l'app non si spegne, la killa inviando il segnale </a:t>
+            </a:r>
+            <a:r>
+              <a:rPr lang="it-IT" b="1" dirty="0">
+                <a:solidFill>
+                  <a:srgbClr val="171FE2"/>
+                </a:solidFill>
+              </a:rPr>
+              <a:t>SIGKILL</a:t>
+            </a:r>
+            <a:r>
+              <a:rPr lang="it-IT" dirty="0">
+                <a:solidFill>
+                  <a:srgbClr val="171FE2"/>
+                </a:solidFill>
+              </a:rPr>
+              <a:t>.</a:t>
+            </a:r>
+          </a:p>
+          <a:p>
+            <a:r>
+              <a:rPr lang="it-IT" dirty="0"/>
+              <a:t>In alternativa, qualora il container non dovesse rispondere risultando bloccato, possiamo fare lo stop forzato:</a:t>
+            </a:r>
+          </a:p>
+          <a:p>
+            <a:r>
+              <a:rPr lang="it-IT" dirty="0" err="1">
+                <a:solidFill>
+                  <a:srgbClr val="171FE2"/>
+                </a:solidFill>
+                <a:latin typeface="Consolas" panose="020B0609020204030204" pitchFamily="49" charset="0"/>
+              </a:rPr>
+              <a:t>docker</a:t>
+            </a:r>
+            <a:r>
+              <a:rPr lang="it-IT" dirty="0">
+                <a:solidFill>
+                  <a:srgbClr val="171FE2"/>
+                </a:solidFill>
+                <a:latin typeface="Consolas" panose="020B0609020204030204" pitchFamily="49" charset="0"/>
+              </a:rPr>
+              <a:t> </a:t>
+            </a:r>
+            <a:r>
+              <a:rPr lang="it-IT" dirty="0" err="1">
+                <a:solidFill>
+                  <a:srgbClr val="171FE2"/>
+                </a:solidFill>
+                <a:latin typeface="Consolas" panose="020B0609020204030204" pitchFamily="49" charset="0"/>
+              </a:rPr>
+              <a:t>kill</a:t>
+            </a:r>
+            <a:r>
+              <a:rPr lang="it-IT" dirty="0">
+                <a:solidFill>
+                  <a:srgbClr val="171FE2"/>
+                </a:solidFill>
+                <a:latin typeface="Consolas" panose="020B0609020204030204" pitchFamily="49" charset="0"/>
+              </a:rPr>
+              <a:t> server-paziente</a:t>
+            </a:r>
+          </a:p>
+          <a:p>
+            <a:r>
+              <a:rPr lang="it-IT" dirty="0"/>
+              <a:t>Il processo viene terminato all'istante. Nessuna possibilità di eseguire operazioni di </a:t>
+            </a:r>
+            <a:r>
+              <a:rPr lang="it-IT" dirty="0" err="1"/>
+              <a:t>cleanup</a:t>
+            </a:r>
+            <a:r>
+              <a:rPr lang="it-IT" dirty="0"/>
+              <a:t> (non darà il tempo ad un </a:t>
+            </a:r>
+            <a:r>
+              <a:rPr lang="it-IT" dirty="0" err="1"/>
+              <a:t>db</a:t>
+            </a:r>
+            <a:r>
+              <a:rPr lang="it-IT" dirty="0"/>
+              <a:t> di salvare dati o ad una connessione di chiudersi).</a:t>
+            </a:r>
+          </a:p>
+          <a:p>
+            <a:r>
+              <a:rPr lang="it-IT" dirty="0">
+                <a:solidFill>
+                  <a:srgbClr val="171FE2"/>
+                </a:solidFill>
+              </a:rPr>
+              <a:t>Sia </a:t>
+            </a:r>
+            <a:r>
+              <a:rPr lang="it-IT" dirty="0" err="1">
+                <a:solidFill>
+                  <a:srgbClr val="171FE2"/>
+                </a:solidFill>
+              </a:rPr>
+              <a:t>docker</a:t>
+            </a:r>
+            <a:r>
+              <a:rPr lang="it-IT" dirty="0">
+                <a:solidFill>
+                  <a:srgbClr val="171FE2"/>
+                </a:solidFill>
+              </a:rPr>
+              <a:t> stop che </a:t>
+            </a:r>
+            <a:r>
+              <a:rPr lang="it-IT" dirty="0" err="1">
+                <a:solidFill>
+                  <a:srgbClr val="171FE2"/>
+                </a:solidFill>
+              </a:rPr>
+              <a:t>docker</a:t>
+            </a:r>
+            <a:r>
+              <a:rPr lang="it-IT" dirty="0">
+                <a:solidFill>
+                  <a:srgbClr val="171FE2"/>
+                </a:solidFill>
+              </a:rPr>
+              <a:t> </a:t>
+            </a:r>
+            <a:r>
+              <a:rPr lang="it-IT" dirty="0" err="1">
+                <a:solidFill>
+                  <a:srgbClr val="171FE2"/>
+                </a:solidFill>
+              </a:rPr>
+              <a:t>kill</a:t>
+            </a:r>
+            <a:r>
+              <a:rPr lang="it-IT" dirty="0">
+                <a:solidFill>
+                  <a:srgbClr val="171FE2"/>
+                </a:solidFill>
+              </a:rPr>
+              <a:t> </a:t>
+            </a:r>
+            <a:r>
+              <a:rPr lang="it-IT" b="1" dirty="0">
+                <a:solidFill>
+                  <a:srgbClr val="171FE2"/>
+                </a:solidFill>
+              </a:rPr>
+              <a:t>terminano il container</a:t>
+            </a:r>
+            <a:r>
+              <a:rPr lang="it-IT" dirty="0">
+                <a:solidFill>
+                  <a:srgbClr val="171FE2"/>
+                </a:solidFill>
+              </a:rPr>
+              <a:t>, ma </a:t>
+            </a:r>
+            <a:r>
+              <a:rPr lang="it-IT" b="1" dirty="0">
+                <a:solidFill>
+                  <a:srgbClr val="171FE2"/>
+                </a:solidFill>
+              </a:rPr>
+              <a:t>non lo eliminano</a:t>
+            </a:r>
+            <a:r>
+              <a:rPr lang="it-IT" dirty="0">
+                <a:solidFill>
+                  <a:srgbClr val="171FE2"/>
+                </a:solidFill>
+              </a:rPr>
+              <a:t>.</a:t>
+            </a:r>
+          </a:p>
+        </p:txBody>
+      </p:sp>
+      <p:sp>
+        <p:nvSpPr>
+          <p:cNvPr id="4" name="Segnaposto numero diapositiva 11">
+            <a:extLst>
+              <a:ext uri="{FF2B5EF4-FFF2-40B4-BE49-F238E27FC236}">
+                <a16:creationId xmlns:a16="http://schemas.microsoft.com/office/drawing/2014/main" id="{0DAB6522-AA7B-FBB1-C760-A5A3FB76B5AB}"/>
+              </a:ext>
+            </a:extLst>
+          </p:cNvPr>
+          <p:cNvSpPr>
+            <a:spLocks noGrp="1"/>
+          </p:cNvSpPr>
+          <p:nvPr>
+            <p:ph type="sldNum" sz="quarter" idx="12"/>
+          </p:nvPr>
+        </p:nvSpPr>
+        <p:spPr>
+          <a:xfrm>
+            <a:off x="8610600" y="6356350"/>
+            <a:ext cx="2743200" cy="365125"/>
+          </a:xfrm>
+        </p:spPr>
+        <p:txBody>
+          <a:bodyPr/>
+          <a:lstStyle/>
+          <a:p>
+            <a:r>
+              <a:rPr lang="it-IT" dirty="0"/>
+              <a:t>25</a:t>
+            </a:r>
+          </a:p>
+        </p:txBody>
+      </p:sp>
+    </p:spTree>
+    <p:extLst>
+      <p:ext uri="{BB962C8B-B14F-4D97-AF65-F5344CB8AC3E}">
+        <p14:creationId xmlns:p14="http://schemas.microsoft.com/office/powerpoint/2010/main" val="2491434374"/>
+      </p:ext>
+    </p:extLst>
+  </p:cSld>
+  <p:clrMapOvr>
+    <a:masterClrMapping/>
+  </p:clrMapOvr>
+</p:sld>
+</file>
+
+<file path=ppt/slides/slide28.xml><?xml version="1.0" encoding="utf-8"?>
+<p:sld xmlns:a="http://schemas.openxmlformats.org/drawingml/2006/main" xmlns:r="http://schemas.openxmlformats.org/officeDocument/2006/relationships" xmlns:p="http://schemas.openxmlformats.org/presentationml/2006/main">
+  <p:cSld>
+    <p:spTree>
+      <p:nvGrpSpPr>
+        <p:cNvPr id="1" name="">
+          <a:extLst>
+            <a:ext uri="{FF2B5EF4-FFF2-40B4-BE49-F238E27FC236}">
+              <a16:creationId xmlns:a16="http://schemas.microsoft.com/office/drawing/2014/main" id="{6CA3DDC1-27DF-685A-6720-66D1BD91EE18}"/>
+            </a:ext>
+          </a:extLst>
+        </p:cNvPr>
+        <p:cNvGrpSpPr/>
+        <p:nvPr/>
+      </p:nvGrpSpPr>
+      <p:grpSpPr>
+        <a:xfrm>
+          <a:off x="0" y="0"/>
+          <a:ext cx="0" cy="0"/>
+          <a:chOff x="0" y="0"/>
+          <a:chExt cx="0" cy="0"/>
+        </a:xfrm>
+      </p:grpSpPr>
+      <p:sp>
+        <p:nvSpPr>
+          <p:cNvPr id="3" name="Contenuto della lezione">
+            <a:extLst>
+              <a:ext uri="{FF2B5EF4-FFF2-40B4-BE49-F238E27FC236}">
+                <a16:creationId xmlns:a16="http://schemas.microsoft.com/office/drawing/2014/main" id="{7B3C232D-59CE-4A8B-D343-3C29BF0C6D12}"/>
+              </a:ext>
+            </a:extLst>
+          </p:cNvPr>
+          <p:cNvSpPr>
+            <a:spLocks noGrp="1"/>
+          </p:cNvSpPr>
+          <p:nvPr>
+            <p:ph idx="1"/>
+          </p:nvPr>
+        </p:nvSpPr>
+        <p:spPr>
+          <a:xfrm>
+            <a:off x="1077759" y="707275"/>
+            <a:ext cx="10036481" cy="5839829"/>
+          </a:xfrm>
+        </p:spPr>
+        <p:txBody>
+          <a:bodyPr/>
+          <a:lstStyle/>
+          <a:p>
+            <a:r>
+              <a:rPr lang="it-IT" b="1" dirty="0"/>
+              <a:t>2. Il dramma dei container addormentati (</a:t>
+            </a:r>
+            <a:r>
+              <a:rPr lang="it-IT" b="1" dirty="0" err="1"/>
+              <a:t>docker</a:t>
+            </a:r>
+            <a:r>
+              <a:rPr lang="it-IT" b="1" dirty="0"/>
+              <a:t> </a:t>
+            </a:r>
+            <a:r>
+              <a:rPr lang="it-IT" b="1" dirty="0" err="1"/>
+              <a:t>ps</a:t>
+            </a:r>
+            <a:r>
+              <a:rPr lang="it-IT" b="1" dirty="0"/>
+              <a:t> -a)</a:t>
+            </a:r>
+          </a:p>
+          <a:p>
+            <a:r>
+              <a:rPr lang="it-IT" dirty="0"/>
+              <a:t>Lanciando il comando di controllo:</a:t>
+            </a:r>
+          </a:p>
+          <a:p>
+            <a:r>
+              <a:rPr lang="it-IT" dirty="0" err="1">
+                <a:solidFill>
+                  <a:srgbClr val="171FE2"/>
+                </a:solidFill>
+                <a:latin typeface="Consolas" panose="020B0609020204030204" pitchFamily="49" charset="0"/>
+              </a:rPr>
+              <a:t>docker</a:t>
+            </a:r>
+            <a:r>
+              <a:rPr lang="it-IT" dirty="0">
+                <a:solidFill>
+                  <a:srgbClr val="171FE2"/>
+                </a:solidFill>
+                <a:latin typeface="Consolas" panose="020B0609020204030204" pitchFamily="49" charset="0"/>
+              </a:rPr>
+              <a:t> </a:t>
+            </a:r>
+            <a:r>
+              <a:rPr lang="it-IT" dirty="0" err="1">
+                <a:solidFill>
+                  <a:srgbClr val="171FE2"/>
+                </a:solidFill>
+                <a:latin typeface="Consolas" panose="020B0609020204030204" pitchFamily="49" charset="0"/>
+              </a:rPr>
+              <a:t>ps</a:t>
+            </a:r>
+            <a:endParaRPr lang="it-IT" dirty="0">
+              <a:solidFill>
+                <a:srgbClr val="171FE2"/>
+              </a:solidFill>
+              <a:latin typeface="Consolas" panose="020B0609020204030204" pitchFamily="49" charset="0"/>
+            </a:endParaRPr>
+          </a:p>
+          <a:p>
+            <a:r>
+              <a:rPr lang="it-IT" dirty="0"/>
+              <a:t>La lista risulterà vuota. Penseremmo che il PC sia pulito, tuttavia, eseguendo:</a:t>
+            </a:r>
+          </a:p>
+          <a:p>
+            <a:r>
+              <a:rPr lang="it-IT" dirty="0" err="1">
+                <a:solidFill>
+                  <a:srgbClr val="171FE2"/>
+                </a:solidFill>
+                <a:latin typeface="Consolas" panose="020B0609020204030204" pitchFamily="49" charset="0"/>
+              </a:rPr>
+              <a:t>docker</a:t>
+            </a:r>
+            <a:r>
+              <a:rPr lang="it-IT" dirty="0">
+                <a:solidFill>
+                  <a:srgbClr val="171FE2"/>
+                </a:solidFill>
+                <a:latin typeface="Consolas" panose="020B0609020204030204" pitchFamily="49" charset="0"/>
+              </a:rPr>
+              <a:t> </a:t>
+            </a:r>
+            <a:r>
+              <a:rPr lang="it-IT" dirty="0" err="1">
+                <a:solidFill>
+                  <a:srgbClr val="171FE2"/>
+                </a:solidFill>
+                <a:latin typeface="Consolas" panose="020B0609020204030204" pitchFamily="49" charset="0"/>
+              </a:rPr>
+              <a:t>ps</a:t>
+            </a:r>
+            <a:r>
+              <a:rPr lang="it-IT" dirty="0">
+                <a:solidFill>
+                  <a:srgbClr val="171FE2"/>
+                </a:solidFill>
+                <a:latin typeface="Consolas" panose="020B0609020204030204" pitchFamily="49" charset="0"/>
+              </a:rPr>
+              <a:t> –a</a:t>
+            </a:r>
+          </a:p>
+          <a:p>
+            <a:r>
+              <a:rPr lang="it-IT" dirty="0"/>
+              <a:t>Vedremo container in stato </a:t>
+            </a:r>
+            <a:r>
+              <a:rPr lang="it-IT" dirty="0" err="1"/>
+              <a:t>Exited</a:t>
+            </a:r>
+            <a:r>
+              <a:rPr lang="it-IT" dirty="0"/>
+              <a:t> (Spenti). </a:t>
+            </a:r>
+          </a:p>
+          <a:p>
+            <a:r>
+              <a:rPr lang="it-IT" dirty="0">
+                <a:solidFill>
+                  <a:srgbClr val="171FE2"/>
+                </a:solidFill>
+              </a:rPr>
+              <a:t>Un container spento </a:t>
+            </a:r>
+            <a:r>
+              <a:rPr lang="it-IT" b="1" dirty="0">
+                <a:solidFill>
+                  <a:srgbClr val="171FE2"/>
+                </a:solidFill>
+              </a:rPr>
+              <a:t>occupa ancora spazio sul disco rigido</a:t>
+            </a:r>
+            <a:r>
+              <a:rPr lang="it-IT" dirty="0">
+                <a:solidFill>
+                  <a:srgbClr val="171FE2"/>
+                </a:solidFill>
+              </a:rPr>
+              <a:t> perché Docker conserva il suo strato di scrittura (</a:t>
+            </a:r>
+            <a:r>
+              <a:rPr lang="it-IT" dirty="0" err="1">
+                <a:solidFill>
+                  <a:srgbClr val="171FE2"/>
+                </a:solidFill>
+              </a:rPr>
+              <a:t>writable</a:t>
+            </a:r>
+            <a:r>
+              <a:rPr lang="it-IT" dirty="0">
+                <a:solidFill>
+                  <a:srgbClr val="171FE2"/>
+                </a:solidFill>
+              </a:rPr>
+              <a:t> </a:t>
+            </a:r>
+            <a:r>
+              <a:rPr lang="it-IT" dirty="0" err="1">
+                <a:solidFill>
+                  <a:srgbClr val="171FE2"/>
+                </a:solidFill>
+              </a:rPr>
+              <a:t>layer</a:t>
+            </a:r>
+            <a:r>
+              <a:rPr lang="it-IT" dirty="0">
+                <a:solidFill>
+                  <a:srgbClr val="171FE2"/>
+                </a:solidFill>
+              </a:rPr>
+              <a:t>) nel caso decidessimo di riavviarlo con </a:t>
+            </a:r>
+            <a:r>
+              <a:rPr lang="it-IT" b="1" dirty="0" err="1">
+                <a:solidFill>
+                  <a:srgbClr val="171FE2"/>
+                </a:solidFill>
+              </a:rPr>
+              <a:t>docker</a:t>
+            </a:r>
+            <a:r>
+              <a:rPr lang="it-IT" b="1" dirty="0">
+                <a:solidFill>
+                  <a:srgbClr val="171FE2"/>
+                </a:solidFill>
+              </a:rPr>
+              <a:t> start</a:t>
+            </a:r>
+            <a:r>
+              <a:rPr lang="it-IT" dirty="0">
+                <a:solidFill>
+                  <a:srgbClr val="171FE2"/>
+                </a:solidFill>
+              </a:rPr>
+              <a:t>.</a:t>
+            </a:r>
+            <a:endParaRPr lang="it-IT" dirty="0">
+              <a:solidFill>
+                <a:srgbClr val="171FE2"/>
+              </a:solidFill>
+              <a:latin typeface="Consolas" panose="020B0609020204030204" pitchFamily="49" charset="0"/>
+            </a:endParaRPr>
+          </a:p>
+          <a:p>
+            <a:r>
+              <a:rPr lang="it-IT" b="1" dirty="0"/>
+              <a:t>3. La grande pulizia: Il comando Prune</a:t>
+            </a:r>
+          </a:p>
+          <a:p>
+            <a:r>
+              <a:rPr lang="it-IT" dirty="0"/>
+              <a:t>Per eliminare in un colpo solo tutti i container spenti ed evitare che i PC vadano in blocco memoria, usiamo il comando di sfoltimento:</a:t>
+            </a:r>
+          </a:p>
+          <a:p>
+            <a:r>
+              <a:rPr lang="it-IT" dirty="0" err="1">
+                <a:solidFill>
+                  <a:srgbClr val="171FE2"/>
+                </a:solidFill>
+                <a:latin typeface="Consolas" panose="020B0609020204030204" pitchFamily="49" charset="0"/>
+              </a:rPr>
+              <a:t>docker</a:t>
+            </a:r>
+            <a:r>
+              <a:rPr lang="it-IT" dirty="0">
+                <a:solidFill>
+                  <a:srgbClr val="171FE2"/>
+                </a:solidFill>
+                <a:latin typeface="Consolas" panose="020B0609020204030204" pitchFamily="49" charset="0"/>
+              </a:rPr>
+              <a:t> container prune </a:t>
+            </a:r>
+            <a:r>
+              <a:rPr lang="it-IT" dirty="0"/>
+              <a:t>oppure senza chiedere conferme: </a:t>
+            </a:r>
+            <a:r>
+              <a:rPr lang="it-IT" dirty="0" err="1">
+                <a:solidFill>
+                  <a:srgbClr val="171FE2"/>
+                </a:solidFill>
+                <a:latin typeface="Consolas" panose="020B0609020204030204" pitchFamily="49" charset="0"/>
+              </a:rPr>
+              <a:t>docker</a:t>
+            </a:r>
+            <a:r>
+              <a:rPr lang="it-IT" dirty="0">
+                <a:solidFill>
+                  <a:srgbClr val="171FE2"/>
+                </a:solidFill>
+                <a:latin typeface="Consolas" panose="020B0609020204030204" pitchFamily="49" charset="0"/>
+              </a:rPr>
+              <a:t> container prune –f</a:t>
+            </a:r>
+          </a:p>
+          <a:p>
+            <a:r>
+              <a:rPr lang="it-IT" dirty="0"/>
+              <a:t>Per rimuovere uno o più container nello specifico:</a:t>
+            </a:r>
+          </a:p>
+          <a:p>
+            <a:r>
+              <a:rPr lang="it-IT" dirty="0" err="1">
+                <a:solidFill>
+                  <a:srgbClr val="171FE2"/>
+                </a:solidFill>
+                <a:latin typeface="Consolas" panose="020B0609020204030204" pitchFamily="49" charset="0"/>
+              </a:rPr>
+              <a:t>docker</a:t>
+            </a:r>
+            <a:r>
+              <a:rPr lang="it-IT" dirty="0">
+                <a:solidFill>
+                  <a:srgbClr val="171FE2"/>
+                </a:solidFill>
+                <a:latin typeface="Consolas" panose="020B0609020204030204" pitchFamily="49" charset="0"/>
+              </a:rPr>
+              <a:t> </a:t>
+            </a:r>
+            <a:r>
+              <a:rPr lang="it-IT" dirty="0" err="1">
+                <a:solidFill>
+                  <a:srgbClr val="171FE2"/>
+                </a:solidFill>
+                <a:latin typeface="Consolas" panose="020B0609020204030204" pitchFamily="49" charset="0"/>
+              </a:rPr>
+              <a:t>rm</a:t>
+            </a:r>
+            <a:r>
+              <a:rPr lang="it-IT" dirty="0">
+                <a:solidFill>
+                  <a:srgbClr val="171FE2"/>
+                </a:solidFill>
+                <a:latin typeface="Consolas" panose="020B0609020204030204" pitchFamily="49" charset="0"/>
+              </a:rPr>
+              <a:t> nome-container </a:t>
+            </a:r>
+            <a:r>
+              <a:rPr lang="it-IT" dirty="0"/>
+              <a:t>oppure</a:t>
+            </a:r>
+            <a:r>
+              <a:rPr lang="it-IT" dirty="0">
+                <a:solidFill>
+                  <a:srgbClr val="171FE2"/>
+                </a:solidFill>
+                <a:latin typeface="Consolas" panose="020B0609020204030204" pitchFamily="49" charset="0"/>
+              </a:rPr>
+              <a:t> </a:t>
+            </a:r>
+            <a:r>
+              <a:rPr lang="it-IT" dirty="0" err="1">
+                <a:solidFill>
+                  <a:srgbClr val="171FE2"/>
+                </a:solidFill>
+                <a:latin typeface="Consolas" panose="020B0609020204030204" pitchFamily="49" charset="0"/>
+              </a:rPr>
+              <a:t>docker</a:t>
+            </a:r>
+            <a:r>
+              <a:rPr lang="it-IT" dirty="0">
+                <a:solidFill>
+                  <a:srgbClr val="171FE2"/>
+                </a:solidFill>
+                <a:latin typeface="Consolas" panose="020B0609020204030204" pitchFamily="49" charset="0"/>
+              </a:rPr>
+              <a:t> </a:t>
+            </a:r>
+            <a:r>
+              <a:rPr lang="it-IT" dirty="0" err="1">
+                <a:solidFill>
+                  <a:srgbClr val="171FE2"/>
+                </a:solidFill>
+                <a:latin typeface="Consolas" panose="020B0609020204030204" pitchFamily="49" charset="0"/>
+              </a:rPr>
+              <a:t>rm</a:t>
+            </a:r>
+            <a:r>
+              <a:rPr lang="it-IT" dirty="0">
+                <a:solidFill>
+                  <a:srgbClr val="171FE2"/>
+                </a:solidFill>
+                <a:latin typeface="Consolas" panose="020B0609020204030204" pitchFamily="49" charset="0"/>
+              </a:rPr>
+              <a:t> nome-container-1 nome-container-2 </a:t>
+            </a:r>
+          </a:p>
+          <a:p>
+            <a:r>
+              <a:rPr lang="it-IT" dirty="0"/>
+              <a:t>La pulizia nucleare che invece spazza tutto il sistema (</a:t>
+            </a:r>
+            <a:r>
+              <a:rPr lang="it-IT" dirty="0" err="1"/>
+              <a:t>immagini,container,cache,volumi,reti</a:t>
+            </a:r>
+            <a:r>
+              <a:rPr lang="it-IT" dirty="0"/>
+              <a:t>):</a:t>
+            </a:r>
+          </a:p>
+          <a:p>
+            <a:r>
+              <a:rPr lang="it-IT" dirty="0" err="1">
+                <a:solidFill>
+                  <a:srgbClr val="171FE2"/>
+                </a:solidFill>
+                <a:latin typeface="Consolas" panose="020B0609020204030204" pitchFamily="49" charset="0"/>
+              </a:rPr>
+              <a:t>docker</a:t>
+            </a:r>
+            <a:r>
+              <a:rPr lang="it-IT" dirty="0">
+                <a:solidFill>
+                  <a:srgbClr val="171FE2"/>
+                </a:solidFill>
+                <a:latin typeface="Consolas" panose="020B0609020204030204" pitchFamily="49" charset="0"/>
+              </a:rPr>
+              <a:t> system prune -a --</a:t>
+            </a:r>
+            <a:r>
+              <a:rPr lang="it-IT" dirty="0" err="1">
+                <a:solidFill>
+                  <a:srgbClr val="171FE2"/>
+                </a:solidFill>
+                <a:latin typeface="Consolas" panose="020B0609020204030204" pitchFamily="49" charset="0"/>
+              </a:rPr>
+              <a:t>volumes</a:t>
+            </a:r>
+            <a:endParaRPr lang="it-IT" dirty="0">
+              <a:solidFill>
+                <a:srgbClr val="171FE2"/>
+              </a:solidFill>
+              <a:latin typeface="Consolas" panose="020B0609020204030204" pitchFamily="49" charset="0"/>
+            </a:endParaRPr>
+          </a:p>
+          <a:p>
+            <a:endParaRPr lang="it-IT" dirty="0">
+              <a:solidFill>
+                <a:srgbClr val="171FE2"/>
+              </a:solidFill>
+              <a:latin typeface="Consolas" panose="020B0609020204030204" pitchFamily="49" charset="0"/>
+            </a:endParaRPr>
+          </a:p>
+          <a:p>
+            <a:endParaRPr lang="it-IT" dirty="0">
+              <a:solidFill>
+                <a:srgbClr val="171FE2"/>
+              </a:solidFill>
+              <a:latin typeface="Consolas" panose="020B0609020204030204" pitchFamily="49" charset="0"/>
+            </a:endParaRPr>
+          </a:p>
+        </p:txBody>
+      </p:sp>
+      <p:sp>
+        <p:nvSpPr>
+          <p:cNvPr id="4" name="Segnaposto numero diapositiva 11">
+            <a:extLst>
+              <a:ext uri="{FF2B5EF4-FFF2-40B4-BE49-F238E27FC236}">
+                <a16:creationId xmlns:a16="http://schemas.microsoft.com/office/drawing/2014/main" id="{562F718B-8B5B-F8AD-148C-22AC520D529B}"/>
+              </a:ext>
+            </a:extLst>
+          </p:cNvPr>
+          <p:cNvSpPr>
+            <a:spLocks noGrp="1"/>
+          </p:cNvSpPr>
+          <p:nvPr>
+            <p:ph type="sldNum" sz="quarter" idx="12"/>
+          </p:nvPr>
+        </p:nvSpPr>
+        <p:spPr>
+          <a:xfrm>
+            <a:off x="8610600" y="6356350"/>
+            <a:ext cx="2743200" cy="365125"/>
+          </a:xfrm>
+        </p:spPr>
+        <p:txBody>
+          <a:bodyPr/>
+          <a:lstStyle/>
+          <a:p>
+            <a:r>
+              <a:rPr lang="it-IT" dirty="0"/>
+              <a:t>26</a:t>
+            </a:r>
+          </a:p>
+        </p:txBody>
+      </p:sp>
+    </p:spTree>
+    <p:extLst>
+      <p:ext uri="{BB962C8B-B14F-4D97-AF65-F5344CB8AC3E}">
+        <p14:creationId xmlns:p14="http://schemas.microsoft.com/office/powerpoint/2010/main" val="61938554"/>
+      </p:ext>
+    </p:extLst>
+  </p:cSld>
+  <p:clrMapOvr>
+    <a:masterClrMapping/>
+  </p:clrMapOvr>
+</p:sld>
+</file>
+
+<file path=ppt/slides/slide29.xml><?xml version="1.0" encoding="utf-8"?>
+<p:sld xmlns:a="http://schemas.openxmlformats.org/drawingml/2006/main" xmlns:r="http://schemas.openxmlformats.org/officeDocument/2006/relationships" xmlns:p="http://schemas.openxmlformats.org/presentationml/2006/main">
+  <p:cSld>
+    <p:spTree>
+      <p:nvGrpSpPr>
+        <p:cNvPr id="1" name="">
+          <a:extLst>
+            <a:ext uri="{FF2B5EF4-FFF2-40B4-BE49-F238E27FC236}">
+              <a16:creationId xmlns:a16="http://schemas.microsoft.com/office/drawing/2014/main" id="{123E3F96-7973-32FD-1242-B81F65722148}"/>
+            </a:ext>
+          </a:extLst>
+        </p:cNvPr>
+        <p:cNvGrpSpPr/>
+        <p:nvPr/>
+      </p:nvGrpSpPr>
+      <p:grpSpPr>
+        <a:xfrm>
+          <a:off x="0" y="0"/>
+          <a:ext cx="0" cy="0"/>
+          <a:chOff x="0" y="0"/>
+          <a:chExt cx="0" cy="0"/>
+        </a:xfrm>
+      </p:grpSpPr>
+      <p:sp>
+        <p:nvSpPr>
+          <p:cNvPr id="2" name="Titolo della lezione">
+            <a:extLst>
+              <a:ext uri="{FF2B5EF4-FFF2-40B4-BE49-F238E27FC236}">
+                <a16:creationId xmlns:a16="http://schemas.microsoft.com/office/drawing/2014/main" id="{77FA7D05-5E5B-1CD0-2EC2-549F02AC9544}"/>
+              </a:ext>
+            </a:extLst>
+          </p:cNvPr>
+          <p:cNvSpPr>
+            <a:spLocks noGrp="1"/>
+          </p:cNvSpPr>
+          <p:nvPr>
+            <p:ph type="title"/>
+          </p:nvPr>
+        </p:nvSpPr>
+        <p:spPr>
+          <a:xfrm>
+            <a:off x="838200" y="831206"/>
+            <a:ext cx="10515600" cy="314198"/>
+          </a:xfrm>
+        </p:spPr>
+        <p:txBody>
+          <a:bodyPr/>
+          <a:lstStyle/>
+          <a:p>
+            <a:r>
+              <a:rPr lang="it-IT" dirty="0"/>
+              <a:t>LAB 6: Riepilogo 1</a:t>
+            </a:r>
+          </a:p>
+        </p:txBody>
+      </p:sp>
+      <p:sp>
+        <p:nvSpPr>
+          <p:cNvPr id="3" name="Contenuto della lezione">
+            <a:extLst>
+              <a:ext uri="{FF2B5EF4-FFF2-40B4-BE49-F238E27FC236}">
+                <a16:creationId xmlns:a16="http://schemas.microsoft.com/office/drawing/2014/main" id="{CD735D12-2B50-C020-2F52-C99E77F419F8}"/>
+              </a:ext>
+            </a:extLst>
+          </p:cNvPr>
+          <p:cNvSpPr>
+            <a:spLocks noGrp="1"/>
+          </p:cNvSpPr>
+          <p:nvPr>
+            <p:ph idx="1"/>
+          </p:nvPr>
+        </p:nvSpPr>
+        <p:spPr>
+          <a:xfrm>
+            <a:off x="1317319" y="1558742"/>
+            <a:ext cx="9557362" cy="4803369"/>
+          </a:xfrm>
+        </p:spPr>
+        <p:txBody>
+          <a:bodyPr/>
+          <a:lstStyle/>
+          <a:p>
+            <a:r>
+              <a:rPr lang="it-IT" b="1" dirty="0"/>
+              <a:t>Traccia:</a:t>
+            </a:r>
+            <a:r>
+              <a:rPr lang="it-IT" dirty="0"/>
+              <a:t> </a:t>
+            </a:r>
+          </a:p>
+          <a:p>
+            <a:pPr marL="342900" indent="-342900">
+              <a:buFont typeface="+mj-lt"/>
+              <a:buAutoNum type="arabicPeriod"/>
+            </a:pPr>
+            <a:r>
+              <a:rPr lang="it-IT" dirty="0"/>
+              <a:t>Avviare due server web indipendenti (Alfa e Beta) usando la stessa immagine di </a:t>
+            </a:r>
+            <a:r>
+              <a:rPr lang="it-IT" dirty="0" err="1"/>
+              <a:t>Nginx</a:t>
+            </a:r>
+            <a:r>
+              <a:rPr lang="it-IT" dirty="0"/>
+              <a:t>.</a:t>
+            </a:r>
+          </a:p>
+          <a:p>
+            <a:pPr marL="342900" indent="-342900">
+              <a:buFont typeface="+mj-lt"/>
+              <a:buAutoNum type="arabicPeriod"/>
+            </a:pPr>
+            <a:r>
+              <a:rPr lang="it-IT" dirty="0"/>
+              <a:t>Entrare dentro web-alfa e modificare la sua pagina iniziale. Poi confrontare l’output restituiti dai due container </a:t>
+            </a:r>
+            <a:r>
+              <a:rPr lang="it-IT" dirty="0" err="1"/>
+              <a:t>Nginx</a:t>
+            </a:r>
+            <a:r>
+              <a:rPr lang="it-IT" dirty="0"/>
+              <a:t>.</a:t>
+            </a:r>
+          </a:p>
+          <a:p>
+            <a:pPr marL="342900" indent="-342900">
+              <a:buFont typeface="+mj-lt"/>
+              <a:buAutoNum type="arabicPeriod"/>
+            </a:pPr>
+            <a:r>
+              <a:rPr lang="it-IT" dirty="0"/>
+              <a:t>Testare la persistenza delle modifiche di Alfa dopo averlo rimosso e fatto ripartire. </a:t>
+            </a:r>
+          </a:p>
+          <a:p>
+            <a:endParaRPr lang="it-IT" dirty="0"/>
+          </a:p>
+        </p:txBody>
+      </p:sp>
+      <p:sp>
+        <p:nvSpPr>
+          <p:cNvPr id="4" name="Segnaposto numero diapositiva 11">
+            <a:extLst>
+              <a:ext uri="{FF2B5EF4-FFF2-40B4-BE49-F238E27FC236}">
+                <a16:creationId xmlns:a16="http://schemas.microsoft.com/office/drawing/2014/main" id="{0B0A1C45-6632-F4FA-77DE-A5A723740EBB}"/>
+              </a:ext>
+            </a:extLst>
+          </p:cNvPr>
+          <p:cNvSpPr>
+            <a:spLocks noGrp="1"/>
+          </p:cNvSpPr>
+          <p:nvPr>
+            <p:ph type="sldNum" sz="quarter" idx="12"/>
+          </p:nvPr>
+        </p:nvSpPr>
+        <p:spPr>
+          <a:xfrm>
+            <a:off x="8610600" y="6356350"/>
+            <a:ext cx="2743200" cy="365125"/>
+          </a:xfrm>
+        </p:spPr>
+        <p:txBody>
+          <a:bodyPr/>
+          <a:lstStyle/>
+          <a:p>
+            <a:r>
+              <a:rPr lang="it-IT" dirty="0"/>
+              <a:t>27</a:t>
+            </a:r>
+          </a:p>
+        </p:txBody>
+      </p:sp>
+    </p:spTree>
+    <p:extLst>
+      <p:ext uri="{BB962C8B-B14F-4D97-AF65-F5344CB8AC3E}">
+        <p14:creationId xmlns:p14="http://schemas.microsoft.com/office/powerpoint/2010/main" val="2199835098"/>
       </p:ext>
     </p:extLst>
   </p:cSld>
@@ -7907,10 +10364,3119 @@
           </a:p>
         </p:txBody>
       </p:sp>
+      <p:sp>
+        <p:nvSpPr>
+          <p:cNvPr id="4" name="Segnaposto numero diapositiva 11">
+            <a:extLst>
+              <a:ext uri="{FF2B5EF4-FFF2-40B4-BE49-F238E27FC236}">
+                <a16:creationId xmlns:a16="http://schemas.microsoft.com/office/drawing/2014/main" id="{72E248D2-9857-707B-C7D4-06B169AB8D9E}"/>
+              </a:ext>
+            </a:extLst>
+          </p:cNvPr>
+          <p:cNvSpPr>
+            <a:spLocks noGrp="1"/>
+          </p:cNvSpPr>
+          <p:nvPr>
+            <p:ph type="sldNum" sz="quarter" idx="12"/>
+          </p:nvPr>
+        </p:nvSpPr>
+        <p:spPr>
+          <a:xfrm>
+            <a:off x="8610600" y="6356350"/>
+            <a:ext cx="2743200" cy="365125"/>
+          </a:xfrm>
+        </p:spPr>
+        <p:txBody>
+          <a:bodyPr/>
+          <a:lstStyle/>
+          <a:p>
+            <a:r>
+              <a:rPr lang="it-IT" dirty="0"/>
+              <a:t>1</a:t>
+            </a:r>
+          </a:p>
+        </p:txBody>
+      </p:sp>
     </p:spTree>
     <p:extLst>
       <p:ext uri="{BB962C8B-B14F-4D97-AF65-F5344CB8AC3E}">
         <p14:creationId xmlns:p14="http://schemas.microsoft.com/office/powerpoint/2010/main" val="526178137"/>
+      </p:ext>
+    </p:extLst>
+  </p:cSld>
+  <p:clrMapOvr>
+    <a:masterClrMapping/>
+  </p:clrMapOvr>
+</p:sld>
+</file>
+
+<file path=ppt/slides/slide30.xml><?xml version="1.0" encoding="utf-8"?>
+<p:sld xmlns:a="http://schemas.openxmlformats.org/drawingml/2006/main" xmlns:r="http://schemas.openxmlformats.org/officeDocument/2006/relationships" xmlns:p="http://schemas.openxmlformats.org/presentationml/2006/main">
+  <p:cSld>
+    <p:spTree>
+      <p:nvGrpSpPr>
+        <p:cNvPr id="1" name="">
+          <a:extLst>
+            <a:ext uri="{FF2B5EF4-FFF2-40B4-BE49-F238E27FC236}">
+              <a16:creationId xmlns:a16="http://schemas.microsoft.com/office/drawing/2014/main" id="{E50BA9C5-C0B1-9467-8848-056B3265CCD7}"/>
+            </a:ext>
+          </a:extLst>
+        </p:cNvPr>
+        <p:cNvGrpSpPr/>
+        <p:nvPr/>
+      </p:nvGrpSpPr>
+      <p:grpSpPr>
+        <a:xfrm>
+          <a:off x="0" y="0"/>
+          <a:ext cx="0" cy="0"/>
+          <a:chOff x="0" y="0"/>
+          <a:chExt cx="0" cy="0"/>
+        </a:xfrm>
+      </p:grpSpPr>
+      <p:sp>
+        <p:nvSpPr>
+          <p:cNvPr id="3" name="Contenuto della lezione">
+            <a:extLst>
+              <a:ext uri="{FF2B5EF4-FFF2-40B4-BE49-F238E27FC236}">
+                <a16:creationId xmlns:a16="http://schemas.microsoft.com/office/drawing/2014/main" id="{6EDD4A83-DD48-25C4-82D1-46E91AD19D04}"/>
+              </a:ext>
+            </a:extLst>
+          </p:cNvPr>
+          <p:cNvSpPr>
+            <a:spLocks noGrp="1"/>
+          </p:cNvSpPr>
+          <p:nvPr>
+            <p:ph idx="1"/>
+          </p:nvPr>
+        </p:nvSpPr>
+        <p:spPr>
+          <a:xfrm>
+            <a:off x="1077759" y="707275"/>
+            <a:ext cx="10036481" cy="5839829"/>
+          </a:xfrm>
+        </p:spPr>
+        <p:txBody>
+          <a:bodyPr/>
+          <a:lstStyle/>
+          <a:p>
+            <a:r>
+              <a:rPr lang="it-IT" b="1" dirty="0"/>
+              <a:t>RIEPILOGO 1: Istanze multiple dalla stessa immagine e "Mortalità" dei dati</a:t>
+            </a:r>
+          </a:p>
+          <a:p>
+            <a:r>
+              <a:rPr lang="it-IT" i="1" dirty="0"/>
+              <a:t>Obiettivo: Dimostrare che si possono creare più container indipendenti da una sola immagine e che i dati interni sono effimeri.</a:t>
+            </a:r>
+            <a:endParaRPr lang="it-IT" dirty="0"/>
+          </a:p>
+          <a:p>
+            <a:r>
+              <a:rPr lang="it-IT" b="1" dirty="0"/>
+              <a:t>1. Avviamo due server web indipendenti (Alfa e Beta) usando la stessa immagine di </a:t>
+            </a:r>
+            <a:r>
+              <a:rPr lang="it-IT" b="1" dirty="0" err="1"/>
+              <a:t>Nginx</a:t>
+            </a:r>
+            <a:r>
+              <a:rPr lang="it-IT" b="1" dirty="0"/>
+              <a:t>:</a:t>
+            </a:r>
+            <a:endParaRPr lang="it-IT" dirty="0"/>
+          </a:p>
+          <a:p>
+            <a:r>
+              <a:rPr lang="it-IT" dirty="0" err="1">
+                <a:solidFill>
+                  <a:srgbClr val="171FE2"/>
+                </a:solidFill>
+                <a:latin typeface="Consolas" panose="020B0609020204030204" pitchFamily="49" charset="0"/>
+              </a:rPr>
+              <a:t>docker</a:t>
+            </a:r>
+            <a:r>
+              <a:rPr lang="it-IT" dirty="0">
+                <a:solidFill>
+                  <a:srgbClr val="171FE2"/>
+                </a:solidFill>
+                <a:latin typeface="Consolas" panose="020B0609020204030204" pitchFamily="49" charset="0"/>
+              </a:rPr>
+              <a:t> </a:t>
+            </a:r>
+            <a:r>
+              <a:rPr lang="it-IT" dirty="0" err="1">
+                <a:solidFill>
+                  <a:srgbClr val="171FE2"/>
+                </a:solidFill>
+                <a:latin typeface="Consolas" panose="020B0609020204030204" pitchFamily="49" charset="0"/>
+              </a:rPr>
+              <a:t>run</a:t>
+            </a:r>
+            <a:r>
+              <a:rPr lang="it-IT" dirty="0">
+                <a:solidFill>
+                  <a:srgbClr val="171FE2"/>
+                </a:solidFill>
+                <a:latin typeface="Consolas" panose="020B0609020204030204" pitchFamily="49" charset="0"/>
+              </a:rPr>
+              <a:t> -d --name web-alfa -p 8081:80 </a:t>
+            </a:r>
+            <a:r>
+              <a:rPr lang="it-IT" dirty="0" err="1">
+                <a:solidFill>
+                  <a:srgbClr val="171FE2"/>
+                </a:solidFill>
+                <a:latin typeface="Consolas" panose="020B0609020204030204" pitchFamily="49" charset="0"/>
+              </a:rPr>
+              <a:t>nginx:latest</a:t>
+            </a:r>
+            <a:endParaRPr lang="it-IT" dirty="0">
+              <a:solidFill>
+                <a:srgbClr val="171FE2"/>
+              </a:solidFill>
+              <a:latin typeface="Consolas" panose="020B0609020204030204" pitchFamily="49" charset="0"/>
+            </a:endParaRPr>
+          </a:p>
+          <a:p>
+            <a:r>
+              <a:rPr lang="it-IT" dirty="0" err="1">
+                <a:solidFill>
+                  <a:srgbClr val="171FE2"/>
+                </a:solidFill>
+                <a:latin typeface="Consolas" panose="020B0609020204030204" pitchFamily="49" charset="0"/>
+              </a:rPr>
+              <a:t>docker</a:t>
+            </a:r>
+            <a:r>
+              <a:rPr lang="it-IT" dirty="0">
+                <a:solidFill>
+                  <a:srgbClr val="171FE2"/>
+                </a:solidFill>
+                <a:latin typeface="Consolas" panose="020B0609020204030204" pitchFamily="49" charset="0"/>
+              </a:rPr>
+              <a:t> </a:t>
+            </a:r>
+            <a:r>
+              <a:rPr lang="it-IT" dirty="0" err="1">
+                <a:solidFill>
+                  <a:srgbClr val="171FE2"/>
+                </a:solidFill>
+                <a:latin typeface="Consolas" panose="020B0609020204030204" pitchFamily="49" charset="0"/>
+              </a:rPr>
+              <a:t>run</a:t>
+            </a:r>
+            <a:r>
+              <a:rPr lang="it-IT" dirty="0">
+                <a:solidFill>
+                  <a:srgbClr val="171FE2"/>
+                </a:solidFill>
+                <a:latin typeface="Consolas" panose="020B0609020204030204" pitchFamily="49" charset="0"/>
+              </a:rPr>
+              <a:t> -d --name web-beta -p 8082:80 </a:t>
+            </a:r>
+            <a:r>
+              <a:rPr lang="it-IT" dirty="0" err="1">
+                <a:solidFill>
+                  <a:srgbClr val="171FE2"/>
+                </a:solidFill>
+                <a:latin typeface="Consolas" panose="020B0609020204030204" pitchFamily="49" charset="0"/>
+              </a:rPr>
+              <a:t>nginx:latest</a:t>
+            </a:r>
+            <a:endParaRPr lang="it-IT" dirty="0">
+              <a:solidFill>
+                <a:srgbClr val="171FE2"/>
+              </a:solidFill>
+              <a:latin typeface="Consolas" panose="020B0609020204030204" pitchFamily="49" charset="0"/>
+            </a:endParaRPr>
+          </a:p>
+          <a:p>
+            <a:r>
+              <a:rPr lang="it-IT" b="1" dirty="0"/>
+              <a:t>2. Entriamo dentro web-alfa e modifichiamo la sua pagina iniziale:</a:t>
+            </a:r>
+          </a:p>
+          <a:p>
+            <a:r>
+              <a:rPr lang="en-US" dirty="0">
+                <a:solidFill>
+                  <a:srgbClr val="171FE2"/>
+                </a:solidFill>
+                <a:latin typeface="Consolas" panose="020B0609020204030204" pitchFamily="49" charset="0"/>
+              </a:rPr>
+              <a:t>docker exec -it web-alfa </a:t>
+            </a:r>
+            <a:r>
+              <a:rPr lang="en-US" dirty="0" err="1">
+                <a:solidFill>
+                  <a:srgbClr val="171FE2"/>
+                </a:solidFill>
+                <a:latin typeface="Consolas" panose="020B0609020204030204" pitchFamily="49" charset="0"/>
+              </a:rPr>
+              <a:t>sh</a:t>
+            </a:r>
+            <a:endParaRPr lang="en-US" dirty="0">
+              <a:solidFill>
+                <a:srgbClr val="171FE2"/>
+              </a:solidFill>
+              <a:latin typeface="Consolas" panose="020B0609020204030204" pitchFamily="49" charset="0"/>
+            </a:endParaRPr>
+          </a:p>
+          <a:p>
+            <a:r>
+              <a:rPr lang="it-IT" i="1" dirty="0"/>
+              <a:t>(Il prompt diventa / #)</a:t>
+            </a:r>
+            <a:r>
+              <a:rPr lang="it-IT" dirty="0"/>
+              <a:t>. Scriviamo il file e usciamo:</a:t>
+            </a:r>
+          </a:p>
+          <a:p>
+            <a:r>
+              <a:rPr lang="it-IT" dirty="0" err="1">
+                <a:solidFill>
+                  <a:srgbClr val="171FE2"/>
+                </a:solidFill>
+                <a:latin typeface="Consolas" panose="020B0609020204030204" pitchFamily="49" charset="0"/>
+              </a:rPr>
+              <a:t>echo</a:t>
+            </a:r>
+            <a:r>
+              <a:rPr lang="it-IT" dirty="0">
+                <a:solidFill>
+                  <a:srgbClr val="171FE2"/>
+                </a:solidFill>
+                <a:latin typeface="Consolas" panose="020B0609020204030204" pitchFamily="49" charset="0"/>
+              </a:rPr>
+              <a:t> "&lt;h1&gt;Benvenuti su ALFA - Modificato da Mirko!&lt;/h1&gt;" &gt; /</a:t>
+            </a:r>
+            <a:r>
+              <a:rPr lang="it-IT" dirty="0" err="1">
+                <a:solidFill>
+                  <a:srgbClr val="171FE2"/>
+                </a:solidFill>
+                <a:latin typeface="Consolas" panose="020B0609020204030204" pitchFamily="49" charset="0"/>
+              </a:rPr>
+              <a:t>usr</a:t>
+            </a:r>
+            <a:r>
+              <a:rPr lang="it-IT" dirty="0">
+                <a:solidFill>
+                  <a:srgbClr val="171FE2"/>
+                </a:solidFill>
+                <a:latin typeface="Consolas" panose="020B0609020204030204" pitchFamily="49" charset="0"/>
+              </a:rPr>
+              <a:t>/share/</a:t>
+            </a:r>
+            <a:r>
+              <a:rPr lang="it-IT" dirty="0" err="1">
+                <a:solidFill>
+                  <a:srgbClr val="171FE2"/>
+                </a:solidFill>
+                <a:latin typeface="Consolas" panose="020B0609020204030204" pitchFamily="49" charset="0"/>
+              </a:rPr>
+              <a:t>nginx</a:t>
+            </a:r>
+            <a:r>
+              <a:rPr lang="it-IT" dirty="0">
+                <a:solidFill>
+                  <a:srgbClr val="171FE2"/>
+                </a:solidFill>
+                <a:latin typeface="Consolas" panose="020B0609020204030204" pitchFamily="49" charset="0"/>
+              </a:rPr>
+              <a:t>/html/index.html</a:t>
+            </a:r>
+          </a:p>
+          <a:p>
+            <a:r>
+              <a:rPr lang="it-IT" dirty="0">
+                <a:solidFill>
+                  <a:srgbClr val="171FE2"/>
+                </a:solidFill>
+                <a:latin typeface="Consolas" panose="020B0609020204030204" pitchFamily="49" charset="0"/>
+              </a:rPr>
+              <a:t>exit</a:t>
+            </a:r>
+          </a:p>
+          <a:p>
+            <a:r>
+              <a:rPr lang="it-IT" dirty="0"/>
+              <a:t>Su http://localhost:8081 -&gt; Appare la scritta personalizzata </a:t>
+            </a:r>
+            <a:r>
+              <a:rPr lang="it-IT" i="1" dirty="0"/>
+              <a:t>"Benvenuti su ALFA..."</a:t>
+            </a:r>
+            <a:r>
+              <a:rPr lang="it-IT" dirty="0"/>
+              <a:t>.</a:t>
+            </a:r>
+          </a:p>
+          <a:p>
+            <a:r>
+              <a:rPr lang="it-IT" dirty="0"/>
+              <a:t>Su http://localhost:8082 -&gt; Appare il </a:t>
+            </a:r>
+            <a:r>
+              <a:rPr lang="it-IT" i="1" dirty="0"/>
+              <a:t>"Welcome to </a:t>
+            </a:r>
+            <a:r>
+              <a:rPr lang="it-IT" i="1" dirty="0" err="1"/>
+              <a:t>nginx</a:t>
+            </a:r>
+            <a:r>
+              <a:rPr lang="it-IT" i="1" dirty="0"/>
+              <a:t>"</a:t>
+            </a:r>
+            <a:r>
+              <a:rPr lang="it-IT" dirty="0"/>
+              <a:t> standard di fabbrica.</a:t>
+            </a:r>
+          </a:p>
+          <a:p>
+            <a:endParaRPr lang="it-IT" dirty="0">
+              <a:solidFill>
+                <a:srgbClr val="171FE2"/>
+              </a:solidFill>
+              <a:latin typeface="Consolas" panose="020B0609020204030204" pitchFamily="49" charset="0"/>
+            </a:endParaRPr>
+          </a:p>
+        </p:txBody>
+      </p:sp>
+      <p:sp>
+        <p:nvSpPr>
+          <p:cNvPr id="4" name="Segnaposto numero diapositiva 11">
+            <a:extLst>
+              <a:ext uri="{FF2B5EF4-FFF2-40B4-BE49-F238E27FC236}">
+                <a16:creationId xmlns:a16="http://schemas.microsoft.com/office/drawing/2014/main" id="{06965C2E-7559-1085-A7DB-A07AE029B983}"/>
+              </a:ext>
+            </a:extLst>
+          </p:cNvPr>
+          <p:cNvSpPr>
+            <a:spLocks noGrp="1"/>
+          </p:cNvSpPr>
+          <p:nvPr>
+            <p:ph type="sldNum" sz="quarter" idx="12"/>
+          </p:nvPr>
+        </p:nvSpPr>
+        <p:spPr>
+          <a:xfrm>
+            <a:off x="8610600" y="6356350"/>
+            <a:ext cx="2743200" cy="365125"/>
+          </a:xfrm>
+        </p:spPr>
+        <p:txBody>
+          <a:bodyPr/>
+          <a:lstStyle/>
+          <a:p>
+            <a:r>
+              <a:rPr lang="it-IT" dirty="0"/>
+              <a:t>28</a:t>
+            </a:r>
+          </a:p>
+        </p:txBody>
+      </p:sp>
+    </p:spTree>
+    <p:extLst>
+      <p:ext uri="{BB962C8B-B14F-4D97-AF65-F5344CB8AC3E}">
+        <p14:creationId xmlns:p14="http://schemas.microsoft.com/office/powerpoint/2010/main" val="4226804829"/>
+      </p:ext>
+    </p:extLst>
+  </p:cSld>
+  <p:clrMapOvr>
+    <a:masterClrMapping/>
+  </p:clrMapOvr>
+</p:sld>
+</file>
+
+<file path=ppt/slides/slide31.xml><?xml version="1.0" encoding="utf-8"?>
+<p:sld xmlns:a="http://schemas.openxmlformats.org/drawingml/2006/main" xmlns:r="http://schemas.openxmlformats.org/officeDocument/2006/relationships" xmlns:p="http://schemas.openxmlformats.org/presentationml/2006/main">
+  <p:cSld>
+    <p:spTree>
+      <p:nvGrpSpPr>
+        <p:cNvPr id="1" name="">
+          <a:extLst>
+            <a:ext uri="{FF2B5EF4-FFF2-40B4-BE49-F238E27FC236}">
+              <a16:creationId xmlns:a16="http://schemas.microsoft.com/office/drawing/2014/main" id="{302999AE-0A8F-1747-8919-49A3323CEDC4}"/>
+            </a:ext>
+          </a:extLst>
+        </p:cNvPr>
+        <p:cNvGrpSpPr/>
+        <p:nvPr/>
+      </p:nvGrpSpPr>
+      <p:grpSpPr>
+        <a:xfrm>
+          <a:off x="0" y="0"/>
+          <a:ext cx="0" cy="0"/>
+          <a:chOff x="0" y="0"/>
+          <a:chExt cx="0" cy="0"/>
+        </a:xfrm>
+      </p:grpSpPr>
+      <p:sp>
+        <p:nvSpPr>
+          <p:cNvPr id="3" name="Contenuto della lezione">
+            <a:extLst>
+              <a:ext uri="{FF2B5EF4-FFF2-40B4-BE49-F238E27FC236}">
+                <a16:creationId xmlns:a16="http://schemas.microsoft.com/office/drawing/2014/main" id="{2D67174C-2E8D-BB23-038B-18F838FDCA18}"/>
+              </a:ext>
+            </a:extLst>
+          </p:cNvPr>
+          <p:cNvSpPr>
+            <a:spLocks noGrp="1"/>
+          </p:cNvSpPr>
+          <p:nvPr>
+            <p:ph idx="1"/>
+          </p:nvPr>
+        </p:nvSpPr>
+        <p:spPr>
+          <a:xfrm>
+            <a:off x="1077759" y="707275"/>
+            <a:ext cx="10036481" cy="5839829"/>
+          </a:xfrm>
+        </p:spPr>
+        <p:txBody>
+          <a:bodyPr/>
+          <a:lstStyle/>
+          <a:p>
+            <a:r>
+              <a:rPr lang="it-IT" b="1" dirty="0"/>
+              <a:t>3. Il test del crash (I dati muoiono):</a:t>
+            </a:r>
+            <a:r>
+              <a:rPr lang="it-IT" dirty="0"/>
+              <a:t> Cancelliamo e rifacciamo il container Alfa:</a:t>
+            </a:r>
+          </a:p>
+          <a:p>
+            <a:r>
+              <a:rPr lang="it-IT" dirty="0" err="1">
+                <a:solidFill>
+                  <a:srgbClr val="171FE2"/>
+                </a:solidFill>
+                <a:latin typeface="Consolas" panose="020B0609020204030204" pitchFamily="49" charset="0"/>
+              </a:rPr>
+              <a:t>docker</a:t>
+            </a:r>
+            <a:r>
+              <a:rPr lang="it-IT" dirty="0">
+                <a:solidFill>
+                  <a:srgbClr val="171FE2"/>
+                </a:solidFill>
+                <a:latin typeface="Consolas" panose="020B0609020204030204" pitchFamily="49" charset="0"/>
+              </a:rPr>
+              <a:t> </a:t>
+            </a:r>
+            <a:r>
+              <a:rPr lang="it-IT" dirty="0" err="1">
+                <a:solidFill>
+                  <a:srgbClr val="171FE2"/>
+                </a:solidFill>
+                <a:latin typeface="Consolas" panose="020B0609020204030204" pitchFamily="49" charset="0"/>
+              </a:rPr>
+              <a:t>rm</a:t>
+            </a:r>
+            <a:r>
+              <a:rPr lang="it-IT" dirty="0">
+                <a:solidFill>
+                  <a:srgbClr val="171FE2"/>
+                </a:solidFill>
+                <a:latin typeface="Consolas" panose="020B0609020204030204" pitchFamily="49" charset="0"/>
+              </a:rPr>
+              <a:t> -f web-alfa</a:t>
+            </a:r>
+          </a:p>
+          <a:p>
+            <a:r>
+              <a:rPr lang="it-IT" dirty="0" err="1">
+                <a:solidFill>
+                  <a:srgbClr val="171FE2"/>
+                </a:solidFill>
+                <a:latin typeface="Consolas" panose="020B0609020204030204" pitchFamily="49" charset="0"/>
+              </a:rPr>
+              <a:t>docker</a:t>
+            </a:r>
+            <a:r>
+              <a:rPr lang="it-IT" dirty="0">
+                <a:solidFill>
+                  <a:srgbClr val="171FE2"/>
+                </a:solidFill>
+                <a:latin typeface="Consolas" panose="020B0609020204030204" pitchFamily="49" charset="0"/>
+              </a:rPr>
+              <a:t> </a:t>
+            </a:r>
+            <a:r>
+              <a:rPr lang="it-IT" dirty="0" err="1">
+                <a:solidFill>
+                  <a:srgbClr val="171FE2"/>
+                </a:solidFill>
+                <a:latin typeface="Consolas" panose="020B0609020204030204" pitchFamily="49" charset="0"/>
+              </a:rPr>
+              <a:t>run</a:t>
+            </a:r>
+            <a:r>
+              <a:rPr lang="it-IT" dirty="0">
+                <a:solidFill>
+                  <a:srgbClr val="171FE2"/>
+                </a:solidFill>
+                <a:latin typeface="Consolas" panose="020B0609020204030204" pitchFamily="49" charset="0"/>
+              </a:rPr>
+              <a:t> -d --name web-alfa -p 8081:80 </a:t>
+            </a:r>
+            <a:r>
+              <a:rPr lang="it-IT" dirty="0" err="1">
+                <a:solidFill>
+                  <a:srgbClr val="171FE2"/>
+                </a:solidFill>
+                <a:latin typeface="Consolas" panose="020B0609020204030204" pitchFamily="49" charset="0"/>
+              </a:rPr>
+              <a:t>nginx:latest</a:t>
+            </a:r>
+            <a:endParaRPr lang="it-IT" dirty="0">
+              <a:solidFill>
+                <a:srgbClr val="171FE2"/>
+              </a:solidFill>
+              <a:latin typeface="Consolas" panose="020B0609020204030204" pitchFamily="49" charset="0"/>
+            </a:endParaRPr>
+          </a:p>
+          <a:p>
+            <a:r>
+              <a:rPr lang="it-IT" dirty="0"/>
+              <a:t>Aggiorna http://localhost:8081 -&gt; La scritta personalizzata è </a:t>
+            </a:r>
+            <a:r>
+              <a:rPr lang="it-IT" b="1" dirty="0"/>
+              <a:t>sparita</a:t>
+            </a:r>
+            <a:r>
+              <a:rPr lang="it-IT" dirty="0"/>
+              <a:t>. Tutto è tornato di fabbrica.</a:t>
+            </a:r>
+            <a:endParaRPr lang="it-IT" dirty="0">
+              <a:solidFill>
+                <a:srgbClr val="171FE2"/>
+              </a:solidFill>
+              <a:latin typeface="Consolas" panose="020B0609020204030204" pitchFamily="49" charset="0"/>
+            </a:endParaRPr>
+          </a:p>
+        </p:txBody>
+      </p:sp>
+      <p:sp>
+        <p:nvSpPr>
+          <p:cNvPr id="4" name="Segnaposto numero diapositiva 11">
+            <a:extLst>
+              <a:ext uri="{FF2B5EF4-FFF2-40B4-BE49-F238E27FC236}">
+                <a16:creationId xmlns:a16="http://schemas.microsoft.com/office/drawing/2014/main" id="{975801CA-31F3-6DA5-1438-255D071344F7}"/>
+              </a:ext>
+            </a:extLst>
+          </p:cNvPr>
+          <p:cNvSpPr>
+            <a:spLocks noGrp="1"/>
+          </p:cNvSpPr>
+          <p:nvPr>
+            <p:ph type="sldNum" sz="quarter" idx="12"/>
+          </p:nvPr>
+        </p:nvSpPr>
+        <p:spPr>
+          <a:xfrm>
+            <a:off x="8610600" y="6356350"/>
+            <a:ext cx="2743200" cy="365125"/>
+          </a:xfrm>
+        </p:spPr>
+        <p:txBody>
+          <a:bodyPr/>
+          <a:lstStyle/>
+          <a:p>
+            <a:r>
+              <a:rPr lang="it-IT" dirty="0"/>
+              <a:t>29</a:t>
+            </a:r>
+          </a:p>
+        </p:txBody>
+      </p:sp>
+    </p:spTree>
+    <p:extLst>
+      <p:ext uri="{BB962C8B-B14F-4D97-AF65-F5344CB8AC3E}">
+        <p14:creationId xmlns:p14="http://schemas.microsoft.com/office/powerpoint/2010/main" val="1754350873"/>
+      </p:ext>
+    </p:extLst>
+  </p:cSld>
+  <p:clrMapOvr>
+    <a:masterClrMapping/>
+  </p:clrMapOvr>
+</p:sld>
+</file>
+
+<file path=ppt/slides/slide32.xml><?xml version="1.0" encoding="utf-8"?>
+<p:sld xmlns:a="http://schemas.openxmlformats.org/drawingml/2006/main" xmlns:r="http://schemas.openxmlformats.org/officeDocument/2006/relationships" xmlns:p="http://schemas.openxmlformats.org/presentationml/2006/main">
+  <p:cSld>
+    <p:spTree>
+      <p:nvGrpSpPr>
+        <p:cNvPr id="1" name="">
+          <a:extLst>
+            <a:ext uri="{FF2B5EF4-FFF2-40B4-BE49-F238E27FC236}">
+              <a16:creationId xmlns:a16="http://schemas.microsoft.com/office/drawing/2014/main" id="{6C8185DB-99CD-D4F6-3E3D-7CFA499B3D29}"/>
+            </a:ext>
+          </a:extLst>
+        </p:cNvPr>
+        <p:cNvGrpSpPr/>
+        <p:nvPr/>
+      </p:nvGrpSpPr>
+      <p:grpSpPr>
+        <a:xfrm>
+          <a:off x="0" y="0"/>
+          <a:ext cx="0" cy="0"/>
+          <a:chOff x="0" y="0"/>
+          <a:chExt cx="0" cy="0"/>
+        </a:xfrm>
+      </p:grpSpPr>
+      <p:sp>
+        <p:nvSpPr>
+          <p:cNvPr id="2" name="Titolo della lezione">
+            <a:extLst>
+              <a:ext uri="{FF2B5EF4-FFF2-40B4-BE49-F238E27FC236}">
+                <a16:creationId xmlns:a16="http://schemas.microsoft.com/office/drawing/2014/main" id="{51FE3E10-FAEA-DC16-1D10-83CDD920E501}"/>
+              </a:ext>
+            </a:extLst>
+          </p:cNvPr>
+          <p:cNvSpPr>
+            <a:spLocks noGrp="1"/>
+          </p:cNvSpPr>
+          <p:nvPr>
+            <p:ph type="title"/>
+          </p:nvPr>
+        </p:nvSpPr>
+        <p:spPr>
+          <a:xfrm>
+            <a:off x="838200" y="831206"/>
+            <a:ext cx="10515600" cy="314198"/>
+          </a:xfrm>
+        </p:spPr>
+        <p:txBody>
+          <a:bodyPr/>
+          <a:lstStyle/>
+          <a:p>
+            <a:r>
+              <a:rPr lang="it-IT" dirty="0"/>
+              <a:t>LAB 7: Riepilogo 2</a:t>
+            </a:r>
+          </a:p>
+        </p:txBody>
+      </p:sp>
+      <p:sp>
+        <p:nvSpPr>
+          <p:cNvPr id="3" name="Contenuto della lezione">
+            <a:extLst>
+              <a:ext uri="{FF2B5EF4-FFF2-40B4-BE49-F238E27FC236}">
+                <a16:creationId xmlns:a16="http://schemas.microsoft.com/office/drawing/2014/main" id="{781B5E98-A04B-016C-1043-0C6C041DB48B}"/>
+              </a:ext>
+            </a:extLst>
+          </p:cNvPr>
+          <p:cNvSpPr>
+            <a:spLocks noGrp="1"/>
+          </p:cNvSpPr>
+          <p:nvPr>
+            <p:ph idx="1"/>
+          </p:nvPr>
+        </p:nvSpPr>
+        <p:spPr>
+          <a:xfrm>
+            <a:off x="1317319" y="1558742"/>
+            <a:ext cx="9557362" cy="4803369"/>
+          </a:xfrm>
+        </p:spPr>
+        <p:txBody>
+          <a:bodyPr/>
+          <a:lstStyle/>
+          <a:p>
+            <a:r>
+              <a:rPr lang="it-IT" b="1" dirty="0"/>
+              <a:t>Traccia A:</a:t>
+            </a:r>
+            <a:r>
+              <a:rPr lang="it-IT" dirty="0"/>
+              <a:t> </a:t>
+            </a:r>
+          </a:p>
+          <a:p>
+            <a:pPr marL="342900" indent="-342900">
+              <a:buFont typeface="+mj-lt"/>
+              <a:buAutoNum type="arabicPeriod"/>
+            </a:pPr>
+            <a:r>
+              <a:rPr lang="it-IT" dirty="0"/>
+              <a:t>Creare un volume sicuro e avviare un container </a:t>
+            </a:r>
+            <a:r>
+              <a:rPr lang="it-IT" dirty="0" err="1"/>
+              <a:t>nginx</a:t>
+            </a:r>
+            <a:r>
+              <a:rPr lang="it-IT" dirty="0"/>
+              <a:t> che lo usa.</a:t>
+            </a:r>
+          </a:p>
+          <a:p>
+            <a:pPr marL="342900" indent="-342900">
+              <a:buFont typeface="+mj-lt"/>
+              <a:buAutoNum type="arabicPeriod"/>
+            </a:pPr>
+            <a:r>
+              <a:rPr lang="it-IT" dirty="0"/>
+              <a:t>Modificare il file all’interno.</a:t>
+            </a:r>
+          </a:p>
+          <a:p>
+            <a:pPr marL="342900" indent="-342900">
+              <a:buFont typeface="+mj-lt"/>
+              <a:buAutoNum type="arabicPeriod"/>
+            </a:pPr>
+            <a:r>
+              <a:rPr lang="it-IT" dirty="0"/>
+              <a:t>Testare la persistenza delle modifiche dopo averlo rimosso e fatto ripartire. </a:t>
+            </a:r>
+          </a:p>
+          <a:p>
+            <a:pPr marL="342900" indent="-342900">
+              <a:buFont typeface="+mj-lt"/>
+              <a:buAutoNum type="arabicPeriod"/>
+            </a:pPr>
+            <a:endParaRPr lang="it-IT" dirty="0"/>
+          </a:p>
+          <a:p>
+            <a:r>
+              <a:rPr lang="it-IT" b="1" dirty="0"/>
+              <a:t>Traccia B:</a:t>
+            </a:r>
+          </a:p>
+          <a:p>
+            <a:pPr marL="342900" indent="-342900">
+              <a:buFont typeface="+mj-lt"/>
+              <a:buAutoNum type="arabicPeriod"/>
+            </a:pPr>
+            <a:r>
+              <a:rPr lang="it-IT" dirty="0"/>
+              <a:t>Creare un cartella sul Desktop con all’interno un file index.html.</a:t>
+            </a:r>
+          </a:p>
+          <a:p>
+            <a:pPr marL="342900" indent="-342900">
+              <a:buFont typeface="+mj-lt"/>
+              <a:buAutoNum type="arabicPeriod"/>
+            </a:pPr>
+            <a:r>
+              <a:rPr lang="it-IT" dirty="0"/>
+              <a:t>Avviare un container proiettando questa cartella interna (spostati prima sul Desktop). Verificare se quanto scritto nell’index si riflette da browser.</a:t>
+            </a:r>
+          </a:p>
+          <a:p>
+            <a:pPr marL="342900" indent="-342900">
+              <a:buFont typeface="+mj-lt"/>
+              <a:buAutoNum type="arabicPeriod"/>
+            </a:pPr>
+            <a:endParaRPr lang="it-IT" dirty="0"/>
+          </a:p>
+          <a:p>
+            <a:r>
+              <a:rPr lang="it-IT" b="1" dirty="0"/>
+              <a:t>Traccia C:</a:t>
+            </a:r>
+          </a:p>
+          <a:p>
+            <a:r>
+              <a:rPr lang="it-IT" dirty="0"/>
+              <a:t>Creare due container per avviare i processi di </a:t>
+            </a:r>
+            <a:r>
+              <a:rPr lang="it-IT" dirty="0" err="1"/>
+              <a:t>MariaDb</a:t>
+            </a:r>
+            <a:r>
+              <a:rPr lang="it-IT" dirty="0"/>
+              <a:t> e del client </a:t>
+            </a:r>
+            <a:r>
+              <a:rPr lang="it-IT" dirty="0" err="1"/>
+              <a:t>phpMyAdmin</a:t>
+            </a:r>
+            <a:r>
+              <a:rPr lang="it-IT" dirty="0"/>
+              <a:t>. </a:t>
+            </a:r>
+          </a:p>
+          <a:p>
+            <a:r>
+              <a:rPr lang="it-IT" dirty="0"/>
+              <a:t>Verificare la comunicazione su bridge (Scenario A) e su rete personalizzata (Scenario B).</a:t>
+            </a:r>
+          </a:p>
+          <a:p>
+            <a:r>
+              <a:rPr lang="it-IT" dirty="0"/>
+              <a:t>Creare poi un volume da assegnare al </a:t>
+            </a:r>
+            <a:r>
+              <a:rPr lang="it-IT" dirty="0" err="1"/>
+              <a:t>db</a:t>
+            </a:r>
+            <a:r>
+              <a:rPr lang="it-IT" dirty="0"/>
+              <a:t>.</a:t>
+            </a:r>
+          </a:p>
+          <a:p>
+            <a:pPr marL="342900" indent="-342900">
+              <a:buFont typeface="+mj-lt"/>
+              <a:buAutoNum type="arabicPeriod"/>
+            </a:pPr>
+            <a:endParaRPr lang="it-IT" dirty="0"/>
+          </a:p>
+          <a:p>
+            <a:endParaRPr lang="it-IT" dirty="0"/>
+          </a:p>
+          <a:p>
+            <a:endParaRPr lang="it-IT" dirty="0"/>
+          </a:p>
+        </p:txBody>
+      </p:sp>
+      <p:sp>
+        <p:nvSpPr>
+          <p:cNvPr id="4" name="Segnaposto numero diapositiva 11">
+            <a:extLst>
+              <a:ext uri="{FF2B5EF4-FFF2-40B4-BE49-F238E27FC236}">
+                <a16:creationId xmlns:a16="http://schemas.microsoft.com/office/drawing/2014/main" id="{2ECC8A21-9E95-ED3F-61BE-2516297CA66D}"/>
+              </a:ext>
+            </a:extLst>
+          </p:cNvPr>
+          <p:cNvSpPr>
+            <a:spLocks noGrp="1"/>
+          </p:cNvSpPr>
+          <p:nvPr>
+            <p:ph type="sldNum" sz="quarter" idx="12"/>
+          </p:nvPr>
+        </p:nvSpPr>
+        <p:spPr>
+          <a:xfrm>
+            <a:off x="8610600" y="6356350"/>
+            <a:ext cx="2743200" cy="365125"/>
+          </a:xfrm>
+        </p:spPr>
+        <p:txBody>
+          <a:bodyPr/>
+          <a:lstStyle/>
+          <a:p>
+            <a:r>
+              <a:rPr lang="it-IT" dirty="0"/>
+              <a:t>30</a:t>
+            </a:r>
+          </a:p>
+        </p:txBody>
+      </p:sp>
+    </p:spTree>
+    <p:extLst>
+      <p:ext uri="{BB962C8B-B14F-4D97-AF65-F5344CB8AC3E}">
+        <p14:creationId xmlns:p14="http://schemas.microsoft.com/office/powerpoint/2010/main" val="2311402787"/>
+      </p:ext>
+    </p:extLst>
+  </p:cSld>
+  <p:clrMapOvr>
+    <a:masterClrMapping/>
+  </p:clrMapOvr>
+</p:sld>
+</file>
+
+<file path=ppt/slides/slide33.xml><?xml version="1.0" encoding="utf-8"?>
+<p:sld xmlns:a="http://schemas.openxmlformats.org/drawingml/2006/main" xmlns:r="http://schemas.openxmlformats.org/officeDocument/2006/relationships" xmlns:p="http://schemas.openxmlformats.org/presentationml/2006/main">
+  <p:cSld>
+    <p:spTree>
+      <p:nvGrpSpPr>
+        <p:cNvPr id="1" name="">
+          <a:extLst>
+            <a:ext uri="{FF2B5EF4-FFF2-40B4-BE49-F238E27FC236}">
+              <a16:creationId xmlns:a16="http://schemas.microsoft.com/office/drawing/2014/main" id="{ECE6A237-4E4D-F7C9-EA72-98FBC4FA80EB}"/>
+            </a:ext>
+          </a:extLst>
+        </p:cNvPr>
+        <p:cNvGrpSpPr/>
+        <p:nvPr/>
+      </p:nvGrpSpPr>
+      <p:grpSpPr>
+        <a:xfrm>
+          <a:off x="0" y="0"/>
+          <a:ext cx="0" cy="0"/>
+          <a:chOff x="0" y="0"/>
+          <a:chExt cx="0" cy="0"/>
+        </a:xfrm>
+      </p:grpSpPr>
+      <p:sp>
+        <p:nvSpPr>
+          <p:cNvPr id="3" name="Contenuto della lezione">
+            <a:extLst>
+              <a:ext uri="{FF2B5EF4-FFF2-40B4-BE49-F238E27FC236}">
+                <a16:creationId xmlns:a16="http://schemas.microsoft.com/office/drawing/2014/main" id="{98C12B50-1CD0-9F93-BD07-D7172C5A44A1}"/>
+              </a:ext>
+            </a:extLst>
+          </p:cNvPr>
+          <p:cNvSpPr>
+            <a:spLocks noGrp="1"/>
+          </p:cNvSpPr>
+          <p:nvPr>
+            <p:ph idx="1"/>
+          </p:nvPr>
+        </p:nvSpPr>
+        <p:spPr>
+          <a:xfrm>
+            <a:off x="1077759" y="707275"/>
+            <a:ext cx="10036481" cy="5839829"/>
+          </a:xfrm>
+        </p:spPr>
+        <p:txBody>
+          <a:bodyPr/>
+          <a:lstStyle/>
+          <a:p>
+            <a:r>
+              <a:rPr lang="it-IT" b="1" dirty="0"/>
+              <a:t>RIEPILOGO 2: </a:t>
+            </a:r>
+            <a:r>
+              <a:rPr lang="it-IT" dirty="0"/>
+              <a:t>Salviamo i dati (</a:t>
+            </a:r>
+            <a:r>
+              <a:rPr lang="it-IT" dirty="0" err="1"/>
+              <a:t>Named</a:t>
+            </a:r>
+            <a:r>
+              <a:rPr lang="it-IT" dirty="0"/>
+              <a:t> </a:t>
+            </a:r>
+            <a:r>
+              <a:rPr lang="it-IT" dirty="0" err="1"/>
+              <a:t>Volumes</a:t>
+            </a:r>
+            <a:r>
+              <a:rPr lang="it-IT" dirty="0"/>
+              <a:t> vs </a:t>
+            </a:r>
+            <a:r>
+              <a:rPr lang="it-IT" dirty="0" err="1"/>
+              <a:t>Bind</a:t>
+            </a:r>
+            <a:r>
+              <a:rPr lang="it-IT" dirty="0"/>
+              <a:t> </a:t>
+            </a:r>
+            <a:r>
+              <a:rPr lang="it-IT" dirty="0" err="1"/>
+              <a:t>Mounts</a:t>
+            </a:r>
+            <a:r>
+              <a:rPr lang="it-IT" dirty="0"/>
+              <a:t>)</a:t>
+            </a:r>
+            <a:endParaRPr lang="it-IT" b="1" dirty="0"/>
+          </a:p>
+          <a:p>
+            <a:r>
+              <a:rPr lang="it-IT" b="1" dirty="0"/>
+              <a:t>Parte A: Il </a:t>
+            </a:r>
+            <a:r>
+              <a:rPr lang="it-IT" b="1" dirty="0" err="1"/>
+              <a:t>Named</a:t>
+            </a:r>
+            <a:r>
+              <a:rPr lang="it-IT" b="1" dirty="0"/>
+              <a:t> Volume (Gestito da Docker)</a:t>
+            </a:r>
+          </a:p>
+          <a:p>
+            <a:pPr marL="342900" indent="-342900">
+              <a:buAutoNum type="arabicPeriod"/>
+            </a:pPr>
+            <a:r>
+              <a:rPr lang="it-IT" b="1" dirty="0"/>
+              <a:t>Creiamo un volume sicuro e avviamo un container che lo usa:</a:t>
+            </a:r>
+          </a:p>
+          <a:p>
+            <a:r>
+              <a:rPr lang="it-IT" dirty="0" err="1">
+                <a:solidFill>
+                  <a:srgbClr val="171FE2"/>
+                </a:solidFill>
+                <a:latin typeface="Consolas" panose="020B0609020204030204" pitchFamily="49" charset="0"/>
+              </a:rPr>
+              <a:t>docker</a:t>
+            </a:r>
+            <a:r>
+              <a:rPr lang="it-IT" dirty="0">
+                <a:solidFill>
+                  <a:srgbClr val="171FE2"/>
+                </a:solidFill>
+                <a:latin typeface="Consolas" panose="020B0609020204030204" pitchFamily="49" charset="0"/>
+              </a:rPr>
+              <a:t> volume create mio-volume-persistente</a:t>
+            </a:r>
+          </a:p>
+          <a:p>
+            <a:r>
+              <a:rPr lang="it-IT" dirty="0" err="1">
+                <a:solidFill>
+                  <a:srgbClr val="171FE2"/>
+                </a:solidFill>
+                <a:latin typeface="Consolas" panose="020B0609020204030204" pitchFamily="49" charset="0"/>
+              </a:rPr>
+              <a:t>docker</a:t>
+            </a:r>
+            <a:r>
+              <a:rPr lang="it-IT" dirty="0">
+                <a:solidFill>
+                  <a:srgbClr val="171FE2"/>
+                </a:solidFill>
+                <a:latin typeface="Consolas" panose="020B0609020204030204" pitchFamily="49" charset="0"/>
+              </a:rPr>
+              <a:t> </a:t>
+            </a:r>
+            <a:r>
+              <a:rPr lang="it-IT" dirty="0" err="1">
+                <a:solidFill>
+                  <a:srgbClr val="171FE2"/>
+                </a:solidFill>
+                <a:latin typeface="Consolas" panose="020B0609020204030204" pitchFamily="49" charset="0"/>
+              </a:rPr>
+              <a:t>run</a:t>
+            </a:r>
+            <a:r>
+              <a:rPr lang="it-IT" dirty="0">
+                <a:solidFill>
+                  <a:srgbClr val="171FE2"/>
+                </a:solidFill>
+                <a:latin typeface="Consolas" panose="020B0609020204030204" pitchFamily="49" charset="0"/>
+              </a:rPr>
+              <a:t> -d --name web-salvato -p 8083:80 -v mio-volume-persistente:/</a:t>
+            </a:r>
+            <a:r>
+              <a:rPr lang="it-IT" dirty="0" err="1">
+                <a:solidFill>
+                  <a:srgbClr val="171FE2"/>
+                </a:solidFill>
+                <a:latin typeface="Consolas" panose="020B0609020204030204" pitchFamily="49" charset="0"/>
+              </a:rPr>
+              <a:t>usr</a:t>
+            </a:r>
+            <a:r>
+              <a:rPr lang="it-IT" dirty="0">
+                <a:solidFill>
+                  <a:srgbClr val="171FE2"/>
+                </a:solidFill>
+                <a:latin typeface="Consolas" panose="020B0609020204030204" pitchFamily="49" charset="0"/>
+              </a:rPr>
+              <a:t>/share/</a:t>
+            </a:r>
+            <a:r>
+              <a:rPr lang="it-IT" dirty="0" err="1">
+                <a:solidFill>
+                  <a:srgbClr val="171FE2"/>
+                </a:solidFill>
+                <a:latin typeface="Consolas" panose="020B0609020204030204" pitchFamily="49" charset="0"/>
+              </a:rPr>
+              <a:t>nginx</a:t>
+            </a:r>
+            <a:r>
+              <a:rPr lang="it-IT" dirty="0">
+                <a:solidFill>
+                  <a:srgbClr val="171FE2"/>
+                </a:solidFill>
+                <a:latin typeface="Consolas" panose="020B0609020204030204" pitchFamily="49" charset="0"/>
+              </a:rPr>
+              <a:t>/html </a:t>
+            </a:r>
+            <a:r>
+              <a:rPr lang="it-IT" dirty="0" err="1">
+                <a:solidFill>
+                  <a:srgbClr val="171FE2"/>
+                </a:solidFill>
+                <a:latin typeface="Consolas" panose="020B0609020204030204" pitchFamily="49" charset="0"/>
+              </a:rPr>
+              <a:t>nginx:latest</a:t>
+            </a:r>
+            <a:endParaRPr lang="it-IT" dirty="0">
+              <a:solidFill>
+                <a:srgbClr val="171FE2"/>
+              </a:solidFill>
+              <a:latin typeface="Consolas" panose="020B0609020204030204" pitchFamily="49" charset="0"/>
+            </a:endParaRPr>
+          </a:p>
+          <a:p>
+            <a:r>
+              <a:rPr lang="it-IT" b="1" dirty="0"/>
+              <a:t>2. Modifichiamo il file all'interno:</a:t>
+            </a:r>
+          </a:p>
+          <a:p>
+            <a:r>
+              <a:rPr lang="it-IT" dirty="0" err="1">
+                <a:solidFill>
+                  <a:srgbClr val="171FE2"/>
+                </a:solidFill>
+                <a:latin typeface="Consolas" panose="020B0609020204030204" pitchFamily="49" charset="0"/>
+              </a:rPr>
+              <a:t>docker</a:t>
+            </a:r>
+            <a:r>
+              <a:rPr lang="it-IT" dirty="0">
+                <a:solidFill>
+                  <a:srgbClr val="171FE2"/>
+                </a:solidFill>
+                <a:latin typeface="Consolas" panose="020B0609020204030204" pitchFamily="49" charset="0"/>
+              </a:rPr>
+              <a:t> </a:t>
+            </a:r>
+            <a:r>
+              <a:rPr lang="it-IT" dirty="0" err="1">
+                <a:solidFill>
+                  <a:srgbClr val="171FE2"/>
+                </a:solidFill>
+                <a:latin typeface="Consolas" panose="020B0609020204030204" pitchFamily="49" charset="0"/>
+              </a:rPr>
+              <a:t>exec</a:t>
+            </a:r>
+            <a:r>
+              <a:rPr lang="it-IT" dirty="0">
+                <a:solidFill>
+                  <a:srgbClr val="171FE2"/>
+                </a:solidFill>
+                <a:latin typeface="Consolas" panose="020B0609020204030204" pitchFamily="49" charset="0"/>
+              </a:rPr>
+              <a:t> -</a:t>
+            </a:r>
+            <a:r>
+              <a:rPr lang="it-IT" dirty="0" err="1">
+                <a:solidFill>
+                  <a:srgbClr val="171FE2"/>
+                </a:solidFill>
+                <a:latin typeface="Consolas" panose="020B0609020204030204" pitchFamily="49" charset="0"/>
+              </a:rPr>
+              <a:t>it</a:t>
+            </a:r>
+            <a:r>
+              <a:rPr lang="it-IT" dirty="0">
+                <a:solidFill>
+                  <a:srgbClr val="171FE2"/>
+                </a:solidFill>
+                <a:latin typeface="Consolas" panose="020B0609020204030204" pitchFamily="49" charset="0"/>
+              </a:rPr>
+              <a:t> web-salvato sh</a:t>
+            </a:r>
+          </a:p>
+          <a:p>
+            <a:r>
+              <a:rPr lang="it-IT" dirty="0" err="1">
+                <a:solidFill>
+                  <a:srgbClr val="171FE2"/>
+                </a:solidFill>
+                <a:latin typeface="Consolas" panose="020B0609020204030204" pitchFamily="49" charset="0"/>
+              </a:rPr>
+              <a:t>echo</a:t>
+            </a:r>
+            <a:r>
+              <a:rPr lang="it-IT" dirty="0">
+                <a:solidFill>
+                  <a:srgbClr val="171FE2"/>
+                </a:solidFill>
+                <a:latin typeface="Consolas" panose="020B0609020204030204" pitchFamily="49" charset="0"/>
+              </a:rPr>
+              <a:t> "&lt;h1&gt;Qui i dati sono immortali!&lt;/h1&gt;" &gt; /</a:t>
+            </a:r>
+            <a:r>
+              <a:rPr lang="it-IT" dirty="0" err="1">
+                <a:solidFill>
+                  <a:srgbClr val="171FE2"/>
+                </a:solidFill>
+                <a:latin typeface="Consolas" panose="020B0609020204030204" pitchFamily="49" charset="0"/>
+              </a:rPr>
+              <a:t>usr</a:t>
+            </a:r>
+            <a:r>
+              <a:rPr lang="it-IT" dirty="0">
+                <a:solidFill>
+                  <a:srgbClr val="171FE2"/>
+                </a:solidFill>
+                <a:latin typeface="Consolas" panose="020B0609020204030204" pitchFamily="49" charset="0"/>
+              </a:rPr>
+              <a:t>/share/</a:t>
+            </a:r>
+            <a:r>
+              <a:rPr lang="it-IT" dirty="0" err="1">
+                <a:solidFill>
+                  <a:srgbClr val="171FE2"/>
+                </a:solidFill>
+                <a:latin typeface="Consolas" panose="020B0609020204030204" pitchFamily="49" charset="0"/>
+              </a:rPr>
+              <a:t>nginx</a:t>
+            </a:r>
+            <a:r>
+              <a:rPr lang="it-IT" dirty="0">
+                <a:solidFill>
+                  <a:srgbClr val="171FE2"/>
+                </a:solidFill>
+                <a:latin typeface="Consolas" panose="020B0609020204030204" pitchFamily="49" charset="0"/>
+              </a:rPr>
+              <a:t>/html/index.html</a:t>
+            </a:r>
+          </a:p>
+          <a:p>
+            <a:r>
+              <a:rPr lang="it-IT" dirty="0">
+                <a:solidFill>
+                  <a:srgbClr val="171FE2"/>
+                </a:solidFill>
+                <a:latin typeface="Consolas" panose="020B0609020204030204" pitchFamily="49" charset="0"/>
+              </a:rPr>
+              <a:t>exit</a:t>
+            </a:r>
+          </a:p>
+          <a:p>
+            <a:r>
+              <a:rPr lang="it-IT" b="1" dirty="0"/>
+              <a:t>3. Distruggiamo il container e verifichiamo la persistenza:</a:t>
+            </a:r>
+          </a:p>
+          <a:p>
+            <a:r>
+              <a:rPr lang="en-US" dirty="0">
+                <a:solidFill>
+                  <a:srgbClr val="171FE2"/>
+                </a:solidFill>
+                <a:latin typeface="Consolas" panose="020B0609020204030204" pitchFamily="49" charset="0"/>
+              </a:rPr>
+              <a:t>docker rm -f web-</a:t>
+            </a:r>
+            <a:r>
+              <a:rPr lang="en-US" dirty="0" err="1">
+                <a:solidFill>
+                  <a:srgbClr val="171FE2"/>
+                </a:solidFill>
+                <a:latin typeface="Consolas" panose="020B0609020204030204" pitchFamily="49" charset="0"/>
+              </a:rPr>
+              <a:t>salvato</a:t>
+            </a:r>
+            <a:endParaRPr lang="en-US" dirty="0">
+              <a:solidFill>
+                <a:srgbClr val="171FE2"/>
+              </a:solidFill>
+              <a:latin typeface="Consolas" panose="020B0609020204030204" pitchFamily="49" charset="0"/>
+            </a:endParaRPr>
+          </a:p>
+          <a:p>
+            <a:r>
+              <a:rPr lang="en-US" dirty="0">
+                <a:solidFill>
+                  <a:srgbClr val="171FE2"/>
+                </a:solidFill>
+                <a:latin typeface="Consolas" panose="020B0609020204030204" pitchFamily="49" charset="0"/>
+              </a:rPr>
+              <a:t>docker run -d --name web-</a:t>
+            </a:r>
+            <a:r>
+              <a:rPr lang="en-US" dirty="0" err="1">
+                <a:solidFill>
+                  <a:srgbClr val="171FE2"/>
+                </a:solidFill>
+                <a:latin typeface="Consolas" panose="020B0609020204030204" pitchFamily="49" charset="0"/>
+              </a:rPr>
+              <a:t>salvato</a:t>
+            </a:r>
+            <a:r>
+              <a:rPr lang="en-US" dirty="0">
+                <a:solidFill>
+                  <a:srgbClr val="171FE2"/>
+                </a:solidFill>
+                <a:latin typeface="Consolas" panose="020B0609020204030204" pitchFamily="49" charset="0"/>
+              </a:rPr>
+              <a:t> -p 8083:80 -v </a:t>
+            </a:r>
+            <a:r>
+              <a:rPr lang="en-US" dirty="0" err="1">
+                <a:solidFill>
+                  <a:srgbClr val="171FE2"/>
+                </a:solidFill>
+                <a:latin typeface="Consolas" panose="020B0609020204030204" pitchFamily="49" charset="0"/>
+              </a:rPr>
+              <a:t>mio</a:t>
+            </a:r>
+            <a:r>
+              <a:rPr lang="en-US" dirty="0">
+                <a:solidFill>
+                  <a:srgbClr val="171FE2"/>
+                </a:solidFill>
+                <a:latin typeface="Consolas" panose="020B0609020204030204" pitchFamily="49" charset="0"/>
+              </a:rPr>
+              <a:t>-volume-</a:t>
+            </a:r>
+            <a:r>
+              <a:rPr lang="en-US" dirty="0" err="1">
+                <a:solidFill>
+                  <a:srgbClr val="171FE2"/>
+                </a:solidFill>
+                <a:latin typeface="Consolas" panose="020B0609020204030204" pitchFamily="49" charset="0"/>
+              </a:rPr>
+              <a:t>persistente</a:t>
+            </a:r>
+            <a:r>
+              <a:rPr lang="en-US" dirty="0">
+                <a:solidFill>
+                  <a:srgbClr val="171FE2"/>
+                </a:solidFill>
+                <a:latin typeface="Consolas" panose="020B0609020204030204" pitchFamily="49" charset="0"/>
+              </a:rPr>
+              <a:t>:/</a:t>
+            </a:r>
+            <a:r>
+              <a:rPr lang="en-US" dirty="0" err="1">
+                <a:solidFill>
+                  <a:srgbClr val="171FE2"/>
+                </a:solidFill>
+                <a:latin typeface="Consolas" panose="020B0609020204030204" pitchFamily="49" charset="0"/>
+              </a:rPr>
+              <a:t>usr</a:t>
+            </a:r>
+            <a:r>
+              <a:rPr lang="en-US" dirty="0">
+                <a:solidFill>
+                  <a:srgbClr val="171FE2"/>
+                </a:solidFill>
+                <a:latin typeface="Consolas" panose="020B0609020204030204" pitchFamily="49" charset="0"/>
+              </a:rPr>
+              <a:t>/share/nginx/html </a:t>
+            </a:r>
+            <a:r>
+              <a:rPr lang="en-US" dirty="0" err="1">
+                <a:solidFill>
+                  <a:srgbClr val="171FE2"/>
+                </a:solidFill>
+                <a:latin typeface="Consolas" panose="020B0609020204030204" pitchFamily="49" charset="0"/>
+              </a:rPr>
+              <a:t>nginx:latest</a:t>
+            </a:r>
+            <a:endParaRPr lang="it-IT" dirty="0">
+              <a:solidFill>
+                <a:srgbClr val="171FE2"/>
+              </a:solidFill>
+              <a:latin typeface="Consolas" panose="020B0609020204030204" pitchFamily="49" charset="0"/>
+            </a:endParaRPr>
+          </a:p>
+        </p:txBody>
+      </p:sp>
+      <p:sp>
+        <p:nvSpPr>
+          <p:cNvPr id="4" name="Segnaposto numero diapositiva 11">
+            <a:extLst>
+              <a:ext uri="{FF2B5EF4-FFF2-40B4-BE49-F238E27FC236}">
+                <a16:creationId xmlns:a16="http://schemas.microsoft.com/office/drawing/2014/main" id="{61CFEA18-CE68-12BA-C7A7-E975F9383BF9}"/>
+              </a:ext>
+            </a:extLst>
+          </p:cNvPr>
+          <p:cNvSpPr>
+            <a:spLocks noGrp="1"/>
+          </p:cNvSpPr>
+          <p:nvPr>
+            <p:ph type="sldNum" sz="quarter" idx="12"/>
+          </p:nvPr>
+        </p:nvSpPr>
+        <p:spPr>
+          <a:xfrm>
+            <a:off x="8610600" y="6356350"/>
+            <a:ext cx="2743200" cy="365125"/>
+          </a:xfrm>
+        </p:spPr>
+        <p:txBody>
+          <a:bodyPr/>
+          <a:lstStyle/>
+          <a:p>
+            <a:r>
+              <a:rPr lang="it-IT" dirty="0"/>
+              <a:t>31</a:t>
+            </a:r>
+          </a:p>
+        </p:txBody>
+      </p:sp>
+    </p:spTree>
+    <p:extLst>
+      <p:ext uri="{BB962C8B-B14F-4D97-AF65-F5344CB8AC3E}">
+        <p14:creationId xmlns:p14="http://schemas.microsoft.com/office/powerpoint/2010/main" val="3771022334"/>
+      </p:ext>
+    </p:extLst>
+  </p:cSld>
+  <p:clrMapOvr>
+    <a:masterClrMapping/>
+  </p:clrMapOvr>
+</p:sld>
+</file>
+
+<file path=ppt/slides/slide34.xml><?xml version="1.0" encoding="utf-8"?>
+<p:sld xmlns:a="http://schemas.openxmlformats.org/drawingml/2006/main" xmlns:r="http://schemas.openxmlformats.org/officeDocument/2006/relationships" xmlns:p="http://schemas.openxmlformats.org/presentationml/2006/main">
+  <p:cSld>
+    <p:spTree>
+      <p:nvGrpSpPr>
+        <p:cNvPr id="1" name="">
+          <a:extLst>
+            <a:ext uri="{FF2B5EF4-FFF2-40B4-BE49-F238E27FC236}">
+              <a16:creationId xmlns:a16="http://schemas.microsoft.com/office/drawing/2014/main" id="{C4B8EB9C-9EF8-AF69-1024-E06FE6C743A1}"/>
+            </a:ext>
+          </a:extLst>
+        </p:cNvPr>
+        <p:cNvGrpSpPr/>
+        <p:nvPr/>
+      </p:nvGrpSpPr>
+      <p:grpSpPr>
+        <a:xfrm>
+          <a:off x="0" y="0"/>
+          <a:ext cx="0" cy="0"/>
+          <a:chOff x="0" y="0"/>
+          <a:chExt cx="0" cy="0"/>
+        </a:xfrm>
+      </p:grpSpPr>
+      <p:sp>
+        <p:nvSpPr>
+          <p:cNvPr id="3" name="Contenuto della lezione">
+            <a:extLst>
+              <a:ext uri="{FF2B5EF4-FFF2-40B4-BE49-F238E27FC236}">
+                <a16:creationId xmlns:a16="http://schemas.microsoft.com/office/drawing/2014/main" id="{62D1FE79-7230-7201-38F2-8D5E379C0AF1}"/>
+              </a:ext>
+            </a:extLst>
+          </p:cNvPr>
+          <p:cNvSpPr>
+            <a:spLocks noGrp="1"/>
+          </p:cNvSpPr>
+          <p:nvPr>
+            <p:ph idx="1"/>
+          </p:nvPr>
+        </p:nvSpPr>
+        <p:spPr>
+          <a:xfrm>
+            <a:off x="1077759" y="707275"/>
+            <a:ext cx="10036481" cy="5839829"/>
+          </a:xfrm>
+        </p:spPr>
+        <p:txBody>
+          <a:bodyPr/>
+          <a:lstStyle/>
+          <a:p>
+            <a:r>
+              <a:rPr lang="it-IT" b="1" dirty="0"/>
+              <a:t>Parte B: Il </a:t>
+            </a:r>
+            <a:r>
+              <a:rPr lang="it-IT" b="1" dirty="0" err="1"/>
+              <a:t>Bind</a:t>
+            </a:r>
+            <a:r>
+              <a:rPr lang="it-IT" b="1" dirty="0"/>
+              <a:t> Mount (La cartella di Windows)</a:t>
+            </a:r>
+          </a:p>
+          <a:p>
+            <a:pPr marL="342900" indent="-342900">
+              <a:buAutoNum type="arabicPeriod"/>
+            </a:pPr>
+            <a:r>
+              <a:rPr lang="it-IT" b="1" dirty="0"/>
+              <a:t>Crea al volo una cartella sul tuo Desktop chiamata sito-windows.</a:t>
+            </a:r>
+            <a:r>
+              <a:rPr lang="it-IT" dirty="0"/>
+              <a:t> </a:t>
+            </a:r>
+          </a:p>
+          <a:p>
+            <a:r>
+              <a:rPr lang="it-IT" dirty="0"/>
+              <a:t>Al suo interno crea un file chiamato index.html usando il Blocco Note o VS Code, e scriviamo: &lt;</a:t>
+            </a:r>
+            <a:r>
+              <a:rPr lang="it-IT" dirty="0">
+                <a:solidFill>
+                  <a:srgbClr val="171FE2"/>
+                </a:solidFill>
+                <a:latin typeface="Consolas" panose="020B0609020204030204" pitchFamily="49" charset="0"/>
+              </a:rPr>
+              <a:t>h1&gt;Sito da Windows! 💻&lt;/h1&gt;</a:t>
+            </a:r>
+          </a:p>
+          <a:p>
+            <a:r>
+              <a:rPr lang="it-IT" b="1" dirty="0"/>
+              <a:t>2. Avviamo un container proiettando questa cartella interna (spostiamoci prima sul Desktop):</a:t>
+            </a:r>
+          </a:p>
+          <a:p>
+            <a:r>
+              <a:rPr lang="it-IT" dirty="0">
+                <a:solidFill>
+                  <a:srgbClr val="171FE2"/>
+                </a:solidFill>
+                <a:latin typeface="Consolas" panose="020B0609020204030204" pitchFamily="49" charset="0"/>
+              </a:rPr>
+              <a:t>cd C:\Users\Utente\Desktop\sito-windows</a:t>
+            </a:r>
+          </a:p>
+          <a:p>
+            <a:r>
+              <a:rPr lang="it-IT" dirty="0" err="1">
+                <a:solidFill>
+                  <a:srgbClr val="171FE2"/>
+                </a:solidFill>
+                <a:latin typeface="Consolas" panose="020B0609020204030204" pitchFamily="49" charset="0"/>
+              </a:rPr>
+              <a:t>docker</a:t>
+            </a:r>
+            <a:r>
+              <a:rPr lang="it-IT" dirty="0">
+                <a:solidFill>
+                  <a:srgbClr val="171FE2"/>
+                </a:solidFill>
+                <a:latin typeface="Consolas" panose="020B0609020204030204" pitchFamily="49" charset="0"/>
+              </a:rPr>
+              <a:t> </a:t>
+            </a:r>
+            <a:r>
+              <a:rPr lang="it-IT" dirty="0" err="1">
+                <a:solidFill>
+                  <a:srgbClr val="171FE2"/>
+                </a:solidFill>
+                <a:latin typeface="Consolas" panose="020B0609020204030204" pitchFamily="49" charset="0"/>
+              </a:rPr>
+              <a:t>run</a:t>
+            </a:r>
+            <a:r>
+              <a:rPr lang="it-IT" dirty="0">
+                <a:solidFill>
+                  <a:srgbClr val="171FE2"/>
+                </a:solidFill>
+                <a:latin typeface="Consolas" panose="020B0609020204030204" pitchFamily="49" charset="0"/>
+              </a:rPr>
+              <a:t> -d --name web-developer -p 8084:80 -v ${PWD}:/</a:t>
+            </a:r>
+            <a:r>
+              <a:rPr lang="it-IT" dirty="0" err="1">
+                <a:solidFill>
+                  <a:srgbClr val="171FE2"/>
+                </a:solidFill>
+                <a:latin typeface="Consolas" panose="020B0609020204030204" pitchFamily="49" charset="0"/>
+              </a:rPr>
+              <a:t>usr</a:t>
+            </a:r>
+            <a:r>
+              <a:rPr lang="it-IT" dirty="0">
+                <a:solidFill>
+                  <a:srgbClr val="171FE2"/>
+                </a:solidFill>
+                <a:latin typeface="Consolas" panose="020B0609020204030204" pitchFamily="49" charset="0"/>
+              </a:rPr>
+              <a:t>/share/</a:t>
+            </a:r>
+            <a:r>
+              <a:rPr lang="it-IT" dirty="0" err="1">
+                <a:solidFill>
+                  <a:srgbClr val="171FE2"/>
+                </a:solidFill>
+                <a:latin typeface="Consolas" panose="020B0609020204030204" pitchFamily="49" charset="0"/>
+              </a:rPr>
+              <a:t>nginx</a:t>
+            </a:r>
+            <a:r>
+              <a:rPr lang="it-IT" dirty="0">
+                <a:solidFill>
+                  <a:srgbClr val="171FE2"/>
+                </a:solidFill>
+                <a:latin typeface="Consolas" panose="020B0609020204030204" pitchFamily="49" charset="0"/>
+              </a:rPr>
+              <a:t>/html </a:t>
+            </a:r>
+            <a:r>
+              <a:rPr lang="it-IT" dirty="0" err="1">
+                <a:solidFill>
+                  <a:srgbClr val="171FE2"/>
+                </a:solidFill>
+                <a:latin typeface="Consolas" panose="020B0609020204030204" pitchFamily="49" charset="0"/>
+              </a:rPr>
+              <a:t>nginx:latest</a:t>
+            </a:r>
+            <a:endParaRPr lang="it-IT" dirty="0">
+              <a:solidFill>
+                <a:srgbClr val="171FE2"/>
+              </a:solidFill>
+              <a:latin typeface="Consolas" panose="020B0609020204030204" pitchFamily="49" charset="0"/>
+            </a:endParaRPr>
+          </a:p>
+          <a:p>
+            <a:r>
+              <a:rPr lang="it-IT" dirty="0"/>
+              <a:t>Su http://localhost:8084 verifichiamo la lettura del testo scritto in index.html.</a:t>
+            </a:r>
+            <a:endParaRPr lang="it-IT" dirty="0">
+              <a:solidFill>
+                <a:srgbClr val="171FE2"/>
+              </a:solidFill>
+              <a:latin typeface="Consolas" panose="020B0609020204030204" pitchFamily="49" charset="0"/>
+            </a:endParaRPr>
+          </a:p>
+        </p:txBody>
+      </p:sp>
+      <p:sp>
+        <p:nvSpPr>
+          <p:cNvPr id="4" name="Segnaposto numero diapositiva 11">
+            <a:extLst>
+              <a:ext uri="{FF2B5EF4-FFF2-40B4-BE49-F238E27FC236}">
+                <a16:creationId xmlns:a16="http://schemas.microsoft.com/office/drawing/2014/main" id="{0D529534-F1AE-319E-6C0C-5BFEE7A91443}"/>
+              </a:ext>
+            </a:extLst>
+          </p:cNvPr>
+          <p:cNvSpPr>
+            <a:spLocks noGrp="1"/>
+          </p:cNvSpPr>
+          <p:nvPr>
+            <p:ph type="sldNum" sz="quarter" idx="12"/>
+          </p:nvPr>
+        </p:nvSpPr>
+        <p:spPr>
+          <a:xfrm>
+            <a:off x="8610600" y="6356350"/>
+            <a:ext cx="2743200" cy="365125"/>
+          </a:xfrm>
+        </p:spPr>
+        <p:txBody>
+          <a:bodyPr/>
+          <a:lstStyle/>
+          <a:p>
+            <a:r>
+              <a:rPr lang="it-IT" dirty="0"/>
+              <a:t>32</a:t>
+            </a:r>
+          </a:p>
+        </p:txBody>
+      </p:sp>
+    </p:spTree>
+    <p:extLst>
+      <p:ext uri="{BB962C8B-B14F-4D97-AF65-F5344CB8AC3E}">
+        <p14:creationId xmlns:p14="http://schemas.microsoft.com/office/powerpoint/2010/main" val="2467125188"/>
+      </p:ext>
+    </p:extLst>
+  </p:cSld>
+  <p:clrMapOvr>
+    <a:masterClrMapping/>
+  </p:clrMapOvr>
+</p:sld>
+</file>
+
+<file path=ppt/slides/slide35.xml><?xml version="1.0" encoding="utf-8"?>
+<p:sld xmlns:a="http://schemas.openxmlformats.org/drawingml/2006/main" xmlns:r="http://schemas.openxmlformats.org/officeDocument/2006/relationships" xmlns:p="http://schemas.openxmlformats.org/presentationml/2006/main">
+  <p:cSld>
+    <p:spTree>
+      <p:nvGrpSpPr>
+        <p:cNvPr id="1" name="">
+          <a:extLst>
+            <a:ext uri="{FF2B5EF4-FFF2-40B4-BE49-F238E27FC236}">
+              <a16:creationId xmlns:a16="http://schemas.microsoft.com/office/drawing/2014/main" id="{9D2C3943-7AD9-6E2A-2A56-063261588DD6}"/>
+            </a:ext>
+          </a:extLst>
+        </p:cNvPr>
+        <p:cNvGrpSpPr/>
+        <p:nvPr/>
+      </p:nvGrpSpPr>
+      <p:grpSpPr>
+        <a:xfrm>
+          <a:off x="0" y="0"/>
+          <a:ext cx="0" cy="0"/>
+          <a:chOff x="0" y="0"/>
+          <a:chExt cx="0" cy="0"/>
+        </a:xfrm>
+      </p:grpSpPr>
+      <p:sp>
+        <p:nvSpPr>
+          <p:cNvPr id="3" name="Contenuto della lezione">
+            <a:extLst>
+              <a:ext uri="{FF2B5EF4-FFF2-40B4-BE49-F238E27FC236}">
+                <a16:creationId xmlns:a16="http://schemas.microsoft.com/office/drawing/2014/main" id="{4005E0C1-8A3B-D3FF-F06A-BC5737C377C9}"/>
+              </a:ext>
+            </a:extLst>
+          </p:cNvPr>
+          <p:cNvSpPr>
+            <a:spLocks noGrp="1"/>
+          </p:cNvSpPr>
+          <p:nvPr>
+            <p:ph idx="1"/>
+          </p:nvPr>
+        </p:nvSpPr>
+        <p:spPr>
+          <a:xfrm>
+            <a:off x="1077759" y="707275"/>
+            <a:ext cx="10036481" cy="5839829"/>
+          </a:xfrm>
+        </p:spPr>
+        <p:txBody>
+          <a:bodyPr/>
+          <a:lstStyle/>
+          <a:p>
+            <a:r>
+              <a:rPr lang="it-IT" b="1" dirty="0"/>
+              <a:t>Parte C: </a:t>
+            </a:r>
+            <a:r>
+              <a:rPr lang="it-IT" dirty="0"/>
+              <a:t>Comunicazione tra container (Il test visivo con </a:t>
+            </a:r>
+            <a:r>
+              <a:rPr lang="it-IT" dirty="0" err="1"/>
+              <a:t>phpMyAdmin</a:t>
+            </a:r>
+            <a:r>
+              <a:rPr lang="it-IT" dirty="0"/>
+              <a:t> e </a:t>
+            </a:r>
+            <a:r>
+              <a:rPr lang="it-IT" dirty="0" err="1"/>
+              <a:t>MariaDB</a:t>
+            </a:r>
+            <a:r>
+              <a:rPr lang="it-IT" dirty="0"/>
+              <a:t>)</a:t>
+            </a:r>
+          </a:p>
+          <a:p>
+            <a:r>
+              <a:rPr lang="it-IT" b="1" dirty="0"/>
+              <a:t>SCENARIO A: Nella rete di default (bridge) – Obbligati a usare l'IP</a:t>
+            </a:r>
+          </a:p>
+          <a:p>
+            <a:r>
+              <a:rPr lang="it-IT" dirty="0"/>
+              <a:t>1. Avviamo il database</a:t>
+            </a:r>
+          </a:p>
+          <a:p>
+            <a:r>
+              <a:rPr lang="it-IT" dirty="0" err="1">
+                <a:solidFill>
+                  <a:srgbClr val="171FE2"/>
+                </a:solidFill>
+                <a:latin typeface="Consolas" panose="020B0609020204030204" pitchFamily="49" charset="0"/>
+              </a:rPr>
+              <a:t>docker</a:t>
+            </a:r>
+            <a:r>
+              <a:rPr lang="it-IT" dirty="0">
+                <a:solidFill>
+                  <a:srgbClr val="171FE2"/>
+                </a:solidFill>
+                <a:latin typeface="Consolas" panose="020B0609020204030204" pitchFamily="49" charset="0"/>
+              </a:rPr>
+              <a:t> </a:t>
+            </a:r>
+            <a:r>
+              <a:rPr lang="it-IT" dirty="0" err="1">
+                <a:solidFill>
+                  <a:srgbClr val="171FE2"/>
+                </a:solidFill>
+                <a:latin typeface="Consolas" panose="020B0609020204030204" pitchFamily="49" charset="0"/>
+              </a:rPr>
+              <a:t>run</a:t>
+            </a:r>
+            <a:r>
+              <a:rPr lang="it-IT" dirty="0">
+                <a:solidFill>
+                  <a:srgbClr val="171FE2"/>
+                </a:solidFill>
+                <a:latin typeface="Consolas" panose="020B0609020204030204" pitchFamily="49" charset="0"/>
+              </a:rPr>
+              <a:t> -d --name il-mio-</a:t>
+            </a:r>
+            <a:r>
+              <a:rPr lang="it-IT" dirty="0" err="1">
+                <a:solidFill>
+                  <a:srgbClr val="171FE2"/>
+                </a:solidFill>
+                <a:latin typeface="Consolas" panose="020B0609020204030204" pitchFamily="49" charset="0"/>
+              </a:rPr>
+              <a:t>db</a:t>
+            </a:r>
+            <a:r>
+              <a:rPr lang="it-IT" dirty="0">
+                <a:solidFill>
+                  <a:srgbClr val="171FE2"/>
+                </a:solidFill>
+                <a:latin typeface="Consolas" panose="020B0609020204030204" pitchFamily="49" charset="0"/>
+              </a:rPr>
+              <a:t> -e MARIADB_ROOT_PASSWORD=segreta </a:t>
+            </a:r>
+            <a:r>
+              <a:rPr lang="it-IT" dirty="0" err="1">
+                <a:solidFill>
+                  <a:srgbClr val="171FE2"/>
+                </a:solidFill>
+                <a:latin typeface="Consolas" panose="020B0609020204030204" pitchFamily="49" charset="0"/>
+              </a:rPr>
+              <a:t>mariadb:latest</a:t>
+            </a:r>
+            <a:endParaRPr lang="it-IT" dirty="0">
+              <a:solidFill>
+                <a:srgbClr val="171FE2"/>
+              </a:solidFill>
+              <a:latin typeface="Consolas" panose="020B0609020204030204" pitchFamily="49" charset="0"/>
+            </a:endParaRPr>
+          </a:p>
+          <a:p>
+            <a:endParaRPr lang="it-IT" dirty="0"/>
+          </a:p>
+          <a:p>
+            <a:r>
+              <a:rPr lang="it-IT" dirty="0"/>
+              <a:t>2. Recuperiamo l'IP che Docker ha assegnato al database (ci serve per dopo)</a:t>
+            </a:r>
+          </a:p>
+          <a:p>
+            <a:r>
+              <a:rPr lang="it-IT" dirty="0" err="1">
+                <a:solidFill>
+                  <a:srgbClr val="171FE2"/>
+                </a:solidFill>
+                <a:latin typeface="Consolas" panose="020B0609020204030204" pitchFamily="49" charset="0"/>
+              </a:rPr>
+              <a:t>docker</a:t>
+            </a:r>
+            <a:r>
+              <a:rPr lang="it-IT" dirty="0">
+                <a:solidFill>
+                  <a:srgbClr val="171FE2"/>
+                </a:solidFill>
+                <a:latin typeface="Consolas" panose="020B0609020204030204" pitchFamily="49" charset="0"/>
+              </a:rPr>
+              <a:t> network </a:t>
+            </a:r>
+            <a:r>
+              <a:rPr lang="it-IT" dirty="0" err="1">
+                <a:solidFill>
+                  <a:srgbClr val="171FE2"/>
+                </a:solidFill>
+                <a:latin typeface="Consolas" panose="020B0609020204030204" pitchFamily="49" charset="0"/>
+              </a:rPr>
+              <a:t>inspect</a:t>
+            </a:r>
+            <a:r>
+              <a:rPr lang="it-IT" dirty="0">
+                <a:solidFill>
+                  <a:srgbClr val="171FE2"/>
+                </a:solidFill>
+                <a:latin typeface="Consolas" panose="020B0609020204030204" pitchFamily="49" charset="0"/>
+              </a:rPr>
+              <a:t> bridge</a:t>
+            </a:r>
+          </a:p>
+          <a:p>
+            <a:endParaRPr lang="it-IT" dirty="0">
+              <a:solidFill>
+                <a:srgbClr val="171FE2"/>
+              </a:solidFill>
+              <a:latin typeface="Consolas" panose="020B0609020204030204" pitchFamily="49" charset="0"/>
+            </a:endParaRPr>
+          </a:p>
+          <a:p>
+            <a:r>
+              <a:rPr lang="it-IT" dirty="0"/>
+              <a:t>3. Avviamo </a:t>
+            </a:r>
+            <a:r>
+              <a:rPr lang="it-IT" dirty="0" err="1"/>
+              <a:t>phpMyAdmin</a:t>
+            </a:r>
+            <a:r>
+              <a:rPr lang="it-IT" dirty="0"/>
+              <a:t> esposto sulla porta 8080 di Windows (PMA_ARBITRARY ci farà associare l’</a:t>
+            </a:r>
+            <a:r>
+              <a:rPr lang="it-IT" dirty="0" err="1"/>
+              <a:t>ip</a:t>
+            </a:r>
+            <a:r>
+              <a:rPr lang="it-IT" dirty="0"/>
+              <a:t> del </a:t>
+            </a:r>
+            <a:r>
+              <a:rPr lang="it-IT" dirty="0" err="1"/>
+              <a:t>db</a:t>
+            </a:r>
+            <a:r>
+              <a:rPr lang="it-IT" dirty="0"/>
+              <a:t>).</a:t>
+            </a:r>
+          </a:p>
+          <a:p>
+            <a:r>
+              <a:rPr lang="it-IT" dirty="0" err="1">
+                <a:solidFill>
+                  <a:srgbClr val="171FE2"/>
+                </a:solidFill>
+                <a:latin typeface="Consolas" panose="020B0609020204030204" pitchFamily="49" charset="0"/>
+              </a:rPr>
+              <a:t>docker</a:t>
+            </a:r>
+            <a:r>
+              <a:rPr lang="it-IT" dirty="0">
+                <a:solidFill>
+                  <a:srgbClr val="171FE2"/>
+                </a:solidFill>
+                <a:latin typeface="Consolas" panose="020B0609020204030204" pitchFamily="49" charset="0"/>
+              </a:rPr>
+              <a:t> </a:t>
+            </a:r>
+            <a:r>
+              <a:rPr lang="it-IT" dirty="0" err="1">
+                <a:solidFill>
+                  <a:srgbClr val="171FE2"/>
+                </a:solidFill>
+                <a:latin typeface="Consolas" panose="020B0609020204030204" pitchFamily="49" charset="0"/>
+              </a:rPr>
+              <a:t>run</a:t>
+            </a:r>
+            <a:r>
+              <a:rPr lang="it-IT" dirty="0">
+                <a:solidFill>
+                  <a:srgbClr val="171FE2"/>
+                </a:solidFill>
+                <a:latin typeface="Consolas" panose="020B0609020204030204" pitchFamily="49" charset="0"/>
+              </a:rPr>
+              <a:t> -d --name la-mia-</a:t>
+            </a:r>
+            <a:r>
+              <a:rPr lang="it-IT" dirty="0" err="1">
+                <a:solidFill>
+                  <a:srgbClr val="171FE2"/>
+                </a:solidFill>
+                <a:latin typeface="Consolas" panose="020B0609020204030204" pitchFamily="49" charset="0"/>
+              </a:rPr>
+              <a:t>gui</a:t>
+            </a:r>
+            <a:r>
+              <a:rPr lang="it-IT" dirty="0">
+                <a:solidFill>
+                  <a:srgbClr val="171FE2"/>
+                </a:solidFill>
+                <a:latin typeface="Consolas" panose="020B0609020204030204" pitchFamily="49" charset="0"/>
+              </a:rPr>
+              <a:t> -p 8080:80 -e PMA_ARBITRARY=1 </a:t>
+            </a:r>
+            <a:r>
+              <a:rPr lang="it-IT" dirty="0" err="1">
+                <a:solidFill>
+                  <a:srgbClr val="171FE2"/>
+                </a:solidFill>
+                <a:latin typeface="Consolas" panose="020B0609020204030204" pitchFamily="49" charset="0"/>
+              </a:rPr>
+              <a:t>phpmyadmin:latest</a:t>
+            </a:r>
+            <a:endParaRPr lang="it-IT" dirty="0">
+              <a:solidFill>
+                <a:srgbClr val="171FE2"/>
+              </a:solidFill>
+              <a:latin typeface="Consolas" panose="020B0609020204030204" pitchFamily="49" charset="0"/>
+            </a:endParaRPr>
+          </a:p>
+          <a:p>
+            <a:r>
+              <a:rPr lang="it-IT" dirty="0"/>
+              <a:t>Nell’input server del login di </a:t>
+            </a:r>
+            <a:r>
+              <a:rPr lang="it-IT" dirty="0" err="1"/>
+              <a:t>phpMyAdmin</a:t>
+            </a:r>
+            <a:r>
+              <a:rPr lang="it-IT" dirty="0"/>
+              <a:t> scriviamo l’</a:t>
+            </a:r>
+            <a:r>
+              <a:rPr lang="it-IT" dirty="0" err="1"/>
+              <a:t>ip</a:t>
+            </a:r>
+            <a:r>
+              <a:rPr lang="it-IT" dirty="0"/>
+              <a:t> del </a:t>
+            </a:r>
+            <a:r>
+              <a:rPr lang="it-IT" dirty="0" err="1"/>
+              <a:t>db</a:t>
+            </a:r>
+            <a:r>
+              <a:rPr lang="it-IT" dirty="0"/>
+              <a:t>. Mettiamo le credenziale (user è root di default) e proviamo l’accesso (entreremo).</a:t>
+            </a:r>
+          </a:p>
+          <a:p>
+            <a:r>
+              <a:rPr lang="it-IT" dirty="0">
+                <a:solidFill>
+                  <a:srgbClr val="171FE2"/>
+                </a:solidFill>
+              </a:rPr>
+              <a:t>Scrivendo il-mio-</a:t>
+            </a:r>
+            <a:r>
+              <a:rPr lang="it-IT" dirty="0" err="1">
+                <a:solidFill>
+                  <a:srgbClr val="171FE2"/>
+                </a:solidFill>
+              </a:rPr>
+              <a:t>db</a:t>
+            </a:r>
+            <a:r>
+              <a:rPr lang="it-IT" dirty="0">
+                <a:solidFill>
+                  <a:srgbClr val="171FE2"/>
+                </a:solidFill>
+              </a:rPr>
+              <a:t> al posto dell’</a:t>
+            </a:r>
+            <a:r>
+              <a:rPr lang="it-IT" dirty="0" err="1">
+                <a:solidFill>
+                  <a:srgbClr val="171FE2"/>
+                </a:solidFill>
+              </a:rPr>
+              <a:t>ip</a:t>
+            </a:r>
+            <a:r>
+              <a:rPr lang="it-IT" dirty="0">
+                <a:solidFill>
+                  <a:srgbClr val="171FE2"/>
+                </a:solidFill>
+              </a:rPr>
+              <a:t> non verrà riconosciuto il </a:t>
+            </a:r>
+            <a:r>
+              <a:rPr lang="it-IT" dirty="0" err="1">
+                <a:solidFill>
+                  <a:srgbClr val="171FE2"/>
+                </a:solidFill>
+              </a:rPr>
+              <a:t>db</a:t>
+            </a:r>
+            <a:r>
+              <a:rPr lang="it-IT" dirty="0">
+                <a:solidFill>
+                  <a:srgbClr val="171FE2"/>
+                </a:solidFill>
+              </a:rPr>
+              <a:t> e ci darà errore di accesso.</a:t>
+            </a:r>
+            <a:endParaRPr lang="it-IT" dirty="0">
+              <a:solidFill>
+                <a:srgbClr val="171FE2"/>
+              </a:solidFill>
+              <a:latin typeface="Consolas" panose="020B0609020204030204" pitchFamily="49" charset="0"/>
+            </a:endParaRPr>
+          </a:p>
+        </p:txBody>
+      </p:sp>
+      <p:sp>
+        <p:nvSpPr>
+          <p:cNvPr id="4" name="Segnaposto numero diapositiva 11">
+            <a:extLst>
+              <a:ext uri="{FF2B5EF4-FFF2-40B4-BE49-F238E27FC236}">
+                <a16:creationId xmlns:a16="http://schemas.microsoft.com/office/drawing/2014/main" id="{16A352AC-89D9-ADB8-FF48-45A43E283E37}"/>
+              </a:ext>
+            </a:extLst>
+          </p:cNvPr>
+          <p:cNvSpPr>
+            <a:spLocks noGrp="1"/>
+          </p:cNvSpPr>
+          <p:nvPr>
+            <p:ph type="sldNum" sz="quarter" idx="12"/>
+          </p:nvPr>
+        </p:nvSpPr>
+        <p:spPr>
+          <a:xfrm>
+            <a:off x="8610600" y="6356350"/>
+            <a:ext cx="2743200" cy="365125"/>
+          </a:xfrm>
+        </p:spPr>
+        <p:txBody>
+          <a:bodyPr/>
+          <a:lstStyle/>
+          <a:p>
+            <a:r>
+              <a:rPr lang="it-IT" dirty="0"/>
+              <a:t>33</a:t>
+            </a:r>
+          </a:p>
+        </p:txBody>
+      </p:sp>
+    </p:spTree>
+    <p:extLst>
+      <p:ext uri="{BB962C8B-B14F-4D97-AF65-F5344CB8AC3E}">
+        <p14:creationId xmlns:p14="http://schemas.microsoft.com/office/powerpoint/2010/main" val="431121875"/>
+      </p:ext>
+    </p:extLst>
+  </p:cSld>
+  <p:clrMapOvr>
+    <a:masterClrMapping/>
+  </p:clrMapOvr>
+</p:sld>
+</file>
+
+<file path=ppt/slides/slide36.xml><?xml version="1.0" encoding="utf-8"?>
+<p:sld xmlns:a="http://schemas.openxmlformats.org/drawingml/2006/main" xmlns:r="http://schemas.openxmlformats.org/officeDocument/2006/relationships" xmlns:p="http://schemas.openxmlformats.org/presentationml/2006/main">
+  <p:cSld>
+    <p:spTree>
+      <p:nvGrpSpPr>
+        <p:cNvPr id="1" name="">
+          <a:extLst>
+            <a:ext uri="{FF2B5EF4-FFF2-40B4-BE49-F238E27FC236}">
+              <a16:creationId xmlns:a16="http://schemas.microsoft.com/office/drawing/2014/main" id="{0E2745B3-A4F6-06D2-79C5-2FFB50277A7F}"/>
+            </a:ext>
+          </a:extLst>
+        </p:cNvPr>
+        <p:cNvGrpSpPr/>
+        <p:nvPr/>
+      </p:nvGrpSpPr>
+      <p:grpSpPr>
+        <a:xfrm>
+          <a:off x="0" y="0"/>
+          <a:ext cx="0" cy="0"/>
+          <a:chOff x="0" y="0"/>
+          <a:chExt cx="0" cy="0"/>
+        </a:xfrm>
+      </p:grpSpPr>
+      <p:sp>
+        <p:nvSpPr>
+          <p:cNvPr id="3" name="Contenuto della lezione">
+            <a:extLst>
+              <a:ext uri="{FF2B5EF4-FFF2-40B4-BE49-F238E27FC236}">
+                <a16:creationId xmlns:a16="http://schemas.microsoft.com/office/drawing/2014/main" id="{C4973535-9858-23A8-225A-760D8432EA73}"/>
+              </a:ext>
+            </a:extLst>
+          </p:cNvPr>
+          <p:cNvSpPr>
+            <a:spLocks noGrp="1"/>
+          </p:cNvSpPr>
+          <p:nvPr>
+            <p:ph idx="1"/>
+          </p:nvPr>
+        </p:nvSpPr>
+        <p:spPr>
+          <a:xfrm>
+            <a:off x="1077759" y="707275"/>
+            <a:ext cx="10036481" cy="5839829"/>
+          </a:xfrm>
+        </p:spPr>
+        <p:txBody>
+          <a:bodyPr/>
+          <a:lstStyle/>
+          <a:p>
+            <a:r>
+              <a:rPr lang="it-IT" b="1" dirty="0"/>
+              <a:t>SCENARIO B: Nella rete personalizzata – La magia del NOME</a:t>
+            </a:r>
+          </a:p>
+          <a:p>
+            <a:r>
+              <a:rPr lang="it-IT" dirty="0"/>
+              <a:t>1. Rimuoviamo i vecchi container dello scenario A</a:t>
+            </a:r>
+          </a:p>
+          <a:p>
+            <a:r>
+              <a:rPr lang="it-IT" dirty="0" err="1">
+                <a:solidFill>
+                  <a:srgbClr val="171FE2"/>
+                </a:solidFill>
+                <a:latin typeface="Consolas" panose="020B0609020204030204" pitchFamily="49" charset="0"/>
+              </a:rPr>
+              <a:t>docker</a:t>
+            </a:r>
+            <a:r>
+              <a:rPr lang="it-IT" dirty="0">
+                <a:solidFill>
+                  <a:srgbClr val="171FE2"/>
+                </a:solidFill>
+                <a:latin typeface="Consolas" panose="020B0609020204030204" pitchFamily="49" charset="0"/>
+              </a:rPr>
+              <a:t> </a:t>
+            </a:r>
+            <a:r>
+              <a:rPr lang="it-IT" dirty="0" err="1">
+                <a:solidFill>
+                  <a:srgbClr val="171FE2"/>
+                </a:solidFill>
+                <a:latin typeface="Consolas" panose="020B0609020204030204" pitchFamily="49" charset="0"/>
+              </a:rPr>
+              <a:t>rm</a:t>
+            </a:r>
+            <a:r>
+              <a:rPr lang="it-IT" dirty="0">
+                <a:solidFill>
+                  <a:srgbClr val="171FE2"/>
+                </a:solidFill>
+                <a:latin typeface="Consolas" panose="020B0609020204030204" pitchFamily="49" charset="0"/>
+              </a:rPr>
+              <a:t> -f il-mio-</a:t>
+            </a:r>
+            <a:r>
+              <a:rPr lang="it-IT" dirty="0" err="1">
+                <a:solidFill>
+                  <a:srgbClr val="171FE2"/>
+                </a:solidFill>
+                <a:latin typeface="Consolas" panose="020B0609020204030204" pitchFamily="49" charset="0"/>
+              </a:rPr>
+              <a:t>db</a:t>
+            </a:r>
+            <a:r>
+              <a:rPr lang="it-IT" dirty="0">
+                <a:solidFill>
+                  <a:srgbClr val="171FE2"/>
+                </a:solidFill>
+                <a:latin typeface="Consolas" panose="020B0609020204030204" pitchFamily="49" charset="0"/>
+              </a:rPr>
+              <a:t> la-mia-</a:t>
+            </a:r>
+            <a:r>
+              <a:rPr lang="it-IT" dirty="0" err="1">
+                <a:solidFill>
+                  <a:srgbClr val="171FE2"/>
+                </a:solidFill>
+                <a:latin typeface="Consolas" panose="020B0609020204030204" pitchFamily="49" charset="0"/>
+              </a:rPr>
+              <a:t>gui</a:t>
+            </a:r>
+            <a:endParaRPr lang="it-IT" dirty="0">
+              <a:solidFill>
+                <a:srgbClr val="171FE2"/>
+              </a:solidFill>
+              <a:latin typeface="Consolas" panose="020B0609020204030204" pitchFamily="49" charset="0"/>
+            </a:endParaRPr>
+          </a:p>
+          <a:p>
+            <a:endParaRPr lang="it-IT" dirty="0"/>
+          </a:p>
+          <a:p>
+            <a:r>
+              <a:rPr lang="it-IT" dirty="0"/>
+              <a:t>2. Creiamo la rete personalizzata</a:t>
+            </a:r>
+          </a:p>
+          <a:p>
+            <a:r>
+              <a:rPr lang="it-IT" dirty="0" err="1">
+                <a:solidFill>
+                  <a:srgbClr val="171FE2"/>
+                </a:solidFill>
+                <a:latin typeface="Consolas" panose="020B0609020204030204" pitchFamily="49" charset="0"/>
+              </a:rPr>
+              <a:t>docker</a:t>
+            </a:r>
+            <a:r>
+              <a:rPr lang="it-IT" dirty="0">
+                <a:solidFill>
+                  <a:srgbClr val="171FE2"/>
+                </a:solidFill>
+                <a:latin typeface="Consolas" panose="020B0609020204030204" pitchFamily="49" charset="0"/>
+              </a:rPr>
+              <a:t> network create rete-aziendale</a:t>
+            </a:r>
+          </a:p>
+          <a:p>
+            <a:endParaRPr lang="it-IT" dirty="0"/>
+          </a:p>
+          <a:p>
+            <a:r>
+              <a:rPr lang="it-IT" dirty="0"/>
+              <a:t>3. </a:t>
+            </a:r>
+            <a:r>
+              <a:rPr lang="it-IT" dirty="0" err="1"/>
+              <a:t>Ri</a:t>
+            </a:r>
+            <a:r>
+              <a:rPr lang="it-IT" dirty="0"/>
+              <a:t>-avviamo il database inserendolo nella nuova rete</a:t>
+            </a:r>
+          </a:p>
+          <a:p>
+            <a:r>
+              <a:rPr lang="it-IT" dirty="0" err="1">
+                <a:solidFill>
+                  <a:srgbClr val="171FE2"/>
+                </a:solidFill>
+                <a:latin typeface="Consolas" panose="020B0609020204030204" pitchFamily="49" charset="0"/>
+              </a:rPr>
+              <a:t>docker</a:t>
+            </a:r>
+            <a:r>
+              <a:rPr lang="it-IT" dirty="0">
+                <a:solidFill>
+                  <a:srgbClr val="171FE2"/>
+                </a:solidFill>
+                <a:latin typeface="Consolas" panose="020B0609020204030204" pitchFamily="49" charset="0"/>
+              </a:rPr>
+              <a:t> </a:t>
+            </a:r>
+            <a:r>
+              <a:rPr lang="it-IT" dirty="0" err="1">
+                <a:solidFill>
+                  <a:srgbClr val="171FE2"/>
+                </a:solidFill>
+                <a:latin typeface="Consolas" panose="020B0609020204030204" pitchFamily="49" charset="0"/>
+              </a:rPr>
+              <a:t>run</a:t>
+            </a:r>
+            <a:r>
+              <a:rPr lang="it-IT" dirty="0">
+                <a:solidFill>
+                  <a:srgbClr val="171FE2"/>
+                </a:solidFill>
+                <a:latin typeface="Consolas" panose="020B0609020204030204" pitchFamily="49" charset="0"/>
+              </a:rPr>
+              <a:t> -d --name il-mio-</a:t>
+            </a:r>
+            <a:r>
+              <a:rPr lang="it-IT" dirty="0" err="1">
+                <a:solidFill>
+                  <a:srgbClr val="171FE2"/>
+                </a:solidFill>
+                <a:latin typeface="Consolas" panose="020B0609020204030204" pitchFamily="49" charset="0"/>
+              </a:rPr>
+              <a:t>db</a:t>
+            </a:r>
+            <a:r>
+              <a:rPr lang="it-IT" dirty="0">
+                <a:solidFill>
+                  <a:srgbClr val="171FE2"/>
+                </a:solidFill>
+                <a:latin typeface="Consolas" panose="020B0609020204030204" pitchFamily="49" charset="0"/>
+              </a:rPr>
+              <a:t> --network rete-aziendale -e MARIADB_ROOT_PASSWORD=segreta </a:t>
+            </a:r>
+            <a:r>
+              <a:rPr lang="it-IT" dirty="0" err="1">
+                <a:solidFill>
+                  <a:srgbClr val="171FE2"/>
+                </a:solidFill>
+                <a:latin typeface="Consolas" panose="020B0609020204030204" pitchFamily="49" charset="0"/>
+              </a:rPr>
+              <a:t>mariadb:latest</a:t>
+            </a:r>
+            <a:endParaRPr lang="it-IT" dirty="0">
+              <a:solidFill>
+                <a:srgbClr val="171FE2"/>
+              </a:solidFill>
+              <a:latin typeface="Consolas" panose="020B0609020204030204" pitchFamily="49" charset="0"/>
+            </a:endParaRPr>
+          </a:p>
+          <a:p>
+            <a:endParaRPr lang="it-IT" dirty="0"/>
+          </a:p>
+          <a:p>
+            <a:r>
+              <a:rPr lang="it-IT" dirty="0"/>
+              <a:t>4. </a:t>
+            </a:r>
+            <a:r>
+              <a:rPr lang="it-IT" dirty="0" err="1"/>
+              <a:t>Ri</a:t>
+            </a:r>
+            <a:r>
+              <a:rPr lang="it-IT" dirty="0"/>
+              <a:t>-avviamo </a:t>
+            </a:r>
+            <a:r>
+              <a:rPr lang="it-IT" dirty="0" err="1"/>
+              <a:t>phpMyAdmin</a:t>
+            </a:r>
+            <a:r>
+              <a:rPr lang="it-IT" dirty="0"/>
+              <a:t> inserendolo nella stessa rete</a:t>
+            </a:r>
+          </a:p>
+          <a:p>
+            <a:r>
+              <a:rPr lang="it-IT" dirty="0" err="1">
+                <a:solidFill>
+                  <a:srgbClr val="171FE2"/>
+                </a:solidFill>
+                <a:latin typeface="Consolas" panose="020B0609020204030204" pitchFamily="49" charset="0"/>
+              </a:rPr>
+              <a:t>docker</a:t>
+            </a:r>
+            <a:r>
+              <a:rPr lang="it-IT" dirty="0">
+                <a:solidFill>
+                  <a:srgbClr val="171FE2"/>
+                </a:solidFill>
+                <a:latin typeface="Consolas" panose="020B0609020204030204" pitchFamily="49" charset="0"/>
+              </a:rPr>
+              <a:t> </a:t>
+            </a:r>
+            <a:r>
+              <a:rPr lang="it-IT" dirty="0" err="1">
+                <a:solidFill>
+                  <a:srgbClr val="171FE2"/>
+                </a:solidFill>
+                <a:latin typeface="Consolas" panose="020B0609020204030204" pitchFamily="49" charset="0"/>
+              </a:rPr>
+              <a:t>run</a:t>
+            </a:r>
+            <a:r>
+              <a:rPr lang="it-IT" dirty="0">
+                <a:solidFill>
+                  <a:srgbClr val="171FE2"/>
+                </a:solidFill>
+                <a:latin typeface="Consolas" panose="020B0609020204030204" pitchFamily="49" charset="0"/>
+              </a:rPr>
+              <a:t> -d --name la-mia-</a:t>
+            </a:r>
+            <a:r>
+              <a:rPr lang="it-IT" dirty="0" err="1">
+                <a:solidFill>
+                  <a:srgbClr val="171FE2"/>
+                </a:solidFill>
+                <a:latin typeface="Consolas" panose="020B0609020204030204" pitchFamily="49" charset="0"/>
+              </a:rPr>
+              <a:t>gui</a:t>
+            </a:r>
+            <a:r>
+              <a:rPr lang="it-IT" dirty="0">
+                <a:solidFill>
+                  <a:srgbClr val="171FE2"/>
+                </a:solidFill>
+                <a:latin typeface="Consolas" panose="020B0609020204030204" pitchFamily="49" charset="0"/>
+              </a:rPr>
+              <a:t> --network rete-aziendale -p 8080:80 -e PMA_ARBITRARY=1 </a:t>
+            </a:r>
+            <a:r>
+              <a:rPr lang="it-IT" dirty="0" err="1">
+                <a:solidFill>
+                  <a:srgbClr val="171FE2"/>
+                </a:solidFill>
+                <a:latin typeface="Consolas" panose="020B0609020204030204" pitchFamily="49" charset="0"/>
+              </a:rPr>
+              <a:t>phpmyadmin:latest</a:t>
+            </a:r>
+            <a:endParaRPr lang="it-IT" dirty="0">
+              <a:solidFill>
+                <a:srgbClr val="171FE2"/>
+              </a:solidFill>
+              <a:latin typeface="Consolas" panose="020B0609020204030204" pitchFamily="49" charset="0"/>
+            </a:endParaRPr>
+          </a:p>
+          <a:p>
+            <a:endParaRPr lang="it-IT" dirty="0">
+              <a:solidFill>
+                <a:srgbClr val="171FE2"/>
+              </a:solidFill>
+              <a:latin typeface="Consolas" panose="020B0609020204030204" pitchFamily="49" charset="0"/>
+            </a:endParaRPr>
+          </a:p>
+          <a:p>
+            <a:r>
+              <a:rPr lang="it-IT" b="1" dirty="0"/>
+              <a:t>Ora potremo scrivere in server il nome del container: il-mio-</a:t>
+            </a:r>
+            <a:r>
+              <a:rPr lang="it-IT" b="1" dirty="0" err="1"/>
+              <a:t>db</a:t>
+            </a:r>
+            <a:r>
+              <a:rPr lang="it-IT" b="1" dirty="0"/>
+              <a:t>, svincolandoci dal suo </a:t>
+            </a:r>
+            <a:r>
+              <a:rPr lang="it-IT" b="1" dirty="0" err="1"/>
+              <a:t>ip</a:t>
+            </a:r>
+            <a:r>
+              <a:rPr lang="it-IT" b="1" dirty="0"/>
+              <a:t>.</a:t>
+            </a:r>
+          </a:p>
+        </p:txBody>
+      </p:sp>
+      <p:sp>
+        <p:nvSpPr>
+          <p:cNvPr id="4" name="Segnaposto numero diapositiva 11">
+            <a:extLst>
+              <a:ext uri="{FF2B5EF4-FFF2-40B4-BE49-F238E27FC236}">
+                <a16:creationId xmlns:a16="http://schemas.microsoft.com/office/drawing/2014/main" id="{EB04A618-36CC-2729-334C-576F226CE1C8}"/>
+              </a:ext>
+            </a:extLst>
+          </p:cNvPr>
+          <p:cNvSpPr>
+            <a:spLocks noGrp="1"/>
+          </p:cNvSpPr>
+          <p:nvPr>
+            <p:ph type="sldNum" sz="quarter" idx="12"/>
+          </p:nvPr>
+        </p:nvSpPr>
+        <p:spPr>
+          <a:xfrm>
+            <a:off x="8610600" y="6356350"/>
+            <a:ext cx="2743200" cy="365125"/>
+          </a:xfrm>
+        </p:spPr>
+        <p:txBody>
+          <a:bodyPr/>
+          <a:lstStyle/>
+          <a:p>
+            <a:r>
+              <a:rPr lang="it-IT" dirty="0"/>
+              <a:t>34</a:t>
+            </a:r>
+          </a:p>
+        </p:txBody>
+      </p:sp>
+    </p:spTree>
+    <p:extLst>
+      <p:ext uri="{BB962C8B-B14F-4D97-AF65-F5344CB8AC3E}">
+        <p14:creationId xmlns:p14="http://schemas.microsoft.com/office/powerpoint/2010/main" val="3617114680"/>
+      </p:ext>
+    </p:extLst>
+  </p:cSld>
+  <p:clrMapOvr>
+    <a:masterClrMapping/>
+  </p:clrMapOvr>
+</p:sld>
+</file>
+
+<file path=ppt/slides/slide37.xml><?xml version="1.0" encoding="utf-8"?>
+<p:sld xmlns:a="http://schemas.openxmlformats.org/drawingml/2006/main" xmlns:r="http://schemas.openxmlformats.org/officeDocument/2006/relationships" xmlns:p="http://schemas.openxmlformats.org/presentationml/2006/main">
+  <p:cSld>
+    <p:spTree>
+      <p:nvGrpSpPr>
+        <p:cNvPr id="1" name="">
+          <a:extLst>
+            <a:ext uri="{FF2B5EF4-FFF2-40B4-BE49-F238E27FC236}">
+              <a16:creationId xmlns:a16="http://schemas.microsoft.com/office/drawing/2014/main" id="{CA21436F-4C1F-D67F-8BEA-9BAE684ACD80}"/>
+            </a:ext>
+          </a:extLst>
+        </p:cNvPr>
+        <p:cNvGrpSpPr/>
+        <p:nvPr/>
+      </p:nvGrpSpPr>
+      <p:grpSpPr>
+        <a:xfrm>
+          <a:off x="0" y="0"/>
+          <a:ext cx="0" cy="0"/>
+          <a:chOff x="0" y="0"/>
+          <a:chExt cx="0" cy="0"/>
+        </a:xfrm>
+      </p:grpSpPr>
+      <p:sp>
+        <p:nvSpPr>
+          <p:cNvPr id="3" name="Contenuto della lezione">
+            <a:extLst>
+              <a:ext uri="{FF2B5EF4-FFF2-40B4-BE49-F238E27FC236}">
+                <a16:creationId xmlns:a16="http://schemas.microsoft.com/office/drawing/2014/main" id="{9BE59C5E-413C-EC8C-0BF4-93761979BAA2}"/>
+              </a:ext>
+            </a:extLst>
+          </p:cNvPr>
+          <p:cNvSpPr>
+            <a:spLocks noGrp="1"/>
+          </p:cNvSpPr>
+          <p:nvPr>
+            <p:ph idx="1"/>
+          </p:nvPr>
+        </p:nvSpPr>
+        <p:spPr>
+          <a:xfrm>
+            <a:off x="1077759" y="707275"/>
+            <a:ext cx="10036481" cy="5839829"/>
+          </a:xfrm>
+        </p:spPr>
+        <p:txBody>
+          <a:bodyPr/>
+          <a:lstStyle/>
+          <a:p>
+            <a:r>
+              <a:rPr lang="it-IT" b="1" dirty="0"/>
+              <a:t>SCENARIO B (Evoluto): La magia del NOME + la sicurezza del VOLUME</a:t>
+            </a:r>
+          </a:p>
+          <a:p>
+            <a:r>
+              <a:rPr lang="it-IT" dirty="0"/>
+              <a:t>1. Rimuoviamo i vecchi container </a:t>
+            </a:r>
+          </a:p>
+          <a:p>
+            <a:r>
+              <a:rPr lang="it-IT" dirty="0" err="1">
+                <a:solidFill>
+                  <a:srgbClr val="171FE2"/>
+                </a:solidFill>
+                <a:latin typeface="Consolas" panose="020B0609020204030204" pitchFamily="49" charset="0"/>
+              </a:rPr>
+              <a:t>docker</a:t>
+            </a:r>
+            <a:r>
+              <a:rPr lang="it-IT" dirty="0">
+                <a:solidFill>
+                  <a:srgbClr val="171FE2"/>
+                </a:solidFill>
+                <a:latin typeface="Consolas" panose="020B0609020204030204" pitchFamily="49" charset="0"/>
+              </a:rPr>
+              <a:t> </a:t>
+            </a:r>
+            <a:r>
+              <a:rPr lang="it-IT" dirty="0" err="1">
+                <a:solidFill>
+                  <a:srgbClr val="171FE2"/>
+                </a:solidFill>
+                <a:latin typeface="Consolas" panose="020B0609020204030204" pitchFamily="49" charset="0"/>
+              </a:rPr>
+              <a:t>rm</a:t>
+            </a:r>
+            <a:r>
+              <a:rPr lang="it-IT" dirty="0">
+                <a:solidFill>
+                  <a:srgbClr val="171FE2"/>
+                </a:solidFill>
+                <a:latin typeface="Consolas" panose="020B0609020204030204" pitchFamily="49" charset="0"/>
+              </a:rPr>
+              <a:t> -f il-mio-</a:t>
+            </a:r>
+            <a:r>
+              <a:rPr lang="it-IT" dirty="0" err="1">
+                <a:solidFill>
+                  <a:srgbClr val="171FE2"/>
+                </a:solidFill>
+                <a:latin typeface="Consolas" panose="020B0609020204030204" pitchFamily="49" charset="0"/>
+              </a:rPr>
+              <a:t>db</a:t>
+            </a:r>
+            <a:r>
+              <a:rPr lang="it-IT" dirty="0">
+                <a:solidFill>
+                  <a:srgbClr val="171FE2"/>
+                </a:solidFill>
+                <a:latin typeface="Consolas" panose="020B0609020204030204" pitchFamily="49" charset="0"/>
+              </a:rPr>
+              <a:t> la-mia-</a:t>
+            </a:r>
+            <a:r>
+              <a:rPr lang="it-IT" dirty="0" err="1">
+                <a:solidFill>
+                  <a:srgbClr val="171FE2"/>
+                </a:solidFill>
+                <a:latin typeface="Consolas" panose="020B0609020204030204" pitchFamily="49" charset="0"/>
+              </a:rPr>
+              <a:t>gui</a:t>
+            </a:r>
+            <a:endParaRPr lang="it-IT" dirty="0">
+              <a:solidFill>
+                <a:srgbClr val="171FE2"/>
+              </a:solidFill>
+              <a:latin typeface="Consolas" panose="020B0609020204030204" pitchFamily="49" charset="0"/>
+            </a:endParaRPr>
+          </a:p>
+          <a:p>
+            <a:endParaRPr lang="it-IT" dirty="0"/>
+          </a:p>
+          <a:p>
+            <a:r>
+              <a:rPr lang="it-IT" dirty="0"/>
+              <a:t>2. Creiamo il volume persistente per la cassaforte dei dati </a:t>
+            </a:r>
+          </a:p>
+          <a:p>
+            <a:r>
+              <a:rPr lang="it-IT" dirty="0" err="1">
+                <a:solidFill>
+                  <a:srgbClr val="171FE2"/>
+                </a:solidFill>
+                <a:latin typeface="Consolas" panose="020B0609020204030204" pitchFamily="49" charset="0"/>
+              </a:rPr>
+              <a:t>docker</a:t>
+            </a:r>
+            <a:r>
+              <a:rPr lang="it-IT" dirty="0">
+                <a:solidFill>
+                  <a:srgbClr val="171FE2"/>
+                </a:solidFill>
+                <a:latin typeface="Consolas" panose="020B0609020204030204" pitchFamily="49" charset="0"/>
+              </a:rPr>
+              <a:t> volume create salvataggio-</a:t>
+            </a:r>
+            <a:r>
+              <a:rPr lang="it-IT" dirty="0" err="1">
+                <a:solidFill>
+                  <a:srgbClr val="171FE2"/>
+                </a:solidFill>
+                <a:latin typeface="Consolas" panose="020B0609020204030204" pitchFamily="49" charset="0"/>
+              </a:rPr>
+              <a:t>db</a:t>
+            </a:r>
+            <a:endParaRPr lang="it-IT" dirty="0">
+              <a:solidFill>
+                <a:srgbClr val="171FE2"/>
+              </a:solidFill>
+              <a:latin typeface="Consolas" panose="020B0609020204030204" pitchFamily="49" charset="0"/>
+            </a:endParaRPr>
+          </a:p>
+          <a:p>
+            <a:endParaRPr lang="it-IT" dirty="0"/>
+          </a:p>
+          <a:p>
+            <a:r>
+              <a:rPr lang="it-IT" dirty="0"/>
+              <a:t>3. Avviamo il database </a:t>
+            </a:r>
+            <a:r>
+              <a:rPr lang="it-IT" dirty="0" err="1"/>
+              <a:t>MariaDB</a:t>
+            </a:r>
+            <a:r>
+              <a:rPr lang="it-IT" dirty="0"/>
+              <a:t> unendo Rete e Volume</a:t>
+            </a:r>
+          </a:p>
+          <a:p>
+            <a:r>
+              <a:rPr lang="it-IT" dirty="0" err="1">
+                <a:solidFill>
+                  <a:srgbClr val="171FE2"/>
+                </a:solidFill>
+                <a:latin typeface="Consolas" panose="020B0609020204030204" pitchFamily="49" charset="0"/>
+              </a:rPr>
+              <a:t>docker</a:t>
+            </a:r>
+            <a:r>
+              <a:rPr lang="it-IT" dirty="0">
+                <a:solidFill>
+                  <a:srgbClr val="171FE2"/>
+                </a:solidFill>
+                <a:latin typeface="Consolas" panose="020B0609020204030204" pitchFamily="49" charset="0"/>
+              </a:rPr>
+              <a:t> </a:t>
+            </a:r>
+            <a:r>
+              <a:rPr lang="it-IT" dirty="0" err="1">
+                <a:solidFill>
+                  <a:srgbClr val="171FE2"/>
+                </a:solidFill>
+                <a:latin typeface="Consolas" panose="020B0609020204030204" pitchFamily="49" charset="0"/>
+              </a:rPr>
+              <a:t>run</a:t>
+            </a:r>
+            <a:r>
+              <a:rPr lang="it-IT" dirty="0">
+                <a:solidFill>
+                  <a:srgbClr val="171FE2"/>
+                </a:solidFill>
+                <a:latin typeface="Consolas" panose="020B0609020204030204" pitchFamily="49" charset="0"/>
+              </a:rPr>
+              <a:t> -d --name il-mio-</a:t>
+            </a:r>
+            <a:r>
+              <a:rPr lang="it-IT" dirty="0" err="1">
+                <a:solidFill>
+                  <a:srgbClr val="171FE2"/>
+                </a:solidFill>
+                <a:latin typeface="Consolas" panose="020B0609020204030204" pitchFamily="49" charset="0"/>
+              </a:rPr>
+              <a:t>db</a:t>
+            </a:r>
+            <a:r>
+              <a:rPr lang="it-IT" dirty="0">
+                <a:solidFill>
+                  <a:srgbClr val="171FE2"/>
+                </a:solidFill>
+                <a:latin typeface="Consolas" panose="020B0609020204030204" pitchFamily="49" charset="0"/>
+              </a:rPr>
+              <a:t> --network rete-aziendale -v salvataggio-</a:t>
+            </a:r>
+            <a:r>
+              <a:rPr lang="it-IT" dirty="0" err="1">
+                <a:solidFill>
+                  <a:srgbClr val="171FE2"/>
+                </a:solidFill>
+                <a:latin typeface="Consolas" panose="020B0609020204030204" pitchFamily="49" charset="0"/>
+              </a:rPr>
+              <a:t>db</a:t>
+            </a:r>
+            <a:r>
+              <a:rPr lang="it-IT" dirty="0">
+                <a:solidFill>
+                  <a:srgbClr val="171FE2"/>
+                </a:solidFill>
+                <a:latin typeface="Consolas" panose="020B0609020204030204" pitchFamily="49" charset="0"/>
+              </a:rPr>
+              <a:t>:/var/</a:t>
+            </a:r>
+            <a:r>
+              <a:rPr lang="it-IT" dirty="0" err="1">
+                <a:solidFill>
+                  <a:srgbClr val="171FE2"/>
+                </a:solidFill>
+                <a:latin typeface="Consolas" panose="020B0609020204030204" pitchFamily="49" charset="0"/>
+              </a:rPr>
+              <a:t>lib</a:t>
+            </a:r>
+            <a:r>
+              <a:rPr lang="it-IT" dirty="0">
+                <a:solidFill>
+                  <a:srgbClr val="171FE2"/>
+                </a:solidFill>
+                <a:latin typeface="Consolas" panose="020B0609020204030204" pitchFamily="49" charset="0"/>
+              </a:rPr>
+              <a:t>/</a:t>
+            </a:r>
+            <a:r>
+              <a:rPr lang="it-IT" dirty="0" err="1">
+                <a:solidFill>
+                  <a:srgbClr val="171FE2"/>
+                </a:solidFill>
+                <a:latin typeface="Consolas" panose="020B0609020204030204" pitchFamily="49" charset="0"/>
+              </a:rPr>
+              <a:t>mysql</a:t>
+            </a:r>
+            <a:r>
+              <a:rPr lang="it-IT" dirty="0">
+                <a:solidFill>
+                  <a:srgbClr val="171FE2"/>
+                </a:solidFill>
+                <a:latin typeface="Consolas" panose="020B0609020204030204" pitchFamily="49" charset="0"/>
+              </a:rPr>
+              <a:t> -e MARIADB_ROOT_PASSWORD=segreta </a:t>
+            </a:r>
+            <a:r>
+              <a:rPr lang="it-IT" dirty="0" err="1">
+                <a:solidFill>
+                  <a:srgbClr val="171FE2"/>
+                </a:solidFill>
+                <a:latin typeface="Consolas" panose="020B0609020204030204" pitchFamily="49" charset="0"/>
+              </a:rPr>
+              <a:t>mariadb:latest</a:t>
+            </a:r>
+            <a:endParaRPr lang="it-IT" dirty="0">
+              <a:solidFill>
+                <a:srgbClr val="171FE2"/>
+              </a:solidFill>
+              <a:latin typeface="Consolas" panose="020B0609020204030204" pitchFamily="49" charset="0"/>
+            </a:endParaRPr>
+          </a:p>
+          <a:p>
+            <a:endParaRPr lang="it-IT" dirty="0"/>
+          </a:p>
+          <a:p>
+            <a:r>
+              <a:rPr lang="it-IT" dirty="0"/>
+              <a:t>4. </a:t>
+            </a:r>
+            <a:r>
+              <a:rPr lang="it-IT" dirty="0" err="1"/>
+              <a:t>Ri</a:t>
+            </a:r>
+            <a:r>
+              <a:rPr lang="it-IT" dirty="0"/>
+              <a:t>-avviamo </a:t>
+            </a:r>
+            <a:r>
+              <a:rPr lang="it-IT" dirty="0" err="1"/>
+              <a:t>phpMyAdmin</a:t>
+            </a:r>
+            <a:r>
+              <a:rPr lang="it-IT" dirty="0"/>
+              <a:t> inserendolo nella stessa rete</a:t>
+            </a:r>
+          </a:p>
+          <a:p>
+            <a:r>
+              <a:rPr lang="it-IT" dirty="0" err="1">
+                <a:solidFill>
+                  <a:srgbClr val="171FE2"/>
+                </a:solidFill>
+                <a:latin typeface="Consolas" panose="020B0609020204030204" pitchFamily="49" charset="0"/>
+              </a:rPr>
+              <a:t>docker</a:t>
+            </a:r>
+            <a:r>
+              <a:rPr lang="it-IT" dirty="0">
+                <a:solidFill>
+                  <a:srgbClr val="171FE2"/>
+                </a:solidFill>
+                <a:latin typeface="Consolas" panose="020B0609020204030204" pitchFamily="49" charset="0"/>
+              </a:rPr>
+              <a:t> </a:t>
+            </a:r>
+            <a:r>
+              <a:rPr lang="it-IT" dirty="0" err="1">
+                <a:solidFill>
+                  <a:srgbClr val="171FE2"/>
+                </a:solidFill>
+                <a:latin typeface="Consolas" panose="020B0609020204030204" pitchFamily="49" charset="0"/>
+              </a:rPr>
+              <a:t>run</a:t>
+            </a:r>
+            <a:r>
+              <a:rPr lang="it-IT" dirty="0">
+                <a:solidFill>
+                  <a:srgbClr val="171FE2"/>
+                </a:solidFill>
+                <a:latin typeface="Consolas" panose="020B0609020204030204" pitchFamily="49" charset="0"/>
+              </a:rPr>
+              <a:t> -d --name la-mia-</a:t>
+            </a:r>
+            <a:r>
+              <a:rPr lang="it-IT" dirty="0" err="1">
+                <a:solidFill>
+                  <a:srgbClr val="171FE2"/>
+                </a:solidFill>
+                <a:latin typeface="Consolas" panose="020B0609020204030204" pitchFamily="49" charset="0"/>
+              </a:rPr>
+              <a:t>gui</a:t>
+            </a:r>
+            <a:r>
+              <a:rPr lang="it-IT" dirty="0">
+                <a:solidFill>
+                  <a:srgbClr val="171FE2"/>
+                </a:solidFill>
+                <a:latin typeface="Consolas" panose="020B0609020204030204" pitchFamily="49" charset="0"/>
+              </a:rPr>
+              <a:t> --network rete-aziendale -p 8080:80 -e PMA_ARBITRARY=1 </a:t>
+            </a:r>
+            <a:r>
+              <a:rPr lang="it-IT" dirty="0" err="1">
+                <a:solidFill>
+                  <a:srgbClr val="171FE2"/>
+                </a:solidFill>
+                <a:latin typeface="Consolas" panose="020B0609020204030204" pitchFamily="49" charset="0"/>
+              </a:rPr>
+              <a:t>phpmyadmin:latest</a:t>
+            </a:r>
+            <a:endParaRPr lang="it-IT" dirty="0">
+              <a:solidFill>
+                <a:srgbClr val="171FE2"/>
+              </a:solidFill>
+              <a:latin typeface="Consolas" panose="020B0609020204030204" pitchFamily="49" charset="0"/>
+            </a:endParaRPr>
+          </a:p>
+          <a:p>
+            <a:endParaRPr lang="it-IT" dirty="0">
+              <a:solidFill>
+                <a:srgbClr val="171FE2"/>
+              </a:solidFill>
+              <a:latin typeface="Consolas" panose="020B0609020204030204" pitchFamily="49" charset="0"/>
+            </a:endParaRPr>
+          </a:p>
+          <a:p>
+            <a:r>
+              <a:rPr lang="it-IT" b="1" dirty="0"/>
+              <a:t>Creiamo una tabella e verifichiamo se persiste dopo aver eliminato i due container.</a:t>
+            </a:r>
+          </a:p>
+        </p:txBody>
+      </p:sp>
+      <p:sp>
+        <p:nvSpPr>
+          <p:cNvPr id="4" name="Segnaposto numero diapositiva 11">
+            <a:extLst>
+              <a:ext uri="{FF2B5EF4-FFF2-40B4-BE49-F238E27FC236}">
+                <a16:creationId xmlns:a16="http://schemas.microsoft.com/office/drawing/2014/main" id="{27A66B59-9C5F-DAA5-7B3A-075B5B5ACEC8}"/>
+              </a:ext>
+            </a:extLst>
+          </p:cNvPr>
+          <p:cNvSpPr>
+            <a:spLocks noGrp="1"/>
+          </p:cNvSpPr>
+          <p:nvPr>
+            <p:ph type="sldNum" sz="quarter" idx="12"/>
+          </p:nvPr>
+        </p:nvSpPr>
+        <p:spPr>
+          <a:xfrm>
+            <a:off x="8610600" y="6356350"/>
+            <a:ext cx="2743200" cy="365125"/>
+          </a:xfrm>
+        </p:spPr>
+        <p:txBody>
+          <a:bodyPr/>
+          <a:lstStyle/>
+          <a:p>
+            <a:r>
+              <a:rPr lang="it-IT" dirty="0"/>
+              <a:t>35</a:t>
+            </a:r>
+          </a:p>
+        </p:txBody>
+      </p:sp>
+    </p:spTree>
+    <p:extLst>
+      <p:ext uri="{BB962C8B-B14F-4D97-AF65-F5344CB8AC3E}">
+        <p14:creationId xmlns:p14="http://schemas.microsoft.com/office/powerpoint/2010/main" val="1127057090"/>
+      </p:ext>
+    </p:extLst>
+  </p:cSld>
+  <p:clrMapOvr>
+    <a:masterClrMapping/>
+  </p:clrMapOvr>
+</p:sld>
+</file>
+
+<file path=ppt/slides/slide38.xml><?xml version="1.0" encoding="utf-8"?>
+<p:sld xmlns:a="http://schemas.openxmlformats.org/drawingml/2006/main" xmlns:r="http://schemas.openxmlformats.org/officeDocument/2006/relationships" xmlns:p="http://schemas.openxmlformats.org/presentationml/2006/main">
+  <p:cSld>
+    <p:spTree>
+      <p:nvGrpSpPr>
+        <p:cNvPr id="1" name=""/>
+        <p:cNvGrpSpPr/>
+        <p:nvPr/>
+      </p:nvGrpSpPr>
+      <p:grpSpPr>
+        <a:xfrm>
+          <a:off x="0" y="0"/>
+          <a:ext cx="0" cy="0"/>
+          <a:chOff x="0" y="0"/>
+          <a:chExt cx="0" cy="0"/>
+        </a:xfrm>
+      </p:grpSpPr>
+      <p:sp>
+        <p:nvSpPr>
+          <p:cNvPr id="2" name="Titolo 1">
+            <a:extLst>
+              <a:ext uri="{FF2B5EF4-FFF2-40B4-BE49-F238E27FC236}">
+                <a16:creationId xmlns:a16="http://schemas.microsoft.com/office/drawing/2014/main" id="{B5E02355-4941-9C10-CA1D-649F04DB5143}"/>
+              </a:ext>
+            </a:extLst>
+          </p:cNvPr>
+          <p:cNvSpPr>
+            <a:spLocks noGrp="1"/>
+          </p:cNvSpPr>
+          <p:nvPr>
+            <p:ph type="title"/>
+          </p:nvPr>
+        </p:nvSpPr>
+        <p:spPr/>
+        <p:txBody>
+          <a:bodyPr/>
+          <a:lstStyle/>
+          <a:p>
+            <a:r>
+              <a:rPr lang="it-IT" spc="0" dirty="0">
+                <a:latin typeface="Neue Haas Grotesk Text Pro" panose="020B0504020202020204" pitchFamily="34" charset="0"/>
+              </a:rPr>
+              <a:t>GRAZIE PER L’ATTENZIONE</a:t>
+            </a:r>
+          </a:p>
+        </p:txBody>
+      </p:sp>
+    </p:spTree>
+    <p:extLst>
+      <p:ext uri="{BB962C8B-B14F-4D97-AF65-F5344CB8AC3E}">
+        <p14:creationId xmlns:p14="http://schemas.microsoft.com/office/powerpoint/2010/main" val="3003246572"/>
       </p:ext>
     </p:extLst>
   </p:cSld>
@@ -7961,7 +13527,7 @@
         </p:nvSpPr>
         <p:spPr>
           <a:xfrm>
-            <a:off x="1415438" y="1349192"/>
+            <a:off x="1317319" y="928568"/>
             <a:ext cx="9557362" cy="4803369"/>
           </a:xfrm>
         </p:spPr>
@@ -7971,30 +13537,7 @@
           <a:p>
             <a:r>
               <a:rPr lang="it-IT" b="1" dirty="0"/>
-              <a:t>1. Pulizia Iniziale ed Elenco della Flotta</a:t>
-            </a:r>
-          </a:p>
-          <a:p>
-            <a:r>
-              <a:rPr lang="it-IT" dirty="0"/>
-              <a:t>Prima di iniziare, facciamo tabula rasa di vecchi container residui:</a:t>
-            </a:r>
-          </a:p>
-          <a:p>
-            <a:r>
-              <a:rPr lang="sv-SE" dirty="0">
-                <a:solidFill>
-                  <a:srgbClr val="171FE2"/>
-                </a:solidFill>
-                <a:latin typeface="Consolas" panose="020B0609020204030204" pitchFamily="49" charset="0"/>
-              </a:rPr>
-              <a:t>docker rm -f $(docker ps -aq)</a:t>
-            </a:r>
-          </a:p>
-          <a:p>
-            <a:r>
-              <a:rPr lang="it-IT" b="1" dirty="0"/>
-              <a:t>2. Avvio coordinato su porte diverse</a:t>
+              <a:t>1. Avvio coordinato su porte diverse</a:t>
             </a:r>
           </a:p>
           <a:p>
@@ -8181,7 +13724,7 @@
           <a:p>
             <a:r>
               <a:rPr lang="it-IT" b="1" dirty="0"/>
-              <a:t>3. Il blocco del Terminale (Cosa succede se dimenticano il flag -d?)</a:t>
+              <a:t>2. Il blocco del Terminale (Cosa succede se dimenticano il flag -d?)</a:t>
             </a:r>
           </a:p>
           <a:p>
@@ -8296,6 +13839,39 @@
           </a:p>
           <a:p>
             <a:endParaRPr lang="it-IT" dirty="0"/>
+          </a:p>
+        </p:txBody>
+      </p:sp>
+      <p:sp>
+        <p:nvSpPr>
+          <p:cNvPr id="2" name="Segnaposto numero diapositiva 11">
+            <a:extLst>
+              <a:ext uri="{FF2B5EF4-FFF2-40B4-BE49-F238E27FC236}">
+                <a16:creationId xmlns:a16="http://schemas.microsoft.com/office/drawing/2014/main" id="{D6E99982-0D58-D9AD-6D29-288B4EEB1818}"/>
+              </a:ext>
+            </a:extLst>
+          </p:cNvPr>
+          <p:cNvSpPr>
+            <a:spLocks noGrp="1"/>
+          </p:cNvSpPr>
+          <p:nvPr>
+            <p:ph type="sldNum" sz="quarter" idx="12"/>
+          </p:nvPr>
+        </p:nvSpPr>
+        <p:spPr>
+          <a:xfrm>
+            <a:off x="8610600" y="6356350"/>
+            <a:ext cx="2743200" cy="365125"/>
+          </a:xfrm>
+        </p:spPr>
+        <p:txBody>
+          <a:bodyPr/>
+          <a:lstStyle/>
+          <a:p>
+            <a:r>
+              <a:rPr lang="it-IT" dirty="0"/>
+              <a:t>2</a:t>
+            </a:r>
           </a:p>
         </p:txBody>
       </p:sp>
@@ -8353,7 +13929,7 @@
         </p:nvSpPr>
         <p:spPr>
           <a:xfrm>
-            <a:off x="1415438" y="1349192"/>
+            <a:off x="1415438" y="1027315"/>
             <a:ext cx="9557362" cy="4803369"/>
           </a:xfrm>
         </p:spPr>
@@ -8363,7 +13939,7 @@
           <a:p>
             <a:r>
               <a:rPr lang="it-IT" b="1" dirty="0"/>
-              <a:t>4. Entriamo dentro il container a modificare il file (Senza Volumi)</a:t>
+              <a:t>3. Entriamo dentro il container a modificare il file (Senza Volumi)</a:t>
             </a:r>
           </a:p>
           <a:p>
@@ -8493,7 +14069,7 @@
                 </a:solidFill>
                 <a:latin typeface="Consolas" panose="020B0609020204030204" pitchFamily="49" charset="0"/>
               </a:rPr>
-              <a:t> "&lt;h1&gt;Proprietà di Mirko - Versione Alfa sbloccata! 🚀&lt;/h1&gt;" &gt; /</a:t>
+              <a:t> "&lt;h1&gt;Proprietà di Mirko - Versione Alfa sbloccata!&lt;/h1&gt;" &gt; /</a:t>
             </a:r>
             <a:r>
               <a:rPr lang="it-IT" dirty="0" err="1">
@@ -8558,6 +14134,39 @@
               </a:solidFill>
               <a:latin typeface="Consolas" panose="020B0609020204030204" pitchFamily="49" charset="0"/>
             </a:endParaRPr>
+          </a:p>
+        </p:txBody>
+      </p:sp>
+      <p:sp>
+        <p:nvSpPr>
+          <p:cNvPr id="2" name="Segnaposto numero diapositiva 11">
+            <a:extLst>
+              <a:ext uri="{FF2B5EF4-FFF2-40B4-BE49-F238E27FC236}">
+                <a16:creationId xmlns:a16="http://schemas.microsoft.com/office/drawing/2014/main" id="{7D257CA2-AEA3-9BD8-452D-8CF8A806A97A}"/>
+              </a:ext>
+            </a:extLst>
+          </p:cNvPr>
+          <p:cNvSpPr>
+            <a:spLocks noGrp="1"/>
+          </p:cNvSpPr>
+          <p:nvPr>
+            <p:ph type="sldNum" sz="quarter" idx="12"/>
+          </p:nvPr>
+        </p:nvSpPr>
+        <p:spPr>
+          <a:xfrm>
+            <a:off x="8610600" y="6356350"/>
+            <a:ext cx="2743200" cy="365125"/>
+          </a:xfrm>
+        </p:spPr>
+        <p:txBody>
+          <a:bodyPr/>
+          <a:lstStyle/>
+          <a:p>
+            <a:r>
+              <a:rPr lang="it-IT" dirty="0"/>
+              <a:t>3</a:t>
+            </a:r>
           </a:p>
         </p:txBody>
       </p:sp>
@@ -8625,7 +14234,7 @@
           <a:p>
             <a:r>
               <a:rPr lang="it-IT" b="1" dirty="0"/>
-              <a:t>5. Il Crash Test: Dimostrazione della natura effimera</a:t>
+              <a:t>4. Il Crash Test: Dimostrazione della natura effimera</a:t>
             </a:r>
           </a:p>
           <a:p>
@@ -8771,6 +14380,39 @@
           </a:p>
           <a:p>
             <a:endParaRPr lang="it-IT" dirty="0"/>
+          </a:p>
+        </p:txBody>
+      </p:sp>
+      <p:sp>
+        <p:nvSpPr>
+          <p:cNvPr id="2" name="Segnaposto numero diapositiva 11">
+            <a:extLst>
+              <a:ext uri="{FF2B5EF4-FFF2-40B4-BE49-F238E27FC236}">
+                <a16:creationId xmlns:a16="http://schemas.microsoft.com/office/drawing/2014/main" id="{DE2F1D92-C4DD-9FDF-D926-2A192CC71DA6}"/>
+              </a:ext>
+            </a:extLst>
+          </p:cNvPr>
+          <p:cNvSpPr>
+            <a:spLocks noGrp="1"/>
+          </p:cNvSpPr>
+          <p:nvPr>
+            <p:ph type="sldNum" sz="quarter" idx="12"/>
+          </p:nvPr>
+        </p:nvSpPr>
+        <p:spPr>
+          <a:xfrm>
+            <a:off x="8610600" y="6356350"/>
+            <a:ext cx="2743200" cy="365125"/>
+          </a:xfrm>
+        </p:spPr>
+        <p:txBody>
+          <a:bodyPr/>
+          <a:lstStyle/>
+          <a:p>
+            <a:r>
+              <a:rPr lang="it-IT" dirty="0"/>
+              <a:t>4</a:t>
+            </a:r>
           </a:p>
         </p:txBody>
       </p:sp>
@@ -9183,6 +14825,39 @@
           </a:p>
         </p:txBody>
       </p:sp>
+      <p:sp>
+        <p:nvSpPr>
+          <p:cNvPr id="2" name="Segnaposto numero diapositiva 11">
+            <a:extLst>
+              <a:ext uri="{FF2B5EF4-FFF2-40B4-BE49-F238E27FC236}">
+                <a16:creationId xmlns:a16="http://schemas.microsoft.com/office/drawing/2014/main" id="{B4A7C079-DA04-6171-B19F-CCA49190B1FC}"/>
+              </a:ext>
+            </a:extLst>
+          </p:cNvPr>
+          <p:cNvSpPr>
+            <a:spLocks noGrp="1"/>
+          </p:cNvSpPr>
+          <p:nvPr>
+            <p:ph type="sldNum" sz="quarter" idx="12"/>
+          </p:nvPr>
+        </p:nvSpPr>
+        <p:spPr>
+          <a:xfrm>
+            <a:off x="8610600" y="6356350"/>
+            <a:ext cx="2743200" cy="365125"/>
+          </a:xfrm>
+        </p:spPr>
+        <p:txBody>
+          <a:bodyPr/>
+          <a:lstStyle/>
+          <a:p>
+            <a:r>
+              <a:rPr lang="it-IT" dirty="0"/>
+              <a:t>5</a:t>
+            </a:r>
+          </a:p>
+        </p:txBody>
+      </p:sp>
     </p:spTree>
     <p:extLst>
       <p:ext uri="{BB962C8B-B14F-4D97-AF65-F5344CB8AC3E}">
@@ -9360,6 +15035,39 @@
             <a:r>
               <a:rPr lang="it-IT" dirty="0"/>
               <a:t> per mappare una cartella del vostro Desktop Windows dentro il container, permettendovi di modificare il codice HTML da VS Code senza riavviare nulla.</a:t>
+            </a:r>
+          </a:p>
+        </p:txBody>
+      </p:sp>
+      <p:sp>
+        <p:nvSpPr>
+          <p:cNvPr id="4" name="Segnaposto numero diapositiva 11">
+            <a:extLst>
+              <a:ext uri="{FF2B5EF4-FFF2-40B4-BE49-F238E27FC236}">
+                <a16:creationId xmlns:a16="http://schemas.microsoft.com/office/drawing/2014/main" id="{52F61DD9-1D8E-BEE9-ADD3-1C4EEA3CDBA2}"/>
+              </a:ext>
+            </a:extLst>
+          </p:cNvPr>
+          <p:cNvSpPr>
+            <a:spLocks noGrp="1"/>
+          </p:cNvSpPr>
+          <p:nvPr>
+            <p:ph type="sldNum" sz="quarter" idx="12"/>
+          </p:nvPr>
+        </p:nvSpPr>
+        <p:spPr>
+          <a:xfrm>
+            <a:off x="8610600" y="6356350"/>
+            <a:ext cx="2743200" cy="365125"/>
+          </a:xfrm>
+        </p:spPr>
+        <p:txBody>
+          <a:bodyPr/>
+          <a:lstStyle/>
+          <a:p>
+            <a:r>
+              <a:rPr lang="it-IT" dirty="0"/>
+              <a:t>6</a:t>
             </a:r>
           </a:p>
         </p:txBody>
@@ -9699,6 +15407,39 @@
               </a:solidFill>
               <a:latin typeface="Consolas" panose="020B0609020204030204" pitchFamily="49" charset="0"/>
             </a:endParaRPr>
+          </a:p>
+        </p:txBody>
+      </p:sp>
+      <p:sp>
+        <p:nvSpPr>
+          <p:cNvPr id="2" name="Segnaposto numero diapositiva 11">
+            <a:extLst>
+              <a:ext uri="{FF2B5EF4-FFF2-40B4-BE49-F238E27FC236}">
+                <a16:creationId xmlns:a16="http://schemas.microsoft.com/office/drawing/2014/main" id="{01178EB1-0456-7669-1C94-7BBDB00A58DB}"/>
+              </a:ext>
+            </a:extLst>
+          </p:cNvPr>
+          <p:cNvSpPr>
+            <a:spLocks noGrp="1"/>
+          </p:cNvSpPr>
+          <p:nvPr>
+            <p:ph type="sldNum" sz="quarter" idx="12"/>
+          </p:nvPr>
+        </p:nvSpPr>
+        <p:spPr>
+          <a:xfrm>
+            <a:off x="8610600" y="6356350"/>
+            <a:ext cx="2743200" cy="365125"/>
+          </a:xfrm>
+        </p:spPr>
+        <p:txBody>
+          <a:bodyPr/>
+          <a:lstStyle/>
+          <a:p>
+            <a:r>
+              <a:rPr lang="it-IT" dirty="0"/>
+              <a:t>7</a:t>
+            </a:r>
           </a:p>
         </p:txBody>
       </p:sp>
@@ -10601,6 +16342,15 @@
 </file>
 
 <file path=customXml/item1.xml><?xml version="1.0" encoding="utf-8"?>
+<?mso-contentType ?>
+<FormTemplates xmlns="http://schemas.microsoft.com/sharepoint/v3/contenttype/forms">
+  <Display>DocumentLibraryForm</Display>
+  <Edit>DocumentLibraryForm</Edit>
+  <New>DocumentLibraryForm</New>
+</FormTemplates>
+</file>
+
+<file path=customXml/item2.xml><?xml version="1.0" encoding="utf-8"?>
 <p:properties xmlns:p="http://schemas.microsoft.com/office/2006/metadata/properties" xmlns:xsi="http://www.w3.org/2001/XMLSchema-instance" xmlns:pc="http://schemas.microsoft.com/office/infopath/2007/PartnerControls">
   <documentManagement>
     <TaxCatchAll xmlns="21b72fd8-e7d0-49ac-9795-d1b0bc6b7e1c" xsi:nil="true"/>
@@ -10610,15 +16360,6 @@
     <Argomento xmlns="8b3acf13-3a58-43b2-a29e-f23503de136d" xsi:nil="true"/>
   </documentManagement>
 </p:properties>
-</file>
-
-<file path=customXml/item2.xml><?xml version="1.0" encoding="utf-8"?>
-<?mso-contentType ?>
-<FormTemplates xmlns="http://schemas.microsoft.com/sharepoint/v3/contenttype/forms">
-  <Display>DocumentLibraryForm</Display>
-  <Edit>DocumentLibraryForm</Edit>
-  <New>DocumentLibraryForm</New>
-</FormTemplates>
 </file>
 
 <file path=customXml/item3.xml><?xml version="1.0" encoding="utf-8"?>
@@ -10873,20 +16614,20 @@
 </file>
 
 <file path=customXml/itemProps1.xml><?xml version="1.0" encoding="utf-8"?>
+<ds:datastoreItem xmlns:ds="http://schemas.openxmlformats.org/officeDocument/2006/customXml" ds:itemID="{67C65656-B2D8-4C19-A873-091B25A5212E}">
+  <ds:schemaRefs>
+    <ds:schemaRef ds:uri="http://schemas.microsoft.com/sharepoint/v3/contenttype/forms"/>
+  </ds:schemaRefs>
+</ds:datastoreItem>
+</file>
+
+<file path=customXml/itemProps2.xml><?xml version="1.0" encoding="utf-8"?>
 <ds:datastoreItem xmlns:ds="http://schemas.openxmlformats.org/officeDocument/2006/customXml" ds:itemID="{6766878A-54ED-4867-B478-72A29DC19B89}">
   <ds:schemaRefs>
     <ds:schemaRef ds:uri="http://schemas.microsoft.com/office/2006/metadata/properties"/>
     <ds:schemaRef ds:uri="http://schemas.microsoft.com/office/infopath/2007/PartnerControls"/>
     <ds:schemaRef ds:uri="21b72fd8-e7d0-49ac-9795-d1b0bc6b7e1c"/>
     <ds:schemaRef ds:uri="8b3acf13-3a58-43b2-a29e-f23503de136d"/>
-  </ds:schemaRefs>
-</ds:datastoreItem>
-</file>
-
-<file path=customXml/itemProps2.xml><?xml version="1.0" encoding="utf-8"?>
-<ds:datastoreItem xmlns:ds="http://schemas.openxmlformats.org/officeDocument/2006/customXml" ds:itemID="{67C65656-B2D8-4C19-A873-091B25A5212E}">
-  <ds:schemaRefs>
-    <ds:schemaRef ds:uri="http://schemas.microsoft.com/sharepoint/v3/contenttype/forms"/>
   </ds:schemaRefs>
 </ds:datastoreItem>
 </file>
